--- a/slices/Olist_Ecommerce_Project_Presentation.pptx
+++ b/slices/Olist_Ecommerce_Project_Presentation.pptx
@@ -135,6 +135,7 @@
 <p1510:revInfo xmlns:a="http://schemas.openxmlformats.org/drawingml/2006/main" xmlns:r="http://schemas.openxmlformats.org/officeDocument/2006/relationships" xmlns:p1510="http://schemas.microsoft.com/office/powerpoint/2015/10/main">
   <p1510:revLst>
     <p1510:client id="{6F752558-1344-4A67-8899-A502F94CDF5C}" v="7" dt="2026-06-07T15:22:03.471"/>
+    <p1510:client id="{E75D47EA-C026-449B-BBAE-3DA48F1C9839}" v="55" dt="2026-06-08T02:00:50.952"/>
   </p1510:revLst>
 </p1510:revInfo>
 </file>
@@ -6176,6 +6177,36 @@
           </a:p>
         </p:txBody>
       </p:sp>
+      <p:pic>
+        <p:nvPicPr>
+          <p:cNvPr id="4" name="Picture 3">
+            <a:extLst>
+              <a:ext uri="{FF2B5EF4-FFF2-40B4-BE49-F238E27FC236}">
+                <a16:creationId xmlns:a16="http://schemas.microsoft.com/office/drawing/2014/main" id="{301A5BC9-81E1-6EC8-58DE-8F50AC90FD24}"/>
+              </a:ext>
+            </a:extLst>
+          </p:cNvPr>
+          <p:cNvPicPr>
+            <a:picLocks noChangeAspect="1"/>
+          </p:cNvPicPr>
+          <p:nvPr/>
+        </p:nvPicPr>
+        <p:blipFill>
+          <a:blip r:embed="rId2"/>
+          <a:stretch>
+            <a:fillRect/>
+          </a:stretch>
+        </p:blipFill>
+        <p:spPr>
+          <a:xfrm>
+            <a:off x="1509568" y="5533448"/>
+            <a:ext cx="6134100" cy="400050"/>
+          </a:xfrm>
+          <a:prstGeom prst="rect">
+            <a:avLst/>
+          </a:prstGeom>
+        </p:spPr>
+      </p:pic>
     </p:spTree>
   </p:cSld>
   <p:clrMapOvr>
@@ -6243,6 +6274,36 @@
           </a:p>
         </p:txBody>
       </p:sp>
+      <p:pic>
+        <p:nvPicPr>
+          <p:cNvPr id="4" name="Picture 3" descr="A line graph with numbers and text&#10;&#10;AI-generated content may be incorrect.">
+            <a:extLst>
+              <a:ext uri="{FF2B5EF4-FFF2-40B4-BE49-F238E27FC236}">
+                <a16:creationId xmlns:a16="http://schemas.microsoft.com/office/drawing/2014/main" id="{FEAD166F-BD87-0F49-725C-88DFBEA02755}"/>
+              </a:ext>
+            </a:extLst>
+          </p:cNvPr>
+          <p:cNvPicPr>
+            <a:picLocks noChangeAspect="1"/>
+          </p:cNvPicPr>
+          <p:nvPr/>
+        </p:nvPicPr>
+        <p:blipFill>
+          <a:blip r:embed="rId2"/>
+          <a:stretch>
+            <a:fillRect/>
+          </a:stretch>
+        </p:blipFill>
+        <p:spPr>
+          <a:xfrm>
+            <a:off x="1408546" y="3027218"/>
+            <a:ext cx="6322292" cy="3149601"/>
+          </a:xfrm>
+          <a:prstGeom prst="rect">
+            <a:avLst/>
+          </a:prstGeom>
+        </p:spPr>
+      </p:pic>
     </p:spTree>
   </p:cSld>
   <p:clrMapOvr>
@@ -6310,6 +6371,36 @@
           </a:p>
         </p:txBody>
       </p:sp>
+      <p:pic>
+        <p:nvPicPr>
+          <p:cNvPr id="4" name="Picture 3" descr="A bar graph with blue bars&#10;&#10;AI-generated content may be incorrect.">
+            <a:extLst>
+              <a:ext uri="{FF2B5EF4-FFF2-40B4-BE49-F238E27FC236}">
+                <a16:creationId xmlns:a16="http://schemas.microsoft.com/office/drawing/2014/main" id="{7B7B4397-2CF1-DD08-F6CE-AD8C69057B2D}"/>
+              </a:ext>
+            </a:extLst>
+          </p:cNvPr>
+          <p:cNvPicPr>
+            <a:picLocks noChangeAspect="1"/>
+          </p:cNvPicPr>
+          <p:nvPr/>
+        </p:nvPicPr>
+        <p:blipFill>
+          <a:blip r:embed="rId2"/>
+          <a:stretch>
+            <a:fillRect/>
+          </a:stretch>
+        </p:blipFill>
+        <p:spPr>
+          <a:xfrm>
+            <a:off x="1343891" y="2976417"/>
+            <a:ext cx="6456219" cy="3228110"/>
+          </a:xfrm>
+          <a:prstGeom prst="rect">
+            <a:avLst/>
+          </a:prstGeom>
+        </p:spPr>
+      </p:pic>
     </p:spTree>
   </p:cSld>
   <p:clrMapOvr>
@@ -6377,6 +6468,36 @@
           </a:p>
         </p:txBody>
       </p:sp>
+      <p:pic>
+        <p:nvPicPr>
+          <p:cNvPr id="4" name="Picture 3" descr="A screenshot of a black screen&#10;&#10;AI-generated content may be incorrect.">
+            <a:extLst>
+              <a:ext uri="{FF2B5EF4-FFF2-40B4-BE49-F238E27FC236}">
+                <a16:creationId xmlns:a16="http://schemas.microsoft.com/office/drawing/2014/main" id="{44975364-062F-C39D-9B74-168752BE0A09}"/>
+              </a:ext>
+            </a:extLst>
+          </p:cNvPr>
+          <p:cNvPicPr>
+            <a:picLocks noChangeAspect="1"/>
+          </p:cNvPicPr>
+          <p:nvPr/>
+        </p:nvPicPr>
+        <p:blipFill>
+          <a:blip r:embed="rId2"/>
+          <a:stretch>
+            <a:fillRect/>
+          </a:stretch>
+        </p:blipFill>
+        <p:spPr>
+          <a:xfrm>
+            <a:off x="3008573" y="2977423"/>
+            <a:ext cx="3136359" cy="3284204"/>
+          </a:xfrm>
+          <a:prstGeom prst="rect">
+            <a:avLst/>
+          </a:prstGeom>
+        </p:spPr>
+      </p:pic>
     </p:spTree>
   </p:cSld>
   <p:clrMapOvr>
@@ -6439,11 +6560,45 @@
           <a:lstStyle/>
           <a:p>
             <a:r>
-              <a:t>Frequency, Recency, Monetary analysis using customer_unique_id.</a:t>
-            </a:r>
-          </a:p>
-        </p:txBody>
-      </p:sp>
+              <a:t>Frequency, Recency, Monetary analysis</a:t>
+            </a:r>
+            <a:r>
+              <a:rPr lang="en-US"/>
+              <a:t>.</a:t>
+            </a:r>
+          </a:p>
+        </p:txBody>
+      </p:sp>
+      <p:pic>
+        <p:nvPicPr>
+          <p:cNvPr id="4" name="Picture 3" descr="A screenshot of a computer screen&#10;&#10;AI-generated content may be incorrect.">
+            <a:extLst>
+              <a:ext uri="{FF2B5EF4-FFF2-40B4-BE49-F238E27FC236}">
+                <a16:creationId xmlns:a16="http://schemas.microsoft.com/office/drawing/2014/main" id="{2177CCBA-43F6-4697-6A05-D4831BB2D833}"/>
+              </a:ext>
+            </a:extLst>
+          </p:cNvPr>
+          <p:cNvPicPr>
+            <a:picLocks noChangeAspect="1"/>
+          </p:cNvPicPr>
+          <p:nvPr/>
+        </p:nvPicPr>
+        <p:blipFill>
+          <a:blip r:embed="rId2"/>
+          <a:stretch>
+            <a:fillRect/>
+          </a:stretch>
+        </p:blipFill>
+        <p:spPr>
+          <a:xfrm>
+            <a:off x="2577095" y="2927601"/>
+            <a:ext cx="3847235" cy="3322067"/>
+          </a:xfrm>
+          <a:prstGeom prst="rect">
+            <a:avLst/>
+          </a:prstGeom>
+        </p:spPr>
+      </p:pic>
     </p:spTree>
   </p:cSld>
   <p:clrMapOvr>

--- a/slices/Olist_Ecommerce_Project_Presentation.pptx
+++ b/slices/Olist_Ecommerce_Project_Presentation.pptx
@@ -4,6 +4,9 @@
   <p:sldMasterIdLst>
     <p:sldMasterId id="2147483738" r:id="rId1"/>
   </p:sldMasterIdLst>
+  <p:notesMasterIdLst>
+    <p:notesMasterId r:id="rId11"/>
+  </p:notesMasterIdLst>
   <p:sldIdLst>
     <p:sldId id="256" r:id="rId2"/>
     <p:sldId id="257" r:id="rId3"/>
@@ -135,9 +138,1275 @@
 <p1510:revInfo xmlns:a="http://schemas.openxmlformats.org/drawingml/2006/main" xmlns:r="http://schemas.openxmlformats.org/officeDocument/2006/relationships" xmlns:p1510="http://schemas.microsoft.com/office/powerpoint/2015/10/main">
   <p1510:revLst>
     <p1510:client id="{6F752558-1344-4A67-8899-A502F94CDF5C}" v="7" dt="2026-06-07T15:22:03.471"/>
-    <p1510:client id="{E75D47EA-C026-449B-BBAE-3DA48F1C9839}" v="55" dt="2026-06-08T02:00:50.952"/>
+    <p1510:client id="{E75D47EA-C026-449B-BBAE-3DA48F1C9839}" v="192" dt="2026-06-08T07:57:12.641"/>
   </p1510:revLst>
 </p1510:revInfo>
+</file>
+
+<file path=ppt/notesMasters/notesMaster1.xml><?xml version="1.0" encoding="utf-8"?>
+<p:notesMaster xmlns:a="http://schemas.openxmlformats.org/drawingml/2006/main" xmlns:r="http://schemas.openxmlformats.org/officeDocument/2006/relationships" xmlns:p="http://schemas.openxmlformats.org/presentationml/2006/main">
+  <p:cSld>
+    <p:bg>
+      <p:bgRef idx="1001">
+        <a:schemeClr val="bg1"/>
+      </p:bgRef>
+    </p:bg>
+    <p:spTree>
+      <p:nvGrpSpPr>
+        <p:cNvPr id="1" name=""/>
+        <p:cNvGrpSpPr/>
+        <p:nvPr/>
+      </p:nvGrpSpPr>
+      <p:grpSpPr>
+        <a:xfrm>
+          <a:off x="0" y="0"/>
+          <a:ext cx="0" cy="0"/>
+          <a:chOff x="0" y="0"/>
+          <a:chExt cx="0" cy="0"/>
+        </a:xfrm>
+      </p:grpSpPr>
+      <p:sp>
+        <p:nvSpPr>
+          <p:cNvPr id="2" name="Header Placeholder 1"/>
+          <p:cNvSpPr>
+            <a:spLocks noGrp="1"/>
+          </p:cNvSpPr>
+          <p:nvPr>
+            <p:ph type="hdr" sz="quarter"/>
+          </p:nvPr>
+        </p:nvSpPr>
+        <p:spPr>
+          <a:xfrm>
+            <a:off x="0" y="0"/>
+            <a:ext cx="2971800" cy="458788"/>
+          </a:xfrm>
+          <a:prstGeom prst="rect">
+            <a:avLst/>
+          </a:prstGeom>
+        </p:spPr>
+        <p:txBody>
+          <a:bodyPr vert="horz" lIns="91440" tIns="45720" rIns="91440" bIns="45720" rtlCol="0"/>
+          <a:lstStyle>
+            <a:lvl1pPr algn="l">
+              <a:defRPr sz="1200"/>
+            </a:lvl1pPr>
+          </a:lstStyle>
+          <a:p>
+            <a:endParaRPr lang="en-US"/>
+          </a:p>
+        </p:txBody>
+      </p:sp>
+      <p:sp>
+        <p:nvSpPr>
+          <p:cNvPr id="3" name="Date Placeholder 2"/>
+          <p:cNvSpPr>
+            <a:spLocks noGrp="1"/>
+          </p:cNvSpPr>
+          <p:nvPr>
+            <p:ph type="dt" idx="1"/>
+          </p:nvPr>
+        </p:nvSpPr>
+        <p:spPr>
+          <a:xfrm>
+            <a:off x="3884613" y="0"/>
+            <a:ext cx="2971800" cy="458788"/>
+          </a:xfrm>
+          <a:prstGeom prst="rect">
+            <a:avLst/>
+          </a:prstGeom>
+        </p:spPr>
+        <p:txBody>
+          <a:bodyPr vert="horz" lIns="91440" tIns="45720" rIns="91440" bIns="45720" rtlCol="0"/>
+          <a:lstStyle>
+            <a:lvl1pPr algn="r">
+              <a:defRPr sz="1200"/>
+            </a:lvl1pPr>
+          </a:lstStyle>
+          <a:p>
+            <a:fld id="{8DE1E0FE-415D-4A86-A5CB-56FB2301993F}" type="datetimeFigureOut">
+              <a:t>6/8/2026</a:t>
+            </a:fld>
+            <a:endParaRPr lang="en-US"/>
+          </a:p>
+        </p:txBody>
+      </p:sp>
+      <p:sp>
+        <p:nvSpPr>
+          <p:cNvPr id="4" name="Slide Image Placeholder 3"/>
+          <p:cNvSpPr>
+            <a:spLocks noGrp="1" noRot="1" noChangeAspect="1"/>
+          </p:cNvSpPr>
+          <p:nvPr>
+            <p:ph type="sldImg" idx="2"/>
+          </p:nvPr>
+        </p:nvSpPr>
+        <p:spPr>
+          <a:xfrm>
+            <a:off x="1371600" y="1143000"/>
+            <a:ext cx="4114800" cy="3086100"/>
+          </a:xfrm>
+          <a:prstGeom prst="rect">
+            <a:avLst/>
+          </a:prstGeom>
+          <a:noFill/>
+          <a:ln w="12700">
+            <a:solidFill>
+              <a:prstClr val="black"/>
+            </a:solidFill>
+          </a:ln>
+        </p:spPr>
+        <p:txBody>
+          <a:bodyPr vert="horz" lIns="91440" tIns="45720" rIns="91440" bIns="45720" rtlCol="0" anchor="ctr"/>
+          <a:lstStyle/>
+          <a:p>
+            <a:endParaRPr lang="en-US"/>
+          </a:p>
+        </p:txBody>
+      </p:sp>
+      <p:sp>
+        <p:nvSpPr>
+          <p:cNvPr id="5" name="Notes Placeholder 4"/>
+          <p:cNvSpPr>
+            <a:spLocks noGrp="1"/>
+          </p:cNvSpPr>
+          <p:nvPr>
+            <p:ph type="body" sz="quarter" idx="3"/>
+          </p:nvPr>
+        </p:nvSpPr>
+        <p:spPr>
+          <a:xfrm>
+            <a:off x="685800" y="4400550"/>
+            <a:ext cx="5486400" cy="3600450"/>
+          </a:xfrm>
+          <a:prstGeom prst="rect">
+            <a:avLst/>
+          </a:prstGeom>
+        </p:spPr>
+        <p:txBody>
+          <a:bodyPr vert="horz" lIns="91440" tIns="45720" rIns="91440" bIns="45720" rtlCol="0"/>
+          <a:lstStyle/>
+          <a:p>
+            <a:pPr lvl="0"/>
+            <a:r>
+              <a:rPr lang="en-US"/>
+              <a:t>Click to edit Master text styles</a:t>
+            </a:r>
+          </a:p>
+          <a:p>
+            <a:pPr lvl="1"/>
+            <a:r>
+              <a:rPr lang="en-US"/>
+              <a:t>Second level</a:t>
+            </a:r>
+          </a:p>
+          <a:p>
+            <a:pPr lvl="2"/>
+            <a:r>
+              <a:rPr lang="en-US"/>
+              <a:t>Third level</a:t>
+            </a:r>
+          </a:p>
+          <a:p>
+            <a:pPr lvl="3"/>
+            <a:r>
+              <a:rPr lang="en-US"/>
+              <a:t>Fourth level</a:t>
+            </a:r>
+          </a:p>
+          <a:p>
+            <a:pPr lvl="4"/>
+            <a:r>
+              <a:rPr lang="en-US"/>
+              <a:t>Fifth level</a:t>
+            </a:r>
+          </a:p>
+        </p:txBody>
+      </p:sp>
+      <p:sp>
+        <p:nvSpPr>
+          <p:cNvPr id="6" name="Footer Placeholder 5"/>
+          <p:cNvSpPr>
+            <a:spLocks noGrp="1"/>
+          </p:cNvSpPr>
+          <p:nvPr>
+            <p:ph type="ftr" sz="quarter" idx="4"/>
+          </p:nvPr>
+        </p:nvSpPr>
+        <p:spPr>
+          <a:xfrm>
+            <a:off x="0" y="8685213"/>
+            <a:ext cx="2971800" cy="458787"/>
+          </a:xfrm>
+          <a:prstGeom prst="rect">
+            <a:avLst/>
+          </a:prstGeom>
+        </p:spPr>
+        <p:txBody>
+          <a:bodyPr vert="horz" lIns="91440" tIns="45720" rIns="91440" bIns="45720" rtlCol="0" anchor="b"/>
+          <a:lstStyle>
+            <a:lvl1pPr algn="l">
+              <a:defRPr sz="1200"/>
+            </a:lvl1pPr>
+          </a:lstStyle>
+          <a:p>
+            <a:endParaRPr lang="en-US"/>
+          </a:p>
+        </p:txBody>
+      </p:sp>
+      <p:sp>
+        <p:nvSpPr>
+          <p:cNvPr id="7" name="Slide Number Placeholder 6"/>
+          <p:cNvSpPr>
+            <a:spLocks noGrp="1"/>
+          </p:cNvSpPr>
+          <p:nvPr>
+            <p:ph type="sldNum" sz="quarter" idx="5"/>
+          </p:nvPr>
+        </p:nvSpPr>
+        <p:spPr>
+          <a:xfrm>
+            <a:off x="3884613" y="8685213"/>
+            <a:ext cx="2971800" cy="458787"/>
+          </a:xfrm>
+          <a:prstGeom prst="rect">
+            <a:avLst/>
+          </a:prstGeom>
+        </p:spPr>
+        <p:txBody>
+          <a:bodyPr vert="horz" lIns="91440" tIns="45720" rIns="91440" bIns="45720" rtlCol="0" anchor="b"/>
+          <a:lstStyle>
+            <a:lvl1pPr algn="r">
+              <a:defRPr sz="1200"/>
+            </a:lvl1pPr>
+          </a:lstStyle>
+          <a:p>
+            <a:fld id="{BB5C6805-D20B-405F-86DA-DC495A4FC83C}" type="slidenum">
+              <a:t>‹#›</a:t>
+            </a:fld>
+            <a:endParaRPr lang="en-US"/>
+          </a:p>
+        </p:txBody>
+      </p:sp>
+    </p:spTree>
+    <p:extLst>
+      <p:ext uri="{BB962C8B-B14F-4D97-AF65-F5344CB8AC3E}">
+        <p14:creationId xmlns:p14="http://schemas.microsoft.com/office/powerpoint/2010/main" val="3213445057"/>
+      </p:ext>
+    </p:extLst>
+  </p:cSld>
+  <p:clrMap bg1="lt1" tx1="dk1" bg2="lt2" tx2="dk2" accent1="accent1" accent2="accent2" accent3="accent3" accent4="accent4" accent5="accent5" accent6="accent6" hlink="hlink" folHlink="folHlink"/>
+  <p:notesStyle>
+    <a:lvl1pPr marL="0" algn="l" defTabSz="914400" rtl="0" eaLnBrk="1" latinLnBrk="0" hangingPunct="1">
+      <a:defRPr sz="1200" kern="1200">
+        <a:solidFill>
+          <a:schemeClr val="tx1"/>
+        </a:solidFill>
+        <a:latin typeface="+mn-lt"/>
+        <a:ea typeface="+mn-ea"/>
+        <a:cs typeface="+mn-cs"/>
+      </a:defRPr>
+    </a:lvl1pPr>
+    <a:lvl2pPr marL="457200" algn="l" defTabSz="914400" rtl="0" eaLnBrk="1" latinLnBrk="0" hangingPunct="1">
+      <a:defRPr sz="1200" kern="1200">
+        <a:solidFill>
+          <a:schemeClr val="tx1"/>
+        </a:solidFill>
+        <a:latin typeface="+mn-lt"/>
+        <a:ea typeface="+mn-ea"/>
+        <a:cs typeface="+mn-cs"/>
+      </a:defRPr>
+    </a:lvl2pPr>
+    <a:lvl3pPr marL="914400" algn="l" defTabSz="914400" rtl="0" eaLnBrk="1" latinLnBrk="0" hangingPunct="1">
+      <a:defRPr sz="1200" kern="1200">
+        <a:solidFill>
+          <a:schemeClr val="tx1"/>
+        </a:solidFill>
+        <a:latin typeface="+mn-lt"/>
+        <a:ea typeface="+mn-ea"/>
+        <a:cs typeface="+mn-cs"/>
+      </a:defRPr>
+    </a:lvl3pPr>
+    <a:lvl4pPr marL="1371600" algn="l" defTabSz="914400" rtl="0" eaLnBrk="1" latinLnBrk="0" hangingPunct="1">
+      <a:defRPr sz="1200" kern="1200">
+        <a:solidFill>
+          <a:schemeClr val="tx1"/>
+        </a:solidFill>
+        <a:latin typeface="+mn-lt"/>
+        <a:ea typeface="+mn-ea"/>
+        <a:cs typeface="+mn-cs"/>
+      </a:defRPr>
+    </a:lvl4pPr>
+    <a:lvl5pPr marL="1828800" algn="l" defTabSz="914400" rtl="0" eaLnBrk="1" latinLnBrk="0" hangingPunct="1">
+      <a:defRPr sz="1200" kern="1200">
+        <a:solidFill>
+          <a:schemeClr val="tx1"/>
+        </a:solidFill>
+        <a:latin typeface="+mn-lt"/>
+        <a:ea typeface="+mn-ea"/>
+        <a:cs typeface="+mn-cs"/>
+      </a:defRPr>
+    </a:lvl5pPr>
+    <a:lvl6pPr marL="2286000" algn="l" defTabSz="914400" rtl="0" eaLnBrk="1" latinLnBrk="0" hangingPunct="1">
+      <a:defRPr sz="1200" kern="1200">
+        <a:solidFill>
+          <a:schemeClr val="tx1"/>
+        </a:solidFill>
+        <a:latin typeface="+mn-lt"/>
+        <a:ea typeface="+mn-ea"/>
+        <a:cs typeface="+mn-cs"/>
+      </a:defRPr>
+    </a:lvl6pPr>
+    <a:lvl7pPr marL="2743200" algn="l" defTabSz="914400" rtl="0" eaLnBrk="1" latinLnBrk="0" hangingPunct="1">
+      <a:defRPr sz="1200" kern="1200">
+        <a:solidFill>
+          <a:schemeClr val="tx1"/>
+        </a:solidFill>
+        <a:latin typeface="+mn-lt"/>
+        <a:ea typeface="+mn-ea"/>
+        <a:cs typeface="+mn-cs"/>
+      </a:defRPr>
+    </a:lvl7pPr>
+    <a:lvl8pPr marL="3200400" algn="l" defTabSz="914400" rtl="0" eaLnBrk="1" latinLnBrk="0" hangingPunct="1">
+      <a:defRPr sz="1200" kern="1200">
+        <a:solidFill>
+          <a:schemeClr val="tx1"/>
+        </a:solidFill>
+        <a:latin typeface="+mn-lt"/>
+        <a:ea typeface="+mn-ea"/>
+        <a:cs typeface="+mn-cs"/>
+      </a:defRPr>
+    </a:lvl8pPr>
+    <a:lvl9pPr marL="3657600" algn="l" defTabSz="914400" rtl="0" eaLnBrk="1" latinLnBrk="0" hangingPunct="1">
+      <a:defRPr sz="1200" kern="1200">
+        <a:solidFill>
+          <a:schemeClr val="tx1"/>
+        </a:solidFill>
+        <a:latin typeface="+mn-lt"/>
+        <a:ea typeface="+mn-ea"/>
+        <a:cs typeface="+mn-cs"/>
+      </a:defRPr>
+    </a:lvl9pPr>
+  </p:notesStyle>
+</p:notesMaster>
+</file>
+
+<file path=ppt/notesSlides/notesSlide1.xml><?xml version="1.0" encoding="utf-8"?>
+<p:notes xmlns:a="http://schemas.openxmlformats.org/drawingml/2006/main" xmlns:r="http://schemas.openxmlformats.org/officeDocument/2006/relationships" xmlns:p="http://schemas.openxmlformats.org/presentationml/2006/main">
+  <p:cSld>
+    <p:spTree>
+      <p:nvGrpSpPr>
+        <p:cNvPr id="1" name=""/>
+        <p:cNvGrpSpPr/>
+        <p:nvPr/>
+      </p:nvGrpSpPr>
+      <p:grpSpPr>
+        <a:xfrm>
+          <a:off x="0" y="0"/>
+          <a:ext cx="0" cy="0"/>
+          <a:chOff x="0" y="0"/>
+          <a:chExt cx="0" cy="0"/>
+        </a:xfrm>
+      </p:grpSpPr>
+      <p:sp>
+        <p:nvSpPr>
+          <p:cNvPr id="2" name="Slide Image Placeholder 1"/>
+          <p:cNvSpPr>
+            <a:spLocks noGrp="1" noRot="1" noChangeAspect="1"/>
+          </p:cNvSpPr>
+          <p:nvPr>
+            <p:ph type="sldImg"/>
+          </p:nvPr>
+        </p:nvSpPr>
+        <p:spPr/>
+      </p:sp>
+      <p:sp>
+        <p:nvSpPr>
+          <p:cNvPr id="3" name="Notes Placeholder 2"/>
+          <p:cNvSpPr>
+            <a:spLocks noGrp="1"/>
+          </p:cNvSpPr>
+          <p:nvPr>
+            <p:ph type="body" idx="1"/>
+          </p:nvPr>
+        </p:nvSpPr>
+        <p:spPr/>
+        <p:txBody>
+          <a:bodyPr/>
+          <a:lstStyle/>
+          <a:p>
+            <a:r>
+              <a:rPr lang="en-US" dirty="0"/>
+              <a:t>Huang Wei: Our project analyzes the Brazilian E-Commerce Public Dataset by </a:t>
+            </a:r>
+            <a:r>
+              <a:rPr lang="en-US" dirty="0" err="1"/>
+              <a:t>Olist</a:t>
+            </a:r>
+            <a:r>
+              <a:rPr lang="en-US" dirty="0"/>
+              <a:t>. The goal was to build an end-to-end analytics workflow: load raw data into </a:t>
+            </a:r>
+            <a:r>
+              <a:rPr lang="en-US" dirty="0" err="1"/>
+              <a:t>DuckDB</a:t>
+            </a:r>
+            <a:r>
+              <a:rPr lang="en-US" dirty="0"/>
+              <a:t>, model it into a star schema using </a:t>
+            </a:r>
+            <a:r>
+              <a:rPr lang="en-US" dirty="0" err="1"/>
+              <a:t>dbt</a:t>
+            </a:r>
+            <a:r>
+              <a:rPr lang="en-US" dirty="0"/>
+              <a:t>, validate data quality with </a:t>
+            </a:r>
+            <a:r>
+              <a:rPr lang="en-US" dirty="0" err="1"/>
+              <a:t>dbt</a:t>
+            </a:r>
+            <a:r>
+              <a:rPr lang="en-US" dirty="0"/>
+              <a:t> tests, and then perform business analysis and visualization with Python and Pandas.</a:t>
+            </a:r>
+          </a:p>
+        </p:txBody>
+      </p:sp>
+      <p:sp>
+        <p:nvSpPr>
+          <p:cNvPr id="4" name="Slide Number Placeholder 3"/>
+          <p:cNvSpPr>
+            <a:spLocks noGrp="1"/>
+          </p:cNvSpPr>
+          <p:nvPr>
+            <p:ph type="sldNum" sz="quarter" idx="5"/>
+          </p:nvPr>
+        </p:nvSpPr>
+        <p:spPr/>
+        <p:txBody>
+          <a:bodyPr/>
+          <a:lstStyle/>
+          <a:p>
+            <a:fld id="{BB5C6805-D20B-405F-86DA-DC495A4FC83C}" type="slidenum">
+              <a:rPr lang="en-US"/>
+              <a:t>1</a:t>
+            </a:fld>
+            <a:endParaRPr lang="en-US"/>
+          </a:p>
+        </p:txBody>
+      </p:sp>
+    </p:spTree>
+    <p:extLst>
+      <p:ext uri="{BB962C8B-B14F-4D97-AF65-F5344CB8AC3E}">
+        <p14:creationId xmlns:p14="http://schemas.microsoft.com/office/powerpoint/2010/main" val="989305360"/>
+      </p:ext>
+    </p:extLst>
+  </p:cSld>
+  <p:clrMapOvr>
+    <a:masterClrMapping/>
+  </p:clrMapOvr>
+</p:notes>
+</file>
+
+<file path=ppt/notesSlides/notesSlide2.xml><?xml version="1.0" encoding="utf-8"?>
+<p:notes xmlns:a="http://schemas.openxmlformats.org/drawingml/2006/main" xmlns:r="http://schemas.openxmlformats.org/officeDocument/2006/relationships" xmlns:p="http://schemas.openxmlformats.org/presentationml/2006/main">
+  <p:cSld>
+    <p:spTree>
+      <p:nvGrpSpPr>
+        <p:cNvPr id="1" name=""/>
+        <p:cNvGrpSpPr/>
+        <p:nvPr/>
+      </p:nvGrpSpPr>
+      <p:grpSpPr>
+        <a:xfrm>
+          <a:off x="0" y="0"/>
+          <a:ext cx="0" cy="0"/>
+          <a:chOff x="0" y="0"/>
+          <a:chExt cx="0" cy="0"/>
+        </a:xfrm>
+      </p:grpSpPr>
+      <p:sp>
+        <p:nvSpPr>
+          <p:cNvPr id="2" name="Slide Image Placeholder 1"/>
+          <p:cNvSpPr>
+            <a:spLocks noGrp="1" noRot="1" noChangeAspect="1"/>
+          </p:cNvSpPr>
+          <p:nvPr>
+            <p:ph type="sldImg"/>
+          </p:nvPr>
+        </p:nvSpPr>
+        <p:spPr/>
+      </p:sp>
+      <p:sp>
+        <p:nvSpPr>
+          <p:cNvPr id="3" name="Notes Placeholder 2"/>
+          <p:cNvSpPr>
+            <a:spLocks noGrp="1"/>
+          </p:cNvSpPr>
+          <p:nvPr>
+            <p:ph type="body" idx="1"/>
+          </p:nvPr>
+        </p:nvSpPr>
+        <p:spPr/>
+        <p:txBody>
+          <a:bodyPr/>
+          <a:lstStyle/>
+          <a:p>
+            <a:r>
+              <a:rPr lang="en-US" dirty="0"/>
+              <a:t>Huang Wei: The workflow starts with CSV files from the </a:t>
+            </a:r>
+            <a:r>
+              <a:rPr lang="en-US" dirty="0" err="1"/>
+              <a:t>Olist</a:t>
+            </a:r>
+            <a:r>
+              <a:rPr lang="en-US" dirty="0"/>
+              <a:t> dataset. We loaded them into </a:t>
+            </a:r>
+            <a:r>
+              <a:rPr lang="en-US" dirty="0" err="1"/>
+              <a:t>DuckDB</a:t>
+            </a:r>
+            <a:r>
+              <a:rPr lang="en-US" dirty="0"/>
+              <a:t>, then used </a:t>
+            </a:r>
+            <a:r>
+              <a:rPr lang="en-US" dirty="0" err="1"/>
+              <a:t>dbt</a:t>
+            </a:r>
+            <a:r>
+              <a:rPr lang="en-US" dirty="0"/>
+              <a:t> to create staging models and dimensional warehouse tables. After validating the data with </a:t>
+            </a:r>
+            <a:r>
+              <a:rPr lang="en-US" dirty="0" err="1"/>
+              <a:t>dbt</a:t>
+            </a:r>
+            <a:r>
+              <a:rPr lang="en-US" dirty="0"/>
+              <a:t> tests, We used Pandas and Matplotlib to generate business insights and charts. We selected </a:t>
+            </a:r>
+            <a:r>
+              <a:rPr lang="en-US" dirty="0" err="1"/>
+              <a:t>DuckDB</a:t>
+            </a:r>
+            <a:r>
+              <a:rPr lang="en-US" dirty="0"/>
+              <a:t> as our analytical database because it can work directly with CSV files, and it is fully supported by </a:t>
+            </a:r>
+            <a:r>
+              <a:rPr lang="en-US" dirty="0" err="1"/>
+              <a:t>dbt</a:t>
+            </a:r>
+            <a:r>
+              <a:rPr lang="en-US" dirty="0"/>
+              <a:t>.</a:t>
+            </a:r>
+            <a:endParaRPr lang="en-US"/>
+          </a:p>
+        </p:txBody>
+      </p:sp>
+      <p:sp>
+        <p:nvSpPr>
+          <p:cNvPr id="4" name="Slide Number Placeholder 3"/>
+          <p:cNvSpPr>
+            <a:spLocks noGrp="1"/>
+          </p:cNvSpPr>
+          <p:nvPr>
+            <p:ph type="sldNum" sz="quarter" idx="5"/>
+          </p:nvPr>
+        </p:nvSpPr>
+        <p:spPr/>
+        <p:txBody>
+          <a:bodyPr/>
+          <a:lstStyle/>
+          <a:p>
+            <a:fld id="{BB5C6805-D20B-405F-86DA-DC495A4FC83C}" type="slidenum">
+              <a:t>2</a:t>
+            </a:fld>
+            <a:endParaRPr lang="en-US"/>
+          </a:p>
+        </p:txBody>
+      </p:sp>
+    </p:spTree>
+    <p:extLst>
+      <p:ext uri="{BB962C8B-B14F-4D97-AF65-F5344CB8AC3E}">
+        <p14:creationId xmlns:p14="http://schemas.microsoft.com/office/powerpoint/2010/main" val="929460200"/>
+      </p:ext>
+    </p:extLst>
+  </p:cSld>
+  <p:clrMapOvr>
+    <a:masterClrMapping/>
+  </p:clrMapOvr>
+</p:notes>
+</file>
+
+<file path=ppt/notesSlides/notesSlide3.xml><?xml version="1.0" encoding="utf-8"?>
+<p:notes xmlns:a="http://schemas.openxmlformats.org/drawingml/2006/main" xmlns:r="http://schemas.openxmlformats.org/officeDocument/2006/relationships" xmlns:p="http://schemas.openxmlformats.org/presentationml/2006/main">
+  <p:cSld>
+    <p:spTree>
+      <p:nvGrpSpPr>
+        <p:cNvPr id="1" name=""/>
+        <p:cNvGrpSpPr/>
+        <p:nvPr/>
+      </p:nvGrpSpPr>
+      <p:grpSpPr>
+        <a:xfrm>
+          <a:off x="0" y="0"/>
+          <a:ext cx="0" cy="0"/>
+          <a:chOff x="0" y="0"/>
+          <a:chExt cx="0" cy="0"/>
+        </a:xfrm>
+      </p:grpSpPr>
+      <p:sp>
+        <p:nvSpPr>
+          <p:cNvPr id="2" name="Slide Image Placeholder 1"/>
+          <p:cNvSpPr>
+            <a:spLocks noGrp="1" noRot="1" noChangeAspect="1"/>
+          </p:cNvSpPr>
+          <p:nvPr>
+            <p:ph type="sldImg"/>
+          </p:nvPr>
+        </p:nvSpPr>
+        <p:spPr/>
+      </p:sp>
+      <p:sp>
+        <p:nvSpPr>
+          <p:cNvPr id="3" name="Notes Placeholder 2"/>
+          <p:cNvSpPr>
+            <a:spLocks noGrp="1"/>
+          </p:cNvSpPr>
+          <p:nvPr>
+            <p:ph type="body" idx="1"/>
+          </p:nvPr>
+        </p:nvSpPr>
+        <p:spPr/>
+        <p:txBody>
+          <a:bodyPr/>
+          <a:lstStyle/>
+          <a:p>
+            <a:r>
+              <a:rPr lang="en-US" dirty="0"/>
+              <a:t>The warehouse uses a star schema. The central fact table is </a:t>
+            </a:r>
+            <a:r>
+              <a:rPr lang="en-US" dirty="0" err="1"/>
+              <a:t>fact_sales</a:t>
+            </a:r>
+            <a:r>
+              <a:rPr lang="en-US" dirty="0"/>
+              <a:t>, which contains transaction-level sales data. Around it are three dimensions: </a:t>
+            </a:r>
+            <a:r>
+              <a:rPr lang="en-US" dirty="0" err="1"/>
+              <a:t>dim_customer</a:t>
+            </a:r>
+            <a:r>
+              <a:rPr lang="en-US" dirty="0"/>
+              <a:t>, </a:t>
+            </a:r>
+            <a:r>
+              <a:rPr lang="en-US" dirty="0" err="1"/>
+              <a:t>dim_product</a:t>
+            </a:r>
+            <a:r>
+              <a:rPr lang="en-US" dirty="0"/>
+              <a:t>, and </a:t>
+            </a:r>
+            <a:r>
+              <a:rPr lang="en-US" dirty="0" err="1"/>
+              <a:t>dim_seller</a:t>
+            </a:r>
+            <a:r>
+              <a:rPr lang="en-US" dirty="0"/>
+              <a:t>. This structure simplifies analytical queries and reporting.</a:t>
+            </a:r>
+          </a:p>
+        </p:txBody>
+      </p:sp>
+      <p:sp>
+        <p:nvSpPr>
+          <p:cNvPr id="4" name="Slide Number Placeholder 3"/>
+          <p:cNvSpPr>
+            <a:spLocks noGrp="1"/>
+          </p:cNvSpPr>
+          <p:nvPr>
+            <p:ph type="sldNum" sz="quarter" idx="5"/>
+          </p:nvPr>
+        </p:nvSpPr>
+        <p:spPr/>
+        <p:txBody>
+          <a:bodyPr/>
+          <a:lstStyle/>
+          <a:p>
+            <a:fld id="{BB5C6805-D20B-405F-86DA-DC495A4FC83C}" type="slidenum">
+              <a:rPr lang="en-US"/>
+              <a:t>3</a:t>
+            </a:fld>
+            <a:endParaRPr lang="en-US"/>
+          </a:p>
+        </p:txBody>
+      </p:sp>
+    </p:spTree>
+    <p:extLst>
+      <p:ext uri="{BB962C8B-B14F-4D97-AF65-F5344CB8AC3E}">
+        <p14:creationId xmlns:p14="http://schemas.microsoft.com/office/powerpoint/2010/main" val="2466823994"/>
+      </p:ext>
+    </p:extLst>
+  </p:cSld>
+  <p:clrMapOvr>
+    <a:masterClrMapping/>
+  </p:clrMapOvr>
+</p:notes>
+</file>
+
+<file path=ppt/notesSlides/notesSlide4.xml><?xml version="1.0" encoding="utf-8"?>
+<p:notes xmlns:a="http://schemas.openxmlformats.org/drawingml/2006/main" xmlns:r="http://schemas.openxmlformats.org/officeDocument/2006/relationships" xmlns:p="http://schemas.openxmlformats.org/presentationml/2006/main">
+  <p:cSld>
+    <p:spTree>
+      <p:nvGrpSpPr>
+        <p:cNvPr id="1" name=""/>
+        <p:cNvGrpSpPr/>
+        <p:nvPr/>
+      </p:nvGrpSpPr>
+      <p:grpSpPr>
+        <a:xfrm>
+          <a:off x="0" y="0"/>
+          <a:ext cx="0" cy="0"/>
+          <a:chOff x="0" y="0"/>
+          <a:chExt cx="0" cy="0"/>
+        </a:xfrm>
+      </p:grpSpPr>
+      <p:sp>
+        <p:nvSpPr>
+          <p:cNvPr id="2" name="Slide Image Placeholder 1"/>
+          <p:cNvSpPr>
+            <a:spLocks noGrp="1" noRot="1" noChangeAspect="1"/>
+          </p:cNvSpPr>
+          <p:nvPr>
+            <p:ph type="sldImg"/>
+          </p:nvPr>
+        </p:nvSpPr>
+        <p:spPr/>
+      </p:sp>
+      <p:sp>
+        <p:nvSpPr>
+          <p:cNvPr id="3" name="Notes Placeholder 2"/>
+          <p:cNvSpPr>
+            <a:spLocks noGrp="1"/>
+          </p:cNvSpPr>
+          <p:nvPr>
+            <p:ph type="body" idx="1"/>
+          </p:nvPr>
+        </p:nvSpPr>
+        <p:spPr/>
+        <p:txBody>
+          <a:bodyPr/>
+          <a:lstStyle/>
+          <a:p>
+            <a:r>
+              <a:rPr lang="en-US" dirty="0"/>
+              <a:t>We added </a:t>
+            </a:r>
+            <a:r>
+              <a:rPr lang="en-US" dirty="0" err="1"/>
+              <a:t>dbt</a:t>
+            </a:r>
+            <a:r>
+              <a:rPr lang="en-US" dirty="0"/>
+              <a:t> tests to ensure key fields are reliable. The tests checked that customer, product, and seller IDs are unique and not null, and that sales records contain valid order IDs. All seven tests passed successfully, which gave us confidence that the warehouse was consistent before running analysis.</a:t>
+            </a:r>
+          </a:p>
+        </p:txBody>
+      </p:sp>
+      <p:sp>
+        <p:nvSpPr>
+          <p:cNvPr id="4" name="Slide Number Placeholder 3"/>
+          <p:cNvSpPr>
+            <a:spLocks noGrp="1"/>
+          </p:cNvSpPr>
+          <p:nvPr>
+            <p:ph type="sldNum" sz="quarter" idx="5"/>
+          </p:nvPr>
+        </p:nvSpPr>
+        <p:spPr/>
+        <p:txBody>
+          <a:bodyPr/>
+          <a:lstStyle/>
+          <a:p>
+            <a:fld id="{BB5C6805-D20B-405F-86DA-DC495A4FC83C}" type="slidenum">
+              <a:rPr lang="en-US"/>
+              <a:t>4</a:t>
+            </a:fld>
+            <a:endParaRPr lang="en-US"/>
+          </a:p>
+        </p:txBody>
+      </p:sp>
+    </p:spTree>
+    <p:extLst>
+      <p:ext uri="{BB962C8B-B14F-4D97-AF65-F5344CB8AC3E}">
+        <p14:creationId xmlns:p14="http://schemas.microsoft.com/office/powerpoint/2010/main" val="107882301"/>
+      </p:ext>
+    </p:extLst>
+  </p:cSld>
+  <p:clrMapOvr>
+    <a:masterClrMapping/>
+  </p:clrMapOvr>
+</p:notes>
+</file>
+
+<file path=ppt/notesSlides/notesSlide5.xml><?xml version="1.0" encoding="utf-8"?>
+<p:notes xmlns:a="http://schemas.openxmlformats.org/drawingml/2006/main" xmlns:r="http://schemas.openxmlformats.org/officeDocument/2006/relationships" xmlns:p="http://schemas.openxmlformats.org/presentationml/2006/main">
+  <p:cSld>
+    <p:spTree>
+      <p:nvGrpSpPr>
+        <p:cNvPr id="1" name=""/>
+        <p:cNvGrpSpPr/>
+        <p:nvPr/>
+      </p:nvGrpSpPr>
+      <p:grpSpPr>
+        <a:xfrm>
+          <a:off x="0" y="0"/>
+          <a:ext cx="0" cy="0"/>
+          <a:chOff x="0" y="0"/>
+          <a:chExt cx="0" cy="0"/>
+        </a:xfrm>
+      </p:grpSpPr>
+      <p:sp>
+        <p:nvSpPr>
+          <p:cNvPr id="2" name="Slide Image Placeholder 1"/>
+          <p:cNvSpPr>
+            <a:spLocks noGrp="1" noRot="1" noChangeAspect="1"/>
+          </p:cNvSpPr>
+          <p:nvPr>
+            <p:ph type="sldImg"/>
+          </p:nvPr>
+        </p:nvSpPr>
+        <p:spPr/>
+      </p:sp>
+      <p:sp>
+        <p:nvSpPr>
+          <p:cNvPr id="3" name="Notes Placeholder 2"/>
+          <p:cNvSpPr>
+            <a:spLocks noGrp="1"/>
+          </p:cNvSpPr>
+          <p:nvPr>
+            <p:ph type="body" idx="1"/>
+          </p:nvPr>
+        </p:nvSpPr>
+        <p:spPr/>
+        <p:txBody>
+          <a:bodyPr/>
+          <a:lstStyle/>
+          <a:p>
+            <a:r>
+              <a:rPr lang="en-US" dirty="0"/>
+              <a:t>This chart shows monthly revenue over time. Revenue generally increased during 2017 and 2018, indicating significant growth in the platform during the observed period. The trend also shows seasonal fluctuations, which are common in e-commerce businesses.</a:t>
+            </a:r>
+          </a:p>
+        </p:txBody>
+      </p:sp>
+      <p:sp>
+        <p:nvSpPr>
+          <p:cNvPr id="4" name="Slide Number Placeholder 3"/>
+          <p:cNvSpPr>
+            <a:spLocks noGrp="1"/>
+          </p:cNvSpPr>
+          <p:nvPr>
+            <p:ph type="sldNum" sz="quarter" idx="5"/>
+          </p:nvPr>
+        </p:nvSpPr>
+        <p:spPr/>
+        <p:txBody>
+          <a:bodyPr/>
+          <a:lstStyle/>
+          <a:p>
+            <a:fld id="{BB5C6805-D20B-405F-86DA-DC495A4FC83C}" type="slidenum">
+              <a:rPr lang="en-US"/>
+              <a:t>5</a:t>
+            </a:fld>
+            <a:endParaRPr lang="en-US"/>
+          </a:p>
+        </p:txBody>
+      </p:sp>
+    </p:spTree>
+    <p:extLst>
+      <p:ext uri="{BB962C8B-B14F-4D97-AF65-F5344CB8AC3E}">
+        <p14:creationId xmlns:p14="http://schemas.microsoft.com/office/powerpoint/2010/main" val="1004333252"/>
+      </p:ext>
+    </p:extLst>
+  </p:cSld>
+  <p:clrMapOvr>
+    <a:masterClrMapping/>
+  </p:clrMapOvr>
+</p:notes>
+</file>
+
+<file path=ppt/notesSlides/notesSlide6.xml><?xml version="1.0" encoding="utf-8"?>
+<p:notes xmlns:a="http://schemas.openxmlformats.org/drawingml/2006/main" xmlns:r="http://schemas.openxmlformats.org/officeDocument/2006/relationships" xmlns:p="http://schemas.openxmlformats.org/presentationml/2006/main">
+  <p:cSld>
+    <p:spTree>
+      <p:nvGrpSpPr>
+        <p:cNvPr id="1" name=""/>
+        <p:cNvGrpSpPr/>
+        <p:nvPr/>
+      </p:nvGrpSpPr>
+      <p:grpSpPr>
+        <a:xfrm>
+          <a:off x="0" y="0"/>
+          <a:ext cx="0" cy="0"/>
+          <a:chOff x="0" y="0"/>
+          <a:chExt cx="0" cy="0"/>
+        </a:xfrm>
+      </p:grpSpPr>
+      <p:sp>
+        <p:nvSpPr>
+          <p:cNvPr id="2" name="Slide Image Placeholder 1"/>
+          <p:cNvSpPr>
+            <a:spLocks noGrp="1" noRot="1" noChangeAspect="1"/>
+          </p:cNvSpPr>
+          <p:nvPr>
+            <p:ph type="sldImg"/>
+          </p:nvPr>
+        </p:nvSpPr>
+        <p:spPr/>
+      </p:sp>
+      <p:sp>
+        <p:nvSpPr>
+          <p:cNvPr id="3" name="Notes Placeholder 2"/>
+          <p:cNvSpPr>
+            <a:spLocks noGrp="1"/>
+          </p:cNvSpPr>
+          <p:nvPr>
+            <p:ph type="body" idx="1"/>
+          </p:nvPr>
+        </p:nvSpPr>
+        <p:spPr/>
+        <p:txBody>
+          <a:bodyPr/>
+          <a:lstStyle/>
+          <a:p>
+            <a:r>
+              <a:rPr lang="en-US"/>
+              <a:t>The highest-revenue product categories were Beauty &amp; Health, Watches &amp; Gifts, and Bed, Bath &amp; Table. These categories contributed a large share of total revenue and could be prioritized for marketing and inventory planning.</a:t>
+            </a:r>
+          </a:p>
+        </p:txBody>
+      </p:sp>
+      <p:sp>
+        <p:nvSpPr>
+          <p:cNvPr id="4" name="Slide Number Placeholder 3"/>
+          <p:cNvSpPr>
+            <a:spLocks noGrp="1"/>
+          </p:cNvSpPr>
+          <p:nvPr>
+            <p:ph type="sldNum" sz="quarter" idx="5"/>
+          </p:nvPr>
+        </p:nvSpPr>
+        <p:spPr/>
+        <p:txBody>
+          <a:bodyPr/>
+          <a:lstStyle/>
+          <a:p>
+            <a:fld id="{BB5C6805-D20B-405F-86DA-DC495A4FC83C}" type="slidenum">
+              <a:rPr lang="en-US"/>
+              <a:t>6</a:t>
+            </a:fld>
+            <a:endParaRPr lang="en-US"/>
+          </a:p>
+        </p:txBody>
+      </p:sp>
+    </p:spTree>
+    <p:extLst>
+      <p:ext uri="{BB962C8B-B14F-4D97-AF65-F5344CB8AC3E}">
+        <p14:creationId xmlns:p14="http://schemas.microsoft.com/office/powerpoint/2010/main" val="2649634372"/>
+      </p:ext>
+    </p:extLst>
+  </p:cSld>
+  <p:clrMapOvr>
+    <a:masterClrMapping/>
+  </p:clrMapOvr>
+</p:notes>
+</file>
+
+<file path=ppt/notesSlides/notesSlide7.xml><?xml version="1.0" encoding="utf-8"?>
+<p:notes xmlns:a="http://schemas.openxmlformats.org/drawingml/2006/main" xmlns:r="http://schemas.openxmlformats.org/officeDocument/2006/relationships" xmlns:p="http://schemas.openxmlformats.org/presentationml/2006/main">
+  <p:cSld>
+    <p:spTree>
+      <p:nvGrpSpPr>
+        <p:cNvPr id="1" name=""/>
+        <p:cNvGrpSpPr/>
+        <p:nvPr/>
+      </p:nvGrpSpPr>
+      <p:grpSpPr>
+        <a:xfrm>
+          <a:off x="0" y="0"/>
+          <a:ext cx="0" cy="0"/>
+          <a:chOff x="0" y="0"/>
+          <a:chExt cx="0" cy="0"/>
+        </a:xfrm>
+      </p:grpSpPr>
+      <p:sp>
+        <p:nvSpPr>
+          <p:cNvPr id="2" name="Slide Image Placeholder 1"/>
+          <p:cNvSpPr>
+            <a:spLocks noGrp="1" noRot="1" noChangeAspect="1"/>
+          </p:cNvSpPr>
+          <p:nvPr>
+            <p:ph type="sldImg"/>
+          </p:nvPr>
+        </p:nvSpPr>
+        <p:spPr/>
+      </p:sp>
+      <p:sp>
+        <p:nvSpPr>
+          <p:cNvPr id="3" name="Notes Placeholder 2"/>
+          <p:cNvSpPr>
+            <a:spLocks noGrp="1"/>
+          </p:cNvSpPr>
+          <p:nvPr>
+            <p:ph type="body" idx="1"/>
+          </p:nvPr>
+        </p:nvSpPr>
+        <p:spPr/>
+        <p:txBody>
+          <a:bodyPr/>
+          <a:lstStyle/>
+          <a:p>
+            <a:r>
+              <a:rPr lang="en-US"/>
+              <a:t>Revenue was heavily concentrated in São Paulo (SP), followed by Rio de Janeiro and Minas Gerais. This suggests that customer demand is strongest in Brazil’s largest economic regions.</a:t>
+            </a:r>
+          </a:p>
+        </p:txBody>
+      </p:sp>
+      <p:sp>
+        <p:nvSpPr>
+          <p:cNvPr id="4" name="Slide Number Placeholder 3"/>
+          <p:cNvSpPr>
+            <a:spLocks noGrp="1"/>
+          </p:cNvSpPr>
+          <p:nvPr>
+            <p:ph type="sldNum" sz="quarter" idx="5"/>
+          </p:nvPr>
+        </p:nvSpPr>
+        <p:spPr/>
+        <p:txBody>
+          <a:bodyPr/>
+          <a:lstStyle/>
+          <a:p>
+            <a:fld id="{BB5C6805-D20B-405F-86DA-DC495A4FC83C}" type="slidenum">
+              <a:rPr lang="en-US"/>
+              <a:t>7</a:t>
+            </a:fld>
+            <a:endParaRPr lang="en-US"/>
+          </a:p>
+        </p:txBody>
+      </p:sp>
+    </p:spTree>
+    <p:extLst>
+      <p:ext uri="{BB962C8B-B14F-4D97-AF65-F5344CB8AC3E}">
+        <p14:creationId xmlns:p14="http://schemas.microsoft.com/office/powerpoint/2010/main" val="577290024"/>
+      </p:ext>
+    </p:extLst>
+  </p:cSld>
+  <p:clrMapOvr>
+    <a:masterClrMapping/>
+  </p:clrMapOvr>
+</p:notes>
+</file>
+
+<file path=ppt/notesSlides/notesSlide8.xml><?xml version="1.0" encoding="utf-8"?>
+<p:notes xmlns:a="http://schemas.openxmlformats.org/drawingml/2006/main" xmlns:r="http://schemas.openxmlformats.org/officeDocument/2006/relationships" xmlns:p="http://schemas.openxmlformats.org/presentationml/2006/main">
+  <p:cSld>
+    <p:spTree>
+      <p:nvGrpSpPr>
+        <p:cNvPr id="1" name=""/>
+        <p:cNvGrpSpPr/>
+        <p:nvPr/>
+      </p:nvGrpSpPr>
+      <p:grpSpPr>
+        <a:xfrm>
+          <a:off x="0" y="0"/>
+          <a:ext cx="0" cy="0"/>
+          <a:chOff x="0" y="0"/>
+          <a:chExt cx="0" cy="0"/>
+        </a:xfrm>
+      </p:grpSpPr>
+      <p:sp>
+        <p:nvSpPr>
+          <p:cNvPr id="2" name="Slide Image Placeholder 1"/>
+          <p:cNvSpPr>
+            <a:spLocks noGrp="1" noRot="1" noChangeAspect="1"/>
+          </p:cNvSpPr>
+          <p:nvPr>
+            <p:ph type="sldImg"/>
+          </p:nvPr>
+        </p:nvSpPr>
+        <p:spPr/>
+      </p:sp>
+      <p:sp>
+        <p:nvSpPr>
+          <p:cNvPr id="3" name="Notes Placeholder 2"/>
+          <p:cNvSpPr>
+            <a:spLocks noGrp="1"/>
+          </p:cNvSpPr>
+          <p:nvPr>
+            <p:ph type="body" idx="1"/>
+          </p:nvPr>
+        </p:nvSpPr>
+        <p:spPr/>
+        <p:txBody>
+          <a:bodyPr/>
+          <a:lstStyle/>
+          <a:p>
+            <a:r>
+              <a:rPr lang="en-US" dirty="0"/>
+              <a:t>For customer analysis, We calculated Recency, Frequency, and Monetary value using the customer’s unique identifier. The results show that some customers placed many repeat orders, indicating a segment of loyal, high-value customers that could be targeted for retention programs.</a:t>
+            </a:r>
+          </a:p>
+        </p:txBody>
+      </p:sp>
+      <p:sp>
+        <p:nvSpPr>
+          <p:cNvPr id="4" name="Slide Number Placeholder 3"/>
+          <p:cNvSpPr>
+            <a:spLocks noGrp="1"/>
+          </p:cNvSpPr>
+          <p:nvPr>
+            <p:ph type="sldNum" sz="quarter" idx="5"/>
+          </p:nvPr>
+        </p:nvSpPr>
+        <p:spPr/>
+        <p:txBody>
+          <a:bodyPr/>
+          <a:lstStyle/>
+          <a:p>
+            <a:fld id="{BB5C6805-D20B-405F-86DA-DC495A4FC83C}" type="slidenum">
+              <a:rPr lang="en-US"/>
+              <a:t>8</a:t>
+            </a:fld>
+            <a:endParaRPr lang="en-US"/>
+          </a:p>
+        </p:txBody>
+      </p:sp>
+    </p:spTree>
+    <p:extLst>
+      <p:ext uri="{BB962C8B-B14F-4D97-AF65-F5344CB8AC3E}">
+        <p14:creationId xmlns:p14="http://schemas.microsoft.com/office/powerpoint/2010/main" val="2227343938"/>
+      </p:ext>
+    </p:extLst>
+  </p:cSld>
+  <p:clrMapOvr>
+    <a:masterClrMapping/>
+  </p:clrMapOvr>
+</p:notes>
+</file>
+
+<file path=ppt/notesSlides/notesSlide9.xml><?xml version="1.0" encoding="utf-8"?>
+<p:notes xmlns:a="http://schemas.openxmlformats.org/drawingml/2006/main" xmlns:r="http://schemas.openxmlformats.org/officeDocument/2006/relationships" xmlns:p="http://schemas.openxmlformats.org/presentationml/2006/main">
+  <p:cSld>
+    <p:spTree>
+      <p:nvGrpSpPr>
+        <p:cNvPr id="1" name=""/>
+        <p:cNvGrpSpPr/>
+        <p:nvPr/>
+      </p:nvGrpSpPr>
+      <p:grpSpPr>
+        <a:xfrm>
+          <a:off x="0" y="0"/>
+          <a:ext cx="0" cy="0"/>
+          <a:chOff x="0" y="0"/>
+          <a:chExt cx="0" cy="0"/>
+        </a:xfrm>
+      </p:grpSpPr>
+      <p:sp>
+        <p:nvSpPr>
+          <p:cNvPr id="2" name="Slide Image Placeholder 1"/>
+          <p:cNvSpPr>
+            <a:spLocks noGrp="1" noRot="1" noChangeAspect="1"/>
+          </p:cNvSpPr>
+          <p:nvPr>
+            <p:ph type="sldImg"/>
+          </p:nvPr>
+        </p:nvSpPr>
+        <p:spPr/>
+      </p:sp>
+      <p:sp>
+        <p:nvSpPr>
+          <p:cNvPr id="3" name="Notes Placeholder 2"/>
+          <p:cNvSpPr>
+            <a:spLocks noGrp="1"/>
+          </p:cNvSpPr>
+          <p:nvPr>
+            <p:ph type="body" idx="1"/>
+          </p:nvPr>
+        </p:nvSpPr>
+        <p:spPr/>
+        <p:txBody>
+          <a:bodyPr/>
+          <a:lstStyle/>
+          <a:p>
+            <a:r>
+              <a:rPr lang="en-US" dirty="0"/>
+              <a:t>In summary, this project demonstrates an end-to-end analytics engineering workflow using </a:t>
+            </a:r>
+            <a:r>
+              <a:rPr lang="en-US" dirty="0" err="1"/>
+              <a:t>DuckDB</a:t>
+            </a:r>
+            <a:r>
+              <a:rPr lang="en-US" dirty="0"/>
+              <a:t> and </a:t>
+            </a:r>
+            <a:r>
+              <a:rPr lang="en-US" dirty="0" err="1"/>
+              <a:t>dbt</a:t>
+            </a:r>
+            <a:r>
+              <a:rPr lang="en-US" dirty="0"/>
+              <a:t>. We learned how to design a star schema, implement automated data quality tests, and generate business insights from transactional data. Key findings include strong revenue growth, high-performing product categories, concentration of sales in São Paulo, and evidence of repeat customer behavior. </a:t>
+            </a:r>
+          </a:p>
+        </p:txBody>
+      </p:sp>
+      <p:sp>
+        <p:nvSpPr>
+          <p:cNvPr id="4" name="Slide Number Placeholder 3"/>
+          <p:cNvSpPr>
+            <a:spLocks noGrp="1"/>
+          </p:cNvSpPr>
+          <p:nvPr>
+            <p:ph type="sldNum" sz="quarter" idx="5"/>
+          </p:nvPr>
+        </p:nvSpPr>
+        <p:spPr/>
+        <p:txBody>
+          <a:bodyPr/>
+          <a:lstStyle/>
+          <a:p>
+            <a:fld id="{BB5C6805-D20B-405F-86DA-DC495A4FC83C}" type="slidenum">
+              <a:rPr lang="en-US"/>
+              <a:t>9</a:t>
+            </a:fld>
+            <a:endParaRPr lang="en-US"/>
+          </a:p>
+        </p:txBody>
+      </p:sp>
+    </p:spTree>
+    <p:extLst>
+      <p:ext uri="{BB962C8B-B14F-4D97-AF65-F5344CB8AC3E}">
+        <p14:creationId xmlns:p14="http://schemas.microsoft.com/office/powerpoint/2010/main" val="4072080152"/>
+      </p:ext>
+    </p:extLst>
+  </p:cSld>
+  <p:clrMapOvr>
+    <a:masterClrMapping/>
+  </p:clrMapOvr>
+</p:notes>
 </file>
 
 <file path=ppt/slideLayouts/slideLayout1.xml><?xml version="1.0" encoding="utf-8"?>
@@ -470,7 +1739,7 @@
             <a:fld id="{B61BEF0D-F0BB-DE4B-95CE-6DB70DBA9567}" type="datetimeFigureOut">
               <a:rPr lang="en-US" dirty="0"/>
               <a:pPr/>
-              <a:t>6/7/2026</a:t>
+              <a:t>6/8/2026</a:t>
             </a:fld>
             <a:endParaRPr lang="en-US" dirty="0"/>
           </a:p>
@@ -791,7 +2060,7 @@
             <a:fld id="{B61BEF0D-F0BB-DE4B-95CE-6DB70DBA9567}" type="datetimeFigureOut">
               <a:rPr lang="en-US" dirty="0"/>
               <a:pPr/>
-              <a:t>6/7/2026</a:t>
+              <a:t>6/8/2026</a:t>
             </a:fld>
             <a:endParaRPr lang="en-US" dirty="0"/>
           </a:p>
@@ -1040,7 +2309,7 @@
             <a:fld id="{B61BEF0D-F0BB-DE4B-95CE-6DB70DBA9567}" type="datetimeFigureOut">
               <a:rPr lang="en-US" dirty="0"/>
               <a:pPr/>
-              <a:t>6/7/2026</a:t>
+              <a:t>6/8/2026</a:t>
             </a:fld>
             <a:endParaRPr lang="en-US" dirty="0"/>
           </a:p>
@@ -1380,7 +2649,7 @@
             <a:fld id="{B61BEF0D-F0BB-DE4B-95CE-6DB70DBA9567}" type="datetimeFigureOut">
               <a:rPr lang="en-US" dirty="0"/>
               <a:pPr/>
-              <a:t>6/7/2026</a:t>
+              <a:t>6/8/2026</a:t>
             </a:fld>
             <a:endParaRPr lang="en-US" dirty="0"/>
           </a:p>
@@ -1728,7 +2997,7 @@
             <a:fld id="{B61BEF0D-F0BB-DE4B-95CE-6DB70DBA9567}" type="datetimeFigureOut">
               <a:rPr lang="en-US" dirty="0"/>
               <a:pPr/>
-              <a:t>6/7/2026</a:t>
+              <a:t>6/8/2026</a:t>
             </a:fld>
             <a:endParaRPr lang="en-US" dirty="0"/>
           </a:p>
@@ -2103,7 +3372,7 @@
             <a:fld id="{B61BEF0D-F0BB-DE4B-95CE-6DB70DBA9567}" type="datetimeFigureOut">
               <a:rPr lang="en-US" dirty="0"/>
               <a:pPr/>
-              <a:t>6/7/2026</a:t>
+              <a:t>6/8/2026</a:t>
             </a:fld>
             <a:endParaRPr lang="en-US" dirty="0"/>
           </a:p>
@@ -2574,7 +3843,7 @@
             <a:fld id="{B61BEF0D-F0BB-DE4B-95CE-6DB70DBA9567}" type="datetimeFigureOut">
               <a:rPr lang="en-US" dirty="0"/>
               <a:pPr/>
-              <a:t>6/7/2026</a:t>
+              <a:t>6/8/2026</a:t>
             </a:fld>
             <a:endParaRPr lang="en-US" dirty="0"/>
           </a:p>
@@ -2784,7 +4053,7 @@
             <a:fld id="{B61BEF0D-F0BB-DE4B-95CE-6DB70DBA9567}" type="datetimeFigureOut">
               <a:rPr lang="en-US" dirty="0"/>
               <a:pPr/>
-              <a:t>6/7/2026</a:t>
+              <a:t>6/8/2026</a:t>
             </a:fld>
             <a:endParaRPr lang="en-US" dirty="0"/>
           </a:p>
@@ -2995,7 +4264,7 @@
             <a:fld id="{B61BEF0D-F0BB-DE4B-95CE-6DB70DBA9567}" type="datetimeFigureOut">
               <a:rPr lang="en-US" dirty="0"/>
               <a:pPr/>
-              <a:t>6/7/2026</a:t>
+              <a:t>6/8/2026</a:t>
             </a:fld>
             <a:endParaRPr lang="en-US" dirty="0"/>
           </a:p>
@@ -3226,7 +4495,7 @@
           <a:p>
             <a:fld id="{05BFA754-D5C3-4E66-96A6-867B257F58DC}" type="datetimeFigureOut">
               <a:rPr lang="en-US" dirty="0"/>
-              <a:t>6/7/2026</a:t>
+              <a:t>6/8/2026</a:t>
             </a:fld>
             <a:endParaRPr lang="en-US" dirty="0"/>
           </a:p>
@@ -3474,7 +4743,7 @@
             <a:fld id="{B61BEF0D-F0BB-DE4B-95CE-6DB70DBA9567}" type="datetimeFigureOut">
               <a:rPr lang="en-US" dirty="0"/>
               <a:pPr/>
-              <a:t>6/7/2026</a:t>
+              <a:t>6/8/2026</a:t>
             </a:fld>
             <a:endParaRPr lang="en-US" dirty="0"/>
           </a:p>
@@ -3775,7 +5044,7 @@
           <a:p>
             <a:fld id="{05BFA754-D5C3-4E66-96A6-867B257F58DC}" type="datetimeFigureOut">
               <a:rPr lang="en-US" dirty="0"/>
-              <a:t>6/7/2026</a:t>
+              <a:t>6/8/2026</a:t>
             </a:fld>
             <a:endParaRPr lang="en-US" dirty="0"/>
           </a:p>
@@ -4155,7 +5424,7 @@
             <a:fld id="{B61BEF0D-F0BB-DE4B-95CE-6DB70DBA9567}" type="datetimeFigureOut">
               <a:rPr lang="en-US" dirty="0"/>
               <a:pPr/>
-              <a:t>6/7/2026</a:t>
+              <a:t>6/8/2026</a:t>
             </a:fld>
             <a:endParaRPr lang="en-US" dirty="0"/>
           </a:p>
@@ -4310,7 +5579,7 @@
             <a:fld id="{B61BEF0D-F0BB-DE4B-95CE-6DB70DBA9567}" type="datetimeFigureOut">
               <a:rPr lang="en-US" dirty="0"/>
               <a:pPr/>
-              <a:t>6/7/2026</a:t>
+              <a:t>6/8/2026</a:t>
             </a:fld>
             <a:endParaRPr lang="en-US" dirty="0"/>
           </a:p>
@@ -4438,7 +5707,7 @@
             <a:fld id="{B61BEF0D-F0BB-DE4B-95CE-6DB70DBA9567}" type="datetimeFigureOut">
               <a:rPr lang="en-US" dirty="0"/>
               <a:pPr/>
-              <a:t>6/7/2026</a:t>
+              <a:t>6/8/2026</a:t>
             </a:fld>
             <a:endParaRPr lang="en-US" dirty="0"/>
           </a:p>
@@ -4693,7 +5962,7 @@
             <a:fld id="{B61BEF0D-F0BB-DE4B-95CE-6DB70DBA9567}" type="datetimeFigureOut">
               <a:rPr lang="en-US" dirty="0"/>
               <a:pPr/>
-              <a:t>6/7/2026</a:t>
+              <a:t>6/8/2026</a:t>
             </a:fld>
             <a:endParaRPr lang="en-US" dirty="0"/>
           </a:p>
@@ -5004,7 +6273,7 @@
             <a:fld id="{B61BEF0D-F0BB-DE4B-95CE-6DB70DBA9567}" type="datetimeFigureOut">
               <a:rPr lang="en-US" dirty="0"/>
               <a:pPr/>
-              <a:t>6/7/2026</a:t>
+              <a:t>6/8/2026</a:t>
             </a:fld>
             <a:endParaRPr lang="en-US" dirty="0"/>
           </a:p>
@@ -5355,7 +6624,7 @@
             <a:fld id="{B61BEF0D-F0BB-DE4B-95CE-6DB70DBA9567}" type="datetimeFigureOut">
               <a:rPr lang="en-US" dirty="0"/>
               <a:pPr/>
-              <a:t>6/7/2026</a:t>
+              <a:t>6/8/2026</a:t>
             </a:fld>
             <a:endParaRPr lang="en-US" dirty="0"/>
           </a:p>
@@ -6085,6 +7354,296 @@
           </a:p>
         </p:txBody>
       </p:sp>
+      <p:sp>
+        <p:nvSpPr>
+          <p:cNvPr id="6" name="TextBox 5">
+            <a:extLst>
+              <a:ext uri="{FF2B5EF4-FFF2-40B4-BE49-F238E27FC236}">
+                <a16:creationId xmlns:a16="http://schemas.microsoft.com/office/drawing/2014/main" id="{04EF12ED-33EF-9957-3B97-7463A89DAB56}"/>
+              </a:ext>
+            </a:extLst>
+          </p:cNvPr>
+          <p:cNvSpPr txBox="1"/>
+          <p:nvPr/>
+        </p:nvSpPr>
+        <p:spPr>
+          <a:xfrm>
+            <a:off x="3909646" y="3845169"/>
+            <a:ext cx="1336431" cy="461665"/>
+          </a:xfrm>
+          <a:prstGeom prst="rect">
+            <a:avLst/>
+          </a:prstGeom>
+          <a:solidFill>
+            <a:schemeClr val="accent5">
+              <a:lumMod val="60000"/>
+              <a:lumOff val="40000"/>
+            </a:schemeClr>
+          </a:solidFill>
+        </p:spPr>
+        <p:txBody>
+          <a:bodyPr rot="0" spcFirstLastPara="0" vertOverflow="overflow" horzOverflow="overflow" vert="horz" wrap="square" lIns="91440" tIns="45720" rIns="91440" bIns="45720" numCol="1" spcCol="0" rtlCol="0" fromWordArt="0" anchor="t" anchorCtr="0" forceAA="0" compatLnSpc="1">
+            <a:prstTxWarp prst="textNoShape">
+              <a:avLst/>
+            </a:prstTxWarp>
+            <a:spAutoFit/>
+          </a:bodyPr>
+          <a:lstStyle/>
+          <a:p>
+            <a:pPr algn="l"/>
+            <a:r>
+              <a:rPr lang="en-US" sz="2400" dirty="0" err="1">
+                <a:solidFill>
+                  <a:srgbClr val="262626"/>
+                </a:solidFill>
+              </a:rPr>
+              <a:t>fact_sales</a:t>
+            </a:r>
+            <a:endParaRPr lang="en-US" dirty="0" err="1"/>
+          </a:p>
+        </p:txBody>
+      </p:sp>
+      <p:cxnSp>
+        <p:nvCxnSpPr>
+          <p:cNvPr id="7" name="Straight Arrow Connector 6">
+            <a:extLst>
+              <a:ext uri="{FF2B5EF4-FFF2-40B4-BE49-F238E27FC236}">
+                <a16:creationId xmlns:a16="http://schemas.microsoft.com/office/drawing/2014/main" id="{AC5512C5-C53E-14C9-4EF9-AA712CFA0101}"/>
+              </a:ext>
+            </a:extLst>
+          </p:cNvPr>
+          <p:cNvCxnSpPr/>
+          <p:nvPr/>
+        </p:nvCxnSpPr>
+        <p:spPr>
+          <a:xfrm>
+            <a:off x="5023338" y="4308230"/>
+            <a:ext cx="914400" cy="914400"/>
+          </a:xfrm>
+          <a:prstGeom prst="straightConnector1">
+            <a:avLst/>
+          </a:prstGeom>
+        </p:spPr>
+        <p:style>
+          <a:lnRef idx="1">
+            <a:schemeClr val="accent1"/>
+          </a:lnRef>
+          <a:fillRef idx="0">
+            <a:schemeClr val="accent1"/>
+          </a:fillRef>
+          <a:effectRef idx="0">
+            <a:schemeClr val="accent1"/>
+          </a:effectRef>
+          <a:fontRef idx="minor">
+            <a:schemeClr val="tx1"/>
+          </a:fontRef>
+        </p:style>
+      </p:cxnSp>
+      <p:cxnSp>
+        <p:nvCxnSpPr>
+          <p:cNvPr id="9" name="Straight Arrow Connector 8">
+            <a:extLst>
+              <a:ext uri="{FF2B5EF4-FFF2-40B4-BE49-F238E27FC236}">
+                <a16:creationId xmlns:a16="http://schemas.microsoft.com/office/drawing/2014/main" id="{3323F2A7-D149-A20A-C67B-63EE505FFF10}"/>
+              </a:ext>
+            </a:extLst>
+          </p:cNvPr>
+          <p:cNvCxnSpPr/>
+          <p:nvPr/>
+        </p:nvCxnSpPr>
+        <p:spPr>
+          <a:xfrm flipH="1">
+            <a:off x="3223846" y="4314091"/>
+            <a:ext cx="926123" cy="926124"/>
+          </a:xfrm>
+          <a:prstGeom prst="straightConnector1">
+            <a:avLst/>
+          </a:prstGeom>
+        </p:spPr>
+        <p:style>
+          <a:lnRef idx="1">
+            <a:schemeClr val="accent1"/>
+          </a:lnRef>
+          <a:fillRef idx="0">
+            <a:schemeClr val="accent1"/>
+          </a:fillRef>
+          <a:effectRef idx="0">
+            <a:schemeClr val="accent1"/>
+          </a:effectRef>
+          <a:fontRef idx="minor">
+            <a:schemeClr val="tx1"/>
+          </a:fontRef>
+        </p:style>
+      </p:cxnSp>
+      <p:cxnSp>
+        <p:nvCxnSpPr>
+          <p:cNvPr id="10" name="Straight Arrow Connector 9">
+            <a:extLst>
+              <a:ext uri="{FF2B5EF4-FFF2-40B4-BE49-F238E27FC236}">
+                <a16:creationId xmlns:a16="http://schemas.microsoft.com/office/drawing/2014/main" id="{EC5D17D2-6ECC-7755-BD96-903481ED9970}"/>
+              </a:ext>
+            </a:extLst>
+          </p:cNvPr>
+          <p:cNvCxnSpPr/>
+          <p:nvPr/>
+        </p:nvCxnSpPr>
+        <p:spPr>
+          <a:xfrm flipH="1">
+            <a:off x="4566138" y="4314092"/>
+            <a:ext cx="17584" cy="931984"/>
+          </a:xfrm>
+          <a:prstGeom prst="straightConnector1">
+            <a:avLst/>
+          </a:prstGeom>
+        </p:spPr>
+        <p:style>
+          <a:lnRef idx="1">
+            <a:schemeClr val="accent1"/>
+          </a:lnRef>
+          <a:fillRef idx="0">
+            <a:schemeClr val="accent1"/>
+          </a:fillRef>
+          <a:effectRef idx="0">
+            <a:schemeClr val="accent1"/>
+          </a:effectRef>
+          <a:fontRef idx="minor">
+            <a:schemeClr val="tx1"/>
+          </a:fontRef>
+        </p:style>
+      </p:cxnSp>
+      <p:sp>
+        <p:nvSpPr>
+          <p:cNvPr id="11" name="TextBox 10">
+            <a:extLst>
+              <a:ext uri="{FF2B5EF4-FFF2-40B4-BE49-F238E27FC236}">
+                <a16:creationId xmlns:a16="http://schemas.microsoft.com/office/drawing/2014/main" id="{23FF5A8C-374B-8EDF-352F-1397BC3928AC}"/>
+              </a:ext>
+            </a:extLst>
+          </p:cNvPr>
+          <p:cNvSpPr txBox="1"/>
+          <p:nvPr/>
+        </p:nvSpPr>
+        <p:spPr>
+          <a:xfrm>
+            <a:off x="2033953" y="5246076"/>
+            <a:ext cx="1500554" cy="369332"/>
+          </a:xfrm>
+          <a:prstGeom prst="rect">
+            <a:avLst/>
+          </a:prstGeom>
+          <a:solidFill>
+            <a:schemeClr val="accent5">
+              <a:lumMod val="60000"/>
+              <a:lumOff val="40000"/>
+            </a:schemeClr>
+          </a:solidFill>
+        </p:spPr>
+        <p:txBody>
+          <a:bodyPr rot="0" spcFirstLastPara="0" vertOverflow="overflow" horzOverflow="overflow" vert="horz" wrap="square" lIns="91440" tIns="45720" rIns="91440" bIns="45720" numCol="1" spcCol="0" rtlCol="0" fromWordArt="0" anchor="t" anchorCtr="0" forceAA="0" compatLnSpc="1">
+            <a:prstTxWarp prst="textNoShape">
+              <a:avLst/>
+            </a:prstTxWarp>
+            <a:spAutoFit/>
+          </a:bodyPr>
+          <a:lstStyle/>
+          <a:p>
+            <a:pPr algn="l"/>
+            <a:r>
+              <a:rPr lang="en-US" dirty="0" err="1"/>
+              <a:t>dim_customer</a:t>
+            </a:r>
+            <a:endParaRPr lang="en-US"/>
+          </a:p>
+        </p:txBody>
+      </p:sp>
+      <p:sp>
+        <p:nvSpPr>
+          <p:cNvPr id="12" name="TextBox 11">
+            <a:extLst>
+              <a:ext uri="{FF2B5EF4-FFF2-40B4-BE49-F238E27FC236}">
+                <a16:creationId xmlns:a16="http://schemas.microsoft.com/office/drawing/2014/main" id="{631376E8-905C-7EA0-3B85-AC1E4178D408}"/>
+              </a:ext>
+            </a:extLst>
+          </p:cNvPr>
+          <p:cNvSpPr txBox="1"/>
+          <p:nvPr/>
+        </p:nvSpPr>
+        <p:spPr>
+          <a:xfrm>
+            <a:off x="3745521" y="5246075"/>
+            <a:ext cx="1500554" cy="369332"/>
+          </a:xfrm>
+          <a:prstGeom prst="rect">
+            <a:avLst/>
+          </a:prstGeom>
+          <a:solidFill>
+            <a:schemeClr val="accent5">
+              <a:lumMod val="60000"/>
+              <a:lumOff val="40000"/>
+            </a:schemeClr>
+          </a:solidFill>
+        </p:spPr>
+        <p:txBody>
+          <a:bodyPr rot="0" spcFirstLastPara="0" vertOverflow="overflow" horzOverflow="overflow" vert="horz" wrap="square" lIns="91440" tIns="45720" rIns="91440" bIns="45720" numCol="1" spcCol="0" rtlCol="0" fromWordArt="0" anchor="t" anchorCtr="0" forceAA="0" compatLnSpc="1">
+            <a:prstTxWarp prst="textNoShape">
+              <a:avLst/>
+            </a:prstTxWarp>
+            <a:spAutoFit/>
+          </a:bodyPr>
+          <a:lstStyle/>
+          <a:p>
+            <a:pPr algn="l"/>
+            <a:r>
+              <a:rPr lang="en-US" dirty="0" err="1"/>
+              <a:t>dim_product</a:t>
+            </a:r>
+          </a:p>
+        </p:txBody>
+      </p:sp>
+      <p:sp>
+        <p:nvSpPr>
+          <p:cNvPr id="13" name="TextBox 12">
+            <a:extLst>
+              <a:ext uri="{FF2B5EF4-FFF2-40B4-BE49-F238E27FC236}">
+                <a16:creationId xmlns:a16="http://schemas.microsoft.com/office/drawing/2014/main" id="{01694F03-80DB-14BD-997A-67B2221B4F0F}"/>
+              </a:ext>
+            </a:extLst>
+          </p:cNvPr>
+          <p:cNvSpPr txBox="1"/>
+          <p:nvPr/>
+        </p:nvSpPr>
+        <p:spPr>
+          <a:xfrm>
+            <a:off x="5480537" y="5246075"/>
+            <a:ext cx="1500554" cy="369332"/>
+          </a:xfrm>
+          <a:prstGeom prst="rect">
+            <a:avLst/>
+          </a:prstGeom>
+          <a:solidFill>
+            <a:schemeClr val="accent5">
+              <a:lumMod val="60000"/>
+              <a:lumOff val="40000"/>
+            </a:schemeClr>
+          </a:solidFill>
+        </p:spPr>
+        <p:txBody>
+          <a:bodyPr rot="0" spcFirstLastPara="0" vertOverflow="overflow" horzOverflow="overflow" vert="horz" wrap="square" lIns="91440" tIns="45720" rIns="91440" bIns="45720" numCol="1" spcCol="0" rtlCol="0" fromWordArt="0" anchor="t" anchorCtr="0" forceAA="0" compatLnSpc="1">
+            <a:prstTxWarp prst="textNoShape">
+              <a:avLst/>
+            </a:prstTxWarp>
+            <a:spAutoFit/>
+          </a:bodyPr>
+          <a:lstStyle/>
+          <a:p>
+            <a:pPr algn="l"/>
+            <a:r>
+              <a:rPr lang="en-US" dirty="0" err="1"/>
+              <a:t>dim_seller</a:t>
+            </a:r>
+          </a:p>
+        </p:txBody>
+      </p:sp>
     </p:spTree>
   </p:cSld>
   <p:clrMapOvr>
@@ -6192,7 +7751,7 @@
           <p:nvPr/>
         </p:nvPicPr>
         <p:blipFill>
-          <a:blip r:embed="rId2"/>
+          <a:blip r:embed="rId3"/>
           <a:stretch>
             <a:fillRect/>
           </a:stretch>
@@ -6289,7 +7848,7 @@
           <p:nvPr/>
         </p:nvPicPr>
         <p:blipFill>
-          <a:blip r:embed="rId2"/>
+          <a:blip r:embed="rId3"/>
           <a:stretch>
             <a:fillRect/>
           </a:stretch>
@@ -6386,7 +7945,7 @@
           <p:nvPr/>
         </p:nvPicPr>
         <p:blipFill>
-          <a:blip r:embed="rId2"/>
+          <a:blip r:embed="rId3"/>
           <a:stretch>
             <a:fillRect/>
           </a:stretch>
@@ -6483,7 +8042,7 @@
           <p:nvPr/>
         </p:nvPicPr>
         <p:blipFill>
-          <a:blip r:embed="rId2"/>
+          <a:blip r:embed="rId3"/>
           <a:stretch>
             <a:fillRect/>
           </a:stretch>
@@ -6584,7 +8143,7 @@
           <p:nvPr/>
         </p:nvPicPr>
         <p:blipFill>
-          <a:blip r:embed="rId2"/>
+          <a:blip r:embed="rId3"/>
           <a:stretch>
             <a:fillRect/>
           </a:stretch>
@@ -6905,4 +8464,299 @@
     </a:ext>
   </a:extLst>
 </a:theme>
+</file>
+
+<file path=ppt/theme/theme2.xml><?xml version="1.0" encoding="utf-8"?>
+<a:theme xmlns:a="http://schemas.openxmlformats.org/drawingml/2006/main" name="Office Theme">
+  <a:themeElements>
+    <a:clrScheme name="Office">
+      <a:dk1>
+        <a:sysClr val="windowText" lastClr="000000"/>
+      </a:dk1>
+      <a:lt1>
+        <a:sysClr val="window" lastClr="FFFFFF"/>
+      </a:lt1>
+      <a:dk2>
+        <a:srgbClr val="44546A"/>
+      </a:dk2>
+      <a:lt2>
+        <a:srgbClr val="E7E6E6"/>
+      </a:lt2>
+      <a:accent1>
+        <a:srgbClr val="4472C4"/>
+      </a:accent1>
+      <a:accent2>
+        <a:srgbClr val="ED7D31"/>
+      </a:accent2>
+      <a:accent3>
+        <a:srgbClr val="A5A5A5"/>
+      </a:accent3>
+      <a:accent4>
+        <a:srgbClr val="FFC000"/>
+      </a:accent4>
+      <a:accent5>
+        <a:srgbClr val="5B9BD5"/>
+      </a:accent5>
+      <a:accent6>
+        <a:srgbClr val="70AD47"/>
+      </a:accent6>
+      <a:hlink>
+        <a:srgbClr val="0563C1"/>
+      </a:hlink>
+      <a:folHlink>
+        <a:srgbClr val="954F72"/>
+      </a:folHlink>
+    </a:clrScheme>
+    <a:fontScheme name="Office">
+      <a:majorFont>
+        <a:latin typeface="Calibri Light" panose="020F0302020204030204"/>
+        <a:ea typeface=""/>
+        <a:cs typeface=""/>
+        <a:font script="Jpan" typeface="游ゴシック Light"/>
+        <a:font script="Hang" typeface="맑은 고딕"/>
+        <a:font script="Hans" typeface="等线 Light"/>
+        <a:font script="Hant" typeface="新細明體"/>
+        <a:font script="Arab" typeface="Times New Roman"/>
+        <a:font script="Hebr" typeface="Times New Roman"/>
+        <a:font script="Thai" typeface="Angsana New"/>
+        <a:font script="Ethi" typeface="Nyala"/>
+        <a:font script="Beng" typeface="Vrinda"/>
+        <a:font script="Gujr" typeface="Shruti"/>
+        <a:font script="Khmr" typeface="MoolBoran"/>
+        <a:font script="Knda" typeface="Tunga"/>
+        <a:font script="Guru" typeface="Raavi"/>
+        <a:font script="Cans" typeface="Euphemia"/>
+        <a:font script="Cher" typeface="Plantagenet Cherokee"/>
+        <a:font script="Yiii" typeface="Microsoft Yi Baiti"/>
+        <a:font script="Tibt" typeface="Microsoft Himalaya"/>
+        <a:font script="Thaa" typeface="MV Boli"/>
+        <a:font script="Deva" typeface="Mangal"/>
+        <a:font script="Telu" typeface="Gautami"/>
+        <a:font script="Taml" typeface="Latha"/>
+        <a:font script="Syrc" typeface="Estrangelo Edessa"/>
+        <a:font script="Orya" typeface="Kalinga"/>
+        <a:font script="Mlym" typeface="Kartika"/>
+        <a:font script="Laoo" typeface="DokChampa"/>
+        <a:font script="Sinh" typeface="Iskoola Pota"/>
+        <a:font script="Mong" typeface="Mongolian Baiti"/>
+        <a:font script="Viet" typeface="Times New Roman"/>
+        <a:font script="Uigh" typeface="Microsoft Uighur"/>
+        <a:font script="Geor" typeface="Sylfaen"/>
+        <a:font script="Armn" typeface="Arial"/>
+        <a:font script="Bugi" typeface="Leelawadee UI"/>
+        <a:font script="Bopo" typeface="Microsoft JhengHei"/>
+        <a:font script="Java" typeface="Javanese Text"/>
+        <a:font script="Lisu" typeface="Segoe UI"/>
+        <a:font script="Mymr" typeface="Myanmar Text"/>
+        <a:font script="Nkoo" typeface="Ebrima"/>
+        <a:font script="Olck" typeface="Nirmala UI"/>
+        <a:font script="Osma" typeface="Ebrima"/>
+        <a:font script="Phag" typeface="Phagspa"/>
+        <a:font script="Syrn" typeface="Estrangelo Edessa"/>
+        <a:font script="Syrj" typeface="Estrangelo Edessa"/>
+        <a:font script="Syre" typeface="Estrangelo Edessa"/>
+        <a:font script="Sora" typeface="Nirmala UI"/>
+        <a:font script="Tale" typeface="Microsoft Tai Le"/>
+        <a:font script="Talu" typeface="Microsoft New Tai Lue"/>
+        <a:font script="Tfng" typeface="Ebrima"/>
+      </a:majorFont>
+      <a:minorFont>
+        <a:latin typeface="Calibri" panose="020F0502020204030204"/>
+        <a:ea typeface=""/>
+        <a:cs typeface=""/>
+        <a:font script="Jpan" typeface="游ゴシック"/>
+        <a:font script="Hang" typeface="맑은 고딕"/>
+        <a:font script="Hans" typeface="等线"/>
+        <a:font script="Hant" typeface="新細明體"/>
+        <a:font script="Arab" typeface="Arial"/>
+        <a:font script="Hebr" typeface="Arial"/>
+        <a:font script="Thai" typeface="Cordia New"/>
+        <a:font script="Ethi" typeface="Nyala"/>
+        <a:font script="Beng" typeface="Vrinda"/>
+        <a:font script="Gujr" typeface="Shruti"/>
+        <a:font script="Khmr" typeface="DaunPenh"/>
+        <a:font script="Knda" typeface="Tunga"/>
+        <a:font script="Guru" typeface="Raavi"/>
+        <a:font script="Cans" typeface="Euphemia"/>
+        <a:font script="Cher" typeface="Plantagenet Cherokee"/>
+        <a:font script="Yiii" typeface="Microsoft Yi Baiti"/>
+        <a:font script="Tibt" typeface="Microsoft Himalaya"/>
+        <a:font script="Thaa" typeface="MV Boli"/>
+        <a:font script="Deva" typeface="Mangal"/>
+        <a:font script="Telu" typeface="Gautami"/>
+        <a:font script="Taml" typeface="Latha"/>
+        <a:font script="Syrc" typeface="Estrangelo Edessa"/>
+        <a:font script="Orya" typeface="Kalinga"/>
+        <a:font script="Mlym" typeface="Kartika"/>
+        <a:font script="Laoo" typeface="DokChampa"/>
+        <a:font script="Sinh" typeface="Iskoola Pota"/>
+        <a:font script="Mong" typeface="Mongolian Baiti"/>
+        <a:font script="Viet" typeface="Arial"/>
+        <a:font script="Uigh" typeface="Microsoft Uighur"/>
+        <a:font script="Geor" typeface="Sylfaen"/>
+        <a:font script="Armn" typeface="Arial"/>
+        <a:font script="Bugi" typeface="Leelawadee UI"/>
+        <a:font script="Bopo" typeface="Microsoft JhengHei"/>
+        <a:font script="Java" typeface="Javanese Text"/>
+        <a:font script="Lisu" typeface="Segoe UI"/>
+        <a:font script="Mymr" typeface="Myanmar Text"/>
+        <a:font script="Nkoo" typeface="Ebrima"/>
+        <a:font script="Olck" typeface="Nirmala UI"/>
+        <a:font script="Osma" typeface="Ebrima"/>
+        <a:font script="Phag" typeface="Phagspa"/>
+        <a:font script="Syrn" typeface="Estrangelo Edessa"/>
+        <a:font script="Syrj" typeface="Estrangelo Edessa"/>
+        <a:font script="Syre" typeface="Estrangelo Edessa"/>
+        <a:font script="Sora" typeface="Nirmala UI"/>
+        <a:font script="Tale" typeface="Microsoft Tai Le"/>
+        <a:font script="Talu" typeface="Microsoft New Tai Lue"/>
+        <a:font script="Tfng" typeface="Ebrima"/>
+      </a:minorFont>
+    </a:fontScheme>
+    <a:fmtScheme name="Office">
+      <a:fillStyleLst>
+        <a:solidFill>
+          <a:schemeClr val="phClr"/>
+        </a:solidFill>
+        <a:gradFill rotWithShape="1">
+          <a:gsLst>
+            <a:gs pos="0">
+              <a:schemeClr val="phClr">
+                <a:lumMod val="110000"/>
+                <a:satMod val="105000"/>
+                <a:tint val="67000"/>
+              </a:schemeClr>
+            </a:gs>
+            <a:gs pos="50000">
+              <a:schemeClr val="phClr">
+                <a:lumMod val="105000"/>
+                <a:satMod val="103000"/>
+                <a:tint val="73000"/>
+              </a:schemeClr>
+            </a:gs>
+            <a:gs pos="100000">
+              <a:schemeClr val="phClr">
+                <a:lumMod val="105000"/>
+                <a:satMod val="109000"/>
+                <a:tint val="81000"/>
+              </a:schemeClr>
+            </a:gs>
+          </a:gsLst>
+          <a:lin ang="5400000" scaled="0"/>
+        </a:gradFill>
+        <a:gradFill rotWithShape="1">
+          <a:gsLst>
+            <a:gs pos="0">
+              <a:schemeClr val="phClr">
+                <a:satMod val="103000"/>
+                <a:lumMod val="102000"/>
+                <a:tint val="94000"/>
+              </a:schemeClr>
+            </a:gs>
+            <a:gs pos="50000">
+              <a:schemeClr val="phClr">
+                <a:satMod val="110000"/>
+                <a:lumMod val="100000"/>
+                <a:shade val="100000"/>
+              </a:schemeClr>
+            </a:gs>
+            <a:gs pos="100000">
+              <a:schemeClr val="phClr">
+                <a:lumMod val="99000"/>
+                <a:satMod val="120000"/>
+                <a:shade val="78000"/>
+              </a:schemeClr>
+            </a:gs>
+          </a:gsLst>
+          <a:lin ang="5400000" scaled="0"/>
+        </a:gradFill>
+      </a:fillStyleLst>
+      <a:lnStyleLst>
+        <a:ln w="6350" cap="flat" cmpd="sng" algn="ctr">
+          <a:solidFill>
+            <a:schemeClr val="phClr"/>
+          </a:solidFill>
+          <a:prstDash val="solid"/>
+          <a:miter lim="800000"/>
+        </a:ln>
+        <a:ln w="12700" cap="flat" cmpd="sng" algn="ctr">
+          <a:solidFill>
+            <a:schemeClr val="phClr"/>
+          </a:solidFill>
+          <a:prstDash val="solid"/>
+          <a:miter lim="800000"/>
+        </a:ln>
+        <a:ln w="19050" cap="flat" cmpd="sng" algn="ctr">
+          <a:solidFill>
+            <a:schemeClr val="phClr"/>
+          </a:solidFill>
+          <a:prstDash val="solid"/>
+          <a:miter lim="800000"/>
+        </a:ln>
+      </a:lnStyleLst>
+      <a:effectStyleLst>
+        <a:effectStyle>
+          <a:effectLst/>
+        </a:effectStyle>
+        <a:effectStyle>
+          <a:effectLst/>
+        </a:effectStyle>
+        <a:effectStyle>
+          <a:effectLst>
+            <a:outerShdw blurRad="57150" dist="19050" dir="5400000" algn="ctr" rotWithShape="0">
+              <a:srgbClr val="000000">
+                <a:alpha val="63000"/>
+              </a:srgbClr>
+            </a:outerShdw>
+          </a:effectLst>
+        </a:effectStyle>
+      </a:effectStyleLst>
+      <a:bgFillStyleLst>
+        <a:solidFill>
+          <a:schemeClr val="phClr"/>
+        </a:solidFill>
+        <a:solidFill>
+          <a:schemeClr val="phClr">
+            <a:tint val="95000"/>
+            <a:satMod val="170000"/>
+          </a:schemeClr>
+        </a:solidFill>
+        <a:gradFill rotWithShape="1">
+          <a:gsLst>
+            <a:gs pos="0">
+              <a:schemeClr val="phClr">
+                <a:tint val="93000"/>
+                <a:satMod val="150000"/>
+                <a:shade val="98000"/>
+                <a:lumMod val="102000"/>
+              </a:schemeClr>
+            </a:gs>
+            <a:gs pos="50000">
+              <a:schemeClr val="phClr">
+                <a:tint val="98000"/>
+                <a:satMod val="130000"/>
+                <a:shade val="90000"/>
+                <a:lumMod val="103000"/>
+              </a:schemeClr>
+            </a:gs>
+            <a:gs pos="100000">
+              <a:schemeClr val="phClr">
+                <a:shade val="63000"/>
+                <a:satMod val="120000"/>
+              </a:schemeClr>
+            </a:gs>
+          </a:gsLst>
+          <a:lin ang="5400000" scaled="0"/>
+        </a:gradFill>
+      </a:bgFillStyleLst>
+    </a:fmtScheme>
+  </a:themeElements>
+  <a:objectDefaults/>
+  <a:extraClrSchemeLst/>
+  <a:extLst>
+    <a:ext uri="{05A4C25C-085E-4340-85A3-A5531E510DB2}">
+      <thm15:themeFamily xmlns:thm15="http://schemas.microsoft.com/office/thememl/2012/main" name="Office Theme" id="{62F939B6-93AF-4DB8-9C6B-D6C7DFDC589F}" vid="{4A3C46E8-61CC-4603-A589-7422A47A8E4A}"/>
+    </a:ext>
+  </a:extLst>
+</a:theme>
 </file>
--- a/slices/Olist_Ecommerce_Project_Presentation.pptx
+++ b/slices/Olist_Ecommerce_Project_Presentation.pptx
@@ -703,9 +703,32 @@
             </a:r>
             <a:r>
               <a:rPr lang="en-US" dirty="0"/>
-              <a:t>.</a:t>
-            </a:r>
-            <a:endParaRPr lang="en-US"/>
+              <a:t>. We chose </a:t>
+            </a:r>
+            <a:r>
+              <a:rPr lang="en-US" dirty="0" err="1"/>
+              <a:t>dbt</a:t>
+            </a:r>
+            <a:r>
+              <a:rPr lang="en-US" dirty="0"/>
+              <a:t> because it follows analytics engineering best practices. It separates raw data from transformed business-ready models, makes transformations modular and reusable, provides built-in testing, and automatically documents data lineage. In our project, </a:t>
+            </a:r>
+            <a:r>
+              <a:rPr lang="en-US" dirty="0" err="1"/>
+              <a:t>dbt</a:t>
+            </a:r>
+            <a:r>
+              <a:rPr lang="en-US" dirty="0"/>
+              <a:t> helped us build a maintainable star schema on top of </a:t>
+            </a:r>
+            <a:r>
+              <a:rPr lang="en-US" dirty="0" err="1"/>
+              <a:t>DuckDB</a:t>
+            </a:r>
+            <a:r>
+              <a:rPr lang="en-US" dirty="0"/>
+              <a:t> while ensuring data quality through automated tests.</a:t>
+            </a:r>
           </a:p>
         </p:txBody>
       </p:sp>

--- a/slices/Olist_Ecommerce_Project_Presentation.pptx
+++ b/slices/Olist_Ecommerce_Project_Presentation.pptx
@@ -7835,27 +7835,6 @@
           </a:p>
         </p:txBody>
       </p:sp>
-      <p:sp>
-        <p:nvSpPr>
-          <p:cNvPr id="3" name="Content Placeholder 2"/>
-          <p:cNvSpPr>
-            <a:spLocks noGrp="1"/>
-          </p:cNvSpPr>
-          <p:nvPr>
-            <p:ph idx="1"/>
-          </p:nvPr>
-        </p:nvSpPr>
-        <p:spPr/>
-        <p:txBody>
-          <a:bodyPr/>
-          <a:lstStyle/>
-          <a:p>
-            <a:r>
-              <a:t>Analyze monthly revenue trends using fact_sales.</a:t>
-            </a:r>
-          </a:p>
-        </p:txBody>
-      </p:sp>
       <p:pic>
         <p:nvPicPr>
           <p:cNvPr id="4" name="Picture 3" descr="A line graph with numbers and text&#10;&#10;AI-generated content may be incorrect.">
@@ -7878,14 +7857,115 @@
         </p:blipFill>
         <p:spPr>
           <a:xfrm>
-            <a:off x="1408546" y="3027218"/>
-            <a:ext cx="6322292" cy="3149601"/>
+            <a:off x="775252" y="2609403"/>
+            <a:ext cx="4591878" cy="3444997"/>
           </a:xfrm>
           <a:prstGeom prst="rect">
             <a:avLst/>
           </a:prstGeom>
         </p:spPr>
       </p:pic>
+      <p:sp>
+        <p:nvSpPr>
+          <p:cNvPr id="6" name="Content Placeholder 5">
+            <a:extLst>
+              <a:ext uri="{FF2B5EF4-FFF2-40B4-BE49-F238E27FC236}">
+                <a16:creationId xmlns:a16="http://schemas.microsoft.com/office/drawing/2014/main" id="{8B628FD7-0C98-F0E7-0425-15A456F18162}"/>
+              </a:ext>
+            </a:extLst>
+          </p:cNvPr>
+          <p:cNvSpPr>
+            <a:spLocks noGrp="1"/>
+          </p:cNvSpPr>
+          <p:nvPr>
+            <p:ph idx="1"/>
+          </p:nvPr>
+        </p:nvSpPr>
+        <p:spPr>
+          <a:xfrm>
+            <a:off x="5619654" y="2707237"/>
+            <a:ext cx="2927998" cy="1594846"/>
+          </a:xfrm>
+        </p:spPr>
+        <p:txBody>
+          <a:bodyPr>
+            <a:normAutofit fontScale="85000" lnSpcReduction="20000"/>
+          </a:bodyPr>
+          <a:lstStyle/>
+          <a:p>
+            <a:r>
+              <a:rPr lang="en-US" dirty="0"/>
+              <a:t>Oct 2016: R$354</a:t>
+            </a:r>
+          </a:p>
+          <a:p>
+            <a:r>
+              <a:rPr lang="en-SG" dirty="0"/>
+              <a:t>Feb 2017: </a:t>
+            </a:r>
+            <a:r>
+              <a:rPr lang="en-US" dirty="0"/>
+              <a:t>R$286k</a:t>
+            </a:r>
+          </a:p>
+          <a:p>
+            <a:r>
+              <a:rPr lang="en-US" dirty="0"/>
+              <a:t>Nov 2017: R$1.18M</a:t>
+            </a:r>
+          </a:p>
+          <a:p>
+            <a:r>
+              <a:rPr lang="en-SG" dirty="0" err="1"/>
+              <a:t>Avg</a:t>
+            </a:r>
+            <a:r>
+              <a:rPr lang="en-SG" dirty="0"/>
+              <a:t> MoM: +</a:t>
+            </a:r>
+            <a:r>
+              <a:rPr lang="en-SG" b="1" dirty="0"/>
+              <a:t>8.8%</a:t>
+            </a:r>
+            <a:endParaRPr lang="en-SG" dirty="0"/>
+          </a:p>
+        </p:txBody>
+      </p:sp>
+      <p:sp>
+        <p:nvSpPr>
+          <p:cNvPr id="8" name="TextBox 7">
+            <a:extLst>
+              <a:ext uri="{FF2B5EF4-FFF2-40B4-BE49-F238E27FC236}">
+                <a16:creationId xmlns:a16="http://schemas.microsoft.com/office/drawing/2014/main" id="{0DFC877C-6845-9757-BE3B-6E1B5B96B41D}"/>
+              </a:ext>
+            </a:extLst>
+          </p:cNvPr>
+          <p:cNvSpPr txBox="1"/>
+          <p:nvPr/>
+        </p:nvSpPr>
+        <p:spPr>
+          <a:xfrm>
+            <a:off x="5619654" y="4871964"/>
+            <a:ext cx="2927998" cy="1200329"/>
+          </a:xfrm>
+          <a:prstGeom prst="rect">
+            <a:avLst/>
+          </a:prstGeom>
+          <a:noFill/>
+        </p:spPr>
+        <p:txBody>
+          <a:bodyPr wrap="square">
+            <a:spAutoFit/>
+          </a:bodyPr>
+          <a:lstStyle/>
+          <a:p>
+            <a:r>
+              <a:rPr lang="en-SG" dirty="0"/>
+              <a:t>Data pipeline transforms 9 raw CSVs into a time-series that immediately shows business momentum</a:t>
+            </a:r>
+          </a:p>
+        </p:txBody>
+      </p:sp>
     </p:spTree>
   </p:cSld>
   <p:clrMapOvr>
@@ -7942,14 +8022,38 @@
             <p:ph idx="1"/>
           </p:nvPr>
         </p:nvSpPr>
-        <p:spPr/>
-        <p:txBody>
-          <a:bodyPr/>
-          <a:lstStyle/>
-          <a:p>
-            <a:r>
-              <a:t>Top categories include Beauty &amp; Health, Watches &amp; Gifts, Bed/Bath/Table.</a:t>
-            </a:r>
+        <p:spPr>
+          <a:xfrm>
+            <a:off x="5208103" y="2708796"/>
+            <a:ext cx="3210340" cy="1535213"/>
+          </a:xfrm>
+        </p:spPr>
+        <p:txBody>
+          <a:bodyPr>
+            <a:normAutofit fontScale="85000" lnSpcReduction="20000"/>
+          </a:bodyPr>
+          <a:lstStyle/>
+          <a:p>
+            <a:r>
+              <a:rPr dirty="0"/>
+              <a:t>Top categories </a:t>
+            </a:r>
+            <a:r>
+              <a:rPr lang="en-US" dirty="0"/>
+              <a:t>=</a:t>
+            </a:r>
+            <a:r>
+              <a:rPr dirty="0"/>
+              <a:t> Beauty &amp; Health, Watches &amp; Gifts, Bed/Bath/Table</a:t>
+            </a:r>
+            <a:endParaRPr lang="en-US" dirty="0"/>
+          </a:p>
+          <a:p>
+            <a:r>
+              <a:rPr lang="en-US" dirty="0"/>
+              <a:t>Accounts for R$4M of Revenue (25.2%)</a:t>
+            </a:r>
+            <a:endParaRPr dirty="0"/>
           </a:p>
         </p:txBody>
       </p:sp>
@@ -7975,14 +8079,49 @@
         </p:blipFill>
         <p:spPr>
           <a:xfrm>
-            <a:off x="1343891" y="2976417"/>
-            <a:ext cx="6456219" cy="3228110"/>
+            <a:off x="1065596" y="2639221"/>
+            <a:ext cx="3923846" cy="3523039"/>
           </a:xfrm>
           <a:prstGeom prst="rect">
             <a:avLst/>
           </a:prstGeom>
         </p:spPr>
       </p:pic>
+      <p:sp>
+        <p:nvSpPr>
+          <p:cNvPr id="6" name="TextBox 5">
+            <a:extLst>
+              <a:ext uri="{FF2B5EF4-FFF2-40B4-BE49-F238E27FC236}">
+                <a16:creationId xmlns:a16="http://schemas.microsoft.com/office/drawing/2014/main" id="{5B106185-7DC1-DEAC-B410-9683A2229E34}"/>
+              </a:ext>
+            </a:extLst>
+          </p:cNvPr>
+          <p:cNvSpPr txBox="1"/>
+          <p:nvPr/>
+        </p:nvSpPr>
+        <p:spPr>
+          <a:xfrm>
+            <a:off x="5317433" y="5515929"/>
+            <a:ext cx="3210340" cy="646331"/>
+          </a:xfrm>
+          <a:prstGeom prst="rect">
+            <a:avLst/>
+          </a:prstGeom>
+          <a:noFill/>
+        </p:spPr>
+        <p:txBody>
+          <a:bodyPr wrap="square">
+            <a:spAutoFit/>
+          </a:bodyPr>
+          <a:lstStyle/>
+          <a:p>
+            <a:r>
+              <a:rPr lang="en-US" dirty="0"/>
+              <a:t>Defend top 3 while explore upselling for top 4-5</a:t>
+            </a:r>
+          </a:p>
+        </p:txBody>
+      </p:sp>
     </p:spTree>
   </p:cSld>
   <p:clrMapOvr>
@@ -8045,6 +8184,7 @@
           <a:lstStyle/>
           <a:p>
             <a:r>
+              <a:rPr dirty="0"/>
               <a:t>São Paulo (SP) generated the highest revenue.</a:t>
             </a:r>
           </a:p>
@@ -8072,7 +8212,7 @@
         </p:blipFill>
         <p:spPr>
           <a:xfrm>
-            <a:off x="3008573" y="2977423"/>
+            <a:off x="1656852" y="2977423"/>
             <a:ext cx="3136359" cy="3284204"/>
           </a:xfrm>
           <a:prstGeom prst="rect">
@@ -8080,6 +8220,327 @@
           </a:prstGeom>
         </p:spPr>
       </p:pic>
+      <p:sp>
+        <p:nvSpPr>
+          <p:cNvPr id="5" name="Content Placeholder 2">
+            <a:extLst>
+              <a:ext uri="{FF2B5EF4-FFF2-40B4-BE49-F238E27FC236}">
+                <a16:creationId xmlns:a16="http://schemas.microsoft.com/office/drawing/2014/main" id="{0008D070-6D63-FC93-57EF-68B39D06591A}"/>
+              </a:ext>
+            </a:extLst>
+          </p:cNvPr>
+          <p:cNvSpPr txBox="1">
+            <a:spLocks/>
+          </p:cNvSpPr>
+          <p:nvPr/>
+        </p:nvSpPr>
+        <p:spPr>
+          <a:xfrm>
+            <a:off x="4949686" y="3175054"/>
+            <a:ext cx="3136360" cy="1922568"/>
+          </a:xfrm>
+          <a:prstGeom prst="rect">
+            <a:avLst/>
+          </a:prstGeom>
+        </p:spPr>
+        <p:txBody>
+          <a:bodyPr vert="horz" lIns="91440" tIns="45720" rIns="91440" bIns="45720" rtlCol="0" anchor="t">
+            <a:normAutofit fontScale="70000" lnSpcReduction="20000"/>
+          </a:bodyPr>
+          <a:lstStyle>
+            <a:lvl1pPr marL="285750" indent="-285750" algn="l" defTabSz="457200" rtl="0" eaLnBrk="1" latinLnBrk="0" hangingPunct="1">
+              <a:spcBef>
+                <a:spcPct val="20000"/>
+              </a:spcBef>
+              <a:spcAft>
+                <a:spcPts val="600"/>
+              </a:spcAft>
+              <a:buClr>
+                <a:schemeClr val="accent1"/>
+              </a:buClr>
+              <a:buSzPct val="115000"/>
+              <a:buFont typeface="Arial"/>
+              <a:buChar char="•"/>
+              <a:defRPr sz="2400" kern="1200" cap="none">
+                <a:solidFill>
+                  <a:schemeClr val="tx1">
+                    <a:lumMod val="85000"/>
+                    <a:lumOff val="15000"/>
+                  </a:schemeClr>
+                </a:solidFill>
+                <a:effectLst/>
+                <a:latin typeface="+mn-lt"/>
+                <a:ea typeface="+mn-ea"/>
+                <a:cs typeface="+mn-cs"/>
+              </a:defRPr>
+            </a:lvl1pPr>
+            <a:lvl2pPr marL="742950" indent="-285750" algn="l" defTabSz="457200" rtl="0" eaLnBrk="1" latinLnBrk="0" hangingPunct="1">
+              <a:spcBef>
+                <a:spcPct val="20000"/>
+              </a:spcBef>
+              <a:spcAft>
+                <a:spcPts val="600"/>
+              </a:spcAft>
+              <a:buClr>
+                <a:schemeClr val="accent1"/>
+              </a:buClr>
+              <a:buSzPct val="115000"/>
+              <a:buFont typeface="Arial"/>
+              <a:buChar char="•"/>
+              <a:defRPr sz="2000" kern="1200" cap="none">
+                <a:solidFill>
+                  <a:schemeClr val="tx1">
+                    <a:lumMod val="85000"/>
+                    <a:lumOff val="15000"/>
+                  </a:schemeClr>
+                </a:solidFill>
+                <a:effectLst/>
+                <a:latin typeface="+mn-lt"/>
+                <a:ea typeface="+mn-ea"/>
+                <a:cs typeface="+mn-cs"/>
+              </a:defRPr>
+            </a:lvl2pPr>
+            <a:lvl3pPr marL="1200150" indent="-285750" algn="l" defTabSz="457200" rtl="0" eaLnBrk="1" latinLnBrk="0" hangingPunct="1">
+              <a:spcBef>
+                <a:spcPct val="20000"/>
+              </a:spcBef>
+              <a:spcAft>
+                <a:spcPts val="600"/>
+              </a:spcAft>
+              <a:buClr>
+                <a:schemeClr val="accent1"/>
+              </a:buClr>
+              <a:buSzPct val="115000"/>
+              <a:buFont typeface="Arial"/>
+              <a:buChar char="•"/>
+              <a:defRPr sz="1800" kern="1200" cap="none">
+                <a:solidFill>
+                  <a:schemeClr val="tx1">
+                    <a:lumMod val="85000"/>
+                    <a:lumOff val="15000"/>
+                  </a:schemeClr>
+                </a:solidFill>
+                <a:effectLst/>
+                <a:latin typeface="+mn-lt"/>
+                <a:ea typeface="+mn-ea"/>
+                <a:cs typeface="+mn-cs"/>
+              </a:defRPr>
+            </a:lvl3pPr>
+            <a:lvl4pPr marL="1543050" indent="-171450" algn="l" defTabSz="457200" rtl="0" eaLnBrk="1" latinLnBrk="0" hangingPunct="1">
+              <a:spcBef>
+                <a:spcPct val="20000"/>
+              </a:spcBef>
+              <a:spcAft>
+                <a:spcPts val="600"/>
+              </a:spcAft>
+              <a:buClr>
+                <a:schemeClr val="accent1"/>
+              </a:buClr>
+              <a:buSzPct val="115000"/>
+              <a:buFont typeface="Arial"/>
+              <a:buChar char="•"/>
+              <a:defRPr sz="1600" kern="1200" cap="none">
+                <a:solidFill>
+                  <a:schemeClr val="tx1">
+                    <a:lumMod val="85000"/>
+                    <a:lumOff val="15000"/>
+                  </a:schemeClr>
+                </a:solidFill>
+                <a:effectLst/>
+                <a:latin typeface="+mn-lt"/>
+                <a:ea typeface="+mn-ea"/>
+                <a:cs typeface="+mn-cs"/>
+              </a:defRPr>
+            </a:lvl4pPr>
+            <a:lvl5pPr marL="2000250" indent="-171450" algn="l" defTabSz="457200" rtl="0" eaLnBrk="1" latinLnBrk="0" hangingPunct="1">
+              <a:spcBef>
+                <a:spcPct val="20000"/>
+              </a:spcBef>
+              <a:spcAft>
+                <a:spcPts val="600"/>
+              </a:spcAft>
+              <a:buClr>
+                <a:schemeClr val="accent1"/>
+              </a:buClr>
+              <a:buSzPct val="115000"/>
+              <a:buFont typeface="Arial"/>
+              <a:buChar char="•"/>
+              <a:defRPr sz="1400" kern="1200" cap="none">
+                <a:solidFill>
+                  <a:schemeClr val="tx1">
+                    <a:lumMod val="85000"/>
+                    <a:lumOff val="15000"/>
+                  </a:schemeClr>
+                </a:solidFill>
+                <a:effectLst/>
+                <a:latin typeface="+mn-lt"/>
+                <a:ea typeface="+mn-ea"/>
+                <a:cs typeface="+mn-cs"/>
+              </a:defRPr>
+            </a:lvl5pPr>
+            <a:lvl6pPr marL="2514600" indent="-228600" algn="l" defTabSz="457200" rtl="0" eaLnBrk="1" latinLnBrk="0" hangingPunct="1">
+              <a:spcBef>
+                <a:spcPct val="20000"/>
+              </a:spcBef>
+              <a:spcAft>
+                <a:spcPts val="600"/>
+              </a:spcAft>
+              <a:buClr>
+                <a:schemeClr val="accent1"/>
+              </a:buClr>
+              <a:buSzPct val="115000"/>
+              <a:buFont typeface="Arial"/>
+              <a:buChar char="•"/>
+              <a:defRPr sz="1400" kern="1200" cap="none">
+                <a:solidFill>
+                  <a:schemeClr val="tx1">
+                    <a:lumMod val="85000"/>
+                    <a:lumOff val="15000"/>
+                  </a:schemeClr>
+                </a:solidFill>
+                <a:effectLst/>
+                <a:latin typeface="+mn-lt"/>
+                <a:ea typeface="+mn-ea"/>
+                <a:cs typeface="+mn-cs"/>
+              </a:defRPr>
+            </a:lvl6pPr>
+            <a:lvl7pPr marL="2971800" indent="-228600" algn="l" defTabSz="457200" rtl="0" eaLnBrk="1" latinLnBrk="0" hangingPunct="1">
+              <a:spcBef>
+                <a:spcPct val="20000"/>
+              </a:spcBef>
+              <a:spcAft>
+                <a:spcPts val="600"/>
+              </a:spcAft>
+              <a:buClr>
+                <a:schemeClr val="accent1"/>
+              </a:buClr>
+              <a:buSzPct val="115000"/>
+              <a:buFont typeface="Arial"/>
+              <a:buChar char="•"/>
+              <a:defRPr sz="1400" kern="1200" cap="none">
+                <a:solidFill>
+                  <a:schemeClr val="tx1">
+                    <a:lumMod val="85000"/>
+                    <a:lumOff val="15000"/>
+                  </a:schemeClr>
+                </a:solidFill>
+                <a:effectLst/>
+                <a:latin typeface="+mn-lt"/>
+                <a:ea typeface="+mn-ea"/>
+                <a:cs typeface="+mn-cs"/>
+              </a:defRPr>
+            </a:lvl7pPr>
+            <a:lvl8pPr marL="3429000" indent="-228600" algn="l" defTabSz="457200" rtl="0" eaLnBrk="1" latinLnBrk="0" hangingPunct="1">
+              <a:spcBef>
+                <a:spcPct val="20000"/>
+              </a:spcBef>
+              <a:spcAft>
+                <a:spcPts val="600"/>
+              </a:spcAft>
+              <a:buClr>
+                <a:schemeClr val="accent1"/>
+              </a:buClr>
+              <a:buSzPct val="115000"/>
+              <a:buFont typeface="Arial"/>
+              <a:buChar char="•"/>
+              <a:defRPr sz="1400" kern="1200" cap="none">
+                <a:solidFill>
+                  <a:schemeClr val="tx1">
+                    <a:lumMod val="85000"/>
+                    <a:lumOff val="15000"/>
+                  </a:schemeClr>
+                </a:solidFill>
+                <a:effectLst/>
+                <a:latin typeface="+mn-lt"/>
+                <a:ea typeface="+mn-ea"/>
+                <a:cs typeface="+mn-cs"/>
+              </a:defRPr>
+            </a:lvl8pPr>
+            <a:lvl9pPr marL="3886200" indent="-228600" algn="l" defTabSz="457200" rtl="0" eaLnBrk="1" latinLnBrk="0" hangingPunct="1">
+              <a:spcBef>
+                <a:spcPct val="20000"/>
+              </a:spcBef>
+              <a:spcAft>
+                <a:spcPts val="600"/>
+              </a:spcAft>
+              <a:buClr>
+                <a:schemeClr val="accent1"/>
+              </a:buClr>
+              <a:buSzPct val="115000"/>
+              <a:buFont typeface="Arial"/>
+              <a:buChar char="•"/>
+              <a:defRPr sz="1400" kern="1200" cap="none">
+                <a:solidFill>
+                  <a:schemeClr val="tx1">
+                    <a:lumMod val="85000"/>
+                    <a:lumOff val="15000"/>
+                  </a:schemeClr>
+                </a:solidFill>
+                <a:effectLst/>
+                <a:latin typeface="+mn-lt"/>
+                <a:ea typeface="+mn-ea"/>
+                <a:cs typeface="+mn-cs"/>
+              </a:defRPr>
+            </a:lvl9pPr>
+          </a:lstStyle>
+          <a:p>
+            <a:r>
+              <a:rPr lang="en-US" dirty="0"/>
+              <a:t>Sao Paulo is 3x the next state (R$5.9M)</a:t>
+            </a:r>
+          </a:p>
+          <a:p>
+            <a:r>
+              <a:rPr lang="en-US" dirty="0"/>
+              <a:t>Retention for top 3 (SP, RJ, MG)</a:t>
+            </a:r>
+          </a:p>
+          <a:p>
+            <a:r>
+              <a:rPr lang="en-US" dirty="0"/>
+              <a:t>Acquisition for RS &amp; PR (most developed but low market penetration)</a:t>
+            </a:r>
+          </a:p>
+          <a:p>
+            <a:endParaRPr lang="en-US" dirty="0"/>
+          </a:p>
+        </p:txBody>
+      </p:sp>
+      <p:sp>
+        <p:nvSpPr>
+          <p:cNvPr id="7" name="TextBox 6">
+            <a:extLst>
+              <a:ext uri="{FF2B5EF4-FFF2-40B4-BE49-F238E27FC236}">
+                <a16:creationId xmlns:a16="http://schemas.microsoft.com/office/drawing/2014/main" id="{D7637E78-7B56-D3C3-B4C5-7549E973E049}"/>
+              </a:ext>
+            </a:extLst>
+          </p:cNvPr>
+          <p:cNvSpPr txBox="1"/>
+          <p:nvPr/>
+        </p:nvSpPr>
+        <p:spPr>
+          <a:xfrm>
+            <a:off x="4989828" y="5097622"/>
+            <a:ext cx="3399183" cy="1200329"/>
+          </a:xfrm>
+          <a:prstGeom prst="rect">
+            <a:avLst/>
+          </a:prstGeom>
+          <a:noFill/>
+        </p:spPr>
+        <p:txBody>
+          <a:bodyPr wrap="square">
+            <a:spAutoFit/>
+          </a:bodyPr>
+          <a:lstStyle/>
+          <a:p>
+            <a:r>
+              <a:rPr lang="en-SG" dirty="0"/>
+              <a:t>Revenue is geographically concentrated in Southeast Brazil. Consolidate and accelerate in South BR further</a:t>
+            </a:r>
+          </a:p>
+        </p:txBody>
+      </p:sp>
     </p:spTree>
   </p:cSld>
   <p:clrMapOvr>

--- a/slices/Olist_Ecommerce_Project_Presentation.pptx
+++ b/slices/Olist_Ecommerce_Project_Presentation.pptx
@@ -146,6 +146,7 @@
     <p1510:client id="{240DB585-72E7-41C7-B8B4-31166C77D257}" v="6" dt="2026-06-08T08:41:20.233"/>
     <p1510:client id="{A0EE111F-F56D-490A-9982-3577EAE95C08}" v="386" dt="2026-06-08T13:19:51.878"/>
     <p1510:client id="{D8EE50BA-8E0A-40EF-8C58-402B5C6725EB}" v="293" dt="2026-06-09T01:29:14.204"/>
+    <p1510:client id="{F492816E-2B29-46D8-B3B8-5ABAF1A79A35}" v="1" dt="2026-06-09T12:02:42.006"/>
   </p1510:revLst>
 </p1510:revInfo>
 </file>
@@ -231,7 +232,7 @@
           </a:lstStyle>
           <a:p>
             <a:fld id="{8DE1E0FE-415D-4A86-A5CB-56FB2301993F}" type="datetimeFigureOut">
-              <a:t>6/8/2026</a:t>
+              <a:t>6/9/2026</a:t>
             </a:fld>
             <a:endParaRPr lang="en-US"/>
           </a:p>
@@ -543,7 +544,7 @@
           <a:p>
             <a:r>
               <a:rPr lang="en-US" dirty="0"/>
-              <a:t>Huang Wei: Our project analyzes the Brazilian E-Commerce Public Dataset by </a:t>
+              <a:t>Pilo: Problem Statement &amp; Dataset: </a:t>
             </a:r>
             <a:r>
               <a:rPr lang="en-US" dirty="0" err="1"/>
@@ -551,6 +552,14 @@
             </a:r>
             <a:r>
               <a:rPr lang="en-US" dirty="0"/>
+              <a:t> is a Brazilian marketplace connecting sellers to customers across multiple channels. 9 source CSV files: orders, customers, products, sellers, order items, payments, reviews, geolocation. Business questions: how is revenue trending, which products perform best, who are the most valuable customers? Our project analyzes the Brazilian E-Commerce Public Dataset by </a:t>
+            </a:r>
+            <a:r>
+              <a:rPr lang="en-US" dirty="0" err="1"/>
+              <a:t>Olist</a:t>
+            </a:r>
+            <a:r>
+              <a:rPr lang="en-US" dirty="0"/>
               <a:t>. The goal was to build an end-to-end analytics workflow: load raw data into </a:t>
             </a:r>
             <a:r>
@@ -577,6 +586,10 @@
               <a:rPr lang="en-US" dirty="0"/>
               <a:t> tests, and then perform business analysis and visualization with Python and Pandas.</a:t>
             </a:r>
+            <a:endParaRPr lang="en-US">
+              <a:ea typeface="Calibri"/>
+              <a:cs typeface="Calibri"/>
+            </a:endParaRPr>
           </a:p>
         </p:txBody>
       </p:sp>
@@ -660,6 +673,13 @@
           <a:bodyPr/>
           <a:lstStyle/>
           <a:p>
+            <a:r>
+              <a:rPr lang="en-US">
+                <a:ea typeface="Calibri"/>
+                <a:cs typeface="Calibri"/>
+              </a:rPr>
+              <a:t>Jacky: </a:t>
+            </a:r>
             <a:endParaRPr lang="en-US" dirty="0"/>
           </a:p>
         </p:txBody>
@@ -746,7 +766,7 @@
           <a:p>
             <a:r>
               <a:rPr lang="en-US" dirty="0"/>
-              <a:t>This chart shows monthly revenue over time. Revenue generally increased during 2017 and 2018, indicating significant growth in the platform during the observed period. The trend also shows seasonal fluctuations, which are common in e-commerce businesses.</a:t>
+              <a:t>Sean: This chart shows monthly revenue over time. Revenue generally increased during 2017 and 2018, indicating significant growth in the platform during the observed period. The trend also shows seasonal fluctuations, which are common in e-commerce businesses.</a:t>
             </a:r>
           </a:p>
         </p:txBody>
@@ -833,7 +853,7 @@
           <a:p>
             <a:r>
               <a:rPr lang="en-US"/>
-              <a:t>The highest-revenue product categories were Beauty &amp; Health, Watches &amp; Gifts, and Bed, Bath &amp; Table. These categories contributed a large share of total revenue and could be prioritized for marketing and inventory planning.</a:t>
+              <a:t>Sean: The highest-revenue product categories were Beauty &amp; Health, Watches &amp; Gifts, and Bed, Bath &amp; Table. These categories contributed a large share of total revenue and could be prioritized for marketing and inventory planning.</a:t>
             </a:r>
           </a:p>
         </p:txBody>
@@ -920,7 +940,7 @@
           <a:p>
             <a:r>
               <a:rPr lang="en-US"/>
-              <a:t>Revenue was heavily concentrated in São Paulo (SP), followed by Rio de Janeiro and Minas Gerais. This suggests that customer demand is strongest in Brazil’s largest economic regions.</a:t>
+              <a:t>Sean: Revenue was heavily concentrated in São Paulo (SP), followed by Rio de Janeiro and Minas Gerais. This suggests that customer demand is strongest in Brazil’s largest economic regions.</a:t>
             </a:r>
           </a:p>
         </p:txBody>
@@ -1006,8 +1026,12 @@
           <a:lstStyle/>
           <a:p>
             <a:r>
+              <a:rPr lang="en-US"/>
+              <a:t>Annie: For</a:t>
+            </a:r>
+            <a:r>
               <a:rPr lang="en-US" dirty="0"/>
-              <a:t>For customer analysis, We calculated Recency, Frequency, and Monetary value using the customer’s unique identifier. The results show that some customers placed many repeat orders, indicating a segment of loyal, high-value customers that could be targeted for retention programs.</a:t>
+              <a:t> customer analysis, We calculated Recency, Frequency, and Monetary value using the customer’s unique identifier. The results show that some customers placed many repeat orders, indicating a segment of loyal, high-value customers that could be targeted for retention programs.</a:t>
             </a:r>
           </a:p>
         </p:txBody>
@@ -1094,7 +1118,7 @@
           <a:p>
             <a:r>
               <a:rPr lang="en-US" dirty="0"/>
-              <a:t>In summary, this project demonstrates an end-to-end analytics engineering workflow using </a:t>
+              <a:t>Michelle: In summary, this project demonstrates an end-to-end analytics engineering workflow using </a:t>
             </a:r>
             <a:r>
               <a:rPr lang="en-US" dirty="0" err="1"/>
@@ -1355,7 +1379,7 @@
           <a:p>
             <a:r>
               <a:rPr lang="en-US" dirty="0"/>
-              <a:t>The warehouse uses a star schema. The central fact table is </a:t>
+              <a:t>Dick: The warehouse uses a star schema. The central fact table is </a:t>
             </a:r>
             <a:r>
               <a:rPr lang="en-US" dirty="0" err="1"/>
@@ -1490,7 +1514,11 @@
               <a:defRPr/>
             </a:pPr>
             <a:r>
-              <a:rPr lang="en-US" sz="1200" i="1" kern="1200" dirty="0">
+              <a:rPr lang="en-US" i="1" dirty="0" err="1"/>
+              <a:t>Jacky</a:t>
+            </a:r>
+            <a:r>
+              <a:rPr lang="en-US" sz="1200" i="1" kern="1200" dirty="0" err="1">
                 <a:solidFill>
                   <a:schemeClr val="tx1"/>
                 </a:solidFill>
@@ -1499,7 +1527,19 @@
                 <a:ea typeface="+mn-ea"/>
                 <a:cs typeface="+mn-cs"/>
               </a:rPr>
-              <a:t>“My part of the project covers the data quality. The goal was to make sure the data feeding our dashboards and analysis is actually trustworthy — that primary keys are clean, relationships hold, and business rules like valid sales amounts are enforced. We will go through the two-layer approach used and what each layer catches.”</a:t>
+              <a:t>“My</a:t>
+            </a:r>
+            <a:r>
+              <a:rPr lang="en-US" sz="1200" i="1" kern="1200" dirty="0">
+                <a:solidFill>
+                  <a:schemeClr val="tx1"/>
+                </a:solidFill>
+                <a:effectLst/>
+                <a:latin typeface="+mn-lt"/>
+                <a:ea typeface="+mn-ea"/>
+                <a:cs typeface="+mn-cs"/>
+              </a:rPr>
+              <a:t> part of the project covers the data quality. The goal was to make sure the data feeding our dashboards and analysis is actually trustworthy — that primary keys are clean, relationships hold, and business rules like valid sales amounts are enforced. We will go through the two-layer approach used and what each layer catches.”</a:t>
             </a:r>
             <a:endParaRPr lang="en-US" sz="1200" kern="1200" dirty="0">
               <a:solidFill>
@@ -1596,6 +1636,13 @@
           <a:bodyPr/>
           <a:lstStyle/>
           <a:p>
+            <a:r>
+              <a:rPr lang="en-US">
+                <a:ea typeface="Calibri"/>
+                <a:cs typeface="Calibri"/>
+              </a:rPr>
+              <a:t>Jacky:</a:t>
+            </a:r>
             <a:endParaRPr lang="en-US" dirty="0"/>
           </a:p>
         </p:txBody>
@@ -1680,23 +1727,13 @@
           <a:bodyPr/>
           <a:lstStyle/>
           <a:p>
-            <a:pPr marL="0" marR="0" lvl="0" indent="0" algn="l" defTabSz="914400" rtl="0" eaLnBrk="1" fontAlgn="auto" latinLnBrk="0" hangingPunct="1">
-              <a:lnSpc>
-                <a:spcPct val="100000"/>
-              </a:lnSpc>
-              <a:spcBef>
-                <a:spcPts val="0"/>
-              </a:spcBef>
-              <a:spcAft>
-                <a:spcPts val="0"/>
-              </a:spcAft>
-              <a:buClrTx/>
-              <a:buSzTx/>
-              <a:buFontTx/>
-              <a:buNone/>
-              <a:tabLst/>
+            <a:pPr>
               <a:defRPr/>
             </a:pPr>
+            <a:r>
+              <a:rPr lang="en-US" i="1" dirty="0"/>
+              <a:t>Jacky: “</a:t>
+            </a:r>
             <a:r>
               <a:rPr lang="en-US" sz="1200" i="1" kern="1200" dirty="0">
                 <a:solidFill>
@@ -1707,7 +1744,7 @@
                 <a:ea typeface="+mn-ea"/>
                 <a:cs typeface="+mn-cs"/>
               </a:rPr>
-              <a:t>“The first layer uses </a:t>
+              <a:t>The first layer uses </a:t>
             </a:r>
             <a:r>
               <a:rPr lang="en-US" sz="1200" i="1" kern="1200" dirty="0" err="1">
@@ -1755,7 +1792,31 @@
                 <a:ea typeface="+mn-ea"/>
                 <a:cs typeface="+mn-cs"/>
               </a:rPr>
-              <a:t> — applied to the primary keys of all three dimension tables and the fact table. In total, 7 tests, and all 7 passed.”</a:t>
+              <a:t> — applied to the primary keys of all </a:t>
+            </a:r>
+            <a:r>
+              <a:rPr lang="en-US" sz="1200" i="1" kern="1200" dirty="0" err="1">
+                <a:solidFill>
+                  <a:schemeClr val="tx1"/>
+                </a:solidFill>
+                <a:effectLst/>
+                <a:latin typeface="+mn-lt"/>
+                <a:ea typeface="+mn-ea"/>
+                <a:cs typeface="+mn-cs"/>
+              </a:rPr>
+              <a:t>three dimension</a:t>
+            </a:r>
+            <a:r>
+              <a:rPr lang="en-US" sz="1200" i="1" kern="1200" dirty="0">
+                <a:solidFill>
+                  <a:schemeClr val="tx1"/>
+                </a:solidFill>
+                <a:effectLst/>
+                <a:latin typeface="+mn-lt"/>
+                <a:ea typeface="+mn-ea"/>
+                <a:cs typeface="+mn-cs"/>
+              </a:rPr>
+              <a:t> tables and the fact table. In total, 7 tests, and all 7 passed.”</a:t>
             </a:r>
             <a:endParaRPr lang="en-US" sz="1200" kern="1200" dirty="0">
               <a:solidFill>
@@ -1852,23 +1913,13 @@
           <a:bodyPr/>
           <a:lstStyle/>
           <a:p>
-            <a:pPr marL="0" marR="0" lvl="0" indent="0" algn="l" defTabSz="914400" rtl="0" eaLnBrk="1" fontAlgn="auto" latinLnBrk="0" hangingPunct="1">
-              <a:lnSpc>
-                <a:spcPct val="100000"/>
-              </a:lnSpc>
-              <a:spcBef>
-                <a:spcPts val="0"/>
-              </a:spcBef>
-              <a:spcAft>
-                <a:spcPts val="0"/>
-              </a:spcAft>
-              <a:buClrTx/>
-              <a:buSzTx/>
-              <a:buFontTx/>
-              <a:buNone/>
-              <a:tabLst/>
+            <a:pPr>
               <a:defRPr/>
             </a:pPr>
+            <a:r>
+              <a:rPr lang="en-US" i="1" dirty="0"/>
+              <a:t>Jacky: “</a:t>
+            </a:r>
             <a:r>
               <a:rPr lang="en-US" sz="1200" i="1" kern="1200" dirty="0">
                 <a:solidFill>
@@ -1879,7 +1930,7 @@
                 <a:ea typeface="+mn-ea"/>
                 <a:cs typeface="+mn-cs"/>
               </a:rPr>
-              <a:t>“The second layer goes beyond structure.  Here a Python script called data_quality.py runs four additional SQL checks directly against </a:t>
+              <a:t>The second layer goes beyond structure.  Here a Python script called data_quality.py runs four additional SQL checks directly against </a:t>
             </a:r>
             <a:r>
               <a:rPr lang="en-US" sz="1200" i="1" kern="1200" dirty="0" err="1">
@@ -2024,23 +2075,13 @@
           <a:bodyPr/>
           <a:lstStyle/>
           <a:p>
-            <a:pPr marL="0" marR="0" lvl="0" indent="0" algn="l" defTabSz="914400" rtl="0" eaLnBrk="1" fontAlgn="auto" latinLnBrk="0" hangingPunct="1">
-              <a:lnSpc>
-                <a:spcPct val="100000"/>
-              </a:lnSpc>
-              <a:spcBef>
-                <a:spcPts val="0"/>
-              </a:spcBef>
-              <a:spcAft>
-                <a:spcPts val="0"/>
-              </a:spcAft>
-              <a:buClrTx/>
-              <a:buSzTx/>
-              <a:buFontTx/>
-              <a:buNone/>
-              <a:tabLst/>
+            <a:pPr>
               <a:defRPr/>
             </a:pPr>
+            <a:r>
+              <a:rPr lang="en-US" dirty="0"/>
+              <a:t>Jacky: The</a:t>
+            </a:r>
             <a:r>
               <a:rPr lang="en-US" sz="1200" kern="1200" dirty="0">
                 <a:solidFill>
@@ -2051,31 +2092,7 @@
                 <a:ea typeface="+mn-ea"/>
                 <a:cs typeface="+mn-cs"/>
               </a:rPr>
-              <a:t>The script stores each check’s name and SQL in a </a:t>
-            </a:r>
-            <a:r>
-              <a:rPr lang="en-US" sz="1200" kern="1200">
-                <a:solidFill>
-                  <a:schemeClr val="tx1"/>
-                </a:solidFill>
-                <a:effectLst/>
-                <a:latin typeface="+mn-lt"/>
-                <a:ea typeface="+mn-ea"/>
-                <a:cs typeface="+mn-cs"/>
-              </a:rPr>
-              <a:t>Python dictionary, </a:t>
-            </a:r>
-            <a:r>
-              <a:rPr lang="en-US" sz="1200" kern="1200" dirty="0">
-                <a:solidFill>
-                  <a:schemeClr val="tx1"/>
-                </a:solidFill>
-                <a:effectLst/>
-                <a:latin typeface="+mn-lt"/>
-                <a:ea typeface="+mn-ea"/>
-                <a:cs typeface="+mn-cs"/>
-              </a:rPr>
-              <a:t>then loops through them — running each query against </a:t>
+              <a:t> script stores each check’s name and SQL in a Python dictionary, then loops through them — running each query against </a:t>
             </a:r>
             <a:r>
               <a:rPr lang="en-US" sz="1200" kern="1200" dirty="0" err="1">
@@ -2187,23 +2204,13 @@
           <a:bodyPr/>
           <a:lstStyle/>
           <a:p>
-            <a:pPr marL="0" marR="0" lvl="0" indent="0" algn="l" defTabSz="914400" rtl="0" eaLnBrk="1" fontAlgn="auto" latinLnBrk="0" hangingPunct="1">
-              <a:lnSpc>
-                <a:spcPct val="100000"/>
-              </a:lnSpc>
-              <a:spcBef>
-                <a:spcPts val="0"/>
-              </a:spcBef>
-              <a:spcAft>
-                <a:spcPts val="0"/>
-              </a:spcAft>
-              <a:buClrTx/>
-              <a:buSzTx/>
-              <a:buFontTx/>
-              <a:buNone/>
-              <a:tabLst/>
+            <a:pPr>
               <a:defRPr/>
             </a:pPr>
+            <a:r>
+              <a:rPr lang="en-US" i="1" dirty="0"/>
+              <a:t>Jacky: </a:t>
+            </a:r>
             <a:r>
               <a:rPr lang="en-US" sz="1200" i="1" kern="1200" dirty="0">
                 <a:solidFill>
@@ -2671,7 +2678,7 @@
             <a:fld id="{B61BEF0D-F0BB-DE4B-95CE-6DB70DBA9567}" type="datetimeFigureOut">
               <a:rPr lang="en-US" dirty="0"/>
               <a:pPr/>
-              <a:t>6/8/2026</a:t>
+              <a:t>6/9/2026</a:t>
             </a:fld>
             <a:endParaRPr lang="en-US" dirty="0"/>
           </a:p>
@@ -2934,7 +2941,7 @@
             <a:fld id="{B61BEF0D-F0BB-DE4B-95CE-6DB70DBA9567}" type="datetimeFigureOut">
               <a:rPr lang="en-US" dirty="0"/>
               <a:pPr/>
-              <a:t>6/8/2026</a:t>
+              <a:t>6/9/2026</a:t>
             </a:fld>
             <a:endParaRPr lang="en-US" dirty="0"/>
           </a:p>
@@ -3185,7 +3192,7 @@
             <a:fld id="{B61BEF0D-F0BB-DE4B-95CE-6DB70DBA9567}" type="datetimeFigureOut">
               <a:rPr lang="en-US" dirty="0"/>
               <a:pPr/>
-              <a:t>6/8/2026</a:t>
+              <a:t>6/9/2026</a:t>
             </a:fld>
             <a:endParaRPr lang="en-US" dirty="0"/>
           </a:p>
@@ -3494,7 +3501,7 @@
             <a:fld id="{B61BEF0D-F0BB-DE4B-95CE-6DB70DBA9567}" type="datetimeFigureOut">
               <a:rPr lang="en-US" dirty="0"/>
               <a:pPr/>
-              <a:t>6/8/2026</a:t>
+              <a:t>6/9/2026</a:t>
             </a:fld>
             <a:endParaRPr lang="en-US" dirty="0"/>
           </a:p>
@@ -3813,7 +3820,7 @@
             <a:fld id="{B61BEF0D-F0BB-DE4B-95CE-6DB70DBA9567}" type="datetimeFigureOut">
               <a:rPr lang="en-US" dirty="0"/>
               <a:pPr/>
-              <a:t>6/8/2026</a:t>
+              <a:t>6/9/2026</a:t>
             </a:fld>
             <a:endParaRPr lang="en-US" dirty="0"/>
           </a:p>
@@ -4116,7 +4123,7 @@
             <a:fld id="{B61BEF0D-F0BB-DE4B-95CE-6DB70DBA9567}" type="datetimeFigureOut">
               <a:rPr lang="en-US" dirty="0"/>
               <a:pPr/>
-              <a:t>6/8/2026</a:t>
+              <a:t>6/9/2026</a:t>
             </a:fld>
             <a:endParaRPr lang="en-US" dirty="0"/>
           </a:p>
@@ -4484,7 +4491,7 @@
             <a:fld id="{B61BEF0D-F0BB-DE4B-95CE-6DB70DBA9567}" type="datetimeFigureOut">
               <a:rPr lang="en-US" dirty="0"/>
               <a:pPr/>
-              <a:t>6/8/2026</a:t>
+              <a:t>6/9/2026</a:t>
             </a:fld>
             <a:endParaRPr lang="en-US" dirty="0"/>
           </a:p>
@@ -4670,7 +4677,7 @@
             <a:fld id="{B61BEF0D-F0BB-DE4B-95CE-6DB70DBA9567}" type="datetimeFigureOut">
               <a:rPr lang="en-US" dirty="0"/>
               <a:pPr/>
-              <a:t>6/8/2026</a:t>
+              <a:t>6/9/2026</a:t>
             </a:fld>
             <a:endParaRPr lang="en-US" dirty="0"/>
           </a:p>
@@ -4856,7 +4863,7 @@
             <a:fld id="{B61BEF0D-F0BB-DE4B-95CE-6DB70DBA9567}" type="datetimeFigureOut">
               <a:rPr lang="en-US" dirty="0"/>
               <a:pPr/>
-              <a:t>6/8/2026</a:t>
+              <a:t>6/9/2026</a:t>
             </a:fld>
             <a:endParaRPr lang="en-US" dirty="0"/>
           </a:p>
@@ -5071,7 +5078,7 @@
             <a:fld id="{B61BEF0D-F0BB-DE4B-95CE-6DB70DBA9567}" type="datetimeFigureOut">
               <a:rPr lang="en-US" dirty="0"/>
               <a:pPr/>
-              <a:t>6/8/2026</a:t>
+              <a:t>6/9/2026</a:t>
             </a:fld>
             <a:endParaRPr lang="en-US" dirty="0"/>
           </a:p>
@@ -5322,7 +5329,7 @@
             <a:fld id="{B61BEF0D-F0BB-DE4B-95CE-6DB70DBA9567}" type="datetimeFigureOut">
               <a:rPr lang="en-US" dirty="0"/>
               <a:pPr/>
-              <a:t>6/8/2026</a:t>
+              <a:t>6/9/2026</a:t>
             </a:fld>
             <a:endParaRPr lang="en-US" dirty="0"/>
           </a:p>
@@ -5568,7 +5575,7 @@
             <a:fld id="{B61BEF0D-F0BB-DE4B-95CE-6DB70DBA9567}" type="datetimeFigureOut">
               <a:rPr lang="en-US" dirty="0"/>
               <a:pPr/>
-              <a:t>6/8/2026</a:t>
+              <a:t>6/9/2026</a:t>
             </a:fld>
             <a:endParaRPr lang="en-US" dirty="0"/>
           </a:p>
@@ -5956,7 +5963,7 @@
             <a:fld id="{B61BEF0D-F0BB-DE4B-95CE-6DB70DBA9567}" type="datetimeFigureOut">
               <a:rPr lang="en-US" dirty="0"/>
               <a:pPr/>
-              <a:t>6/8/2026</a:t>
+              <a:t>6/9/2026</a:t>
             </a:fld>
             <a:endParaRPr lang="en-US" dirty="0"/>
           </a:p>
@@ -6086,7 +6093,7 @@
             <a:fld id="{B61BEF0D-F0BB-DE4B-95CE-6DB70DBA9567}" type="datetimeFigureOut">
               <a:rPr lang="en-US" dirty="0"/>
               <a:pPr/>
-              <a:t>6/8/2026</a:t>
+              <a:t>6/9/2026</a:t>
             </a:fld>
             <a:endParaRPr lang="en-US" dirty="0"/>
           </a:p>
@@ -6183,7 +6190,7 @@
             <a:fld id="{B61BEF0D-F0BB-DE4B-95CE-6DB70DBA9567}" type="datetimeFigureOut">
               <a:rPr lang="en-US" dirty="0"/>
               <a:pPr/>
-              <a:t>6/8/2026</a:t>
+              <a:t>6/9/2026</a:t>
             </a:fld>
             <a:endParaRPr lang="en-US" dirty="0"/>
           </a:p>
@@ -6438,7 +6445,7 @@
             <a:fld id="{B61BEF0D-F0BB-DE4B-95CE-6DB70DBA9567}" type="datetimeFigureOut">
               <a:rPr lang="en-US" dirty="0"/>
               <a:pPr/>
-              <a:t>6/8/2026</a:t>
+              <a:t>6/9/2026</a:t>
             </a:fld>
             <a:endParaRPr lang="en-US" dirty="0"/>
           </a:p>
@@ -6718,7 +6725,7 @@
             <a:fld id="{B61BEF0D-F0BB-DE4B-95CE-6DB70DBA9567}" type="datetimeFigureOut">
               <a:rPr lang="en-US" dirty="0"/>
               <a:pPr/>
-              <a:t>6/8/2026</a:t>
+              <a:t>6/9/2026</a:t>
             </a:fld>
             <a:endParaRPr lang="en-US" dirty="0"/>
           </a:p>
@@ -7129,7 +7136,7 @@
             <a:fld id="{B61BEF0D-F0BB-DE4B-95CE-6DB70DBA9567}" type="datetimeFigureOut">
               <a:rPr lang="en-US" dirty="0"/>
               <a:pPr/>
-              <a:t>6/8/2026</a:t>
+              <a:t>6/9/2026</a:t>
             </a:fld>
             <a:endParaRPr lang="en-US" dirty="0"/>
           </a:p>

--- a/slices/Olist_Ecommerce_Project_Presentation.pptx
+++ b/slices/Olist_Ecommerce_Project_Presentation.pptx
@@ -5,7 +5,7 @@
     <p:sldMasterId id="2147483783" r:id="rId1"/>
   </p:sldMasterIdLst>
   <p:notesMasterIdLst>
-    <p:notesMasterId r:id="rId17"/>
+    <p:notesMasterId r:id="rId19"/>
   </p:notesMasterIdLst>
   <p:sldIdLst>
     <p:sldId id="256" r:id="rId2"/>
@@ -22,7 +22,9 @@
     <p:sldId id="261" r:id="rId13"/>
     <p:sldId id="262" r:id="rId14"/>
     <p:sldId id="263" r:id="rId15"/>
-    <p:sldId id="264" r:id="rId16"/>
+    <p:sldId id="272" r:id="rId16"/>
+    <p:sldId id="273" r:id="rId17"/>
+    <p:sldId id="264" r:id="rId18"/>
   </p:sldIdLst>
   <p:sldSz cx="9144000" cy="6858000" type="screen4x3"/>
   <p:notesSz cx="6858000" cy="9144000"/>
@@ -232,7 +234,7 @@
           </a:lstStyle>
           <a:p>
             <a:fld id="{8DE1E0FE-415D-4A86-A5CB-56FB2301993F}" type="datetimeFigureOut">
-              <a:t>6/9/2026</a:t>
+              <a:t>6/10/2026</a:t>
             </a:fld>
             <a:endParaRPr lang="en-US"/>
           </a:p>
@@ -1117,6 +1119,327 @@
           <a:lstStyle/>
           <a:p>
             <a:r>
+              <a:rPr lang="en-SG" sz="1200" b="0" i="0" kern="1200" dirty="0">
+                <a:effectLst/>
+              </a:rPr>
+              <a:t>This slide explains why customer retention is the most important customer strategy question in the </a:t>
+            </a:r>
+            <a:r>
+              <a:rPr lang="en-SG" sz="1200" b="0" i="0" kern="1200" dirty="0" err="1">
+                <a:effectLst/>
+              </a:rPr>
+              <a:t>Olist</a:t>
+            </a:r>
+            <a:r>
+              <a:rPr lang="en-SG" sz="1200" b="0" i="0" kern="1200" dirty="0">
+                <a:effectLst/>
+              </a:rPr>
+              <a:t> dataset. The key point is that only 2,913 out of 95,420 customers are repeat buyers, which is just 3.05% of the customer base. Because repeat purchasing is so rare, a standard frequency percentile score would exaggerate small differences between mostly one-time customers.</a:t>
+            </a:r>
+          </a:p>
+          <a:p>
+            <a:endParaRPr lang="en-SG" sz="1200" b="0" i="0" kern="1200" dirty="0">
+              <a:effectLst/>
+            </a:endParaRPr>
+          </a:p>
+          <a:p>
+            <a:r>
+              <a:rPr lang="en-SG" sz="1200" b="0" i="0" kern="1200" dirty="0">
+                <a:effectLst/>
+              </a:rPr>
+              <a:t>The RFM scoring therefore uses a more honest frequency method:</a:t>
+            </a:r>
+          </a:p>
+          <a:p>
+            <a:endParaRPr lang="en-US" dirty="0"/>
+          </a:p>
+          <a:p>
+            <a:r>
+              <a:rPr lang="en-US" dirty="0"/>
+              <a:t>1 order = low frequency</a:t>
+            </a:r>
+          </a:p>
+          <a:p>
+            <a:r>
+              <a:rPr lang="en-US" dirty="0"/>
+              <a:t>2 orders = repeat buyer</a:t>
+            </a:r>
+          </a:p>
+          <a:p>
+            <a:r>
+              <a:rPr lang="en-US" dirty="0"/>
+              <a:t>3-5 orders = strong repeat buyer</a:t>
+            </a:r>
+          </a:p>
+          <a:p>
+            <a:r>
+              <a:rPr lang="en-US" dirty="0"/>
+              <a:t>6+ orders = very frequent buyer</a:t>
+            </a:r>
+          </a:p>
+          <a:p>
+            <a:endParaRPr lang="en-SG" dirty="0"/>
+          </a:p>
+          <a:p>
+            <a:r>
+              <a:rPr lang="en-SG" sz="1200" b="0" i="0" kern="1200" dirty="0">
+                <a:effectLst/>
+              </a:rPr>
+              <a:t>The segment table shows that most customers are either new, mid-value, dormant, or one-time high spenders. The most commercially important insight is that the high-value one-time groups are large and valuable. High-Value New Customers and Big Spenders - One-Time Buyers together represent more than 22,000 customers and more than R$8M in gross item sales.</a:t>
+            </a:r>
+          </a:p>
+          <a:p>
+            <a:r>
+              <a:rPr lang="en-SG" sz="1200" b="0" i="0" kern="1200" dirty="0">
+                <a:effectLst/>
+              </a:rPr>
+              <a:t>The business takeaway is that </a:t>
+            </a:r>
+            <a:r>
+              <a:rPr lang="en-SG" sz="1200" b="0" i="0" kern="1200" dirty="0" err="1">
+                <a:effectLst/>
+              </a:rPr>
+              <a:t>Olist</a:t>
+            </a:r>
+            <a:r>
+              <a:rPr lang="en-SG" sz="1200" b="0" i="0" kern="1200" dirty="0">
+                <a:effectLst/>
+              </a:rPr>
+              <a:t> should not treat retention as a generic loyalty problem yet. The first priority is to convert valuable one-time buyers into second-time buyers, because that is where the largest customer value opportunity sits.</a:t>
+            </a:r>
+          </a:p>
+          <a:p>
+            <a:endParaRPr dirty="0"/>
+          </a:p>
+        </p:txBody>
+      </p:sp>
+      <p:sp>
+        <p:nvSpPr>
+          <p:cNvPr id="4" name="Slide Number Placeholder 3"/>
+          <p:cNvSpPr>
+            <a:spLocks noGrp="1"/>
+          </p:cNvSpPr>
+          <p:nvPr>
+            <p:ph type="sldNum" idx="5"/>
+          </p:nvPr>
+        </p:nvSpPr>
+        <p:spPr/>
+        <p:txBody>
+          <a:bodyPr/>
+          <a:lstStyle/>
+          <a:p>
+            <a:endParaRPr/>
+          </a:p>
+        </p:txBody>
+      </p:sp>
+    </p:spTree>
+  </p:cSld>
+  <p:clrMapOvr>
+    <a:masterClrMapping/>
+  </p:clrMapOvr>
+</p:notes>
+</file>
+
+<file path=ppt/notesSlides/notesSlide16.xml><?xml version="1.0" encoding="utf-8"?>
+<p:notes xmlns:a="http://schemas.openxmlformats.org/drawingml/2006/main" xmlns:r="http://schemas.openxmlformats.org/officeDocument/2006/relationships" xmlns:p="http://schemas.openxmlformats.org/presentationml/2006/main">
+  <p:cSld>
+    <p:spTree>
+      <p:nvGrpSpPr>
+        <p:cNvPr id="1" name=""/>
+        <p:cNvGrpSpPr/>
+        <p:nvPr/>
+      </p:nvGrpSpPr>
+      <p:grpSpPr>
+        <a:xfrm>
+          <a:off x="0" y="0"/>
+          <a:ext cx="0" cy="0"/>
+          <a:chOff x="0" y="0"/>
+          <a:chExt cx="0" cy="0"/>
+        </a:xfrm>
+      </p:grpSpPr>
+      <p:sp>
+        <p:nvSpPr>
+          <p:cNvPr id="2" name="Slide Image Placeholder 1"/>
+          <p:cNvSpPr>
+            <a:spLocks noGrp="1" noRot="1" noChangeAspect="1"/>
+          </p:cNvSpPr>
+          <p:nvPr>
+            <p:ph type="sldImg"/>
+          </p:nvPr>
+        </p:nvSpPr>
+        <p:spPr/>
+      </p:sp>
+      <p:sp>
+        <p:nvSpPr>
+          <p:cNvPr id="3" name="Notes Placeholder 2"/>
+          <p:cNvSpPr>
+            <a:spLocks noGrp="1"/>
+          </p:cNvSpPr>
+          <p:nvPr>
+            <p:ph type="body" idx="1"/>
+          </p:nvPr>
+        </p:nvSpPr>
+        <p:spPr/>
+        <p:txBody>
+          <a:bodyPr/>
+          <a:lstStyle/>
+          <a:p>
+            <a:r>
+              <a:rPr lang="en-SG" sz="1200" b="0" i="0" kern="1200" dirty="0">
+                <a:effectLst/>
+              </a:rPr>
+              <a:t>This slide translates the RFM results into campaign priorities. Since only 3.05% of customers are repeat buyers, broad loyalty campaigns would reach a very small part of the customer base. A staged retention strategy is more practical.</a:t>
+            </a:r>
+          </a:p>
+          <a:p>
+            <a:r>
+              <a:rPr lang="en-SG" sz="1200" b="0" i="0" kern="1200" dirty="0">
+                <a:effectLst/>
+              </a:rPr>
+              <a:t>The first priority is High-Value New Customers. These customers purchased recently, bought only once, and generated high gross item sales. They are the best audience for second-purchase coupons, category recommendations, or limited-time follow-up offers.</a:t>
+            </a:r>
+          </a:p>
+          <a:p>
+            <a:r>
+              <a:rPr lang="en-SG" sz="1200" b="0" i="0" kern="1200" dirty="0">
+                <a:effectLst/>
+              </a:rPr>
+              <a:t>The second priority is At-Risk High Spenders. These customers generated meaningful sales but have not purchased recently. They are good candidates for win-back campaigns, especially if offers are personalized around previous product categories.</a:t>
+            </a:r>
+          </a:p>
+          <a:p>
+            <a:r>
+              <a:rPr lang="en-SG" sz="1200" b="0" i="0" kern="1200" dirty="0">
+                <a:effectLst/>
+              </a:rPr>
+              <a:t>The third priority is Recent Repeat Buyers. This group is much smaller, but they have already shown repeat purchase </a:t>
+            </a:r>
+            <a:r>
+              <a:rPr lang="en-SG" sz="1200" b="0" i="0" kern="1200" dirty="0" err="1">
+                <a:effectLst/>
+              </a:rPr>
+              <a:t>behavior</a:t>
+            </a:r>
+            <a:r>
+              <a:rPr lang="en-SG" sz="1200" b="0" i="0" kern="1200" dirty="0">
+                <a:effectLst/>
+              </a:rPr>
+              <a:t>. They are the right audience for loyalty rewards, early access, or benefits that encourage continued engagement.</a:t>
+            </a:r>
+          </a:p>
+          <a:p>
+            <a:r>
+              <a:rPr lang="en-SG" sz="1200" b="0" i="0" kern="1200" dirty="0">
+                <a:effectLst/>
+              </a:rPr>
+              <a:t>Champions are the smallest group, but they show the strongest combination of recency, frequency, and monetary value. They should receive VIP treatment, premium offers, or early access campaigns.</a:t>
+            </a:r>
+          </a:p>
+          <a:p>
+            <a:r>
+              <a:rPr lang="en-SG" sz="1200" b="0" i="0" kern="1200" dirty="0">
+                <a:effectLst/>
+              </a:rPr>
+              <a:t>The main presenter message is:</a:t>
+            </a:r>
+          </a:p>
+          <a:p>
+            <a:r>
+              <a:rPr lang="en-SG" sz="1200" b="0" i="0" kern="1200" dirty="0">
+                <a:effectLst/>
+              </a:rPr>
+              <a:t>RFM scoring shows </a:t>
+            </a:r>
+            <a:r>
+              <a:rPr lang="en-SG" sz="1200" b="0" i="0" kern="1200" dirty="0" err="1">
+                <a:effectLst/>
+              </a:rPr>
+              <a:t>Olist's</a:t>
+            </a:r>
+            <a:r>
+              <a:rPr lang="en-SG" sz="1200" b="0" i="0" kern="1200">
+                <a:effectLst/>
+              </a:rPr>
+              <a:t> biggest customer opportunity is converting high-value one-time buyers into repeat customers, while using win-back campaigns for older high-spend customers and loyalty offers for the small repeat-buyer base.</a:t>
+            </a:r>
+          </a:p>
+          <a:p>
+            <a:endParaRPr/>
+          </a:p>
+        </p:txBody>
+      </p:sp>
+      <p:sp>
+        <p:nvSpPr>
+          <p:cNvPr id="4" name="Slide Number Placeholder 3"/>
+          <p:cNvSpPr>
+            <a:spLocks noGrp="1"/>
+          </p:cNvSpPr>
+          <p:nvPr>
+            <p:ph type="sldNum" idx="5"/>
+          </p:nvPr>
+        </p:nvSpPr>
+        <p:spPr/>
+        <p:txBody>
+          <a:bodyPr/>
+          <a:lstStyle/>
+          <a:p>
+            <a:endParaRPr/>
+          </a:p>
+        </p:txBody>
+      </p:sp>
+    </p:spTree>
+  </p:cSld>
+  <p:clrMapOvr>
+    <a:masterClrMapping/>
+  </p:clrMapOvr>
+</p:notes>
+</file>
+
+<file path=ppt/notesSlides/notesSlide17.xml><?xml version="1.0" encoding="utf-8"?>
+<p:notes xmlns:a="http://schemas.openxmlformats.org/drawingml/2006/main" xmlns:r="http://schemas.openxmlformats.org/officeDocument/2006/relationships" xmlns:p="http://schemas.openxmlformats.org/presentationml/2006/main">
+  <p:cSld>
+    <p:spTree>
+      <p:nvGrpSpPr>
+        <p:cNvPr id="1" name=""/>
+        <p:cNvGrpSpPr/>
+        <p:nvPr/>
+      </p:nvGrpSpPr>
+      <p:grpSpPr>
+        <a:xfrm>
+          <a:off x="0" y="0"/>
+          <a:ext cx="0" cy="0"/>
+          <a:chOff x="0" y="0"/>
+          <a:chExt cx="0" cy="0"/>
+        </a:xfrm>
+      </p:grpSpPr>
+      <p:sp>
+        <p:nvSpPr>
+          <p:cNvPr id="2" name="Slide Image Placeholder 1"/>
+          <p:cNvSpPr>
+            <a:spLocks noGrp="1" noRot="1" noChangeAspect="1"/>
+          </p:cNvSpPr>
+          <p:nvPr>
+            <p:ph type="sldImg"/>
+          </p:nvPr>
+        </p:nvSpPr>
+        <p:spPr/>
+      </p:sp>
+      <p:sp>
+        <p:nvSpPr>
+          <p:cNvPr id="3" name="Notes Placeholder 2"/>
+          <p:cNvSpPr>
+            <a:spLocks noGrp="1"/>
+          </p:cNvSpPr>
+          <p:nvPr>
+            <p:ph type="body" idx="1"/>
+          </p:nvPr>
+        </p:nvSpPr>
+        <p:spPr/>
+        <p:txBody>
+          <a:bodyPr/>
+          <a:lstStyle/>
+          <a:p>
+            <a:r>
               <a:rPr lang="en-US" dirty="0"/>
               <a:t>Michelle: In summary, this project demonstrates an end-to-end analytics engineering workflow using </a:t>
             </a:r>
@@ -1156,7 +1479,7 @@
           <a:p>
             <a:fld id="{BB5C6805-D20B-405F-86DA-DC495A4FC83C}" type="slidenum">
               <a:rPr lang="en-US"/>
-              <a:t>15</a:t>
+              <a:t>17</a:t>
             </a:fld>
             <a:endParaRPr lang="en-US"/>
           </a:p>
@@ -2678,7 +3001,7 @@
             <a:fld id="{B61BEF0D-F0BB-DE4B-95CE-6DB70DBA9567}" type="datetimeFigureOut">
               <a:rPr lang="en-US" dirty="0"/>
               <a:pPr/>
-              <a:t>6/9/2026</a:t>
+              <a:t>6/10/2026</a:t>
             </a:fld>
             <a:endParaRPr lang="en-US" dirty="0"/>
           </a:p>
@@ -2941,7 +3264,7 @@
             <a:fld id="{B61BEF0D-F0BB-DE4B-95CE-6DB70DBA9567}" type="datetimeFigureOut">
               <a:rPr lang="en-US" dirty="0"/>
               <a:pPr/>
-              <a:t>6/9/2026</a:t>
+              <a:t>6/10/2026</a:t>
             </a:fld>
             <a:endParaRPr lang="en-US" dirty="0"/>
           </a:p>
@@ -3192,7 +3515,7 @@
             <a:fld id="{B61BEF0D-F0BB-DE4B-95CE-6DB70DBA9567}" type="datetimeFigureOut">
               <a:rPr lang="en-US" dirty="0"/>
               <a:pPr/>
-              <a:t>6/9/2026</a:t>
+              <a:t>6/10/2026</a:t>
             </a:fld>
             <a:endParaRPr lang="en-US" dirty="0"/>
           </a:p>
@@ -3501,7 +3824,7 @@
             <a:fld id="{B61BEF0D-F0BB-DE4B-95CE-6DB70DBA9567}" type="datetimeFigureOut">
               <a:rPr lang="en-US" dirty="0"/>
               <a:pPr/>
-              <a:t>6/9/2026</a:t>
+              <a:t>6/10/2026</a:t>
             </a:fld>
             <a:endParaRPr lang="en-US" dirty="0"/>
           </a:p>
@@ -3820,7 +4143,7 @@
             <a:fld id="{B61BEF0D-F0BB-DE4B-95CE-6DB70DBA9567}" type="datetimeFigureOut">
               <a:rPr lang="en-US" dirty="0"/>
               <a:pPr/>
-              <a:t>6/9/2026</a:t>
+              <a:t>6/10/2026</a:t>
             </a:fld>
             <a:endParaRPr lang="en-US" dirty="0"/>
           </a:p>
@@ -4123,7 +4446,7 @@
             <a:fld id="{B61BEF0D-F0BB-DE4B-95CE-6DB70DBA9567}" type="datetimeFigureOut">
               <a:rPr lang="en-US" dirty="0"/>
               <a:pPr/>
-              <a:t>6/9/2026</a:t>
+              <a:t>6/10/2026</a:t>
             </a:fld>
             <a:endParaRPr lang="en-US" dirty="0"/>
           </a:p>
@@ -4491,7 +4814,7 @@
             <a:fld id="{B61BEF0D-F0BB-DE4B-95CE-6DB70DBA9567}" type="datetimeFigureOut">
               <a:rPr lang="en-US" dirty="0"/>
               <a:pPr/>
-              <a:t>6/9/2026</a:t>
+              <a:t>6/10/2026</a:t>
             </a:fld>
             <a:endParaRPr lang="en-US" dirty="0"/>
           </a:p>
@@ -4677,7 +5000,7 @@
             <a:fld id="{B61BEF0D-F0BB-DE4B-95CE-6DB70DBA9567}" type="datetimeFigureOut">
               <a:rPr lang="en-US" dirty="0"/>
               <a:pPr/>
-              <a:t>6/9/2026</a:t>
+              <a:t>6/10/2026</a:t>
             </a:fld>
             <a:endParaRPr lang="en-US" dirty="0"/>
           </a:p>
@@ -4863,7 +5186,7 @@
             <a:fld id="{B61BEF0D-F0BB-DE4B-95CE-6DB70DBA9567}" type="datetimeFigureOut">
               <a:rPr lang="en-US" dirty="0"/>
               <a:pPr/>
-              <a:t>6/9/2026</a:t>
+              <a:t>6/10/2026</a:t>
             </a:fld>
             <a:endParaRPr lang="en-US" dirty="0"/>
           </a:p>
@@ -4960,6 +5283,36 @@
 </p:sldLayout>
 </file>
 
+<file path=ppt/slideLayouts/slideLayout19.xml><?xml version="1.0" encoding="utf-8"?>
+<p:sldLayout xmlns:a="http://schemas.openxmlformats.org/drawingml/2006/main" xmlns:r="http://schemas.openxmlformats.org/officeDocument/2006/relationships" xmlns:p="http://schemas.openxmlformats.org/presentationml/2006/main" type="title">
+  <p:cSld name="1_Title Slide">
+    <p:spTree>
+      <p:nvGrpSpPr>
+        <p:cNvPr id="1" name=""/>
+        <p:cNvGrpSpPr/>
+        <p:nvPr/>
+      </p:nvGrpSpPr>
+      <p:grpSpPr>
+        <a:xfrm>
+          <a:off x="0" y="0"/>
+          <a:ext cx="0" cy="0"/>
+          <a:chOff x="0" y="0"/>
+          <a:chExt cx="0" cy="0"/>
+        </a:xfrm>
+      </p:grpSpPr>
+    </p:spTree>
+    <p:extLst>
+      <p:ext uri="{BB962C8B-B14F-4D97-AF65-F5344CB8AC3E}">
+        <p14:creationId xmlns:p14="http://schemas.microsoft.com/office/powerpoint/2010/main" val="2601148798"/>
+      </p:ext>
+    </p:extLst>
+  </p:cSld>
+  <p:clrMapOvr>
+    <a:masterClrMapping/>
+  </p:clrMapOvr>
+</p:sldLayout>
+</file>
+
 <file path=ppt/slideLayouts/slideLayout2.xml><?xml version="1.0" encoding="utf-8"?>
 <p:sldLayout xmlns:a="http://schemas.openxmlformats.org/drawingml/2006/main" xmlns:r="http://schemas.openxmlformats.org/officeDocument/2006/relationships" xmlns:p="http://schemas.openxmlformats.org/presentationml/2006/main" type="obj" preserve="1">
   <p:cSld name="Title and Content">
@@ -5078,7 +5431,7 @@
             <a:fld id="{B61BEF0D-F0BB-DE4B-95CE-6DB70DBA9567}" type="datetimeFigureOut">
               <a:rPr lang="en-US" dirty="0"/>
               <a:pPr/>
-              <a:t>6/9/2026</a:t>
+              <a:t>6/10/2026</a:t>
             </a:fld>
             <a:endParaRPr lang="en-US" dirty="0"/>
           </a:p>
@@ -5329,7 +5682,7 @@
             <a:fld id="{B61BEF0D-F0BB-DE4B-95CE-6DB70DBA9567}" type="datetimeFigureOut">
               <a:rPr lang="en-US" dirty="0"/>
               <a:pPr/>
-              <a:t>6/9/2026</a:t>
+              <a:t>6/10/2026</a:t>
             </a:fld>
             <a:endParaRPr lang="en-US" dirty="0"/>
           </a:p>
@@ -5575,7 +5928,7 @@
             <a:fld id="{B61BEF0D-F0BB-DE4B-95CE-6DB70DBA9567}" type="datetimeFigureOut">
               <a:rPr lang="en-US" dirty="0"/>
               <a:pPr/>
-              <a:t>6/9/2026</a:t>
+              <a:t>6/10/2026</a:t>
             </a:fld>
             <a:endParaRPr lang="en-US" dirty="0"/>
           </a:p>
@@ -5963,7 +6316,7 @@
             <a:fld id="{B61BEF0D-F0BB-DE4B-95CE-6DB70DBA9567}" type="datetimeFigureOut">
               <a:rPr lang="en-US" dirty="0"/>
               <a:pPr/>
-              <a:t>6/9/2026</a:t>
+              <a:t>6/10/2026</a:t>
             </a:fld>
             <a:endParaRPr lang="en-US" dirty="0"/>
           </a:p>
@@ -6093,7 +6446,7 @@
             <a:fld id="{B61BEF0D-F0BB-DE4B-95CE-6DB70DBA9567}" type="datetimeFigureOut">
               <a:rPr lang="en-US" dirty="0"/>
               <a:pPr/>
-              <a:t>6/9/2026</a:t>
+              <a:t>6/10/2026</a:t>
             </a:fld>
             <a:endParaRPr lang="en-US" dirty="0"/>
           </a:p>
@@ -6190,7 +6543,7 @@
             <a:fld id="{B61BEF0D-F0BB-DE4B-95CE-6DB70DBA9567}" type="datetimeFigureOut">
               <a:rPr lang="en-US" dirty="0"/>
               <a:pPr/>
-              <a:t>6/9/2026</a:t>
+              <a:t>6/10/2026</a:t>
             </a:fld>
             <a:endParaRPr lang="en-US" dirty="0"/>
           </a:p>
@@ -6445,7 +6798,7 @@
             <a:fld id="{B61BEF0D-F0BB-DE4B-95CE-6DB70DBA9567}" type="datetimeFigureOut">
               <a:rPr lang="en-US" dirty="0"/>
               <a:pPr/>
-              <a:t>6/9/2026</a:t>
+              <a:t>6/10/2026</a:t>
             </a:fld>
             <a:endParaRPr lang="en-US" dirty="0"/>
           </a:p>
@@ -6725,7 +7078,7 @@
             <a:fld id="{B61BEF0D-F0BB-DE4B-95CE-6DB70DBA9567}" type="datetimeFigureOut">
               <a:rPr lang="en-US" dirty="0"/>
               <a:pPr/>
-              <a:t>6/9/2026</a:t>
+              <a:t>6/10/2026</a:t>
             </a:fld>
             <a:endParaRPr lang="en-US" dirty="0"/>
           </a:p>
@@ -7136,7 +7489,7 @@
             <a:fld id="{B61BEF0D-F0BB-DE4B-95CE-6DB70DBA9567}" type="datetimeFigureOut">
               <a:rPr lang="en-US" dirty="0"/>
               <a:pPr/>
-              <a:t>6/9/2026</a:t>
+              <a:t>6/10/2026</a:t>
             </a:fld>
             <a:endParaRPr lang="en-US" dirty="0"/>
           </a:p>
@@ -7252,6 +7605,7 @@
     <p:sldLayoutId id="2147483799" r:id="rId16"/>
     <p:sldLayoutId id="2147483800" r:id="rId17"/>
     <p:sldLayoutId id="2147483801" r:id="rId18"/>
+    <p:sldLayoutId id="2147483802" r:id="rId19"/>
   </p:sldLayoutIdLst>
   <p:txStyles>
     <p:titleStyle>
@@ -8117,53 +8471,6 @@
           </a:p>
         </p:txBody>
       </p:sp>
-      <p:sp>
-        <p:nvSpPr>
-          <p:cNvPr id="3" name="Content Placeholder 2"/>
-          <p:cNvSpPr>
-            <a:spLocks noGrp="1"/>
-          </p:cNvSpPr>
-          <p:nvPr>
-            <p:ph idx="1"/>
-          </p:nvPr>
-        </p:nvSpPr>
-        <p:spPr>
-          <a:xfrm>
-            <a:off x="158261" y="5269522"/>
-            <a:ext cx="6554867" cy="1141702"/>
-          </a:xfrm>
-        </p:spPr>
-        <p:txBody>
-          <a:bodyPr/>
-          <a:lstStyle/>
-          <a:p>
-            <a:r>
-              <a:rPr dirty="0">
-                <a:solidFill>
-                  <a:schemeClr val="tx1"/>
-                </a:solidFill>
-              </a:rPr>
-              <a:t>Analyze monthly revenue trends using </a:t>
-            </a:r>
-            <a:r>
-              <a:rPr dirty="0" err="1">
-                <a:solidFill>
-                  <a:schemeClr val="tx1"/>
-                </a:solidFill>
-              </a:rPr>
-              <a:t>fact_sales</a:t>
-            </a:r>
-            <a:r>
-              <a:rPr dirty="0">
-                <a:solidFill>
-                  <a:schemeClr val="tx1"/>
-                </a:solidFill>
-              </a:rPr>
-              <a:t>.</a:t>
-            </a:r>
-          </a:p>
-        </p:txBody>
-      </p:sp>
       <p:pic>
         <p:nvPicPr>
           <p:cNvPr id="4" name="Picture 3" descr="A line graph with numbers and text&#10;&#10;AI-generated content may be incorrect.">
@@ -8186,14 +8493,131 @@
         </p:blipFill>
         <p:spPr>
           <a:xfrm>
-            <a:off x="517591" y="1251172"/>
-            <a:ext cx="8110061" cy="4017109"/>
+            <a:off x="517591" y="1109770"/>
+            <a:ext cx="8371885" cy="4017109"/>
           </a:xfrm>
           <a:prstGeom prst="rect">
             <a:avLst/>
           </a:prstGeom>
         </p:spPr>
       </p:pic>
+      <p:sp>
+        <p:nvSpPr>
+          <p:cNvPr id="10" name="TextBox 9">
+            <a:extLst>
+              <a:ext uri="{FF2B5EF4-FFF2-40B4-BE49-F238E27FC236}">
+                <a16:creationId xmlns:a16="http://schemas.microsoft.com/office/drawing/2014/main" id="{D2168987-0960-2C0F-96F7-1A284C7E0D3B}"/>
+              </a:ext>
+            </a:extLst>
+          </p:cNvPr>
+          <p:cNvSpPr txBox="1"/>
+          <p:nvPr/>
+        </p:nvSpPr>
+        <p:spPr>
+          <a:xfrm>
+            <a:off x="517591" y="5319868"/>
+            <a:ext cx="4581426" cy="1200329"/>
+          </a:xfrm>
+          <a:prstGeom prst="rect">
+            <a:avLst/>
+          </a:prstGeom>
+          <a:noFill/>
+        </p:spPr>
+        <p:txBody>
+          <a:bodyPr wrap="square">
+            <a:spAutoFit/>
+          </a:bodyPr>
+          <a:lstStyle/>
+          <a:p>
+            <a:pPr marL="285750" indent="-285750">
+              <a:buFont typeface="Arial" panose="020B0604020202020204" pitchFamily="34" charset="0"/>
+              <a:buChar char="•"/>
+            </a:pPr>
+            <a:r>
+              <a:rPr lang="en-US" dirty="0"/>
+              <a:t>Oct 2016: R$354</a:t>
+            </a:r>
+          </a:p>
+          <a:p>
+            <a:pPr marL="285750" indent="-285750">
+              <a:buFont typeface="Arial" panose="020B0604020202020204" pitchFamily="34" charset="0"/>
+              <a:buChar char="•"/>
+            </a:pPr>
+            <a:r>
+              <a:rPr lang="en-SG" dirty="0"/>
+              <a:t>Feb 2017: </a:t>
+            </a:r>
+            <a:r>
+              <a:rPr lang="en-US" dirty="0"/>
+              <a:t>R$286k</a:t>
+            </a:r>
+          </a:p>
+          <a:p>
+            <a:pPr marL="285750" indent="-285750">
+              <a:buFont typeface="Arial" panose="020B0604020202020204" pitchFamily="34" charset="0"/>
+              <a:buChar char="•"/>
+            </a:pPr>
+            <a:r>
+              <a:rPr lang="en-US" dirty="0"/>
+              <a:t>Nov 2017: R$1.18M</a:t>
+            </a:r>
+          </a:p>
+          <a:p>
+            <a:pPr marL="285750" indent="-285750">
+              <a:buFont typeface="Arial" panose="020B0604020202020204" pitchFamily="34" charset="0"/>
+              <a:buChar char="•"/>
+            </a:pPr>
+            <a:r>
+              <a:rPr lang="en-SG" dirty="0" err="1"/>
+              <a:t>Avg</a:t>
+            </a:r>
+            <a:r>
+              <a:rPr lang="en-SG" dirty="0"/>
+              <a:t> MoM: +</a:t>
+            </a:r>
+            <a:r>
+              <a:rPr lang="en-SG" b="1" dirty="0"/>
+              <a:t>8.8%</a:t>
+            </a:r>
+            <a:endParaRPr lang="en-SG" dirty="0"/>
+          </a:p>
+        </p:txBody>
+      </p:sp>
+      <p:sp>
+        <p:nvSpPr>
+          <p:cNvPr id="12" name="TextBox 11">
+            <a:extLst>
+              <a:ext uri="{FF2B5EF4-FFF2-40B4-BE49-F238E27FC236}">
+                <a16:creationId xmlns:a16="http://schemas.microsoft.com/office/drawing/2014/main" id="{BD686D1B-8222-8432-F5A2-7EB7DD0EC930}"/>
+              </a:ext>
+            </a:extLst>
+          </p:cNvPr>
+          <p:cNvSpPr txBox="1"/>
+          <p:nvPr/>
+        </p:nvSpPr>
+        <p:spPr>
+          <a:xfrm>
+            <a:off x="4308050" y="5458367"/>
+            <a:ext cx="4581426" cy="923330"/>
+          </a:xfrm>
+          <a:prstGeom prst="rect">
+            <a:avLst/>
+          </a:prstGeom>
+          <a:noFill/>
+        </p:spPr>
+        <p:txBody>
+          <a:bodyPr wrap="square">
+            <a:spAutoFit/>
+          </a:bodyPr>
+          <a:lstStyle/>
+          <a:p>
+            <a:r>
+              <a:rPr lang="en-SG" dirty="0"/>
+              <a:t>Data pipeline transforms 9 raw CSVs into a time-series that immediately shows business momentum</a:t>
+            </a:r>
+          </a:p>
+        </p:txBody>
+      </p:sp>
     </p:spTree>
   </p:cSld>
   <p:clrMapOvr>
@@ -8250,39 +8674,6 @@
           </a:p>
         </p:txBody>
       </p:sp>
-      <p:sp>
-        <p:nvSpPr>
-          <p:cNvPr id="3" name="Content Placeholder 2"/>
-          <p:cNvSpPr>
-            <a:spLocks noGrp="1"/>
-          </p:cNvSpPr>
-          <p:nvPr>
-            <p:ph idx="1"/>
-          </p:nvPr>
-        </p:nvSpPr>
-        <p:spPr>
-          <a:xfrm>
-            <a:off x="23447" y="5873261"/>
-            <a:ext cx="9128080" cy="983440"/>
-          </a:xfrm>
-        </p:spPr>
-        <p:txBody>
-          <a:bodyPr>
-            <a:normAutofit/>
-          </a:bodyPr>
-          <a:lstStyle/>
-          <a:p>
-            <a:r>
-              <a:rPr sz="1800">
-                <a:solidFill>
-                  <a:schemeClr val="tx1"/>
-                </a:solidFill>
-              </a:rPr>
-              <a:t>Top categories include Beauty &amp; Health, Watches &amp; Gifts, Bed/Bath/Table.</a:t>
-            </a:r>
-          </a:p>
-        </p:txBody>
-      </p:sp>
       <p:pic>
         <p:nvPicPr>
           <p:cNvPr id="4" name="Picture 3" descr="A bar graph with blue bars&#10;&#10;AI-generated content may be incorrect.">
@@ -8305,14 +8696,98 @@
         </p:blipFill>
         <p:spPr>
           <a:xfrm>
-            <a:off x="353289" y="1675155"/>
-            <a:ext cx="8431556" cy="4195264"/>
+            <a:off x="66197" y="1750570"/>
+            <a:ext cx="5439058" cy="4866322"/>
           </a:xfrm>
           <a:prstGeom prst="rect">
             <a:avLst/>
           </a:prstGeom>
         </p:spPr>
       </p:pic>
+      <p:sp>
+        <p:nvSpPr>
+          <p:cNvPr id="6" name="TextBox 5">
+            <a:extLst>
+              <a:ext uri="{FF2B5EF4-FFF2-40B4-BE49-F238E27FC236}">
+                <a16:creationId xmlns:a16="http://schemas.microsoft.com/office/drawing/2014/main" id="{B27769D9-0894-575B-9AC6-9E584D26CA1A}"/>
+              </a:ext>
+            </a:extLst>
+          </p:cNvPr>
+          <p:cNvSpPr txBox="1"/>
+          <p:nvPr/>
+        </p:nvSpPr>
+        <p:spPr>
+          <a:xfrm>
+            <a:off x="5589886" y="1766991"/>
+            <a:ext cx="3487917" cy="1477328"/>
+          </a:xfrm>
+          <a:prstGeom prst="rect">
+            <a:avLst/>
+          </a:prstGeom>
+          <a:noFill/>
+        </p:spPr>
+        <p:txBody>
+          <a:bodyPr wrap="square">
+            <a:spAutoFit/>
+          </a:bodyPr>
+          <a:lstStyle/>
+          <a:p>
+            <a:pPr marL="285750" indent="-285750">
+              <a:buFont typeface="Arial" panose="020B0604020202020204" pitchFamily="34" charset="0"/>
+              <a:buChar char="•"/>
+            </a:pPr>
+            <a:r>
+              <a:rPr lang="en-US" dirty="0"/>
+              <a:t>Top categories = Beauty &amp; Health, Watches &amp; Gifts, Bed/Bath/Table</a:t>
+            </a:r>
+          </a:p>
+          <a:p>
+            <a:pPr marL="285750" indent="-285750">
+              <a:buFont typeface="Arial" panose="020B0604020202020204" pitchFamily="34" charset="0"/>
+              <a:buChar char="•"/>
+            </a:pPr>
+            <a:r>
+              <a:rPr lang="en-US" dirty="0"/>
+              <a:t>Accounts for R$4M of Revenue (25.2%)</a:t>
+            </a:r>
+          </a:p>
+        </p:txBody>
+      </p:sp>
+      <p:sp>
+        <p:nvSpPr>
+          <p:cNvPr id="8" name="TextBox 7">
+            <a:extLst>
+              <a:ext uri="{FF2B5EF4-FFF2-40B4-BE49-F238E27FC236}">
+                <a16:creationId xmlns:a16="http://schemas.microsoft.com/office/drawing/2014/main" id="{34B94B00-17E4-242D-3A12-73DE76E477C4}"/>
+              </a:ext>
+            </a:extLst>
+          </p:cNvPr>
+          <p:cNvSpPr txBox="1"/>
+          <p:nvPr/>
+        </p:nvSpPr>
+        <p:spPr>
+          <a:xfrm>
+            <a:off x="5693790" y="5116101"/>
+            <a:ext cx="3195686" cy="646331"/>
+          </a:xfrm>
+          <a:prstGeom prst="rect">
+            <a:avLst/>
+          </a:prstGeom>
+          <a:noFill/>
+        </p:spPr>
+        <p:txBody>
+          <a:bodyPr wrap="square">
+            <a:spAutoFit/>
+          </a:bodyPr>
+          <a:lstStyle/>
+          <a:p>
+            <a:r>
+              <a:rPr lang="en-US" b="1" dirty="0"/>
+              <a:t>Defend top 3 while explore upselling for top 4-5</a:t>
+            </a:r>
+          </a:p>
+        </p:txBody>
+      </p:sp>
     </p:spTree>
   </p:cSld>
   <p:clrMapOvr>
@@ -8364,39 +8839,6 @@
           </a:p>
         </p:txBody>
       </p:sp>
-      <p:sp>
-        <p:nvSpPr>
-          <p:cNvPr id="3" name="Content Placeholder 2"/>
-          <p:cNvSpPr>
-            <a:spLocks noGrp="1"/>
-          </p:cNvSpPr>
-          <p:nvPr>
-            <p:ph idx="1"/>
-          </p:nvPr>
-        </p:nvSpPr>
-        <p:spPr>
-          <a:xfrm>
-            <a:off x="240323" y="5802923"/>
-            <a:ext cx="6554867" cy="1176871"/>
-          </a:xfrm>
-        </p:spPr>
-        <p:txBody>
-          <a:bodyPr>
-            <a:normAutofit/>
-          </a:bodyPr>
-          <a:lstStyle/>
-          <a:p>
-            <a:r>
-              <a:rPr sz="1800">
-                <a:solidFill>
-                  <a:schemeClr val="tx1"/>
-                </a:solidFill>
-              </a:rPr>
-              <a:t>São Paulo (SP) generated the highest revenue.</a:t>
-            </a:r>
-          </a:p>
-        </p:txBody>
-      </p:sp>
       <p:pic>
         <p:nvPicPr>
           <p:cNvPr id="4" name="Picture 3" descr="A screenshot of a black screen&#10;&#10;AI-generated content may be incorrect.">
@@ -8419,14 +8861,111 @@
         </p:blipFill>
         <p:spPr>
           <a:xfrm>
-            <a:off x="1613526" y="1611684"/>
-            <a:ext cx="4209021" cy="4403758"/>
+            <a:off x="329938" y="1569174"/>
+            <a:ext cx="4209021" cy="5020161"/>
           </a:xfrm>
           <a:prstGeom prst="rect">
             <a:avLst/>
           </a:prstGeom>
         </p:spPr>
       </p:pic>
+      <p:sp>
+        <p:nvSpPr>
+          <p:cNvPr id="6" name="TextBox 5">
+            <a:extLst>
+              <a:ext uri="{FF2B5EF4-FFF2-40B4-BE49-F238E27FC236}">
+                <a16:creationId xmlns:a16="http://schemas.microsoft.com/office/drawing/2014/main" id="{34EDE5E7-43BD-2689-8D09-D4F57C1074A9}"/>
+              </a:ext>
+            </a:extLst>
+          </p:cNvPr>
+          <p:cNvSpPr txBox="1"/>
+          <p:nvPr/>
+        </p:nvSpPr>
+        <p:spPr>
+          <a:xfrm>
+            <a:off x="4840731" y="1611923"/>
+            <a:ext cx="4086453" cy="2031325"/>
+          </a:xfrm>
+          <a:prstGeom prst="rect">
+            <a:avLst/>
+          </a:prstGeom>
+          <a:noFill/>
+        </p:spPr>
+        <p:txBody>
+          <a:bodyPr wrap="square">
+            <a:spAutoFit/>
+          </a:bodyPr>
+          <a:lstStyle/>
+          <a:p>
+            <a:pPr marL="285750" indent="-285750">
+              <a:buFont typeface="Arial" panose="020B0604020202020204" pitchFamily="34" charset="0"/>
+              <a:buChar char="•"/>
+            </a:pPr>
+            <a:r>
+              <a:rPr lang="en-US"/>
+              <a:t>Sao Paulo is 3x the next state (R$5.9M)</a:t>
+            </a:r>
+          </a:p>
+          <a:p>
+            <a:pPr marL="285750" indent="-285750">
+              <a:buFont typeface="Arial" panose="020B0604020202020204" pitchFamily="34" charset="0"/>
+              <a:buChar char="•"/>
+            </a:pPr>
+            <a:r>
+              <a:rPr lang="en-US"/>
+              <a:t>Retention for top 3 (SP, RJ, MG)</a:t>
+            </a:r>
+          </a:p>
+          <a:p>
+            <a:pPr marL="285750" indent="-285750">
+              <a:buFont typeface="Arial" panose="020B0604020202020204" pitchFamily="34" charset="0"/>
+              <a:buChar char="•"/>
+            </a:pPr>
+            <a:r>
+              <a:rPr lang="en-US"/>
+              <a:t>Acquisition for RS &amp; PR (most developed but low market penetration)</a:t>
+            </a:r>
+          </a:p>
+          <a:p>
+            <a:endParaRPr lang="en-US" dirty="0"/>
+          </a:p>
+        </p:txBody>
+      </p:sp>
+      <p:sp>
+        <p:nvSpPr>
+          <p:cNvPr id="8" name="TextBox 7">
+            <a:extLst>
+              <a:ext uri="{FF2B5EF4-FFF2-40B4-BE49-F238E27FC236}">
+                <a16:creationId xmlns:a16="http://schemas.microsoft.com/office/drawing/2014/main" id="{3D7B013F-F17D-87C6-F953-79D70F82B95A}"/>
+              </a:ext>
+            </a:extLst>
+          </p:cNvPr>
+          <p:cNvSpPr txBox="1"/>
+          <p:nvPr/>
+        </p:nvSpPr>
+        <p:spPr>
+          <a:xfrm>
+            <a:off x="4840732" y="4203668"/>
+            <a:ext cx="3586832" cy="1200329"/>
+          </a:xfrm>
+          <a:prstGeom prst="rect">
+            <a:avLst/>
+          </a:prstGeom>
+          <a:noFill/>
+        </p:spPr>
+        <p:txBody>
+          <a:bodyPr wrap="square">
+            <a:spAutoFit/>
+          </a:bodyPr>
+          <a:lstStyle/>
+          <a:p>
+            <a:r>
+              <a:rPr lang="en-SG" b="1" dirty="0"/>
+              <a:t>Revenue is geographically concentrated in Southeast Brazil. Consolidate and accelerate in South BR further</a:t>
+            </a:r>
+          </a:p>
+        </p:txBody>
+      </p:sp>
     </p:spTree>
   </p:cSld>
   <p:clrMapOvr>
@@ -8558,6 +9097,7984 @@
 </file>
 
 <file path=ppt/slides/slide15.xml><?xml version="1.0" encoding="utf-8"?>
+<p:sld xmlns:a="http://schemas.openxmlformats.org/drawingml/2006/main" xmlns:r="http://schemas.openxmlformats.org/officeDocument/2006/relationships" xmlns:p="http://schemas.openxmlformats.org/presentationml/2006/main">
+  <p:cSld>
+    <p:spTree>
+      <p:nvGrpSpPr>
+        <p:cNvPr id="1" name=""/>
+        <p:cNvGrpSpPr/>
+        <p:nvPr/>
+      </p:nvGrpSpPr>
+      <p:grpSpPr>
+        <a:xfrm>
+          <a:off x="0" y="0"/>
+          <a:ext cx="0" cy="0"/>
+          <a:chOff x="0" y="0"/>
+          <a:chExt cx="0" cy="0"/>
+        </a:xfrm>
+      </p:grpSpPr>
+      <p:sp>
+        <p:nvSpPr>
+          <p:cNvPr id="99" name="Rectangle 98">
+            <a:extLst>
+              <a:ext uri="{FF2B5EF4-FFF2-40B4-BE49-F238E27FC236}">
+                <a16:creationId xmlns:a16="http://schemas.microsoft.com/office/drawing/2014/main" id="{BD62B89F-8046-4E8B-84C5-9A7CCA6965D6}"/>
+              </a:ext>
+            </a:extLst>
+          </p:cNvPr>
+          <p:cNvSpPr>
+            <a:spLocks noGrp="1"/>
+          </p:cNvSpPr>
+          <p:nvPr/>
+        </p:nvSpPr>
+        <p:spPr>
+          <a:xfrm>
+            <a:off x="0" y="857250"/>
+            <a:ext cx="9144000" cy="5143500"/>
+          </a:xfrm>
+          <a:prstGeom prst="rect">
+            <a:avLst/>
+          </a:prstGeom>
+          <a:solidFill>
+            <a:srgbClr val="FFFFFF"/>
+          </a:solidFill>
+          <a:ln w="0">
+            <a:solidFill>
+              <a:srgbClr val="000000">
+                <a:alpha val="0"/>
+              </a:srgbClr>
+            </a:solidFill>
+            <a:prstDash val="solid"/>
+          </a:ln>
+        </p:spPr>
+        <p:txBody>
+          <a:bodyPr/>
+          <a:lstStyle/>
+          <a:p>
+            <a:endParaRPr lang="en-SG" sz="1350"/>
+          </a:p>
+        </p:txBody>
+      </p:sp>
+      <p:sp>
+        <p:nvSpPr>
+          <p:cNvPr id="2" name="kicker-marker">
+            <a:extLst>
+              <a:ext uri="{FF2B5EF4-FFF2-40B4-BE49-F238E27FC236}">
+                <a16:creationId xmlns:a16="http://schemas.microsoft.com/office/drawing/2014/main" id="{3AAB92AD-22FC-4FC7-BC28-7607C52196F8}"/>
+              </a:ext>
+            </a:extLst>
+          </p:cNvPr>
+          <p:cNvSpPr>
+            <a:spLocks noGrp="1"/>
+          </p:cNvSpPr>
+          <p:nvPr/>
+        </p:nvSpPr>
+        <p:spPr>
+          <a:xfrm>
+            <a:off x="457200" y="1200150"/>
+            <a:ext cx="92869" cy="92869"/>
+          </a:xfrm>
+          <a:prstGeom prst="ellipse">
+            <a:avLst/>
+          </a:prstGeom>
+          <a:solidFill>
+            <a:srgbClr val="178F8A"/>
+          </a:solidFill>
+          <a:ln w="0">
+            <a:solidFill>
+              <a:srgbClr val="000000">
+                <a:alpha val="0"/>
+              </a:srgbClr>
+            </a:solidFill>
+            <a:prstDash val="solid"/>
+          </a:ln>
+        </p:spPr>
+        <p:txBody>
+          <a:bodyPr/>
+          <a:lstStyle/>
+          <a:p>
+            <a:endParaRPr lang="en-SG" sz="1350"/>
+          </a:p>
+        </p:txBody>
+      </p:sp>
+      <p:sp>
+        <p:nvSpPr>
+          <p:cNvPr id="3" name="kicker-label">
+            <a:extLst>
+              <a:ext uri="{FF2B5EF4-FFF2-40B4-BE49-F238E27FC236}">
+                <a16:creationId xmlns:a16="http://schemas.microsoft.com/office/drawing/2014/main" id="{103DA635-63D2-46AE-8600-C1B758B1B512}"/>
+              </a:ext>
+            </a:extLst>
+          </p:cNvPr>
+          <p:cNvSpPr>
+            <a:spLocks noGrp="1"/>
+          </p:cNvSpPr>
+          <p:nvPr/>
+        </p:nvSpPr>
+        <p:spPr>
+          <a:xfrm>
+            <a:off x="628650" y="1135856"/>
+            <a:ext cx="1928813" cy="214313"/>
+          </a:xfrm>
+          <a:prstGeom prst="rect">
+            <a:avLst/>
+          </a:prstGeom>
+          <a:solidFill>
+            <a:srgbClr val="000000">
+              <a:alpha val="0"/>
+            </a:srgbClr>
+          </a:solidFill>
+          <a:ln w="0">
+            <a:solidFill>
+              <a:srgbClr val="000000">
+                <a:alpha val="0"/>
+              </a:srgbClr>
+            </a:solidFill>
+            <a:prstDash val="solid"/>
+          </a:ln>
+        </p:spPr>
+        <p:txBody>
+          <a:bodyPr lIns="0" tIns="28575" rIns="0" bIns="0" anchor="t"/>
+          <a:lstStyle/>
+          <a:p>
+            <a:pPr algn="l">
+              <a:defRPr sz="975" b="1">
+                <a:solidFill>
+                  <a:srgbClr val="178F8A"/>
+                </a:solidFill>
+                <a:latin typeface="Aptos"/>
+                <a:ea typeface="Aptos"/>
+                <a:cs typeface="Aptos"/>
+              </a:defRPr>
+            </a:pPr>
+            <a:r>
+              <a:rPr sz="731" b="1">
+                <a:solidFill>
+                  <a:srgbClr val="178F8A"/>
+                </a:solidFill>
+                <a:latin typeface="Aptos"/>
+                <a:ea typeface="Aptos"/>
+                <a:cs typeface="Aptos"/>
+              </a:rPr>
+              <a:t>CUSTOMER RETENTION</a:t>
+            </a:r>
+          </a:p>
+        </p:txBody>
+      </p:sp>
+      <p:sp>
+        <p:nvSpPr>
+          <p:cNvPr id="4" name="Rectangle 3">
+            <a:extLst>
+              <a:ext uri="{FF2B5EF4-FFF2-40B4-BE49-F238E27FC236}">
+                <a16:creationId xmlns:a16="http://schemas.microsoft.com/office/drawing/2014/main" id="{7855238F-9601-4B4D-928A-7660E0331799}"/>
+              </a:ext>
+            </a:extLst>
+          </p:cNvPr>
+          <p:cNvSpPr>
+            <a:spLocks noGrp="1"/>
+          </p:cNvSpPr>
+          <p:nvPr/>
+        </p:nvSpPr>
+        <p:spPr>
+          <a:xfrm>
+            <a:off x="457200" y="1414462"/>
+            <a:ext cx="5429250" cy="614363"/>
+          </a:xfrm>
+          <a:prstGeom prst="rect">
+            <a:avLst/>
+          </a:prstGeom>
+          <a:solidFill>
+            <a:srgbClr val="000000">
+              <a:alpha val="0"/>
+            </a:srgbClr>
+          </a:solidFill>
+          <a:ln w="0">
+            <a:solidFill>
+              <a:srgbClr val="000000">
+                <a:alpha val="0"/>
+              </a:srgbClr>
+            </a:solidFill>
+            <a:prstDash val="solid"/>
+          </a:ln>
+        </p:spPr>
+        <p:txBody>
+          <a:bodyPr lIns="0" tIns="0" rIns="0" bIns="0" anchor="t"/>
+          <a:lstStyle/>
+          <a:p>
+            <a:pPr algn="l">
+              <a:defRPr sz="2550" b="1">
+                <a:solidFill>
+                  <a:srgbClr val="1F2933"/>
+                </a:solidFill>
+                <a:latin typeface="Aptos Display"/>
+                <a:ea typeface="Aptos Display"/>
+                <a:cs typeface="Aptos Display"/>
+              </a:defRPr>
+            </a:pPr>
+            <a:r>
+              <a:rPr sz="1913" b="1">
+                <a:solidFill>
+                  <a:srgbClr val="1F2933"/>
+                </a:solidFill>
+                <a:latin typeface="Aptos Display"/>
+                <a:ea typeface="Aptos Display"/>
+                <a:cs typeface="Aptos Display"/>
+              </a:rPr>
+              <a:t>RFM shows the biggest opportunity is converting valuable one-time buyers.</a:t>
+            </a:r>
+          </a:p>
+        </p:txBody>
+      </p:sp>
+      <p:sp>
+        <p:nvSpPr>
+          <p:cNvPr id="5" name="Rectangle 4">
+            <a:extLst>
+              <a:ext uri="{FF2B5EF4-FFF2-40B4-BE49-F238E27FC236}">
+                <a16:creationId xmlns:a16="http://schemas.microsoft.com/office/drawing/2014/main" id="{46618DE4-57D5-40A5-BC83-B1EDF85231BE}"/>
+              </a:ext>
+            </a:extLst>
+          </p:cNvPr>
+          <p:cNvSpPr>
+            <a:spLocks noGrp="1"/>
+          </p:cNvSpPr>
+          <p:nvPr/>
+        </p:nvSpPr>
+        <p:spPr>
+          <a:xfrm>
+            <a:off x="457201" y="2035969"/>
+            <a:ext cx="4822031" cy="314325"/>
+          </a:xfrm>
+          <a:prstGeom prst="rect">
+            <a:avLst/>
+          </a:prstGeom>
+          <a:solidFill>
+            <a:srgbClr val="000000">
+              <a:alpha val="0"/>
+            </a:srgbClr>
+          </a:solidFill>
+          <a:ln w="0">
+            <a:solidFill>
+              <a:srgbClr val="000000">
+                <a:alpha val="0"/>
+              </a:srgbClr>
+            </a:solidFill>
+            <a:prstDash val="solid"/>
+          </a:ln>
+        </p:spPr>
+        <p:txBody>
+          <a:bodyPr lIns="0" tIns="0" rIns="0" bIns="0" anchor="t"/>
+          <a:lstStyle/>
+          <a:p>
+            <a:pPr algn="l">
+              <a:defRPr sz="1275" b="0">
+                <a:solidFill>
+                  <a:srgbClr val="6B7280"/>
+                </a:solidFill>
+                <a:latin typeface="Aptos"/>
+                <a:ea typeface="Aptos"/>
+                <a:cs typeface="Aptos"/>
+              </a:defRPr>
+            </a:pPr>
+            <a:r>
+              <a:rPr sz="956">
+                <a:solidFill>
+                  <a:srgbClr val="6B7280"/>
+                </a:solidFill>
+                <a:latin typeface="Aptos"/>
+                <a:ea typeface="Aptos"/>
+                <a:cs typeface="Aptos"/>
+              </a:rPr>
+              <a:t>Only 3.05% of customers are repeat buyers, so frequency is scored with honest order-count buckets rather than misleading percentiles.</a:t>
+            </a:r>
+          </a:p>
+        </p:txBody>
+      </p:sp>
+      <p:sp>
+        <p:nvSpPr>
+          <p:cNvPr id="6" name="Rectangle 5">
+            <a:extLst>
+              <a:ext uri="{FF2B5EF4-FFF2-40B4-BE49-F238E27FC236}">
+                <a16:creationId xmlns:a16="http://schemas.microsoft.com/office/drawing/2014/main" id="{19D7DFDD-5CCE-4593-9BAF-5431BEC48DD6}"/>
+              </a:ext>
+            </a:extLst>
+          </p:cNvPr>
+          <p:cNvSpPr>
+            <a:spLocks noGrp="1"/>
+          </p:cNvSpPr>
+          <p:nvPr/>
+        </p:nvSpPr>
+        <p:spPr>
+          <a:xfrm>
+            <a:off x="6429375" y="1443038"/>
+            <a:ext cx="1357313" cy="257175"/>
+          </a:xfrm>
+          <a:prstGeom prst="rect">
+            <a:avLst/>
+          </a:prstGeom>
+          <a:solidFill>
+            <a:srgbClr val="000000">
+              <a:alpha val="0"/>
+            </a:srgbClr>
+          </a:solidFill>
+          <a:ln w="0">
+            <a:solidFill>
+              <a:srgbClr val="000000">
+                <a:alpha val="0"/>
+              </a:srgbClr>
+            </a:solidFill>
+            <a:prstDash val="solid"/>
+          </a:ln>
+        </p:spPr>
+        <p:txBody>
+          <a:bodyPr lIns="0" tIns="0" rIns="0" bIns="0" anchor="t"/>
+          <a:lstStyle/>
+          <a:p>
+            <a:pPr algn="r">
+              <a:defRPr sz="2325" b="1">
+                <a:solidFill>
+                  <a:srgbClr val="1F2933"/>
+                </a:solidFill>
+                <a:latin typeface="Aptos"/>
+                <a:ea typeface="Aptos"/>
+                <a:cs typeface="Aptos"/>
+              </a:defRPr>
+            </a:pPr>
+            <a:r>
+              <a:rPr sz="1744" b="1">
+                <a:solidFill>
+                  <a:srgbClr val="1F2933"/>
+                </a:solidFill>
+                <a:latin typeface="Aptos"/>
+                <a:ea typeface="Aptos"/>
+                <a:cs typeface="Aptos"/>
+              </a:rPr>
+              <a:t>95,420</a:t>
+            </a:r>
+          </a:p>
+        </p:txBody>
+      </p:sp>
+      <p:sp>
+        <p:nvSpPr>
+          <p:cNvPr id="7" name="Rectangle 6">
+            <a:extLst>
+              <a:ext uri="{FF2B5EF4-FFF2-40B4-BE49-F238E27FC236}">
+                <a16:creationId xmlns:a16="http://schemas.microsoft.com/office/drawing/2014/main" id="{3C802448-C140-4CF5-9A03-E2BCEF493846}"/>
+              </a:ext>
+            </a:extLst>
+          </p:cNvPr>
+          <p:cNvSpPr>
+            <a:spLocks noGrp="1"/>
+          </p:cNvSpPr>
+          <p:nvPr/>
+        </p:nvSpPr>
+        <p:spPr>
+          <a:xfrm>
+            <a:off x="6429375" y="1700212"/>
+            <a:ext cx="1357313" cy="157163"/>
+          </a:xfrm>
+          <a:prstGeom prst="rect">
+            <a:avLst/>
+          </a:prstGeom>
+          <a:solidFill>
+            <a:srgbClr val="000000">
+              <a:alpha val="0"/>
+            </a:srgbClr>
+          </a:solidFill>
+          <a:ln w="0">
+            <a:solidFill>
+              <a:srgbClr val="000000">
+                <a:alpha val="0"/>
+              </a:srgbClr>
+            </a:solidFill>
+            <a:prstDash val="solid"/>
+          </a:ln>
+        </p:spPr>
+        <p:txBody>
+          <a:bodyPr lIns="0" tIns="0" rIns="0" bIns="0" anchor="t"/>
+          <a:lstStyle/>
+          <a:p>
+            <a:pPr algn="r">
+              <a:defRPr sz="975" b="0">
+                <a:solidFill>
+                  <a:srgbClr val="6B7280"/>
+                </a:solidFill>
+                <a:latin typeface="Aptos"/>
+                <a:ea typeface="Aptos"/>
+                <a:cs typeface="Aptos"/>
+              </a:defRPr>
+            </a:pPr>
+            <a:r>
+              <a:rPr sz="731">
+                <a:solidFill>
+                  <a:srgbClr val="6B7280"/>
+                </a:solidFill>
+                <a:latin typeface="Aptos"/>
+                <a:ea typeface="Aptos"/>
+                <a:cs typeface="Aptos"/>
+              </a:rPr>
+              <a:t>customers scored</a:t>
+            </a:r>
+          </a:p>
+        </p:txBody>
+      </p:sp>
+      <p:sp>
+        <p:nvSpPr>
+          <p:cNvPr id="8" name="Rectangle 7">
+            <a:extLst>
+              <a:ext uri="{FF2B5EF4-FFF2-40B4-BE49-F238E27FC236}">
+                <a16:creationId xmlns:a16="http://schemas.microsoft.com/office/drawing/2014/main" id="{66289F89-E670-4363-8DEA-AC49DACCE0A5}"/>
+              </a:ext>
+            </a:extLst>
+          </p:cNvPr>
+          <p:cNvSpPr>
+            <a:spLocks noGrp="1"/>
+          </p:cNvSpPr>
+          <p:nvPr/>
+        </p:nvSpPr>
+        <p:spPr>
+          <a:xfrm>
+            <a:off x="6429375" y="1928813"/>
+            <a:ext cx="1357313" cy="257175"/>
+          </a:xfrm>
+          <a:prstGeom prst="rect">
+            <a:avLst/>
+          </a:prstGeom>
+          <a:solidFill>
+            <a:srgbClr val="000000">
+              <a:alpha val="0"/>
+            </a:srgbClr>
+          </a:solidFill>
+          <a:ln w="0">
+            <a:solidFill>
+              <a:srgbClr val="000000">
+                <a:alpha val="0"/>
+              </a:srgbClr>
+            </a:solidFill>
+            <a:prstDash val="solid"/>
+          </a:ln>
+        </p:spPr>
+        <p:txBody>
+          <a:bodyPr lIns="0" tIns="0" rIns="0" bIns="0" anchor="t"/>
+          <a:lstStyle/>
+          <a:p>
+            <a:pPr algn="r">
+              <a:defRPr sz="2325" b="1">
+                <a:solidFill>
+                  <a:srgbClr val="1F2933"/>
+                </a:solidFill>
+                <a:latin typeface="Aptos"/>
+                <a:ea typeface="Aptos"/>
+                <a:cs typeface="Aptos"/>
+              </a:defRPr>
+            </a:pPr>
+            <a:r>
+              <a:rPr sz="1744" b="1">
+                <a:solidFill>
+                  <a:srgbClr val="1F2933"/>
+                </a:solidFill>
+                <a:latin typeface="Aptos"/>
+                <a:ea typeface="Aptos"/>
+                <a:cs typeface="Aptos"/>
+              </a:rPr>
+              <a:t>2,913</a:t>
+            </a:r>
+          </a:p>
+        </p:txBody>
+      </p:sp>
+      <p:sp>
+        <p:nvSpPr>
+          <p:cNvPr id="9" name="Rectangle 8">
+            <a:extLst>
+              <a:ext uri="{FF2B5EF4-FFF2-40B4-BE49-F238E27FC236}">
+                <a16:creationId xmlns:a16="http://schemas.microsoft.com/office/drawing/2014/main" id="{97228EE4-1A9D-41D8-8624-E6192CB3FEC4}"/>
+              </a:ext>
+            </a:extLst>
+          </p:cNvPr>
+          <p:cNvSpPr>
+            <a:spLocks noGrp="1"/>
+          </p:cNvSpPr>
+          <p:nvPr/>
+        </p:nvSpPr>
+        <p:spPr>
+          <a:xfrm>
+            <a:off x="6429375" y="2185987"/>
+            <a:ext cx="1357313" cy="157163"/>
+          </a:xfrm>
+          <a:prstGeom prst="rect">
+            <a:avLst/>
+          </a:prstGeom>
+          <a:solidFill>
+            <a:srgbClr val="000000">
+              <a:alpha val="0"/>
+            </a:srgbClr>
+          </a:solidFill>
+          <a:ln w="0">
+            <a:solidFill>
+              <a:srgbClr val="000000">
+                <a:alpha val="0"/>
+              </a:srgbClr>
+            </a:solidFill>
+            <a:prstDash val="solid"/>
+          </a:ln>
+        </p:spPr>
+        <p:txBody>
+          <a:bodyPr lIns="0" tIns="0" rIns="0" bIns="0" anchor="t"/>
+          <a:lstStyle/>
+          <a:p>
+            <a:pPr algn="r">
+              <a:defRPr sz="975" b="0">
+                <a:solidFill>
+                  <a:srgbClr val="6B7280"/>
+                </a:solidFill>
+                <a:latin typeface="Aptos"/>
+                <a:ea typeface="Aptos"/>
+                <a:cs typeface="Aptos"/>
+              </a:defRPr>
+            </a:pPr>
+            <a:r>
+              <a:rPr sz="731">
+                <a:solidFill>
+                  <a:srgbClr val="6B7280"/>
+                </a:solidFill>
+                <a:latin typeface="Aptos"/>
+                <a:ea typeface="Aptos"/>
+                <a:cs typeface="Aptos"/>
+              </a:rPr>
+              <a:t>repeat customers</a:t>
+            </a:r>
+          </a:p>
+        </p:txBody>
+      </p:sp>
+      <p:sp>
+        <p:nvSpPr>
+          <p:cNvPr id="10" name="Rectangle 9">
+            <a:extLst>
+              <a:ext uri="{FF2B5EF4-FFF2-40B4-BE49-F238E27FC236}">
+                <a16:creationId xmlns:a16="http://schemas.microsoft.com/office/drawing/2014/main" id="{24A4BB7E-7F08-4235-BF3D-CFDBCB2AFC1F}"/>
+              </a:ext>
+            </a:extLst>
+          </p:cNvPr>
+          <p:cNvSpPr>
+            <a:spLocks noGrp="1"/>
+          </p:cNvSpPr>
+          <p:nvPr/>
+        </p:nvSpPr>
+        <p:spPr>
+          <a:xfrm>
+            <a:off x="457200" y="2357437"/>
+            <a:ext cx="7786688" cy="271463"/>
+          </a:xfrm>
+          <a:prstGeom prst="rect">
+            <a:avLst/>
+          </a:prstGeom>
+          <a:solidFill>
+            <a:srgbClr val="F4F6F8"/>
+          </a:solidFill>
+          <a:ln w="0">
+            <a:solidFill>
+              <a:srgbClr val="000000">
+                <a:alpha val="0"/>
+              </a:srgbClr>
+            </a:solidFill>
+            <a:prstDash val="solid"/>
+          </a:ln>
+        </p:spPr>
+        <p:txBody>
+          <a:bodyPr/>
+          <a:lstStyle/>
+          <a:p>
+            <a:endParaRPr lang="en-SG" sz="1350"/>
+          </a:p>
+        </p:txBody>
+      </p:sp>
+      <p:sp>
+        <p:nvSpPr>
+          <p:cNvPr id="11" name="Rectangle 10">
+            <a:extLst>
+              <a:ext uri="{FF2B5EF4-FFF2-40B4-BE49-F238E27FC236}">
+                <a16:creationId xmlns:a16="http://schemas.microsoft.com/office/drawing/2014/main" id="{048C4648-2C00-4A37-A2D4-B8F887D86DF5}"/>
+              </a:ext>
+            </a:extLst>
+          </p:cNvPr>
+          <p:cNvSpPr>
+            <a:spLocks noGrp="1"/>
+          </p:cNvSpPr>
+          <p:nvPr/>
+        </p:nvSpPr>
+        <p:spPr>
+          <a:xfrm>
+            <a:off x="457200" y="2414588"/>
+            <a:ext cx="1857375" cy="142875"/>
+          </a:xfrm>
+          <a:prstGeom prst="rect">
+            <a:avLst/>
+          </a:prstGeom>
+          <a:solidFill>
+            <a:srgbClr val="000000">
+              <a:alpha val="0"/>
+            </a:srgbClr>
+          </a:solidFill>
+          <a:ln w="0">
+            <a:solidFill>
+              <a:srgbClr val="000000">
+                <a:alpha val="0"/>
+              </a:srgbClr>
+            </a:solidFill>
+            <a:prstDash val="solid"/>
+          </a:ln>
+        </p:spPr>
+        <p:txBody>
+          <a:bodyPr lIns="0" tIns="0" rIns="0" bIns="0" anchor="t"/>
+          <a:lstStyle/>
+          <a:p>
+            <a:pPr algn="l">
+              <a:defRPr sz="900" b="1">
+                <a:solidFill>
+                  <a:srgbClr val="6B7280"/>
+                </a:solidFill>
+                <a:latin typeface="Aptos"/>
+                <a:ea typeface="Aptos"/>
+                <a:cs typeface="Aptos"/>
+              </a:defRPr>
+            </a:pPr>
+            <a:r>
+              <a:rPr sz="675" b="1">
+                <a:solidFill>
+                  <a:srgbClr val="6B7280"/>
+                </a:solidFill>
+                <a:latin typeface="Aptos"/>
+                <a:ea typeface="Aptos"/>
+                <a:cs typeface="Aptos"/>
+              </a:rPr>
+              <a:t>Segment</a:t>
+            </a:r>
+          </a:p>
+        </p:txBody>
+      </p:sp>
+      <p:sp>
+        <p:nvSpPr>
+          <p:cNvPr id="12" name="Rectangle 11">
+            <a:extLst>
+              <a:ext uri="{FF2B5EF4-FFF2-40B4-BE49-F238E27FC236}">
+                <a16:creationId xmlns:a16="http://schemas.microsoft.com/office/drawing/2014/main" id="{24FDC713-BAB5-4B3C-9A52-0C42A282EADC}"/>
+              </a:ext>
+            </a:extLst>
+          </p:cNvPr>
+          <p:cNvSpPr>
+            <a:spLocks noGrp="1"/>
+          </p:cNvSpPr>
+          <p:nvPr/>
+        </p:nvSpPr>
+        <p:spPr>
+          <a:xfrm>
+            <a:off x="3243263" y="2414588"/>
+            <a:ext cx="714375" cy="142875"/>
+          </a:xfrm>
+          <a:prstGeom prst="rect">
+            <a:avLst/>
+          </a:prstGeom>
+          <a:solidFill>
+            <a:srgbClr val="000000">
+              <a:alpha val="0"/>
+            </a:srgbClr>
+          </a:solidFill>
+          <a:ln w="0">
+            <a:solidFill>
+              <a:srgbClr val="000000">
+                <a:alpha val="0"/>
+              </a:srgbClr>
+            </a:solidFill>
+            <a:prstDash val="solid"/>
+          </a:ln>
+        </p:spPr>
+        <p:txBody>
+          <a:bodyPr lIns="0" tIns="0" rIns="0" bIns="0" anchor="t"/>
+          <a:lstStyle/>
+          <a:p>
+            <a:pPr algn="r">
+              <a:defRPr sz="900" b="1">
+                <a:solidFill>
+                  <a:srgbClr val="6B7280"/>
+                </a:solidFill>
+                <a:latin typeface="Aptos"/>
+                <a:ea typeface="Aptos"/>
+                <a:cs typeface="Aptos"/>
+              </a:defRPr>
+            </a:pPr>
+            <a:r>
+              <a:rPr sz="675" b="1">
+                <a:solidFill>
+                  <a:srgbClr val="6B7280"/>
+                </a:solidFill>
+                <a:latin typeface="Aptos"/>
+                <a:ea typeface="Aptos"/>
+                <a:cs typeface="Aptos"/>
+              </a:rPr>
+              <a:t>Customers</a:t>
+            </a:r>
+          </a:p>
+        </p:txBody>
+      </p:sp>
+      <p:sp>
+        <p:nvSpPr>
+          <p:cNvPr id="13" name="Rectangle 12">
+            <a:extLst>
+              <a:ext uri="{FF2B5EF4-FFF2-40B4-BE49-F238E27FC236}">
+                <a16:creationId xmlns:a16="http://schemas.microsoft.com/office/drawing/2014/main" id="{75C06582-16D6-4C8E-AB66-F3E4D554AB7B}"/>
+              </a:ext>
+            </a:extLst>
+          </p:cNvPr>
+          <p:cNvSpPr>
+            <a:spLocks noGrp="1"/>
+          </p:cNvSpPr>
+          <p:nvPr/>
+        </p:nvSpPr>
+        <p:spPr>
+          <a:xfrm>
+            <a:off x="4171951" y="2414588"/>
+            <a:ext cx="535781" cy="142875"/>
+          </a:xfrm>
+          <a:prstGeom prst="rect">
+            <a:avLst/>
+          </a:prstGeom>
+          <a:solidFill>
+            <a:srgbClr val="000000">
+              <a:alpha val="0"/>
+            </a:srgbClr>
+          </a:solidFill>
+          <a:ln w="0">
+            <a:solidFill>
+              <a:srgbClr val="000000">
+                <a:alpha val="0"/>
+              </a:srgbClr>
+            </a:solidFill>
+            <a:prstDash val="solid"/>
+          </a:ln>
+        </p:spPr>
+        <p:txBody>
+          <a:bodyPr lIns="0" tIns="0" rIns="0" bIns="0" anchor="t"/>
+          <a:lstStyle/>
+          <a:p>
+            <a:pPr algn="r">
+              <a:defRPr sz="900" b="1">
+                <a:solidFill>
+                  <a:srgbClr val="6B7280"/>
+                </a:solidFill>
+                <a:latin typeface="Aptos"/>
+                <a:ea typeface="Aptos"/>
+                <a:cs typeface="Aptos"/>
+              </a:defRPr>
+            </a:pPr>
+            <a:r>
+              <a:rPr sz="675" b="1">
+                <a:solidFill>
+                  <a:srgbClr val="6B7280"/>
+                </a:solidFill>
+                <a:latin typeface="Aptos"/>
+                <a:ea typeface="Aptos"/>
+                <a:cs typeface="Aptos"/>
+              </a:rPr>
+              <a:t>Share</a:t>
+            </a:r>
+          </a:p>
+        </p:txBody>
+      </p:sp>
+      <p:sp>
+        <p:nvSpPr>
+          <p:cNvPr id="14" name="Rectangle 13">
+            <a:extLst>
+              <a:ext uri="{FF2B5EF4-FFF2-40B4-BE49-F238E27FC236}">
+                <a16:creationId xmlns:a16="http://schemas.microsoft.com/office/drawing/2014/main" id="{5072A716-C31A-49F4-9AAA-AF79D6BD62DD}"/>
+              </a:ext>
+            </a:extLst>
+          </p:cNvPr>
+          <p:cNvSpPr>
+            <a:spLocks noGrp="1"/>
+          </p:cNvSpPr>
+          <p:nvPr/>
+        </p:nvSpPr>
+        <p:spPr>
+          <a:xfrm>
+            <a:off x="4993482" y="2414588"/>
+            <a:ext cx="750094" cy="142875"/>
+          </a:xfrm>
+          <a:prstGeom prst="rect">
+            <a:avLst/>
+          </a:prstGeom>
+          <a:solidFill>
+            <a:srgbClr val="000000">
+              <a:alpha val="0"/>
+            </a:srgbClr>
+          </a:solidFill>
+          <a:ln w="0">
+            <a:solidFill>
+              <a:srgbClr val="000000">
+                <a:alpha val="0"/>
+              </a:srgbClr>
+            </a:solidFill>
+            <a:prstDash val="solid"/>
+          </a:ln>
+        </p:spPr>
+        <p:txBody>
+          <a:bodyPr lIns="0" tIns="0" rIns="0" bIns="0" anchor="t"/>
+          <a:lstStyle/>
+          <a:p>
+            <a:pPr algn="r">
+              <a:defRPr sz="900" b="1">
+                <a:solidFill>
+                  <a:srgbClr val="6B7280"/>
+                </a:solidFill>
+                <a:latin typeface="Aptos"/>
+                <a:ea typeface="Aptos"/>
+                <a:cs typeface="Aptos"/>
+              </a:defRPr>
+            </a:pPr>
+            <a:r>
+              <a:rPr sz="675" b="1">
+                <a:solidFill>
+                  <a:srgbClr val="6B7280"/>
+                </a:solidFill>
+                <a:latin typeface="Aptos"/>
+                <a:ea typeface="Aptos"/>
+                <a:cs typeface="Aptos"/>
+              </a:rPr>
+              <a:t>Gross sales</a:t>
+            </a:r>
+          </a:p>
+        </p:txBody>
+      </p:sp>
+      <p:sp>
+        <p:nvSpPr>
+          <p:cNvPr id="15" name="Rectangle 14">
+            <a:extLst>
+              <a:ext uri="{FF2B5EF4-FFF2-40B4-BE49-F238E27FC236}">
+                <a16:creationId xmlns:a16="http://schemas.microsoft.com/office/drawing/2014/main" id="{F8301A46-825C-4089-9952-19DB9232AFDF}"/>
+              </a:ext>
+            </a:extLst>
+          </p:cNvPr>
+          <p:cNvSpPr>
+            <a:spLocks noGrp="1"/>
+          </p:cNvSpPr>
+          <p:nvPr/>
+        </p:nvSpPr>
+        <p:spPr>
+          <a:xfrm>
+            <a:off x="5886450" y="2414588"/>
+            <a:ext cx="1750219" cy="142875"/>
+          </a:xfrm>
+          <a:prstGeom prst="rect">
+            <a:avLst/>
+          </a:prstGeom>
+          <a:solidFill>
+            <a:srgbClr val="000000">
+              <a:alpha val="0"/>
+            </a:srgbClr>
+          </a:solidFill>
+          <a:ln w="0">
+            <a:solidFill>
+              <a:srgbClr val="000000">
+                <a:alpha val="0"/>
+              </a:srgbClr>
+            </a:solidFill>
+            <a:prstDash val="solid"/>
+          </a:ln>
+        </p:spPr>
+        <p:txBody>
+          <a:bodyPr lIns="0" tIns="0" rIns="0" bIns="0" anchor="t"/>
+          <a:lstStyle/>
+          <a:p>
+            <a:pPr algn="l">
+              <a:defRPr sz="900" b="1">
+                <a:solidFill>
+                  <a:srgbClr val="6B7280"/>
+                </a:solidFill>
+                <a:latin typeface="Aptos"/>
+                <a:ea typeface="Aptos"/>
+                <a:cs typeface="Aptos"/>
+              </a:defRPr>
+            </a:pPr>
+            <a:r>
+              <a:rPr sz="675" b="1">
+                <a:solidFill>
+                  <a:srgbClr val="6B7280"/>
+                </a:solidFill>
+                <a:latin typeface="Aptos"/>
+                <a:ea typeface="Aptos"/>
+                <a:cs typeface="Aptos"/>
+              </a:rPr>
+              <a:t>Campaign use</a:t>
+            </a:r>
+          </a:p>
+        </p:txBody>
+      </p:sp>
+      <p:sp>
+        <p:nvSpPr>
+          <p:cNvPr id="16" name="Rectangle 15">
+            <a:extLst>
+              <a:ext uri="{FF2B5EF4-FFF2-40B4-BE49-F238E27FC236}">
+                <a16:creationId xmlns:a16="http://schemas.microsoft.com/office/drawing/2014/main" id="{23A45074-71C8-4EA9-BA39-FAD9DD7361AB}"/>
+              </a:ext>
+            </a:extLst>
+          </p:cNvPr>
+          <p:cNvSpPr>
+            <a:spLocks noGrp="1"/>
+          </p:cNvSpPr>
+          <p:nvPr/>
+        </p:nvSpPr>
+        <p:spPr>
+          <a:xfrm>
+            <a:off x="457200" y="2921794"/>
+            <a:ext cx="7786688" cy="7144"/>
+          </a:xfrm>
+          <a:prstGeom prst="rect">
+            <a:avLst/>
+          </a:prstGeom>
+          <a:solidFill>
+            <a:srgbClr val="D9DEE7"/>
+          </a:solidFill>
+          <a:ln w="0">
+            <a:solidFill>
+              <a:srgbClr val="000000">
+                <a:alpha val="0"/>
+              </a:srgbClr>
+            </a:solidFill>
+            <a:prstDash val="solid"/>
+          </a:ln>
+        </p:spPr>
+        <p:txBody>
+          <a:bodyPr/>
+          <a:lstStyle/>
+          <a:p>
+            <a:endParaRPr lang="en-SG" sz="1350"/>
+          </a:p>
+        </p:txBody>
+      </p:sp>
+      <p:sp>
+        <p:nvSpPr>
+          <p:cNvPr id="17" name="Oval 16">
+            <a:extLst>
+              <a:ext uri="{FF2B5EF4-FFF2-40B4-BE49-F238E27FC236}">
+                <a16:creationId xmlns:a16="http://schemas.microsoft.com/office/drawing/2014/main" id="{CDE49212-5B99-4719-8330-6875CA54F306}"/>
+              </a:ext>
+            </a:extLst>
+          </p:cNvPr>
+          <p:cNvSpPr>
+            <a:spLocks noGrp="1"/>
+          </p:cNvSpPr>
+          <p:nvPr/>
+        </p:nvSpPr>
+        <p:spPr>
+          <a:xfrm>
+            <a:off x="457200" y="2714625"/>
+            <a:ext cx="71438" cy="71438"/>
+          </a:xfrm>
+          <a:prstGeom prst="ellipse">
+            <a:avLst/>
+          </a:prstGeom>
+          <a:solidFill>
+            <a:srgbClr val="178F8A"/>
+          </a:solidFill>
+          <a:ln w="0">
+            <a:solidFill>
+              <a:srgbClr val="000000">
+                <a:alpha val="0"/>
+              </a:srgbClr>
+            </a:solidFill>
+            <a:prstDash val="solid"/>
+          </a:ln>
+        </p:spPr>
+        <p:txBody>
+          <a:bodyPr/>
+          <a:lstStyle/>
+          <a:p>
+            <a:endParaRPr lang="en-SG" sz="1350"/>
+          </a:p>
+        </p:txBody>
+      </p:sp>
+      <p:sp>
+        <p:nvSpPr>
+          <p:cNvPr id="18" name="Rectangle 17">
+            <a:extLst>
+              <a:ext uri="{FF2B5EF4-FFF2-40B4-BE49-F238E27FC236}">
+                <a16:creationId xmlns:a16="http://schemas.microsoft.com/office/drawing/2014/main" id="{D969306B-B70E-4AF6-B322-BAD0E4C75850}"/>
+              </a:ext>
+            </a:extLst>
+          </p:cNvPr>
+          <p:cNvSpPr>
+            <a:spLocks noGrp="1"/>
+          </p:cNvSpPr>
+          <p:nvPr/>
+        </p:nvSpPr>
+        <p:spPr>
+          <a:xfrm>
+            <a:off x="585788" y="2664619"/>
+            <a:ext cx="2143125" cy="171450"/>
+          </a:xfrm>
+          <a:prstGeom prst="rect">
+            <a:avLst/>
+          </a:prstGeom>
+          <a:solidFill>
+            <a:srgbClr val="000000">
+              <a:alpha val="0"/>
+            </a:srgbClr>
+          </a:solidFill>
+          <a:ln w="0">
+            <a:solidFill>
+              <a:srgbClr val="000000">
+                <a:alpha val="0"/>
+              </a:srgbClr>
+            </a:solidFill>
+            <a:prstDash val="solid"/>
+          </a:ln>
+        </p:spPr>
+        <p:txBody>
+          <a:bodyPr lIns="0" tIns="0" rIns="0" bIns="0" anchor="t"/>
+          <a:lstStyle/>
+          <a:p>
+            <a:pPr algn="l">
+              <a:defRPr sz="1050" b="0">
+                <a:solidFill>
+                  <a:srgbClr val="1F2933"/>
+                </a:solidFill>
+                <a:latin typeface="Aptos"/>
+                <a:ea typeface="Aptos"/>
+                <a:cs typeface="Aptos"/>
+              </a:defRPr>
+            </a:pPr>
+            <a:r>
+              <a:rPr sz="788">
+                <a:solidFill>
+                  <a:srgbClr val="1F2933"/>
+                </a:solidFill>
+                <a:latin typeface="Aptos"/>
+                <a:ea typeface="Aptos"/>
+                <a:cs typeface="Aptos"/>
+              </a:rPr>
+              <a:t>Recent New Customers</a:t>
+            </a:r>
+          </a:p>
+        </p:txBody>
+      </p:sp>
+      <p:sp>
+        <p:nvSpPr>
+          <p:cNvPr id="19" name="Rectangle 18">
+            <a:extLst>
+              <a:ext uri="{FF2B5EF4-FFF2-40B4-BE49-F238E27FC236}">
+                <a16:creationId xmlns:a16="http://schemas.microsoft.com/office/drawing/2014/main" id="{E0317296-77F7-4551-B145-6FB12119D81D}"/>
+              </a:ext>
+            </a:extLst>
+          </p:cNvPr>
+          <p:cNvSpPr>
+            <a:spLocks noGrp="1"/>
+          </p:cNvSpPr>
+          <p:nvPr/>
+        </p:nvSpPr>
+        <p:spPr>
+          <a:xfrm>
+            <a:off x="2778919" y="2721769"/>
+            <a:ext cx="414338" cy="57150"/>
+          </a:xfrm>
+          <a:prstGeom prst="rect">
+            <a:avLst/>
+          </a:prstGeom>
+          <a:solidFill>
+            <a:srgbClr val="F4F6F8"/>
+          </a:solidFill>
+          <a:ln w="0">
+            <a:solidFill>
+              <a:srgbClr val="000000">
+                <a:alpha val="0"/>
+              </a:srgbClr>
+            </a:solidFill>
+            <a:prstDash val="solid"/>
+          </a:ln>
+        </p:spPr>
+        <p:txBody>
+          <a:bodyPr/>
+          <a:lstStyle/>
+          <a:p>
+            <a:endParaRPr lang="en-SG" sz="1350"/>
+          </a:p>
+        </p:txBody>
+      </p:sp>
+      <p:sp>
+        <p:nvSpPr>
+          <p:cNvPr id="20" name="Rectangle 19">
+            <a:extLst>
+              <a:ext uri="{FF2B5EF4-FFF2-40B4-BE49-F238E27FC236}">
+                <a16:creationId xmlns:a16="http://schemas.microsoft.com/office/drawing/2014/main" id="{10BE2005-6FC0-44D0-9076-1FC1E3B6AFB6}"/>
+              </a:ext>
+            </a:extLst>
+          </p:cNvPr>
+          <p:cNvSpPr>
+            <a:spLocks noGrp="1"/>
+          </p:cNvSpPr>
+          <p:nvPr/>
+        </p:nvSpPr>
+        <p:spPr>
+          <a:xfrm>
+            <a:off x="2778919" y="2721769"/>
+            <a:ext cx="398984" cy="57150"/>
+          </a:xfrm>
+          <a:prstGeom prst="rect">
+            <a:avLst/>
+          </a:prstGeom>
+          <a:solidFill>
+            <a:srgbClr val="178F8A"/>
+          </a:solidFill>
+          <a:ln w="0">
+            <a:solidFill>
+              <a:srgbClr val="000000">
+                <a:alpha val="0"/>
+              </a:srgbClr>
+            </a:solidFill>
+            <a:prstDash val="solid"/>
+          </a:ln>
+        </p:spPr>
+        <p:txBody>
+          <a:bodyPr/>
+          <a:lstStyle/>
+          <a:p>
+            <a:endParaRPr lang="en-SG" sz="1350"/>
+          </a:p>
+        </p:txBody>
+      </p:sp>
+      <p:sp>
+        <p:nvSpPr>
+          <p:cNvPr id="21" name="Rectangle 20">
+            <a:extLst>
+              <a:ext uri="{FF2B5EF4-FFF2-40B4-BE49-F238E27FC236}">
+                <a16:creationId xmlns:a16="http://schemas.microsoft.com/office/drawing/2014/main" id="{8A1F7B5B-AC00-4E13-B0C5-E01F9FBD9D2B}"/>
+              </a:ext>
+            </a:extLst>
+          </p:cNvPr>
+          <p:cNvSpPr>
+            <a:spLocks noGrp="1"/>
+          </p:cNvSpPr>
+          <p:nvPr/>
+        </p:nvSpPr>
+        <p:spPr>
+          <a:xfrm>
+            <a:off x="3243263" y="2664619"/>
+            <a:ext cx="714375" cy="171450"/>
+          </a:xfrm>
+          <a:prstGeom prst="rect">
+            <a:avLst/>
+          </a:prstGeom>
+          <a:solidFill>
+            <a:srgbClr val="000000">
+              <a:alpha val="0"/>
+            </a:srgbClr>
+          </a:solidFill>
+          <a:ln w="0">
+            <a:solidFill>
+              <a:srgbClr val="000000">
+                <a:alpha val="0"/>
+              </a:srgbClr>
+            </a:solidFill>
+            <a:prstDash val="solid"/>
+          </a:ln>
+        </p:spPr>
+        <p:txBody>
+          <a:bodyPr lIns="0" tIns="0" rIns="0" bIns="0" anchor="t"/>
+          <a:lstStyle/>
+          <a:p>
+            <a:pPr algn="r">
+              <a:defRPr sz="1050" b="0">
+                <a:solidFill>
+                  <a:srgbClr val="1F2933"/>
+                </a:solidFill>
+                <a:latin typeface="Aptos"/>
+                <a:ea typeface="Aptos"/>
+                <a:cs typeface="Aptos"/>
+              </a:defRPr>
+            </a:pPr>
+            <a:r>
+              <a:rPr sz="788">
+                <a:solidFill>
+                  <a:srgbClr val="1F2933"/>
+                </a:solidFill>
+                <a:latin typeface="Aptos"/>
+                <a:ea typeface="Aptos"/>
+                <a:cs typeface="Aptos"/>
+              </a:rPr>
+              <a:t>23,179</a:t>
+            </a:r>
+          </a:p>
+        </p:txBody>
+      </p:sp>
+      <p:sp>
+        <p:nvSpPr>
+          <p:cNvPr id="22" name="Rectangle 21">
+            <a:extLst>
+              <a:ext uri="{FF2B5EF4-FFF2-40B4-BE49-F238E27FC236}">
+                <a16:creationId xmlns:a16="http://schemas.microsoft.com/office/drawing/2014/main" id="{2261FAEB-C982-4850-B4FD-BD4D93D3DCE8}"/>
+              </a:ext>
+            </a:extLst>
+          </p:cNvPr>
+          <p:cNvSpPr>
+            <a:spLocks noGrp="1"/>
+          </p:cNvSpPr>
+          <p:nvPr/>
+        </p:nvSpPr>
+        <p:spPr>
+          <a:xfrm>
+            <a:off x="4171951" y="2664619"/>
+            <a:ext cx="535781" cy="171450"/>
+          </a:xfrm>
+          <a:prstGeom prst="rect">
+            <a:avLst/>
+          </a:prstGeom>
+          <a:solidFill>
+            <a:srgbClr val="000000">
+              <a:alpha val="0"/>
+            </a:srgbClr>
+          </a:solidFill>
+          <a:ln w="0">
+            <a:solidFill>
+              <a:srgbClr val="000000">
+                <a:alpha val="0"/>
+              </a:srgbClr>
+            </a:solidFill>
+            <a:prstDash val="solid"/>
+          </a:ln>
+        </p:spPr>
+        <p:txBody>
+          <a:bodyPr lIns="0" tIns="0" rIns="0" bIns="0" anchor="t"/>
+          <a:lstStyle/>
+          <a:p>
+            <a:pPr algn="r">
+              <a:defRPr sz="1050" b="0">
+                <a:solidFill>
+                  <a:srgbClr val="1F2933"/>
+                </a:solidFill>
+                <a:latin typeface="Aptos"/>
+                <a:ea typeface="Aptos"/>
+                <a:cs typeface="Aptos"/>
+              </a:defRPr>
+            </a:pPr>
+            <a:r>
+              <a:rPr sz="788">
+                <a:solidFill>
+                  <a:srgbClr val="1F2933"/>
+                </a:solidFill>
+                <a:latin typeface="Aptos"/>
+                <a:ea typeface="Aptos"/>
+                <a:cs typeface="Aptos"/>
+              </a:rPr>
+              <a:t>24.29%</a:t>
+            </a:r>
+          </a:p>
+        </p:txBody>
+      </p:sp>
+      <p:sp>
+        <p:nvSpPr>
+          <p:cNvPr id="23" name="Rectangle 22">
+            <a:extLst>
+              <a:ext uri="{FF2B5EF4-FFF2-40B4-BE49-F238E27FC236}">
+                <a16:creationId xmlns:a16="http://schemas.microsoft.com/office/drawing/2014/main" id="{655B8836-4F80-41FB-BB65-6021D6168B2B}"/>
+              </a:ext>
+            </a:extLst>
+          </p:cNvPr>
+          <p:cNvSpPr>
+            <a:spLocks noGrp="1"/>
+          </p:cNvSpPr>
+          <p:nvPr/>
+        </p:nvSpPr>
+        <p:spPr>
+          <a:xfrm>
+            <a:off x="4993482" y="2664619"/>
+            <a:ext cx="750094" cy="171450"/>
+          </a:xfrm>
+          <a:prstGeom prst="rect">
+            <a:avLst/>
+          </a:prstGeom>
+          <a:solidFill>
+            <a:srgbClr val="000000">
+              <a:alpha val="0"/>
+            </a:srgbClr>
+          </a:solidFill>
+          <a:ln w="0">
+            <a:solidFill>
+              <a:srgbClr val="000000">
+                <a:alpha val="0"/>
+              </a:srgbClr>
+            </a:solidFill>
+            <a:prstDash val="solid"/>
+          </a:ln>
+        </p:spPr>
+        <p:txBody>
+          <a:bodyPr lIns="0" tIns="0" rIns="0" bIns="0" anchor="t"/>
+          <a:lstStyle/>
+          <a:p>
+            <a:pPr algn="r">
+              <a:defRPr sz="1050" b="0">
+                <a:solidFill>
+                  <a:srgbClr val="1F2933"/>
+                </a:solidFill>
+                <a:latin typeface="Aptos"/>
+                <a:ea typeface="Aptos"/>
+                <a:cs typeface="Aptos"/>
+              </a:defRPr>
+            </a:pPr>
+            <a:r>
+              <a:rPr sz="788">
+                <a:solidFill>
+                  <a:srgbClr val="1F2933"/>
+                </a:solidFill>
+                <a:latin typeface="Aptos"/>
+                <a:ea typeface="Aptos"/>
+                <a:cs typeface="Aptos"/>
+              </a:rPr>
+              <a:t>R$1.46M</a:t>
+            </a:r>
+          </a:p>
+        </p:txBody>
+      </p:sp>
+      <p:sp>
+        <p:nvSpPr>
+          <p:cNvPr id="24" name="Rectangle 23">
+            <a:extLst>
+              <a:ext uri="{FF2B5EF4-FFF2-40B4-BE49-F238E27FC236}">
+                <a16:creationId xmlns:a16="http://schemas.microsoft.com/office/drawing/2014/main" id="{D9AA8E18-CC3A-4996-928D-77C8400CBCE2}"/>
+              </a:ext>
+            </a:extLst>
+          </p:cNvPr>
+          <p:cNvSpPr>
+            <a:spLocks noGrp="1"/>
+          </p:cNvSpPr>
+          <p:nvPr/>
+        </p:nvSpPr>
+        <p:spPr>
+          <a:xfrm>
+            <a:off x="5886450" y="2664619"/>
+            <a:ext cx="1785938" cy="171450"/>
+          </a:xfrm>
+          <a:prstGeom prst="rect">
+            <a:avLst/>
+          </a:prstGeom>
+          <a:solidFill>
+            <a:srgbClr val="000000">
+              <a:alpha val="0"/>
+            </a:srgbClr>
+          </a:solidFill>
+          <a:ln w="0">
+            <a:solidFill>
+              <a:srgbClr val="000000">
+                <a:alpha val="0"/>
+              </a:srgbClr>
+            </a:solidFill>
+            <a:prstDash val="solid"/>
+          </a:ln>
+        </p:spPr>
+        <p:txBody>
+          <a:bodyPr lIns="0" tIns="0" rIns="0" bIns="0" anchor="t"/>
+          <a:lstStyle/>
+          <a:p>
+            <a:pPr algn="l">
+              <a:defRPr sz="975" b="0">
+                <a:solidFill>
+                  <a:srgbClr val="6B7280"/>
+                </a:solidFill>
+                <a:latin typeface="Aptos"/>
+                <a:ea typeface="Aptos"/>
+                <a:cs typeface="Aptos"/>
+              </a:defRPr>
+            </a:pPr>
+            <a:r>
+              <a:rPr sz="731">
+                <a:solidFill>
+                  <a:srgbClr val="6B7280"/>
+                </a:solidFill>
+                <a:latin typeface="Aptos"/>
+                <a:ea typeface="Aptos"/>
+                <a:cs typeface="Aptos"/>
+              </a:rPr>
+              <a:t>Second-purchase coupon</a:t>
+            </a:r>
+          </a:p>
+        </p:txBody>
+      </p:sp>
+      <p:sp>
+        <p:nvSpPr>
+          <p:cNvPr id="25" name="Rectangle 24">
+            <a:extLst>
+              <a:ext uri="{FF2B5EF4-FFF2-40B4-BE49-F238E27FC236}">
+                <a16:creationId xmlns:a16="http://schemas.microsoft.com/office/drawing/2014/main" id="{F05AD2AB-2880-474A-8D8C-9ACC242B76F8}"/>
+              </a:ext>
+            </a:extLst>
+          </p:cNvPr>
+          <p:cNvSpPr>
+            <a:spLocks noGrp="1"/>
+          </p:cNvSpPr>
+          <p:nvPr/>
+        </p:nvSpPr>
+        <p:spPr>
+          <a:xfrm>
+            <a:off x="457200" y="3221832"/>
+            <a:ext cx="7786688" cy="7144"/>
+          </a:xfrm>
+          <a:prstGeom prst="rect">
+            <a:avLst/>
+          </a:prstGeom>
+          <a:solidFill>
+            <a:srgbClr val="D9DEE7"/>
+          </a:solidFill>
+          <a:ln w="0">
+            <a:solidFill>
+              <a:srgbClr val="000000">
+                <a:alpha val="0"/>
+              </a:srgbClr>
+            </a:solidFill>
+            <a:prstDash val="solid"/>
+          </a:ln>
+        </p:spPr>
+        <p:txBody>
+          <a:bodyPr/>
+          <a:lstStyle/>
+          <a:p>
+            <a:endParaRPr lang="en-SG" sz="1350"/>
+          </a:p>
+        </p:txBody>
+      </p:sp>
+      <p:sp>
+        <p:nvSpPr>
+          <p:cNvPr id="26" name="Oval 25">
+            <a:extLst>
+              <a:ext uri="{FF2B5EF4-FFF2-40B4-BE49-F238E27FC236}">
+                <a16:creationId xmlns:a16="http://schemas.microsoft.com/office/drawing/2014/main" id="{D9BD9122-FCFA-42EA-AF11-4EA14CC0038E}"/>
+              </a:ext>
+            </a:extLst>
+          </p:cNvPr>
+          <p:cNvSpPr>
+            <a:spLocks noGrp="1"/>
+          </p:cNvSpPr>
+          <p:nvPr/>
+        </p:nvSpPr>
+        <p:spPr>
+          <a:xfrm>
+            <a:off x="457200" y="3014662"/>
+            <a:ext cx="71438" cy="71438"/>
+          </a:xfrm>
+          <a:prstGeom prst="ellipse">
+            <a:avLst/>
+          </a:prstGeom>
+          <a:solidFill>
+            <a:srgbClr val="178F8A"/>
+          </a:solidFill>
+          <a:ln w="0">
+            <a:solidFill>
+              <a:srgbClr val="000000">
+                <a:alpha val="0"/>
+              </a:srgbClr>
+            </a:solidFill>
+            <a:prstDash val="solid"/>
+          </a:ln>
+        </p:spPr>
+        <p:txBody>
+          <a:bodyPr/>
+          <a:lstStyle/>
+          <a:p>
+            <a:endParaRPr lang="en-SG" sz="1350"/>
+          </a:p>
+        </p:txBody>
+      </p:sp>
+      <p:sp>
+        <p:nvSpPr>
+          <p:cNvPr id="27" name="Rectangle 26">
+            <a:extLst>
+              <a:ext uri="{FF2B5EF4-FFF2-40B4-BE49-F238E27FC236}">
+                <a16:creationId xmlns:a16="http://schemas.microsoft.com/office/drawing/2014/main" id="{E671D850-6F57-4004-A59B-65FFB1FAE14F}"/>
+              </a:ext>
+            </a:extLst>
+          </p:cNvPr>
+          <p:cNvSpPr>
+            <a:spLocks noGrp="1"/>
+          </p:cNvSpPr>
+          <p:nvPr/>
+        </p:nvSpPr>
+        <p:spPr>
+          <a:xfrm>
+            <a:off x="585788" y="2964656"/>
+            <a:ext cx="2143125" cy="171450"/>
+          </a:xfrm>
+          <a:prstGeom prst="rect">
+            <a:avLst/>
+          </a:prstGeom>
+          <a:solidFill>
+            <a:srgbClr val="000000">
+              <a:alpha val="0"/>
+            </a:srgbClr>
+          </a:solidFill>
+          <a:ln w="0">
+            <a:solidFill>
+              <a:srgbClr val="000000">
+                <a:alpha val="0"/>
+              </a:srgbClr>
+            </a:solidFill>
+            <a:prstDash val="solid"/>
+          </a:ln>
+        </p:spPr>
+        <p:txBody>
+          <a:bodyPr lIns="0" tIns="0" rIns="0" bIns="0" anchor="t"/>
+          <a:lstStyle/>
+          <a:p>
+            <a:pPr algn="l">
+              <a:defRPr sz="1050" b="0">
+                <a:solidFill>
+                  <a:srgbClr val="1F2933"/>
+                </a:solidFill>
+                <a:latin typeface="Aptos"/>
+                <a:ea typeface="Aptos"/>
+                <a:cs typeface="Aptos"/>
+              </a:defRPr>
+            </a:pPr>
+            <a:r>
+              <a:rPr sz="788">
+                <a:solidFill>
+                  <a:srgbClr val="1F2933"/>
+                </a:solidFill>
+                <a:latin typeface="Aptos"/>
+                <a:ea typeface="Aptos"/>
+                <a:cs typeface="Aptos"/>
+              </a:rPr>
+              <a:t>Core / Mid-Value Customers</a:t>
+            </a:r>
+          </a:p>
+        </p:txBody>
+      </p:sp>
+      <p:sp>
+        <p:nvSpPr>
+          <p:cNvPr id="28" name="Rectangle 27">
+            <a:extLst>
+              <a:ext uri="{FF2B5EF4-FFF2-40B4-BE49-F238E27FC236}">
+                <a16:creationId xmlns:a16="http://schemas.microsoft.com/office/drawing/2014/main" id="{9DEE9CEC-55C9-47AF-B46A-30C1FF2F8FAB}"/>
+              </a:ext>
+            </a:extLst>
+          </p:cNvPr>
+          <p:cNvSpPr>
+            <a:spLocks noGrp="1"/>
+          </p:cNvSpPr>
+          <p:nvPr/>
+        </p:nvSpPr>
+        <p:spPr>
+          <a:xfrm>
+            <a:off x="2778919" y="3021806"/>
+            <a:ext cx="414338" cy="57150"/>
+          </a:xfrm>
+          <a:prstGeom prst="rect">
+            <a:avLst/>
+          </a:prstGeom>
+          <a:solidFill>
+            <a:srgbClr val="F4F6F8"/>
+          </a:solidFill>
+          <a:ln w="0">
+            <a:solidFill>
+              <a:srgbClr val="000000">
+                <a:alpha val="0"/>
+              </a:srgbClr>
+            </a:solidFill>
+            <a:prstDash val="solid"/>
+          </a:ln>
+        </p:spPr>
+        <p:txBody>
+          <a:bodyPr/>
+          <a:lstStyle/>
+          <a:p>
+            <a:endParaRPr lang="en-SG" sz="1350"/>
+          </a:p>
+        </p:txBody>
+      </p:sp>
+      <p:sp>
+        <p:nvSpPr>
+          <p:cNvPr id="29" name="Rectangle 28">
+            <a:extLst>
+              <a:ext uri="{FF2B5EF4-FFF2-40B4-BE49-F238E27FC236}">
+                <a16:creationId xmlns:a16="http://schemas.microsoft.com/office/drawing/2014/main" id="{F41CC0DF-B339-4E06-BFB1-C05D20565E5C}"/>
+              </a:ext>
+            </a:extLst>
+          </p:cNvPr>
+          <p:cNvSpPr>
+            <a:spLocks noGrp="1"/>
+          </p:cNvSpPr>
+          <p:nvPr/>
+        </p:nvSpPr>
+        <p:spPr>
+          <a:xfrm>
+            <a:off x="2778919" y="3021806"/>
+            <a:ext cx="414338" cy="57150"/>
+          </a:xfrm>
+          <a:prstGeom prst="rect">
+            <a:avLst/>
+          </a:prstGeom>
+          <a:solidFill>
+            <a:srgbClr val="178F8A"/>
+          </a:solidFill>
+          <a:ln w="0">
+            <a:solidFill>
+              <a:srgbClr val="000000">
+                <a:alpha val="0"/>
+              </a:srgbClr>
+            </a:solidFill>
+            <a:prstDash val="solid"/>
+          </a:ln>
+        </p:spPr>
+        <p:txBody>
+          <a:bodyPr/>
+          <a:lstStyle/>
+          <a:p>
+            <a:endParaRPr lang="en-SG" sz="1350"/>
+          </a:p>
+        </p:txBody>
+      </p:sp>
+      <p:sp>
+        <p:nvSpPr>
+          <p:cNvPr id="30" name="Rectangle 29">
+            <a:extLst>
+              <a:ext uri="{FF2B5EF4-FFF2-40B4-BE49-F238E27FC236}">
+                <a16:creationId xmlns:a16="http://schemas.microsoft.com/office/drawing/2014/main" id="{BD64E74A-6489-4C2A-B5E4-B88D9AF9BA74}"/>
+              </a:ext>
+            </a:extLst>
+          </p:cNvPr>
+          <p:cNvSpPr>
+            <a:spLocks noGrp="1"/>
+          </p:cNvSpPr>
+          <p:nvPr/>
+        </p:nvSpPr>
+        <p:spPr>
+          <a:xfrm>
+            <a:off x="3243263" y="2964656"/>
+            <a:ext cx="714375" cy="171450"/>
+          </a:xfrm>
+          <a:prstGeom prst="rect">
+            <a:avLst/>
+          </a:prstGeom>
+          <a:solidFill>
+            <a:srgbClr val="000000">
+              <a:alpha val="0"/>
+            </a:srgbClr>
+          </a:solidFill>
+          <a:ln w="0">
+            <a:solidFill>
+              <a:srgbClr val="000000">
+                <a:alpha val="0"/>
+              </a:srgbClr>
+            </a:solidFill>
+            <a:prstDash val="solid"/>
+          </a:ln>
+        </p:spPr>
+        <p:txBody>
+          <a:bodyPr lIns="0" tIns="0" rIns="0" bIns="0" anchor="t"/>
+          <a:lstStyle/>
+          <a:p>
+            <a:pPr algn="r">
+              <a:defRPr sz="1050" b="0">
+                <a:solidFill>
+                  <a:srgbClr val="1F2933"/>
+                </a:solidFill>
+                <a:latin typeface="Aptos"/>
+                <a:ea typeface="Aptos"/>
+                <a:cs typeface="Aptos"/>
+              </a:defRPr>
+            </a:pPr>
+            <a:r>
+              <a:rPr sz="788">
+                <a:solidFill>
+                  <a:srgbClr val="1F2933"/>
+                </a:solidFill>
+                <a:latin typeface="Aptos"/>
+                <a:ea typeface="Aptos"/>
+                <a:cs typeface="Aptos"/>
+              </a:rPr>
+              <a:t>24,071</a:t>
+            </a:r>
+          </a:p>
+        </p:txBody>
+      </p:sp>
+      <p:sp>
+        <p:nvSpPr>
+          <p:cNvPr id="31" name="Rectangle 30">
+            <a:extLst>
+              <a:ext uri="{FF2B5EF4-FFF2-40B4-BE49-F238E27FC236}">
+                <a16:creationId xmlns:a16="http://schemas.microsoft.com/office/drawing/2014/main" id="{11546B33-A7BE-42BA-94B7-0CF0C2161380}"/>
+              </a:ext>
+            </a:extLst>
+          </p:cNvPr>
+          <p:cNvSpPr>
+            <a:spLocks noGrp="1"/>
+          </p:cNvSpPr>
+          <p:nvPr/>
+        </p:nvSpPr>
+        <p:spPr>
+          <a:xfrm>
+            <a:off x="4171951" y="2964656"/>
+            <a:ext cx="535781" cy="171450"/>
+          </a:xfrm>
+          <a:prstGeom prst="rect">
+            <a:avLst/>
+          </a:prstGeom>
+          <a:solidFill>
+            <a:srgbClr val="000000">
+              <a:alpha val="0"/>
+            </a:srgbClr>
+          </a:solidFill>
+          <a:ln w="0">
+            <a:solidFill>
+              <a:srgbClr val="000000">
+                <a:alpha val="0"/>
+              </a:srgbClr>
+            </a:solidFill>
+            <a:prstDash val="solid"/>
+          </a:ln>
+        </p:spPr>
+        <p:txBody>
+          <a:bodyPr lIns="0" tIns="0" rIns="0" bIns="0" anchor="t"/>
+          <a:lstStyle/>
+          <a:p>
+            <a:pPr algn="r">
+              <a:defRPr sz="1050" b="0">
+                <a:solidFill>
+                  <a:srgbClr val="1F2933"/>
+                </a:solidFill>
+                <a:latin typeface="Aptos"/>
+                <a:ea typeface="Aptos"/>
+                <a:cs typeface="Aptos"/>
+              </a:defRPr>
+            </a:pPr>
+            <a:r>
+              <a:rPr sz="788">
+                <a:solidFill>
+                  <a:srgbClr val="1F2933"/>
+                </a:solidFill>
+                <a:latin typeface="Aptos"/>
+                <a:ea typeface="Aptos"/>
+                <a:cs typeface="Aptos"/>
+              </a:rPr>
+              <a:t>25.23%</a:t>
+            </a:r>
+          </a:p>
+        </p:txBody>
+      </p:sp>
+      <p:sp>
+        <p:nvSpPr>
+          <p:cNvPr id="32" name="Rectangle 31">
+            <a:extLst>
+              <a:ext uri="{FF2B5EF4-FFF2-40B4-BE49-F238E27FC236}">
+                <a16:creationId xmlns:a16="http://schemas.microsoft.com/office/drawing/2014/main" id="{54D4DC83-D9FA-468D-A98A-E90DA5B2924F}"/>
+              </a:ext>
+            </a:extLst>
+          </p:cNvPr>
+          <p:cNvSpPr>
+            <a:spLocks noGrp="1"/>
+          </p:cNvSpPr>
+          <p:nvPr/>
+        </p:nvSpPr>
+        <p:spPr>
+          <a:xfrm>
+            <a:off x="4993482" y="2964656"/>
+            <a:ext cx="750094" cy="171450"/>
+          </a:xfrm>
+          <a:prstGeom prst="rect">
+            <a:avLst/>
+          </a:prstGeom>
+          <a:solidFill>
+            <a:srgbClr val="000000">
+              <a:alpha val="0"/>
+            </a:srgbClr>
+          </a:solidFill>
+          <a:ln w="0">
+            <a:solidFill>
+              <a:srgbClr val="000000">
+                <a:alpha val="0"/>
+              </a:srgbClr>
+            </a:solidFill>
+            <a:prstDash val="solid"/>
+          </a:ln>
+        </p:spPr>
+        <p:txBody>
+          <a:bodyPr lIns="0" tIns="0" rIns="0" bIns="0" anchor="t"/>
+          <a:lstStyle/>
+          <a:p>
+            <a:pPr algn="r">
+              <a:defRPr sz="1050" b="0">
+                <a:solidFill>
+                  <a:srgbClr val="1F2933"/>
+                </a:solidFill>
+                <a:latin typeface="Aptos"/>
+                <a:ea typeface="Aptos"/>
+                <a:cs typeface="Aptos"/>
+              </a:defRPr>
+            </a:pPr>
+            <a:r>
+              <a:rPr sz="788">
+                <a:solidFill>
+                  <a:srgbClr val="1F2933"/>
+                </a:solidFill>
+                <a:latin typeface="Aptos"/>
+                <a:ea typeface="Aptos"/>
+                <a:cs typeface="Aptos"/>
+              </a:rPr>
+              <a:t>R$2.70M</a:t>
+            </a:r>
+          </a:p>
+        </p:txBody>
+      </p:sp>
+      <p:sp>
+        <p:nvSpPr>
+          <p:cNvPr id="33" name="Rectangle 32">
+            <a:extLst>
+              <a:ext uri="{FF2B5EF4-FFF2-40B4-BE49-F238E27FC236}">
+                <a16:creationId xmlns:a16="http://schemas.microsoft.com/office/drawing/2014/main" id="{4DBA36F2-B128-4834-B01A-0171B9B04A8F}"/>
+              </a:ext>
+            </a:extLst>
+          </p:cNvPr>
+          <p:cNvSpPr>
+            <a:spLocks noGrp="1"/>
+          </p:cNvSpPr>
+          <p:nvPr/>
+        </p:nvSpPr>
+        <p:spPr>
+          <a:xfrm>
+            <a:off x="5886450" y="2964656"/>
+            <a:ext cx="1785938" cy="171450"/>
+          </a:xfrm>
+          <a:prstGeom prst="rect">
+            <a:avLst/>
+          </a:prstGeom>
+          <a:solidFill>
+            <a:srgbClr val="000000">
+              <a:alpha val="0"/>
+            </a:srgbClr>
+          </a:solidFill>
+          <a:ln w="0">
+            <a:solidFill>
+              <a:srgbClr val="000000">
+                <a:alpha val="0"/>
+              </a:srgbClr>
+            </a:solidFill>
+            <a:prstDash val="solid"/>
+          </a:ln>
+        </p:spPr>
+        <p:txBody>
+          <a:bodyPr lIns="0" tIns="0" rIns="0" bIns="0" anchor="t"/>
+          <a:lstStyle/>
+          <a:p>
+            <a:pPr algn="l">
+              <a:defRPr sz="975" b="0">
+                <a:solidFill>
+                  <a:srgbClr val="6B7280"/>
+                </a:solidFill>
+                <a:latin typeface="Aptos"/>
+                <a:ea typeface="Aptos"/>
+                <a:cs typeface="Aptos"/>
+              </a:defRPr>
+            </a:pPr>
+            <a:r>
+              <a:rPr sz="731">
+                <a:solidFill>
+                  <a:srgbClr val="6B7280"/>
+                </a:solidFill>
+                <a:latin typeface="Aptos"/>
+                <a:ea typeface="Aptos"/>
+                <a:cs typeface="Aptos"/>
+              </a:rPr>
+              <a:t>General nurture</a:t>
+            </a:r>
+          </a:p>
+        </p:txBody>
+      </p:sp>
+      <p:sp>
+        <p:nvSpPr>
+          <p:cNvPr id="34" name="Rectangle 33">
+            <a:extLst>
+              <a:ext uri="{FF2B5EF4-FFF2-40B4-BE49-F238E27FC236}">
+                <a16:creationId xmlns:a16="http://schemas.microsoft.com/office/drawing/2014/main" id="{B9EE70B8-50B9-44F1-B000-38EFF52C5ED9}"/>
+              </a:ext>
+            </a:extLst>
+          </p:cNvPr>
+          <p:cNvSpPr>
+            <a:spLocks noGrp="1"/>
+          </p:cNvSpPr>
+          <p:nvPr/>
+        </p:nvSpPr>
+        <p:spPr>
+          <a:xfrm>
+            <a:off x="457200" y="3521869"/>
+            <a:ext cx="7786688" cy="7144"/>
+          </a:xfrm>
+          <a:prstGeom prst="rect">
+            <a:avLst/>
+          </a:prstGeom>
+          <a:solidFill>
+            <a:srgbClr val="D9DEE7"/>
+          </a:solidFill>
+          <a:ln w="0">
+            <a:solidFill>
+              <a:srgbClr val="000000">
+                <a:alpha val="0"/>
+              </a:srgbClr>
+            </a:solidFill>
+            <a:prstDash val="solid"/>
+          </a:ln>
+        </p:spPr>
+        <p:txBody>
+          <a:bodyPr/>
+          <a:lstStyle/>
+          <a:p>
+            <a:endParaRPr lang="en-SG" sz="1350"/>
+          </a:p>
+        </p:txBody>
+      </p:sp>
+      <p:sp>
+        <p:nvSpPr>
+          <p:cNvPr id="35" name="Oval 34">
+            <a:extLst>
+              <a:ext uri="{FF2B5EF4-FFF2-40B4-BE49-F238E27FC236}">
+                <a16:creationId xmlns:a16="http://schemas.microsoft.com/office/drawing/2014/main" id="{14A7EF2E-B74A-4C58-BFF3-EBF427302AD9}"/>
+              </a:ext>
+            </a:extLst>
+          </p:cNvPr>
+          <p:cNvSpPr>
+            <a:spLocks noGrp="1"/>
+          </p:cNvSpPr>
+          <p:nvPr/>
+        </p:nvSpPr>
+        <p:spPr>
+          <a:xfrm>
+            <a:off x="457200" y="3314700"/>
+            <a:ext cx="71438" cy="71438"/>
+          </a:xfrm>
+          <a:prstGeom prst="ellipse">
+            <a:avLst/>
+          </a:prstGeom>
+          <a:solidFill>
+            <a:srgbClr val="6B7280"/>
+          </a:solidFill>
+          <a:ln w="0">
+            <a:solidFill>
+              <a:srgbClr val="000000">
+                <a:alpha val="0"/>
+              </a:srgbClr>
+            </a:solidFill>
+            <a:prstDash val="solid"/>
+          </a:ln>
+        </p:spPr>
+        <p:txBody>
+          <a:bodyPr/>
+          <a:lstStyle/>
+          <a:p>
+            <a:endParaRPr lang="en-SG" sz="1350"/>
+          </a:p>
+        </p:txBody>
+      </p:sp>
+      <p:sp>
+        <p:nvSpPr>
+          <p:cNvPr id="36" name="Rectangle 35">
+            <a:extLst>
+              <a:ext uri="{FF2B5EF4-FFF2-40B4-BE49-F238E27FC236}">
+                <a16:creationId xmlns:a16="http://schemas.microsoft.com/office/drawing/2014/main" id="{4517A001-9223-4535-8DEE-85A350C80203}"/>
+              </a:ext>
+            </a:extLst>
+          </p:cNvPr>
+          <p:cNvSpPr>
+            <a:spLocks noGrp="1"/>
+          </p:cNvSpPr>
+          <p:nvPr/>
+        </p:nvSpPr>
+        <p:spPr>
+          <a:xfrm>
+            <a:off x="585788" y="3264694"/>
+            <a:ext cx="2143125" cy="171450"/>
+          </a:xfrm>
+          <a:prstGeom prst="rect">
+            <a:avLst/>
+          </a:prstGeom>
+          <a:solidFill>
+            <a:srgbClr val="000000">
+              <a:alpha val="0"/>
+            </a:srgbClr>
+          </a:solidFill>
+          <a:ln w="0">
+            <a:solidFill>
+              <a:srgbClr val="000000">
+                <a:alpha val="0"/>
+              </a:srgbClr>
+            </a:solidFill>
+            <a:prstDash val="solid"/>
+          </a:ln>
+        </p:spPr>
+        <p:txBody>
+          <a:bodyPr lIns="0" tIns="0" rIns="0" bIns="0" anchor="t"/>
+          <a:lstStyle/>
+          <a:p>
+            <a:pPr algn="l">
+              <a:defRPr sz="1050" b="0">
+                <a:solidFill>
+                  <a:srgbClr val="1F2933"/>
+                </a:solidFill>
+                <a:latin typeface="Aptos"/>
+                <a:ea typeface="Aptos"/>
+                <a:cs typeface="Aptos"/>
+              </a:defRPr>
+            </a:pPr>
+            <a:r>
+              <a:rPr sz="788">
+                <a:solidFill>
+                  <a:srgbClr val="1F2933"/>
+                </a:solidFill>
+                <a:latin typeface="Aptos"/>
+                <a:ea typeface="Aptos"/>
+                <a:cs typeface="Aptos"/>
+              </a:rPr>
+              <a:t>Dormant Low Value</a:t>
+            </a:r>
+          </a:p>
+        </p:txBody>
+      </p:sp>
+      <p:sp>
+        <p:nvSpPr>
+          <p:cNvPr id="37" name="Rectangle 36">
+            <a:extLst>
+              <a:ext uri="{FF2B5EF4-FFF2-40B4-BE49-F238E27FC236}">
+                <a16:creationId xmlns:a16="http://schemas.microsoft.com/office/drawing/2014/main" id="{0618641B-A9BA-4C96-998E-AF9DF040FC52}"/>
+              </a:ext>
+            </a:extLst>
+          </p:cNvPr>
+          <p:cNvSpPr>
+            <a:spLocks noGrp="1"/>
+          </p:cNvSpPr>
+          <p:nvPr/>
+        </p:nvSpPr>
+        <p:spPr>
+          <a:xfrm>
+            <a:off x="2778919" y="3321844"/>
+            <a:ext cx="414338" cy="57150"/>
+          </a:xfrm>
+          <a:prstGeom prst="rect">
+            <a:avLst/>
+          </a:prstGeom>
+          <a:solidFill>
+            <a:srgbClr val="F4F6F8"/>
+          </a:solidFill>
+          <a:ln w="0">
+            <a:solidFill>
+              <a:srgbClr val="000000">
+                <a:alpha val="0"/>
+              </a:srgbClr>
+            </a:solidFill>
+            <a:prstDash val="solid"/>
+          </a:ln>
+        </p:spPr>
+        <p:txBody>
+          <a:bodyPr/>
+          <a:lstStyle/>
+          <a:p>
+            <a:endParaRPr lang="en-SG" sz="1350"/>
+          </a:p>
+        </p:txBody>
+      </p:sp>
+      <p:sp>
+        <p:nvSpPr>
+          <p:cNvPr id="38" name="Rectangle 37">
+            <a:extLst>
+              <a:ext uri="{FF2B5EF4-FFF2-40B4-BE49-F238E27FC236}">
+                <a16:creationId xmlns:a16="http://schemas.microsoft.com/office/drawing/2014/main" id="{AE7F4968-1F34-492A-A7F1-D01E83703E14}"/>
+              </a:ext>
+            </a:extLst>
+          </p:cNvPr>
+          <p:cNvSpPr>
+            <a:spLocks noGrp="1"/>
+          </p:cNvSpPr>
+          <p:nvPr/>
+        </p:nvSpPr>
+        <p:spPr>
+          <a:xfrm>
+            <a:off x="2778919" y="3321844"/>
+            <a:ext cx="205852" cy="57150"/>
+          </a:xfrm>
+          <a:prstGeom prst="rect">
+            <a:avLst/>
+          </a:prstGeom>
+          <a:solidFill>
+            <a:srgbClr val="6B7280"/>
+          </a:solidFill>
+          <a:ln w="0">
+            <a:solidFill>
+              <a:srgbClr val="000000">
+                <a:alpha val="0"/>
+              </a:srgbClr>
+            </a:solidFill>
+            <a:prstDash val="solid"/>
+          </a:ln>
+        </p:spPr>
+        <p:txBody>
+          <a:bodyPr/>
+          <a:lstStyle/>
+          <a:p>
+            <a:endParaRPr lang="en-SG" sz="1350"/>
+          </a:p>
+        </p:txBody>
+      </p:sp>
+      <p:sp>
+        <p:nvSpPr>
+          <p:cNvPr id="39" name="Rectangle 38">
+            <a:extLst>
+              <a:ext uri="{FF2B5EF4-FFF2-40B4-BE49-F238E27FC236}">
+                <a16:creationId xmlns:a16="http://schemas.microsoft.com/office/drawing/2014/main" id="{9D963069-14AA-43D9-92FC-8056DB72E056}"/>
+              </a:ext>
+            </a:extLst>
+          </p:cNvPr>
+          <p:cNvSpPr>
+            <a:spLocks noGrp="1"/>
+          </p:cNvSpPr>
+          <p:nvPr/>
+        </p:nvSpPr>
+        <p:spPr>
+          <a:xfrm>
+            <a:off x="3243263" y="3264694"/>
+            <a:ext cx="714375" cy="171450"/>
+          </a:xfrm>
+          <a:prstGeom prst="rect">
+            <a:avLst/>
+          </a:prstGeom>
+          <a:solidFill>
+            <a:srgbClr val="000000">
+              <a:alpha val="0"/>
+            </a:srgbClr>
+          </a:solidFill>
+          <a:ln w="0">
+            <a:solidFill>
+              <a:srgbClr val="000000">
+                <a:alpha val="0"/>
+              </a:srgbClr>
+            </a:solidFill>
+            <a:prstDash val="solid"/>
+          </a:ln>
+        </p:spPr>
+        <p:txBody>
+          <a:bodyPr lIns="0" tIns="0" rIns="0" bIns="0" anchor="t"/>
+          <a:lstStyle/>
+          <a:p>
+            <a:pPr algn="r">
+              <a:defRPr sz="1050" b="0">
+                <a:solidFill>
+                  <a:srgbClr val="1F2933"/>
+                </a:solidFill>
+                <a:latin typeface="Aptos"/>
+                <a:ea typeface="Aptos"/>
+                <a:cs typeface="Aptos"/>
+              </a:defRPr>
+            </a:pPr>
+            <a:r>
+              <a:rPr sz="788">
+                <a:solidFill>
+                  <a:srgbClr val="1F2933"/>
+                </a:solidFill>
+                <a:latin typeface="Aptos"/>
+                <a:ea typeface="Aptos"/>
+                <a:cs typeface="Aptos"/>
+              </a:rPr>
+              <a:t>11,959</a:t>
+            </a:r>
+          </a:p>
+        </p:txBody>
+      </p:sp>
+      <p:sp>
+        <p:nvSpPr>
+          <p:cNvPr id="40" name="Rectangle 39">
+            <a:extLst>
+              <a:ext uri="{FF2B5EF4-FFF2-40B4-BE49-F238E27FC236}">
+                <a16:creationId xmlns:a16="http://schemas.microsoft.com/office/drawing/2014/main" id="{2A2DDA7D-C9E2-49F5-879F-A7BA8A188F3E}"/>
+              </a:ext>
+            </a:extLst>
+          </p:cNvPr>
+          <p:cNvSpPr>
+            <a:spLocks noGrp="1"/>
+          </p:cNvSpPr>
+          <p:nvPr/>
+        </p:nvSpPr>
+        <p:spPr>
+          <a:xfrm>
+            <a:off x="4171951" y="3264694"/>
+            <a:ext cx="535781" cy="171450"/>
+          </a:xfrm>
+          <a:prstGeom prst="rect">
+            <a:avLst/>
+          </a:prstGeom>
+          <a:solidFill>
+            <a:srgbClr val="000000">
+              <a:alpha val="0"/>
+            </a:srgbClr>
+          </a:solidFill>
+          <a:ln w="0">
+            <a:solidFill>
+              <a:srgbClr val="000000">
+                <a:alpha val="0"/>
+              </a:srgbClr>
+            </a:solidFill>
+            <a:prstDash val="solid"/>
+          </a:ln>
+        </p:spPr>
+        <p:txBody>
+          <a:bodyPr lIns="0" tIns="0" rIns="0" bIns="0" anchor="t"/>
+          <a:lstStyle/>
+          <a:p>
+            <a:pPr algn="r">
+              <a:defRPr sz="1050" b="0">
+                <a:solidFill>
+                  <a:srgbClr val="1F2933"/>
+                </a:solidFill>
+                <a:latin typeface="Aptos"/>
+                <a:ea typeface="Aptos"/>
+                <a:cs typeface="Aptos"/>
+              </a:defRPr>
+            </a:pPr>
+            <a:r>
+              <a:rPr sz="788">
+                <a:solidFill>
+                  <a:srgbClr val="1F2933"/>
+                </a:solidFill>
+                <a:latin typeface="Aptos"/>
+                <a:ea typeface="Aptos"/>
+                <a:cs typeface="Aptos"/>
+              </a:rPr>
+              <a:t>12.53%</a:t>
+            </a:r>
+          </a:p>
+        </p:txBody>
+      </p:sp>
+      <p:sp>
+        <p:nvSpPr>
+          <p:cNvPr id="41" name="Rectangle 40">
+            <a:extLst>
+              <a:ext uri="{FF2B5EF4-FFF2-40B4-BE49-F238E27FC236}">
+                <a16:creationId xmlns:a16="http://schemas.microsoft.com/office/drawing/2014/main" id="{9C5351DB-CC4B-4402-B076-F241577625B6}"/>
+              </a:ext>
+            </a:extLst>
+          </p:cNvPr>
+          <p:cNvSpPr>
+            <a:spLocks noGrp="1"/>
+          </p:cNvSpPr>
+          <p:nvPr/>
+        </p:nvSpPr>
+        <p:spPr>
+          <a:xfrm>
+            <a:off x="4993482" y="3264694"/>
+            <a:ext cx="750094" cy="171450"/>
+          </a:xfrm>
+          <a:prstGeom prst="rect">
+            <a:avLst/>
+          </a:prstGeom>
+          <a:solidFill>
+            <a:srgbClr val="000000">
+              <a:alpha val="0"/>
+            </a:srgbClr>
+          </a:solidFill>
+          <a:ln w="0">
+            <a:solidFill>
+              <a:srgbClr val="000000">
+                <a:alpha val="0"/>
+              </a:srgbClr>
+            </a:solidFill>
+            <a:prstDash val="solid"/>
+          </a:ln>
+        </p:spPr>
+        <p:txBody>
+          <a:bodyPr lIns="0" tIns="0" rIns="0" bIns="0" anchor="t"/>
+          <a:lstStyle/>
+          <a:p>
+            <a:pPr algn="r">
+              <a:defRPr sz="1050" b="0">
+                <a:solidFill>
+                  <a:srgbClr val="1F2933"/>
+                </a:solidFill>
+                <a:latin typeface="Aptos"/>
+                <a:ea typeface="Aptos"/>
+                <a:cs typeface="Aptos"/>
+              </a:defRPr>
+            </a:pPr>
+            <a:r>
+              <a:rPr sz="788">
+                <a:solidFill>
+                  <a:srgbClr val="1F2933"/>
+                </a:solidFill>
+                <a:latin typeface="Aptos"/>
+                <a:ea typeface="Aptos"/>
+                <a:cs typeface="Aptos"/>
+              </a:rPr>
+              <a:t>R$523k</a:t>
+            </a:r>
+          </a:p>
+        </p:txBody>
+      </p:sp>
+      <p:sp>
+        <p:nvSpPr>
+          <p:cNvPr id="42" name="Rectangle 41">
+            <a:extLst>
+              <a:ext uri="{FF2B5EF4-FFF2-40B4-BE49-F238E27FC236}">
+                <a16:creationId xmlns:a16="http://schemas.microsoft.com/office/drawing/2014/main" id="{19D2DD84-4234-4C86-B754-A4B013F51CF3}"/>
+              </a:ext>
+            </a:extLst>
+          </p:cNvPr>
+          <p:cNvSpPr>
+            <a:spLocks noGrp="1"/>
+          </p:cNvSpPr>
+          <p:nvPr/>
+        </p:nvSpPr>
+        <p:spPr>
+          <a:xfrm>
+            <a:off x="5886450" y="3264694"/>
+            <a:ext cx="1785938" cy="171450"/>
+          </a:xfrm>
+          <a:prstGeom prst="rect">
+            <a:avLst/>
+          </a:prstGeom>
+          <a:solidFill>
+            <a:srgbClr val="000000">
+              <a:alpha val="0"/>
+            </a:srgbClr>
+          </a:solidFill>
+          <a:ln w="0">
+            <a:solidFill>
+              <a:srgbClr val="000000">
+                <a:alpha val="0"/>
+              </a:srgbClr>
+            </a:solidFill>
+            <a:prstDash val="solid"/>
+          </a:ln>
+        </p:spPr>
+        <p:txBody>
+          <a:bodyPr lIns="0" tIns="0" rIns="0" bIns="0" anchor="t"/>
+          <a:lstStyle/>
+          <a:p>
+            <a:pPr algn="l">
+              <a:defRPr sz="975" b="0">
+                <a:solidFill>
+                  <a:srgbClr val="6B7280"/>
+                </a:solidFill>
+                <a:latin typeface="Aptos"/>
+                <a:ea typeface="Aptos"/>
+                <a:cs typeface="Aptos"/>
+              </a:defRPr>
+            </a:pPr>
+            <a:r>
+              <a:rPr sz="731">
+                <a:solidFill>
+                  <a:srgbClr val="6B7280"/>
+                </a:solidFill>
+                <a:latin typeface="Aptos"/>
+                <a:ea typeface="Aptos"/>
+                <a:cs typeface="Aptos"/>
+              </a:rPr>
+              <a:t>Low-cost reactivation</a:t>
+            </a:r>
+          </a:p>
+        </p:txBody>
+      </p:sp>
+      <p:sp>
+        <p:nvSpPr>
+          <p:cNvPr id="43" name="Rectangle 42">
+            <a:extLst>
+              <a:ext uri="{FF2B5EF4-FFF2-40B4-BE49-F238E27FC236}">
+                <a16:creationId xmlns:a16="http://schemas.microsoft.com/office/drawing/2014/main" id="{BB1FC2A0-FE00-48A8-B81D-FBBA9D62DA0B}"/>
+              </a:ext>
+            </a:extLst>
+          </p:cNvPr>
+          <p:cNvSpPr>
+            <a:spLocks noGrp="1"/>
+          </p:cNvSpPr>
+          <p:nvPr/>
+        </p:nvSpPr>
+        <p:spPr>
+          <a:xfrm>
+            <a:off x="457200" y="3821907"/>
+            <a:ext cx="7786688" cy="7144"/>
+          </a:xfrm>
+          <a:prstGeom prst="rect">
+            <a:avLst/>
+          </a:prstGeom>
+          <a:solidFill>
+            <a:srgbClr val="D9DEE7"/>
+          </a:solidFill>
+          <a:ln w="0">
+            <a:solidFill>
+              <a:srgbClr val="000000">
+                <a:alpha val="0"/>
+              </a:srgbClr>
+            </a:solidFill>
+            <a:prstDash val="solid"/>
+          </a:ln>
+        </p:spPr>
+        <p:txBody>
+          <a:bodyPr/>
+          <a:lstStyle/>
+          <a:p>
+            <a:endParaRPr lang="en-SG" sz="1350"/>
+          </a:p>
+        </p:txBody>
+      </p:sp>
+      <p:sp>
+        <p:nvSpPr>
+          <p:cNvPr id="44" name="Oval 43">
+            <a:extLst>
+              <a:ext uri="{FF2B5EF4-FFF2-40B4-BE49-F238E27FC236}">
+                <a16:creationId xmlns:a16="http://schemas.microsoft.com/office/drawing/2014/main" id="{A448DA7B-8D4D-459C-819D-AE4B49A68C7A}"/>
+              </a:ext>
+            </a:extLst>
+          </p:cNvPr>
+          <p:cNvSpPr>
+            <a:spLocks noGrp="1"/>
+          </p:cNvSpPr>
+          <p:nvPr/>
+        </p:nvSpPr>
+        <p:spPr>
+          <a:xfrm>
+            <a:off x="457200" y="3614737"/>
+            <a:ext cx="71438" cy="71438"/>
+          </a:xfrm>
+          <a:prstGeom prst="ellipse">
+            <a:avLst/>
+          </a:prstGeom>
+          <a:solidFill>
+            <a:srgbClr val="C77721"/>
+          </a:solidFill>
+          <a:ln w="0">
+            <a:solidFill>
+              <a:srgbClr val="000000">
+                <a:alpha val="0"/>
+              </a:srgbClr>
+            </a:solidFill>
+            <a:prstDash val="solid"/>
+          </a:ln>
+        </p:spPr>
+        <p:txBody>
+          <a:bodyPr/>
+          <a:lstStyle/>
+          <a:p>
+            <a:endParaRPr lang="en-SG" sz="1350"/>
+          </a:p>
+        </p:txBody>
+      </p:sp>
+      <p:sp>
+        <p:nvSpPr>
+          <p:cNvPr id="45" name="Rectangle 44">
+            <a:extLst>
+              <a:ext uri="{FF2B5EF4-FFF2-40B4-BE49-F238E27FC236}">
+                <a16:creationId xmlns:a16="http://schemas.microsoft.com/office/drawing/2014/main" id="{BD4BF6DD-9DC0-43EA-8C93-6B70E5FCFFDF}"/>
+              </a:ext>
+            </a:extLst>
+          </p:cNvPr>
+          <p:cNvSpPr>
+            <a:spLocks noGrp="1"/>
+          </p:cNvSpPr>
+          <p:nvPr/>
+        </p:nvSpPr>
+        <p:spPr>
+          <a:xfrm>
+            <a:off x="585788" y="3564731"/>
+            <a:ext cx="2143125" cy="171450"/>
+          </a:xfrm>
+          <a:prstGeom prst="rect">
+            <a:avLst/>
+          </a:prstGeom>
+          <a:solidFill>
+            <a:srgbClr val="000000">
+              <a:alpha val="0"/>
+            </a:srgbClr>
+          </a:solidFill>
+          <a:ln w="0">
+            <a:solidFill>
+              <a:srgbClr val="000000">
+                <a:alpha val="0"/>
+              </a:srgbClr>
+            </a:solidFill>
+            <a:prstDash val="solid"/>
+          </a:ln>
+        </p:spPr>
+        <p:txBody>
+          <a:bodyPr lIns="0" tIns="0" rIns="0" bIns="0" anchor="t"/>
+          <a:lstStyle/>
+          <a:p>
+            <a:pPr algn="l">
+              <a:defRPr sz="1050" b="0">
+                <a:solidFill>
+                  <a:srgbClr val="1F2933"/>
+                </a:solidFill>
+                <a:latin typeface="Aptos"/>
+                <a:ea typeface="Aptos"/>
+                <a:cs typeface="Aptos"/>
+              </a:defRPr>
+            </a:pPr>
+            <a:r>
+              <a:rPr sz="788">
+                <a:solidFill>
+                  <a:srgbClr val="1F2933"/>
+                </a:solidFill>
+                <a:latin typeface="Aptos"/>
+                <a:ea typeface="Aptos"/>
+                <a:cs typeface="Aptos"/>
+              </a:rPr>
+              <a:t>At-Risk High Spenders</a:t>
+            </a:r>
+          </a:p>
+        </p:txBody>
+      </p:sp>
+      <p:sp>
+        <p:nvSpPr>
+          <p:cNvPr id="46" name="Rectangle 45">
+            <a:extLst>
+              <a:ext uri="{FF2B5EF4-FFF2-40B4-BE49-F238E27FC236}">
+                <a16:creationId xmlns:a16="http://schemas.microsoft.com/office/drawing/2014/main" id="{C457B996-30C7-44B6-BB5F-2CB374CFC5D1}"/>
+              </a:ext>
+            </a:extLst>
+          </p:cNvPr>
+          <p:cNvSpPr>
+            <a:spLocks noGrp="1"/>
+          </p:cNvSpPr>
+          <p:nvPr/>
+        </p:nvSpPr>
+        <p:spPr>
+          <a:xfrm>
+            <a:off x="2778919" y="3621881"/>
+            <a:ext cx="414338" cy="57150"/>
+          </a:xfrm>
+          <a:prstGeom prst="rect">
+            <a:avLst/>
+          </a:prstGeom>
+          <a:solidFill>
+            <a:srgbClr val="F4F6F8"/>
+          </a:solidFill>
+          <a:ln w="0">
+            <a:solidFill>
+              <a:srgbClr val="000000">
+                <a:alpha val="0"/>
+              </a:srgbClr>
+            </a:solidFill>
+            <a:prstDash val="solid"/>
+          </a:ln>
+        </p:spPr>
+        <p:txBody>
+          <a:bodyPr/>
+          <a:lstStyle/>
+          <a:p>
+            <a:endParaRPr lang="en-SG" sz="1350"/>
+          </a:p>
+        </p:txBody>
+      </p:sp>
+      <p:sp>
+        <p:nvSpPr>
+          <p:cNvPr id="47" name="Rectangle 46">
+            <a:extLst>
+              <a:ext uri="{FF2B5EF4-FFF2-40B4-BE49-F238E27FC236}">
+                <a16:creationId xmlns:a16="http://schemas.microsoft.com/office/drawing/2014/main" id="{19EED285-CDCA-420B-BA0A-9D1BB73E0A17}"/>
+              </a:ext>
+            </a:extLst>
+          </p:cNvPr>
+          <p:cNvSpPr>
+            <a:spLocks noGrp="1"/>
+          </p:cNvSpPr>
+          <p:nvPr/>
+        </p:nvSpPr>
+        <p:spPr>
+          <a:xfrm>
+            <a:off x="2778919" y="3621881"/>
+            <a:ext cx="194061" cy="57150"/>
+          </a:xfrm>
+          <a:prstGeom prst="rect">
+            <a:avLst/>
+          </a:prstGeom>
+          <a:solidFill>
+            <a:srgbClr val="C77721"/>
+          </a:solidFill>
+          <a:ln w="0">
+            <a:solidFill>
+              <a:srgbClr val="000000">
+                <a:alpha val="0"/>
+              </a:srgbClr>
+            </a:solidFill>
+            <a:prstDash val="solid"/>
+          </a:ln>
+        </p:spPr>
+        <p:txBody>
+          <a:bodyPr/>
+          <a:lstStyle/>
+          <a:p>
+            <a:endParaRPr lang="en-SG" sz="1350"/>
+          </a:p>
+        </p:txBody>
+      </p:sp>
+      <p:sp>
+        <p:nvSpPr>
+          <p:cNvPr id="48" name="Rectangle 47">
+            <a:extLst>
+              <a:ext uri="{FF2B5EF4-FFF2-40B4-BE49-F238E27FC236}">
+                <a16:creationId xmlns:a16="http://schemas.microsoft.com/office/drawing/2014/main" id="{F68C7B4D-A7DC-42D1-9C26-395602C8D7DA}"/>
+              </a:ext>
+            </a:extLst>
+          </p:cNvPr>
+          <p:cNvSpPr>
+            <a:spLocks noGrp="1"/>
+          </p:cNvSpPr>
+          <p:nvPr/>
+        </p:nvSpPr>
+        <p:spPr>
+          <a:xfrm>
+            <a:off x="3243263" y="3564731"/>
+            <a:ext cx="714375" cy="171450"/>
+          </a:xfrm>
+          <a:prstGeom prst="rect">
+            <a:avLst/>
+          </a:prstGeom>
+          <a:solidFill>
+            <a:srgbClr val="000000">
+              <a:alpha val="0"/>
+            </a:srgbClr>
+          </a:solidFill>
+          <a:ln w="0">
+            <a:solidFill>
+              <a:srgbClr val="000000">
+                <a:alpha val="0"/>
+              </a:srgbClr>
+            </a:solidFill>
+            <a:prstDash val="solid"/>
+          </a:ln>
+        </p:spPr>
+        <p:txBody>
+          <a:bodyPr lIns="0" tIns="0" rIns="0" bIns="0" anchor="t"/>
+          <a:lstStyle/>
+          <a:p>
+            <a:pPr algn="r">
+              <a:defRPr sz="1050" b="0">
+                <a:solidFill>
+                  <a:srgbClr val="1F2933"/>
+                </a:solidFill>
+                <a:latin typeface="Aptos"/>
+                <a:ea typeface="Aptos"/>
+                <a:cs typeface="Aptos"/>
+              </a:defRPr>
+            </a:pPr>
+            <a:r>
+              <a:rPr sz="788">
+                <a:solidFill>
+                  <a:srgbClr val="1F2933"/>
+                </a:solidFill>
+                <a:latin typeface="Aptos"/>
+                <a:ea typeface="Aptos"/>
+                <a:cs typeface="Aptos"/>
+              </a:rPr>
+              <a:t>11,274</a:t>
+            </a:r>
+          </a:p>
+        </p:txBody>
+      </p:sp>
+      <p:sp>
+        <p:nvSpPr>
+          <p:cNvPr id="49" name="Rectangle 48">
+            <a:extLst>
+              <a:ext uri="{FF2B5EF4-FFF2-40B4-BE49-F238E27FC236}">
+                <a16:creationId xmlns:a16="http://schemas.microsoft.com/office/drawing/2014/main" id="{05FB0397-A258-48B9-A797-9681BA60225A}"/>
+              </a:ext>
+            </a:extLst>
+          </p:cNvPr>
+          <p:cNvSpPr>
+            <a:spLocks noGrp="1"/>
+          </p:cNvSpPr>
+          <p:nvPr/>
+        </p:nvSpPr>
+        <p:spPr>
+          <a:xfrm>
+            <a:off x="4171951" y="3564731"/>
+            <a:ext cx="535781" cy="171450"/>
+          </a:xfrm>
+          <a:prstGeom prst="rect">
+            <a:avLst/>
+          </a:prstGeom>
+          <a:solidFill>
+            <a:srgbClr val="000000">
+              <a:alpha val="0"/>
+            </a:srgbClr>
+          </a:solidFill>
+          <a:ln w="0">
+            <a:solidFill>
+              <a:srgbClr val="000000">
+                <a:alpha val="0"/>
+              </a:srgbClr>
+            </a:solidFill>
+            <a:prstDash val="solid"/>
+          </a:ln>
+        </p:spPr>
+        <p:txBody>
+          <a:bodyPr lIns="0" tIns="0" rIns="0" bIns="0" anchor="t"/>
+          <a:lstStyle/>
+          <a:p>
+            <a:pPr algn="r">
+              <a:defRPr sz="1050" b="0">
+                <a:solidFill>
+                  <a:srgbClr val="1F2933"/>
+                </a:solidFill>
+                <a:latin typeface="Aptos"/>
+                <a:ea typeface="Aptos"/>
+                <a:cs typeface="Aptos"/>
+              </a:defRPr>
+            </a:pPr>
+            <a:r>
+              <a:rPr sz="788">
+                <a:solidFill>
+                  <a:srgbClr val="1F2933"/>
+                </a:solidFill>
+                <a:latin typeface="Aptos"/>
+                <a:ea typeface="Aptos"/>
+                <a:cs typeface="Aptos"/>
+              </a:rPr>
+              <a:t>11.82%</a:t>
+            </a:r>
+          </a:p>
+        </p:txBody>
+      </p:sp>
+      <p:sp>
+        <p:nvSpPr>
+          <p:cNvPr id="50" name="Rectangle 49">
+            <a:extLst>
+              <a:ext uri="{FF2B5EF4-FFF2-40B4-BE49-F238E27FC236}">
+                <a16:creationId xmlns:a16="http://schemas.microsoft.com/office/drawing/2014/main" id="{BB99B6D3-C24F-46B4-B933-04013B4667D8}"/>
+              </a:ext>
+            </a:extLst>
+          </p:cNvPr>
+          <p:cNvSpPr>
+            <a:spLocks noGrp="1"/>
+          </p:cNvSpPr>
+          <p:nvPr/>
+        </p:nvSpPr>
+        <p:spPr>
+          <a:xfrm>
+            <a:off x="4993482" y="3564731"/>
+            <a:ext cx="750094" cy="171450"/>
+          </a:xfrm>
+          <a:prstGeom prst="rect">
+            <a:avLst/>
+          </a:prstGeom>
+          <a:solidFill>
+            <a:srgbClr val="000000">
+              <a:alpha val="0"/>
+            </a:srgbClr>
+          </a:solidFill>
+          <a:ln w="0">
+            <a:solidFill>
+              <a:srgbClr val="000000">
+                <a:alpha val="0"/>
+              </a:srgbClr>
+            </a:solidFill>
+            <a:prstDash val="solid"/>
+          </a:ln>
+        </p:spPr>
+        <p:txBody>
+          <a:bodyPr lIns="0" tIns="0" rIns="0" bIns="0" anchor="t"/>
+          <a:lstStyle/>
+          <a:p>
+            <a:pPr algn="r">
+              <a:defRPr sz="1050" b="0">
+                <a:solidFill>
+                  <a:srgbClr val="1F2933"/>
+                </a:solidFill>
+                <a:latin typeface="Aptos"/>
+                <a:ea typeface="Aptos"/>
+                <a:cs typeface="Aptos"/>
+              </a:defRPr>
+            </a:pPr>
+            <a:r>
+              <a:rPr sz="788">
+                <a:solidFill>
+                  <a:srgbClr val="1F2933"/>
+                </a:solidFill>
+                <a:latin typeface="Aptos"/>
+                <a:ea typeface="Aptos"/>
+                <a:cs typeface="Aptos"/>
+              </a:rPr>
+              <a:t>R$1.59M</a:t>
+            </a:r>
+          </a:p>
+        </p:txBody>
+      </p:sp>
+      <p:sp>
+        <p:nvSpPr>
+          <p:cNvPr id="51" name="Rectangle 50">
+            <a:extLst>
+              <a:ext uri="{FF2B5EF4-FFF2-40B4-BE49-F238E27FC236}">
+                <a16:creationId xmlns:a16="http://schemas.microsoft.com/office/drawing/2014/main" id="{EB03F384-FF50-4C13-85F0-2BD3574FD9C7}"/>
+              </a:ext>
+            </a:extLst>
+          </p:cNvPr>
+          <p:cNvSpPr>
+            <a:spLocks noGrp="1"/>
+          </p:cNvSpPr>
+          <p:nvPr/>
+        </p:nvSpPr>
+        <p:spPr>
+          <a:xfrm>
+            <a:off x="5886450" y="3564731"/>
+            <a:ext cx="1785938" cy="171450"/>
+          </a:xfrm>
+          <a:prstGeom prst="rect">
+            <a:avLst/>
+          </a:prstGeom>
+          <a:solidFill>
+            <a:srgbClr val="000000">
+              <a:alpha val="0"/>
+            </a:srgbClr>
+          </a:solidFill>
+          <a:ln w="0">
+            <a:solidFill>
+              <a:srgbClr val="000000">
+                <a:alpha val="0"/>
+              </a:srgbClr>
+            </a:solidFill>
+            <a:prstDash val="solid"/>
+          </a:ln>
+        </p:spPr>
+        <p:txBody>
+          <a:bodyPr lIns="0" tIns="0" rIns="0" bIns="0" anchor="t"/>
+          <a:lstStyle/>
+          <a:p>
+            <a:pPr algn="l">
+              <a:defRPr sz="975" b="0">
+                <a:solidFill>
+                  <a:srgbClr val="6B7280"/>
+                </a:solidFill>
+                <a:latin typeface="Aptos"/>
+                <a:ea typeface="Aptos"/>
+                <a:cs typeface="Aptos"/>
+              </a:defRPr>
+            </a:pPr>
+            <a:r>
+              <a:rPr sz="731">
+                <a:solidFill>
+                  <a:srgbClr val="6B7280"/>
+                </a:solidFill>
+                <a:latin typeface="Aptos"/>
+                <a:ea typeface="Aptos"/>
+                <a:cs typeface="Aptos"/>
+              </a:rPr>
+              <a:t>Win-back campaign</a:t>
+            </a:r>
+          </a:p>
+        </p:txBody>
+      </p:sp>
+      <p:sp>
+        <p:nvSpPr>
+          <p:cNvPr id="52" name="Rectangle 51">
+            <a:extLst>
+              <a:ext uri="{FF2B5EF4-FFF2-40B4-BE49-F238E27FC236}">
+                <a16:creationId xmlns:a16="http://schemas.microsoft.com/office/drawing/2014/main" id="{25470233-AB1C-4EA9-8B17-F773BF2B4221}"/>
+              </a:ext>
+            </a:extLst>
+          </p:cNvPr>
+          <p:cNvSpPr>
+            <a:spLocks noGrp="1"/>
+          </p:cNvSpPr>
+          <p:nvPr/>
+        </p:nvSpPr>
+        <p:spPr>
+          <a:xfrm>
+            <a:off x="457200" y="4121944"/>
+            <a:ext cx="7786688" cy="7144"/>
+          </a:xfrm>
+          <a:prstGeom prst="rect">
+            <a:avLst/>
+          </a:prstGeom>
+          <a:solidFill>
+            <a:srgbClr val="D9DEE7"/>
+          </a:solidFill>
+          <a:ln w="0">
+            <a:solidFill>
+              <a:srgbClr val="000000">
+                <a:alpha val="0"/>
+              </a:srgbClr>
+            </a:solidFill>
+            <a:prstDash val="solid"/>
+          </a:ln>
+        </p:spPr>
+        <p:txBody>
+          <a:bodyPr/>
+          <a:lstStyle/>
+          <a:p>
+            <a:endParaRPr lang="en-SG" sz="1350"/>
+          </a:p>
+        </p:txBody>
+      </p:sp>
+      <p:sp>
+        <p:nvSpPr>
+          <p:cNvPr id="53" name="Oval 52">
+            <a:extLst>
+              <a:ext uri="{FF2B5EF4-FFF2-40B4-BE49-F238E27FC236}">
+                <a16:creationId xmlns:a16="http://schemas.microsoft.com/office/drawing/2014/main" id="{16224CD8-A396-434B-84D8-597A6C70785A}"/>
+              </a:ext>
+            </a:extLst>
+          </p:cNvPr>
+          <p:cNvSpPr>
+            <a:spLocks noGrp="1"/>
+          </p:cNvSpPr>
+          <p:nvPr/>
+        </p:nvSpPr>
+        <p:spPr>
+          <a:xfrm>
+            <a:off x="457200" y="3914775"/>
+            <a:ext cx="71438" cy="71438"/>
+          </a:xfrm>
+          <a:prstGeom prst="ellipse">
+            <a:avLst/>
+          </a:prstGeom>
+          <a:solidFill>
+            <a:srgbClr val="2F8F5B"/>
+          </a:solidFill>
+          <a:ln w="0">
+            <a:solidFill>
+              <a:srgbClr val="000000">
+                <a:alpha val="0"/>
+              </a:srgbClr>
+            </a:solidFill>
+            <a:prstDash val="solid"/>
+          </a:ln>
+        </p:spPr>
+        <p:txBody>
+          <a:bodyPr/>
+          <a:lstStyle/>
+          <a:p>
+            <a:endParaRPr lang="en-SG" sz="1350"/>
+          </a:p>
+        </p:txBody>
+      </p:sp>
+      <p:sp>
+        <p:nvSpPr>
+          <p:cNvPr id="54" name="Rectangle 53">
+            <a:extLst>
+              <a:ext uri="{FF2B5EF4-FFF2-40B4-BE49-F238E27FC236}">
+                <a16:creationId xmlns:a16="http://schemas.microsoft.com/office/drawing/2014/main" id="{C24EFB52-55F6-4C7B-BE75-61F82F978311}"/>
+              </a:ext>
+            </a:extLst>
+          </p:cNvPr>
+          <p:cNvSpPr>
+            <a:spLocks noGrp="1"/>
+          </p:cNvSpPr>
+          <p:nvPr/>
+        </p:nvSpPr>
+        <p:spPr>
+          <a:xfrm>
+            <a:off x="585788" y="3864769"/>
+            <a:ext cx="2143125" cy="171450"/>
+          </a:xfrm>
+          <a:prstGeom prst="rect">
+            <a:avLst/>
+          </a:prstGeom>
+          <a:solidFill>
+            <a:srgbClr val="000000">
+              <a:alpha val="0"/>
+            </a:srgbClr>
+          </a:solidFill>
+          <a:ln w="0">
+            <a:solidFill>
+              <a:srgbClr val="000000">
+                <a:alpha val="0"/>
+              </a:srgbClr>
+            </a:solidFill>
+            <a:prstDash val="solid"/>
+          </a:ln>
+        </p:spPr>
+        <p:txBody>
+          <a:bodyPr lIns="0" tIns="0" rIns="0" bIns="0" anchor="t"/>
+          <a:lstStyle/>
+          <a:p>
+            <a:pPr algn="l">
+              <a:defRPr sz="1050" b="1">
+                <a:solidFill>
+                  <a:srgbClr val="1F2933"/>
+                </a:solidFill>
+                <a:latin typeface="Aptos"/>
+                <a:ea typeface="Aptos"/>
+                <a:cs typeface="Aptos"/>
+              </a:defRPr>
+            </a:pPr>
+            <a:r>
+              <a:rPr sz="788" b="1">
+                <a:solidFill>
+                  <a:srgbClr val="1F2933"/>
+                </a:solidFill>
+                <a:latin typeface="Aptos"/>
+                <a:ea typeface="Aptos"/>
+                <a:cs typeface="Aptos"/>
+              </a:rPr>
+              <a:t>High-Value New Customers</a:t>
+            </a:r>
+          </a:p>
+        </p:txBody>
+      </p:sp>
+      <p:sp>
+        <p:nvSpPr>
+          <p:cNvPr id="55" name="Rectangle 54">
+            <a:extLst>
+              <a:ext uri="{FF2B5EF4-FFF2-40B4-BE49-F238E27FC236}">
+                <a16:creationId xmlns:a16="http://schemas.microsoft.com/office/drawing/2014/main" id="{25C37448-3A5F-4F85-BE01-F2537B532C80}"/>
+              </a:ext>
+            </a:extLst>
+          </p:cNvPr>
+          <p:cNvSpPr>
+            <a:spLocks noGrp="1"/>
+          </p:cNvSpPr>
+          <p:nvPr/>
+        </p:nvSpPr>
+        <p:spPr>
+          <a:xfrm>
+            <a:off x="2778919" y="3921919"/>
+            <a:ext cx="414338" cy="57150"/>
+          </a:xfrm>
+          <a:prstGeom prst="rect">
+            <a:avLst/>
+          </a:prstGeom>
+          <a:solidFill>
+            <a:srgbClr val="F4F6F8"/>
+          </a:solidFill>
+          <a:ln w="0">
+            <a:solidFill>
+              <a:srgbClr val="000000">
+                <a:alpha val="0"/>
+              </a:srgbClr>
+            </a:solidFill>
+            <a:prstDash val="solid"/>
+          </a:ln>
+        </p:spPr>
+        <p:txBody>
+          <a:bodyPr/>
+          <a:lstStyle/>
+          <a:p>
+            <a:endParaRPr lang="en-SG" sz="1350"/>
+          </a:p>
+        </p:txBody>
+      </p:sp>
+      <p:sp>
+        <p:nvSpPr>
+          <p:cNvPr id="56" name="Rectangle 55">
+            <a:extLst>
+              <a:ext uri="{FF2B5EF4-FFF2-40B4-BE49-F238E27FC236}">
+                <a16:creationId xmlns:a16="http://schemas.microsoft.com/office/drawing/2014/main" id="{F9F28A94-6ECC-4DB2-BC69-CB10A3B03692}"/>
+              </a:ext>
+            </a:extLst>
+          </p:cNvPr>
+          <p:cNvSpPr>
+            <a:spLocks noGrp="1"/>
+          </p:cNvSpPr>
+          <p:nvPr/>
+        </p:nvSpPr>
+        <p:spPr>
+          <a:xfrm>
+            <a:off x="2778919" y="3921919"/>
+            <a:ext cx="190739" cy="57150"/>
+          </a:xfrm>
+          <a:prstGeom prst="rect">
+            <a:avLst/>
+          </a:prstGeom>
+          <a:solidFill>
+            <a:srgbClr val="2F8F5B"/>
+          </a:solidFill>
+          <a:ln w="0">
+            <a:solidFill>
+              <a:srgbClr val="000000">
+                <a:alpha val="0"/>
+              </a:srgbClr>
+            </a:solidFill>
+            <a:prstDash val="solid"/>
+          </a:ln>
+        </p:spPr>
+        <p:txBody>
+          <a:bodyPr/>
+          <a:lstStyle/>
+          <a:p>
+            <a:endParaRPr lang="en-SG" sz="1350"/>
+          </a:p>
+        </p:txBody>
+      </p:sp>
+      <p:sp>
+        <p:nvSpPr>
+          <p:cNvPr id="57" name="Rectangle 56">
+            <a:extLst>
+              <a:ext uri="{FF2B5EF4-FFF2-40B4-BE49-F238E27FC236}">
+                <a16:creationId xmlns:a16="http://schemas.microsoft.com/office/drawing/2014/main" id="{57A70115-B5CC-4227-AACD-41E370CA8D0B}"/>
+              </a:ext>
+            </a:extLst>
+          </p:cNvPr>
+          <p:cNvSpPr>
+            <a:spLocks noGrp="1"/>
+          </p:cNvSpPr>
+          <p:nvPr/>
+        </p:nvSpPr>
+        <p:spPr>
+          <a:xfrm>
+            <a:off x="3243263" y="3864769"/>
+            <a:ext cx="714375" cy="171450"/>
+          </a:xfrm>
+          <a:prstGeom prst="rect">
+            <a:avLst/>
+          </a:prstGeom>
+          <a:solidFill>
+            <a:srgbClr val="000000">
+              <a:alpha val="0"/>
+            </a:srgbClr>
+          </a:solidFill>
+          <a:ln w="0">
+            <a:solidFill>
+              <a:srgbClr val="000000">
+                <a:alpha val="0"/>
+              </a:srgbClr>
+            </a:solidFill>
+            <a:prstDash val="solid"/>
+          </a:ln>
+        </p:spPr>
+        <p:txBody>
+          <a:bodyPr lIns="0" tIns="0" rIns="0" bIns="0" anchor="t"/>
+          <a:lstStyle/>
+          <a:p>
+            <a:pPr algn="r">
+              <a:defRPr sz="1050" b="0">
+                <a:solidFill>
+                  <a:srgbClr val="1F2933"/>
+                </a:solidFill>
+                <a:latin typeface="Aptos"/>
+                <a:ea typeface="Aptos"/>
+                <a:cs typeface="Aptos"/>
+              </a:defRPr>
+            </a:pPr>
+            <a:r>
+              <a:rPr sz="788">
+                <a:solidFill>
+                  <a:srgbClr val="1F2933"/>
+                </a:solidFill>
+                <a:latin typeface="Aptos"/>
+                <a:ea typeface="Aptos"/>
+                <a:cs typeface="Aptos"/>
+              </a:rPr>
+              <a:t>11,081</a:t>
+            </a:r>
+          </a:p>
+        </p:txBody>
+      </p:sp>
+      <p:sp>
+        <p:nvSpPr>
+          <p:cNvPr id="58" name="Rectangle 57">
+            <a:extLst>
+              <a:ext uri="{FF2B5EF4-FFF2-40B4-BE49-F238E27FC236}">
+                <a16:creationId xmlns:a16="http://schemas.microsoft.com/office/drawing/2014/main" id="{0C6D933D-EB99-4F5B-A087-0C29168EE4C8}"/>
+              </a:ext>
+            </a:extLst>
+          </p:cNvPr>
+          <p:cNvSpPr>
+            <a:spLocks noGrp="1"/>
+          </p:cNvSpPr>
+          <p:nvPr/>
+        </p:nvSpPr>
+        <p:spPr>
+          <a:xfrm>
+            <a:off x="4171951" y="3864769"/>
+            <a:ext cx="535781" cy="171450"/>
+          </a:xfrm>
+          <a:prstGeom prst="rect">
+            <a:avLst/>
+          </a:prstGeom>
+          <a:solidFill>
+            <a:srgbClr val="000000">
+              <a:alpha val="0"/>
+            </a:srgbClr>
+          </a:solidFill>
+          <a:ln w="0">
+            <a:solidFill>
+              <a:srgbClr val="000000">
+                <a:alpha val="0"/>
+              </a:srgbClr>
+            </a:solidFill>
+            <a:prstDash val="solid"/>
+          </a:ln>
+        </p:spPr>
+        <p:txBody>
+          <a:bodyPr lIns="0" tIns="0" rIns="0" bIns="0" anchor="t"/>
+          <a:lstStyle/>
+          <a:p>
+            <a:pPr algn="r">
+              <a:defRPr sz="1050" b="0">
+                <a:solidFill>
+                  <a:srgbClr val="1F2933"/>
+                </a:solidFill>
+                <a:latin typeface="Aptos"/>
+                <a:ea typeface="Aptos"/>
+                <a:cs typeface="Aptos"/>
+              </a:defRPr>
+            </a:pPr>
+            <a:r>
+              <a:rPr sz="788">
+                <a:solidFill>
+                  <a:srgbClr val="1F2933"/>
+                </a:solidFill>
+                <a:latin typeface="Aptos"/>
+                <a:ea typeface="Aptos"/>
+                <a:cs typeface="Aptos"/>
+              </a:rPr>
+              <a:t>11.61%</a:t>
+            </a:r>
+          </a:p>
+        </p:txBody>
+      </p:sp>
+      <p:sp>
+        <p:nvSpPr>
+          <p:cNvPr id="59" name="Rectangle 58">
+            <a:extLst>
+              <a:ext uri="{FF2B5EF4-FFF2-40B4-BE49-F238E27FC236}">
+                <a16:creationId xmlns:a16="http://schemas.microsoft.com/office/drawing/2014/main" id="{B8ADD278-7901-4215-A0FF-F51D3E17FA3F}"/>
+              </a:ext>
+            </a:extLst>
+          </p:cNvPr>
+          <p:cNvSpPr>
+            <a:spLocks noGrp="1"/>
+          </p:cNvSpPr>
+          <p:nvPr/>
+        </p:nvSpPr>
+        <p:spPr>
+          <a:xfrm>
+            <a:off x="4993482" y="3864769"/>
+            <a:ext cx="750094" cy="171450"/>
+          </a:xfrm>
+          <a:prstGeom prst="rect">
+            <a:avLst/>
+          </a:prstGeom>
+          <a:solidFill>
+            <a:srgbClr val="000000">
+              <a:alpha val="0"/>
+            </a:srgbClr>
+          </a:solidFill>
+          <a:ln w="0">
+            <a:solidFill>
+              <a:srgbClr val="000000">
+                <a:alpha val="0"/>
+              </a:srgbClr>
+            </a:solidFill>
+            <a:prstDash val="solid"/>
+          </a:ln>
+        </p:spPr>
+        <p:txBody>
+          <a:bodyPr lIns="0" tIns="0" rIns="0" bIns="0" anchor="t"/>
+          <a:lstStyle/>
+          <a:p>
+            <a:pPr algn="r">
+              <a:defRPr sz="1050" b="1">
+                <a:solidFill>
+                  <a:srgbClr val="2F8F5B"/>
+                </a:solidFill>
+                <a:latin typeface="Aptos"/>
+                <a:ea typeface="Aptos"/>
+                <a:cs typeface="Aptos"/>
+              </a:defRPr>
+            </a:pPr>
+            <a:r>
+              <a:rPr sz="788" b="1">
+                <a:solidFill>
+                  <a:srgbClr val="2F8F5B"/>
+                </a:solidFill>
+                <a:latin typeface="Aptos"/>
+                <a:ea typeface="Aptos"/>
+                <a:cs typeface="Aptos"/>
+              </a:rPr>
+              <a:t>R$4.34M</a:t>
+            </a:r>
+          </a:p>
+        </p:txBody>
+      </p:sp>
+      <p:sp>
+        <p:nvSpPr>
+          <p:cNvPr id="60" name="Rectangle 59">
+            <a:extLst>
+              <a:ext uri="{FF2B5EF4-FFF2-40B4-BE49-F238E27FC236}">
+                <a16:creationId xmlns:a16="http://schemas.microsoft.com/office/drawing/2014/main" id="{EF457117-E755-4C36-A914-DA8D9F6980B1}"/>
+              </a:ext>
+            </a:extLst>
+          </p:cNvPr>
+          <p:cNvSpPr>
+            <a:spLocks noGrp="1"/>
+          </p:cNvSpPr>
+          <p:nvPr/>
+        </p:nvSpPr>
+        <p:spPr>
+          <a:xfrm>
+            <a:off x="5886450" y="3864769"/>
+            <a:ext cx="1785938" cy="171450"/>
+          </a:xfrm>
+          <a:prstGeom prst="rect">
+            <a:avLst/>
+          </a:prstGeom>
+          <a:solidFill>
+            <a:srgbClr val="000000">
+              <a:alpha val="0"/>
+            </a:srgbClr>
+          </a:solidFill>
+          <a:ln w="0">
+            <a:solidFill>
+              <a:srgbClr val="000000">
+                <a:alpha val="0"/>
+              </a:srgbClr>
+            </a:solidFill>
+            <a:prstDash val="solid"/>
+          </a:ln>
+        </p:spPr>
+        <p:txBody>
+          <a:bodyPr lIns="0" tIns="0" rIns="0" bIns="0" anchor="t"/>
+          <a:lstStyle/>
+          <a:p>
+            <a:pPr algn="l">
+              <a:defRPr sz="975" b="0">
+                <a:solidFill>
+                  <a:srgbClr val="6B7280"/>
+                </a:solidFill>
+                <a:latin typeface="Aptos"/>
+                <a:ea typeface="Aptos"/>
+                <a:cs typeface="Aptos"/>
+              </a:defRPr>
+            </a:pPr>
+            <a:r>
+              <a:rPr sz="731">
+                <a:solidFill>
+                  <a:srgbClr val="6B7280"/>
+                </a:solidFill>
+                <a:latin typeface="Aptos"/>
+                <a:ea typeface="Aptos"/>
+                <a:cs typeface="Aptos"/>
+              </a:rPr>
+              <a:t>Priority second-purchase</a:t>
+            </a:r>
+          </a:p>
+        </p:txBody>
+      </p:sp>
+      <p:sp>
+        <p:nvSpPr>
+          <p:cNvPr id="61" name="Rectangle 60">
+            <a:extLst>
+              <a:ext uri="{FF2B5EF4-FFF2-40B4-BE49-F238E27FC236}">
+                <a16:creationId xmlns:a16="http://schemas.microsoft.com/office/drawing/2014/main" id="{543900D7-F55A-4B11-9CD9-FC4910576690}"/>
+              </a:ext>
+            </a:extLst>
+          </p:cNvPr>
+          <p:cNvSpPr>
+            <a:spLocks noGrp="1"/>
+          </p:cNvSpPr>
+          <p:nvPr/>
+        </p:nvSpPr>
+        <p:spPr>
+          <a:xfrm>
+            <a:off x="457200" y="4421982"/>
+            <a:ext cx="7786688" cy="7144"/>
+          </a:xfrm>
+          <a:prstGeom prst="rect">
+            <a:avLst/>
+          </a:prstGeom>
+          <a:solidFill>
+            <a:srgbClr val="D9DEE7"/>
+          </a:solidFill>
+          <a:ln w="0">
+            <a:solidFill>
+              <a:srgbClr val="000000">
+                <a:alpha val="0"/>
+              </a:srgbClr>
+            </a:solidFill>
+            <a:prstDash val="solid"/>
+          </a:ln>
+        </p:spPr>
+        <p:txBody>
+          <a:bodyPr/>
+          <a:lstStyle/>
+          <a:p>
+            <a:endParaRPr lang="en-SG" sz="1350"/>
+          </a:p>
+        </p:txBody>
+      </p:sp>
+      <p:sp>
+        <p:nvSpPr>
+          <p:cNvPr id="62" name="Oval 61">
+            <a:extLst>
+              <a:ext uri="{FF2B5EF4-FFF2-40B4-BE49-F238E27FC236}">
+                <a16:creationId xmlns:a16="http://schemas.microsoft.com/office/drawing/2014/main" id="{CCD6E60C-C46A-4C9C-BF31-307465876559}"/>
+              </a:ext>
+            </a:extLst>
+          </p:cNvPr>
+          <p:cNvSpPr>
+            <a:spLocks noGrp="1"/>
+          </p:cNvSpPr>
+          <p:nvPr/>
+        </p:nvSpPr>
+        <p:spPr>
+          <a:xfrm>
+            <a:off x="457200" y="4214812"/>
+            <a:ext cx="71438" cy="71438"/>
+          </a:xfrm>
+          <a:prstGeom prst="ellipse">
+            <a:avLst/>
+          </a:prstGeom>
+          <a:solidFill>
+            <a:srgbClr val="2F8F5B"/>
+          </a:solidFill>
+          <a:ln w="0">
+            <a:solidFill>
+              <a:srgbClr val="000000">
+                <a:alpha val="0"/>
+              </a:srgbClr>
+            </a:solidFill>
+            <a:prstDash val="solid"/>
+          </a:ln>
+        </p:spPr>
+        <p:txBody>
+          <a:bodyPr/>
+          <a:lstStyle/>
+          <a:p>
+            <a:endParaRPr lang="en-SG" sz="1350"/>
+          </a:p>
+        </p:txBody>
+      </p:sp>
+      <p:sp>
+        <p:nvSpPr>
+          <p:cNvPr id="63" name="Rectangle 62">
+            <a:extLst>
+              <a:ext uri="{FF2B5EF4-FFF2-40B4-BE49-F238E27FC236}">
+                <a16:creationId xmlns:a16="http://schemas.microsoft.com/office/drawing/2014/main" id="{0134AF76-C9CB-4053-9931-F78AF39E4532}"/>
+              </a:ext>
+            </a:extLst>
+          </p:cNvPr>
+          <p:cNvSpPr>
+            <a:spLocks noGrp="1"/>
+          </p:cNvSpPr>
+          <p:nvPr/>
+        </p:nvSpPr>
+        <p:spPr>
+          <a:xfrm>
+            <a:off x="585788" y="4164806"/>
+            <a:ext cx="2143125" cy="171450"/>
+          </a:xfrm>
+          <a:prstGeom prst="rect">
+            <a:avLst/>
+          </a:prstGeom>
+          <a:solidFill>
+            <a:srgbClr val="000000">
+              <a:alpha val="0"/>
+            </a:srgbClr>
+          </a:solidFill>
+          <a:ln w="0">
+            <a:solidFill>
+              <a:srgbClr val="000000">
+                <a:alpha val="0"/>
+              </a:srgbClr>
+            </a:solidFill>
+            <a:prstDash val="solid"/>
+          </a:ln>
+        </p:spPr>
+        <p:txBody>
+          <a:bodyPr lIns="0" tIns="0" rIns="0" bIns="0" anchor="t"/>
+          <a:lstStyle/>
+          <a:p>
+            <a:pPr algn="l">
+              <a:defRPr sz="1050" b="1">
+                <a:solidFill>
+                  <a:srgbClr val="1F2933"/>
+                </a:solidFill>
+                <a:latin typeface="Aptos"/>
+                <a:ea typeface="Aptos"/>
+                <a:cs typeface="Aptos"/>
+              </a:defRPr>
+            </a:pPr>
+            <a:r>
+              <a:rPr sz="788" b="1">
+                <a:solidFill>
+                  <a:srgbClr val="1F2933"/>
+                </a:solidFill>
+                <a:latin typeface="Aptos"/>
+                <a:ea typeface="Aptos"/>
+                <a:cs typeface="Aptos"/>
+              </a:rPr>
+              <a:t>Big Spenders - One-Time Buyers</a:t>
+            </a:r>
+          </a:p>
+        </p:txBody>
+      </p:sp>
+      <p:sp>
+        <p:nvSpPr>
+          <p:cNvPr id="64" name="Rectangle 63">
+            <a:extLst>
+              <a:ext uri="{FF2B5EF4-FFF2-40B4-BE49-F238E27FC236}">
+                <a16:creationId xmlns:a16="http://schemas.microsoft.com/office/drawing/2014/main" id="{9D176FEE-9163-4545-851A-5B810BFDC19C}"/>
+              </a:ext>
+            </a:extLst>
+          </p:cNvPr>
+          <p:cNvSpPr>
+            <a:spLocks noGrp="1"/>
+          </p:cNvSpPr>
+          <p:nvPr/>
+        </p:nvSpPr>
+        <p:spPr>
+          <a:xfrm>
+            <a:off x="2778919" y="4221956"/>
+            <a:ext cx="414338" cy="57150"/>
+          </a:xfrm>
+          <a:prstGeom prst="rect">
+            <a:avLst/>
+          </a:prstGeom>
+          <a:solidFill>
+            <a:srgbClr val="F4F6F8"/>
+          </a:solidFill>
+          <a:ln w="0">
+            <a:solidFill>
+              <a:srgbClr val="000000">
+                <a:alpha val="0"/>
+              </a:srgbClr>
+            </a:solidFill>
+            <a:prstDash val="solid"/>
+          </a:ln>
+        </p:spPr>
+        <p:txBody>
+          <a:bodyPr/>
+          <a:lstStyle/>
+          <a:p>
+            <a:endParaRPr lang="en-SG" sz="1350"/>
+          </a:p>
+        </p:txBody>
+      </p:sp>
+      <p:sp>
+        <p:nvSpPr>
+          <p:cNvPr id="65" name="Rectangle 64">
+            <a:extLst>
+              <a:ext uri="{FF2B5EF4-FFF2-40B4-BE49-F238E27FC236}">
+                <a16:creationId xmlns:a16="http://schemas.microsoft.com/office/drawing/2014/main" id="{ABD76629-04D4-4A73-9310-0E7B7E0EF1C0}"/>
+              </a:ext>
+            </a:extLst>
+          </p:cNvPr>
+          <p:cNvSpPr>
+            <a:spLocks noGrp="1"/>
+          </p:cNvSpPr>
+          <p:nvPr/>
+        </p:nvSpPr>
+        <p:spPr>
+          <a:xfrm>
+            <a:off x="2778919" y="4221956"/>
+            <a:ext cx="188363" cy="57150"/>
+          </a:xfrm>
+          <a:prstGeom prst="rect">
+            <a:avLst/>
+          </a:prstGeom>
+          <a:solidFill>
+            <a:srgbClr val="2F8F5B"/>
+          </a:solidFill>
+          <a:ln w="0">
+            <a:solidFill>
+              <a:srgbClr val="000000">
+                <a:alpha val="0"/>
+              </a:srgbClr>
+            </a:solidFill>
+            <a:prstDash val="solid"/>
+          </a:ln>
+        </p:spPr>
+        <p:txBody>
+          <a:bodyPr/>
+          <a:lstStyle/>
+          <a:p>
+            <a:endParaRPr lang="en-SG" sz="1350"/>
+          </a:p>
+        </p:txBody>
+      </p:sp>
+      <p:sp>
+        <p:nvSpPr>
+          <p:cNvPr id="66" name="Rectangle 65">
+            <a:extLst>
+              <a:ext uri="{FF2B5EF4-FFF2-40B4-BE49-F238E27FC236}">
+                <a16:creationId xmlns:a16="http://schemas.microsoft.com/office/drawing/2014/main" id="{0C81D34E-0A84-45C2-A5A4-09920FFAE131}"/>
+              </a:ext>
+            </a:extLst>
+          </p:cNvPr>
+          <p:cNvSpPr>
+            <a:spLocks noGrp="1"/>
+          </p:cNvSpPr>
+          <p:nvPr/>
+        </p:nvSpPr>
+        <p:spPr>
+          <a:xfrm>
+            <a:off x="3243263" y="4164806"/>
+            <a:ext cx="714375" cy="171450"/>
+          </a:xfrm>
+          <a:prstGeom prst="rect">
+            <a:avLst/>
+          </a:prstGeom>
+          <a:solidFill>
+            <a:srgbClr val="000000">
+              <a:alpha val="0"/>
+            </a:srgbClr>
+          </a:solidFill>
+          <a:ln w="0">
+            <a:solidFill>
+              <a:srgbClr val="000000">
+                <a:alpha val="0"/>
+              </a:srgbClr>
+            </a:solidFill>
+            <a:prstDash val="solid"/>
+          </a:ln>
+        </p:spPr>
+        <p:txBody>
+          <a:bodyPr lIns="0" tIns="0" rIns="0" bIns="0" anchor="t"/>
+          <a:lstStyle/>
+          <a:p>
+            <a:pPr algn="r">
+              <a:defRPr sz="1050" b="0">
+                <a:solidFill>
+                  <a:srgbClr val="1F2933"/>
+                </a:solidFill>
+                <a:latin typeface="Aptos"/>
+                <a:ea typeface="Aptos"/>
+                <a:cs typeface="Aptos"/>
+              </a:defRPr>
+            </a:pPr>
+            <a:r>
+              <a:rPr sz="788">
+                <a:solidFill>
+                  <a:srgbClr val="1F2933"/>
+                </a:solidFill>
+                <a:latin typeface="Aptos"/>
+                <a:ea typeface="Aptos"/>
+                <a:cs typeface="Aptos"/>
+              </a:rPr>
+              <a:t>10,943</a:t>
+            </a:r>
+          </a:p>
+        </p:txBody>
+      </p:sp>
+      <p:sp>
+        <p:nvSpPr>
+          <p:cNvPr id="67" name="Rectangle 66">
+            <a:extLst>
+              <a:ext uri="{FF2B5EF4-FFF2-40B4-BE49-F238E27FC236}">
+                <a16:creationId xmlns:a16="http://schemas.microsoft.com/office/drawing/2014/main" id="{3333DF9E-673A-470E-B141-353BB47306BA}"/>
+              </a:ext>
+            </a:extLst>
+          </p:cNvPr>
+          <p:cNvSpPr>
+            <a:spLocks noGrp="1"/>
+          </p:cNvSpPr>
+          <p:nvPr/>
+        </p:nvSpPr>
+        <p:spPr>
+          <a:xfrm>
+            <a:off x="4171951" y="4164806"/>
+            <a:ext cx="535781" cy="171450"/>
+          </a:xfrm>
+          <a:prstGeom prst="rect">
+            <a:avLst/>
+          </a:prstGeom>
+          <a:solidFill>
+            <a:srgbClr val="000000">
+              <a:alpha val="0"/>
+            </a:srgbClr>
+          </a:solidFill>
+          <a:ln w="0">
+            <a:solidFill>
+              <a:srgbClr val="000000">
+                <a:alpha val="0"/>
+              </a:srgbClr>
+            </a:solidFill>
+            <a:prstDash val="solid"/>
+          </a:ln>
+        </p:spPr>
+        <p:txBody>
+          <a:bodyPr lIns="0" tIns="0" rIns="0" bIns="0" anchor="t"/>
+          <a:lstStyle/>
+          <a:p>
+            <a:pPr algn="r">
+              <a:defRPr sz="1050" b="0">
+                <a:solidFill>
+                  <a:srgbClr val="1F2933"/>
+                </a:solidFill>
+                <a:latin typeface="Aptos"/>
+                <a:ea typeface="Aptos"/>
+                <a:cs typeface="Aptos"/>
+              </a:defRPr>
+            </a:pPr>
+            <a:r>
+              <a:rPr sz="788">
+                <a:solidFill>
+                  <a:srgbClr val="1F2933"/>
+                </a:solidFill>
+                <a:latin typeface="Aptos"/>
+                <a:ea typeface="Aptos"/>
+                <a:cs typeface="Aptos"/>
+              </a:rPr>
+              <a:t>11.47%</a:t>
+            </a:r>
+          </a:p>
+        </p:txBody>
+      </p:sp>
+      <p:sp>
+        <p:nvSpPr>
+          <p:cNvPr id="68" name="Rectangle 67">
+            <a:extLst>
+              <a:ext uri="{FF2B5EF4-FFF2-40B4-BE49-F238E27FC236}">
+                <a16:creationId xmlns:a16="http://schemas.microsoft.com/office/drawing/2014/main" id="{CCBDF192-CAF2-4772-B6C1-E7B526BB17E0}"/>
+              </a:ext>
+            </a:extLst>
+          </p:cNvPr>
+          <p:cNvSpPr>
+            <a:spLocks noGrp="1"/>
+          </p:cNvSpPr>
+          <p:nvPr/>
+        </p:nvSpPr>
+        <p:spPr>
+          <a:xfrm>
+            <a:off x="4993482" y="4164806"/>
+            <a:ext cx="750094" cy="171450"/>
+          </a:xfrm>
+          <a:prstGeom prst="rect">
+            <a:avLst/>
+          </a:prstGeom>
+          <a:solidFill>
+            <a:srgbClr val="000000">
+              <a:alpha val="0"/>
+            </a:srgbClr>
+          </a:solidFill>
+          <a:ln w="0">
+            <a:solidFill>
+              <a:srgbClr val="000000">
+                <a:alpha val="0"/>
+              </a:srgbClr>
+            </a:solidFill>
+            <a:prstDash val="solid"/>
+          </a:ln>
+        </p:spPr>
+        <p:txBody>
+          <a:bodyPr lIns="0" tIns="0" rIns="0" bIns="0" anchor="t"/>
+          <a:lstStyle/>
+          <a:p>
+            <a:pPr algn="r">
+              <a:defRPr sz="1050" b="1">
+                <a:solidFill>
+                  <a:srgbClr val="2F8F5B"/>
+                </a:solidFill>
+                <a:latin typeface="Aptos"/>
+                <a:ea typeface="Aptos"/>
+                <a:cs typeface="Aptos"/>
+              </a:defRPr>
+            </a:pPr>
+            <a:r>
+              <a:rPr sz="788" b="1">
+                <a:solidFill>
+                  <a:srgbClr val="2F8F5B"/>
+                </a:solidFill>
+                <a:latin typeface="Aptos"/>
+                <a:ea typeface="Aptos"/>
+                <a:cs typeface="Aptos"/>
+              </a:rPr>
+              <a:t>R$4.32M</a:t>
+            </a:r>
+          </a:p>
+        </p:txBody>
+      </p:sp>
+      <p:sp>
+        <p:nvSpPr>
+          <p:cNvPr id="69" name="Rectangle 68">
+            <a:extLst>
+              <a:ext uri="{FF2B5EF4-FFF2-40B4-BE49-F238E27FC236}">
+                <a16:creationId xmlns:a16="http://schemas.microsoft.com/office/drawing/2014/main" id="{80F6EC7E-A7BB-486D-9A3C-741DDEA3B1D4}"/>
+              </a:ext>
+            </a:extLst>
+          </p:cNvPr>
+          <p:cNvSpPr>
+            <a:spLocks noGrp="1"/>
+          </p:cNvSpPr>
+          <p:nvPr/>
+        </p:nvSpPr>
+        <p:spPr>
+          <a:xfrm>
+            <a:off x="5886450" y="4164806"/>
+            <a:ext cx="1785938" cy="171450"/>
+          </a:xfrm>
+          <a:prstGeom prst="rect">
+            <a:avLst/>
+          </a:prstGeom>
+          <a:solidFill>
+            <a:srgbClr val="000000">
+              <a:alpha val="0"/>
+            </a:srgbClr>
+          </a:solidFill>
+          <a:ln w="0">
+            <a:solidFill>
+              <a:srgbClr val="000000">
+                <a:alpha val="0"/>
+              </a:srgbClr>
+            </a:solidFill>
+            <a:prstDash val="solid"/>
+          </a:ln>
+        </p:spPr>
+        <p:txBody>
+          <a:bodyPr lIns="0" tIns="0" rIns="0" bIns="0" anchor="t"/>
+          <a:lstStyle/>
+          <a:p>
+            <a:pPr algn="l">
+              <a:defRPr sz="975" b="0">
+                <a:solidFill>
+                  <a:srgbClr val="6B7280"/>
+                </a:solidFill>
+                <a:latin typeface="Aptos"/>
+                <a:ea typeface="Aptos"/>
+                <a:cs typeface="Aptos"/>
+              </a:defRPr>
+            </a:pPr>
+            <a:r>
+              <a:rPr sz="731">
+                <a:solidFill>
+                  <a:srgbClr val="6B7280"/>
+                </a:solidFill>
+                <a:latin typeface="Aptos"/>
+                <a:ea typeface="Aptos"/>
+                <a:cs typeface="Aptos"/>
+              </a:rPr>
+              <a:t>Premium cross-sell</a:t>
+            </a:r>
+          </a:p>
+        </p:txBody>
+      </p:sp>
+      <p:sp>
+        <p:nvSpPr>
+          <p:cNvPr id="70" name="Rectangle 69">
+            <a:extLst>
+              <a:ext uri="{FF2B5EF4-FFF2-40B4-BE49-F238E27FC236}">
+                <a16:creationId xmlns:a16="http://schemas.microsoft.com/office/drawing/2014/main" id="{624B1107-6F87-4611-90C1-5A3EDC468A68}"/>
+              </a:ext>
+            </a:extLst>
+          </p:cNvPr>
+          <p:cNvSpPr>
+            <a:spLocks noGrp="1"/>
+          </p:cNvSpPr>
+          <p:nvPr/>
+        </p:nvSpPr>
+        <p:spPr>
+          <a:xfrm>
+            <a:off x="457200" y="4722019"/>
+            <a:ext cx="7786688" cy="7144"/>
+          </a:xfrm>
+          <a:prstGeom prst="rect">
+            <a:avLst/>
+          </a:prstGeom>
+          <a:solidFill>
+            <a:srgbClr val="D9DEE7"/>
+          </a:solidFill>
+          <a:ln w="0">
+            <a:solidFill>
+              <a:srgbClr val="000000">
+                <a:alpha val="0"/>
+              </a:srgbClr>
+            </a:solidFill>
+            <a:prstDash val="solid"/>
+          </a:ln>
+        </p:spPr>
+        <p:txBody>
+          <a:bodyPr/>
+          <a:lstStyle/>
+          <a:p>
+            <a:endParaRPr lang="en-SG" sz="1350"/>
+          </a:p>
+        </p:txBody>
+      </p:sp>
+      <p:sp>
+        <p:nvSpPr>
+          <p:cNvPr id="71" name="Oval 70">
+            <a:extLst>
+              <a:ext uri="{FF2B5EF4-FFF2-40B4-BE49-F238E27FC236}">
+                <a16:creationId xmlns:a16="http://schemas.microsoft.com/office/drawing/2014/main" id="{BB93D748-1709-43ED-A9F7-6FF147765057}"/>
+              </a:ext>
+            </a:extLst>
+          </p:cNvPr>
+          <p:cNvSpPr>
+            <a:spLocks noGrp="1"/>
+          </p:cNvSpPr>
+          <p:nvPr/>
+        </p:nvSpPr>
+        <p:spPr>
+          <a:xfrm>
+            <a:off x="457200" y="4514850"/>
+            <a:ext cx="71438" cy="71438"/>
+          </a:xfrm>
+          <a:prstGeom prst="ellipse">
+            <a:avLst/>
+          </a:prstGeom>
+          <a:solidFill>
+            <a:srgbClr val="34699A"/>
+          </a:solidFill>
+          <a:ln w="0">
+            <a:solidFill>
+              <a:srgbClr val="000000">
+                <a:alpha val="0"/>
+              </a:srgbClr>
+            </a:solidFill>
+            <a:prstDash val="solid"/>
+          </a:ln>
+        </p:spPr>
+        <p:txBody>
+          <a:bodyPr/>
+          <a:lstStyle/>
+          <a:p>
+            <a:endParaRPr lang="en-SG" sz="1350"/>
+          </a:p>
+        </p:txBody>
+      </p:sp>
+      <p:sp>
+        <p:nvSpPr>
+          <p:cNvPr id="72" name="Rectangle 71">
+            <a:extLst>
+              <a:ext uri="{FF2B5EF4-FFF2-40B4-BE49-F238E27FC236}">
+                <a16:creationId xmlns:a16="http://schemas.microsoft.com/office/drawing/2014/main" id="{9B55504D-F02A-4EC7-AAB1-E27970F867C1}"/>
+              </a:ext>
+            </a:extLst>
+          </p:cNvPr>
+          <p:cNvSpPr>
+            <a:spLocks noGrp="1"/>
+          </p:cNvSpPr>
+          <p:nvPr/>
+        </p:nvSpPr>
+        <p:spPr>
+          <a:xfrm>
+            <a:off x="585788" y="4464844"/>
+            <a:ext cx="2143125" cy="171450"/>
+          </a:xfrm>
+          <a:prstGeom prst="rect">
+            <a:avLst/>
+          </a:prstGeom>
+          <a:solidFill>
+            <a:srgbClr val="000000">
+              <a:alpha val="0"/>
+            </a:srgbClr>
+          </a:solidFill>
+          <a:ln w="0">
+            <a:solidFill>
+              <a:srgbClr val="000000">
+                <a:alpha val="0"/>
+              </a:srgbClr>
+            </a:solidFill>
+            <a:prstDash val="solid"/>
+          </a:ln>
+        </p:spPr>
+        <p:txBody>
+          <a:bodyPr lIns="0" tIns="0" rIns="0" bIns="0" anchor="t"/>
+          <a:lstStyle/>
+          <a:p>
+            <a:pPr algn="l">
+              <a:defRPr sz="1050" b="0">
+                <a:solidFill>
+                  <a:srgbClr val="1F2933"/>
+                </a:solidFill>
+                <a:latin typeface="Aptos"/>
+                <a:ea typeface="Aptos"/>
+                <a:cs typeface="Aptos"/>
+              </a:defRPr>
+            </a:pPr>
+            <a:r>
+              <a:rPr sz="788">
+                <a:solidFill>
+                  <a:srgbClr val="1F2933"/>
+                </a:solidFill>
+                <a:latin typeface="Aptos"/>
+                <a:ea typeface="Aptos"/>
+                <a:cs typeface="Aptos"/>
+              </a:rPr>
+              <a:t>Recent Repeat Buyers</a:t>
+            </a:r>
+          </a:p>
+        </p:txBody>
+      </p:sp>
+      <p:sp>
+        <p:nvSpPr>
+          <p:cNvPr id="73" name="Rectangle 72">
+            <a:extLst>
+              <a:ext uri="{FF2B5EF4-FFF2-40B4-BE49-F238E27FC236}">
+                <a16:creationId xmlns:a16="http://schemas.microsoft.com/office/drawing/2014/main" id="{F737C9DF-EF03-4203-8E0A-A176B69CD2D2}"/>
+              </a:ext>
+            </a:extLst>
+          </p:cNvPr>
+          <p:cNvSpPr>
+            <a:spLocks noGrp="1"/>
+          </p:cNvSpPr>
+          <p:nvPr/>
+        </p:nvSpPr>
+        <p:spPr>
+          <a:xfrm>
+            <a:off x="2778919" y="4521994"/>
+            <a:ext cx="414338" cy="57150"/>
+          </a:xfrm>
+          <a:prstGeom prst="rect">
+            <a:avLst/>
+          </a:prstGeom>
+          <a:solidFill>
+            <a:srgbClr val="F4F6F8"/>
+          </a:solidFill>
+          <a:ln w="0">
+            <a:solidFill>
+              <a:srgbClr val="000000">
+                <a:alpha val="0"/>
+              </a:srgbClr>
+            </a:solidFill>
+            <a:prstDash val="solid"/>
+          </a:ln>
+        </p:spPr>
+        <p:txBody>
+          <a:bodyPr/>
+          <a:lstStyle/>
+          <a:p>
+            <a:endParaRPr lang="en-SG" sz="1350"/>
+          </a:p>
+        </p:txBody>
+      </p:sp>
+      <p:sp>
+        <p:nvSpPr>
+          <p:cNvPr id="74" name="Rectangle 73">
+            <a:extLst>
+              <a:ext uri="{FF2B5EF4-FFF2-40B4-BE49-F238E27FC236}">
+                <a16:creationId xmlns:a16="http://schemas.microsoft.com/office/drawing/2014/main" id="{4151B761-9A4C-42C7-AB90-15BEC88B12EE}"/>
+              </a:ext>
+            </a:extLst>
+          </p:cNvPr>
+          <p:cNvSpPr>
+            <a:spLocks noGrp="1"/>
+          </p:cNvSpPr>
+          <p:nvPr/>
+        </p:nvSpPr>
+        <p:spPr>
+          <a:xfrm>
+            <a:off x="2778919" y="4521994"/>
+            <a:ext cx="26129" cy="57150"/>
+          </a:xfrm>
+          <a:prstGeom prst="rect">
+            <a:avLst/>
+          </a:prstGeom>
+          <a:solidFill>
+            <a:srgbClr val="34699A"/>
+          </a:solidFill>
+          <a:ln w="0">
+            <a:solidFill>
+              <a:srgbClr val="000000">
+                <a:alpha val="0"/>
+              </a:srgbClr>
+            </a:solidFill>
+            <a:prstDash val="solid"/>
+          </a:ln>
+        </p:spPr>
+        <p:txBody>
+          <a:bodyPr/>
+          <a:lstStyle/>
+          <a:p>
+            <a:endParaRPr lang="en-SG" sz="1350"/>
+          </a:p>
+        </p:txBody>
+      </p:sp>
+      <p:sp>
+        <p:nvSpPr>
+          <p:cNvPr id="75" name="Rectangle 74">
+            <a:extLst>
+              <a:ext uri="{FF2B5EF4-FFF2-40B4-BE49-F238E27FC236}">
+                <a16:creationId xmlns:a16="http://schemas.microsoft.com/office/drawing/2014/main" id="{07CE996F-7811-47D1-9E5A-9A26071D0FF7}"/>
+              </a:ext>
+            </a:extLst>
+          </p:cNvPr>
+          <p:cNvSpPr>
+            <a:spLocks noGrp="1"/>
+          </p:cNvSpPr>
+          <p:nvPr/>
+        </p:nvSpPr>
+        <p:spPr>
+          <a:xfrm>
+            <a:off x="3243263" y="4464844"/>
+            <a:ext cx="714375" cy="171450"/>
+          </a:xfrm>
+          <a:prstGeom prst="rect">
+            <a:avLst/>
+          </a:prstGeom>
+          <a:solidFill>
+            <a:srgbClr val="000000">
+              <a:alpha val="0"/>
+            </a:srgbClr>
+          </a:solidFill>
+          <a:ln w="0">
+            <a:solidFill>
+              <a:srgbClr val="000000">
+                <a:alpha val="0"/>
+              </a:srgbClr>
+            </a:solidFill>
+            <a:prstDash val="solid"/>
+          </a:ln>
+        </p:spPr>
+        <p:txBody>
+          <a:bodyPr lIns="0" tIns="0" rIns="0" bIns="0" anchor="t"/>
+          <a:lstStyle/>
+          <a:p>
+            <a:pPr algn="r">
+              <a:defRPr sz="1050" b="0">
+                <a:solidFill>
+                  <a:srgbClr val="1F2933"/>
+                </a:solidFill>
+                <a:latin typeface="Aptos"/>
+                <a:ea typeface="Aptos"/>
+                <a:cs typeface="Aptos"/>
+              </a:defRPr>
+            </a:pPr>
+            <a:r>
+              <a:rPr sz="788">
+                <a:solidFill>
+                  <a:srgbClr val="1F2933"/>
+                </a:solidFill>
+                <a:latin typeface="Aptos"/>
+                <a:ea typeface="Aptos"/>
+                <a:cs typeface="Aptos"/>
+              </a:rPr>
+              <a:t>1,518</a:t>
+            </a:r>
+          </a:p>
+        </p:txBody>
+      </p:sp>
+      <p:sp>
+        <p:nvSpPr>
+          <p:cNvPr id="76" name="Rectangle 75">
+            <a:extLst>
+              <a:ext uri="{FF2B5EF4-FFF2-40B4-BE49-F238E27FC236}">
+                <a16:creationId xmlns:a16="http://schemas.microsoft.com/office/drawing/2014/main" id="{056FDC0F-C4A0-480B-A3EA-B40C0527C6D1}"/>
+              </a:ext>
+            </a:extLst>
+          </p:cNvPr>
+          <p:cNvSpPr>
+            <a:spLocks noGrp="1"/>
+          </p:cNvSpPr>
+          <p:nvPr/>
+        </p:nvSpPr>
+        <p:spPr>
+          <a:xfrm>
+            <a:off x="4171951" y="4464844"/>
+            <a:ext cx="535781" cy="171450"/>
+          </a:xfrm>
+          <a:prstGeom prst="rect">
+            <a:avLst/>
+          </a:prstGeom>
+          <a:solidFill>
+            <a:srgbClr val="000000">
+              <a:alpha val="0"/>
+            </a:srgbClr>
+          </a:solidFill>
+          <a:ln w="0">
+            <a:solidFill>
+              <a:srgbClr val="000000">
+                <a:alpha val="0"/>
+              </a:srgbClr>
+            </a:solidFill>
+            <a:prstDash val="solid"/>
+          </a:ln>
+        </p:spPr>
+        <p:txBody>
+          <a:bodyPr lIns="0" tIns="0" rIns="0" bIns="0" anchor="t"/>
+          <a:lstStyle/>
+          <a:p>
+            <a:pPr algn="r">
+              <a:defRPr sz="1050" b="0">
+                <a:solidFill>
+                  <a:srgbClr val="1F2933"/>
+                </a:solidFill>
+                <a:latin typeface="Aptos"/>
+                <a:ea typeface="Aptos"/>
+                <a:cs typeface="Aptos"/>
+              </a:defRPr>
+            </a:pPr>
+            <a:r>
+              <a:rPr sz="788">
+                <a:solidFill>
+                  <a:srgbClr val="1F2933"/>
+                </a:solidFill>
+                <a:latin typeface="Aptos"/>
+                <a:ea typeface="Aptos"/>
+                <a:cs typeface="Aptos"/>
+              </a:rPr>
+              <a:t>1.59%</a:t>
+            </a:r>
+          </a:p>
+        </p:txBody>
+      </p:sp>
+      <p:sp>
+        <p:nvSpPr>
+          <p:cNvPr id="77" name="Rectangle 76">
+            <a:extLst>
+              <a:ext uri="{FF2B5EF4-FFF2-40B4-BE49-F238E27FC236}">
+                <a16:creationId xmlns:a16="http://schemas.microsoft.com/office/drawing/2014/main" id="{D9AE8896-162E-4301-8D31-A4C9C9C6A876}"/>
+              </a:ext>
+            </a:extLst>
+          </p:cNvPr>
+          <p:cNvSpPr>
+            <a:spLocks noGrp="1"/>
+          </p:cNvSpPr>
+          <p:nvPr/>
+        </p:nvSpPr>
+        <p:spPr>
+          <a:xfrm>
+            <a:off x="4993482" y="4464844"/>
+            <a:ext cx="750094" cy="171450"/>
+          </a:xfrm>
+          <a:prstGeom prst="rect">
+            <a:avLst/>
+          </a:prstGeom>
+          <a:solidFill>
+            <a:srgbClr val="000000">
+              <a:alpha val="0"/>
+            </a:srgbClr>
+          </a:solidFill>
+          <a:ln w="0">
+            <a:solidFill>
+              <a:srgbClr val="000000">
+                <a:alpha val="0"/>
+              </a:srgbClr>
+            </a:solidFill>
+            <a:prstDash val="solid"/>
+          </a:ln>
+        </p:spPr>
+        <p:txBody>
+          <a:bodyPr lIns="0" tIns="0" rIns="0" bIns="0" anchor="t"/>
+          <a:lstStyle/>
+          <a:p>
+            <a:pPr algn="r">
+              <a:defRPr sz="1050" b="0">
+                <a:solidFill>
+                  <a:srgbClr val="1F2933"/>
+                </a:solidFill>
+                <a:latin typeface="Aptos"/>
+                <a:ea typeface="Aptos"/>
+                <a:cs typeface="Aptos"/>
+              </a:defRPr>
+            </a:pPr>
+            <a:r>
+              <a:rPr sz="788">
+                <a:solidFill>
+                  <a:srgbClr val="1F2933"/>
+                </a:solidFill>
+                <a:latin typeface="Aptos"/>
+                <a:ea typeface="Aptos"/>
+                <a:cs typeface="Aptos"/>
+              </a:rPr>
+              <a:t>R$453k</a:t>
+            </a:r>
+          </a:p>
+        </p:txBody>
+      </p:sp>
+      <p:sp>
+        <p:nvSpPr>
+          <p:cNvPr id="78" name="Rectangle 77">
+            <a:extLst>
+              <a:ext uri="{FF2B5EF4-FFF2-40B4-BE49-F238E27FC236}">
+                <a16:creationId xmlns:a16="http://schemas.microsoft.com/office/drawing/2014/main" id="{1A89880D-9026-4F43-B847-40737FA46751}"/>
+              </a:ext>
+            </a:extLst>
+          </p:cNvPr>
+          <p:cNvSpPr>
+            <a:spLocks noGrp="1"/>
+          </p:cNvSpPr>
+          <p:nvPr/>
+        </p:nvSpPr>
+        <p:spPr>
+          <a:xfrm>
+            <a:off x="5886450" y="4464844"/>
+            <a:ext cx="1785938" cy="171450"/>
+          </a:xfrm>
+          <a:prstGeom prst="rect">
+            <a:avLst/>
+          </a:prstGeom>
+          <a:solidFill>
+            <a:srgbClr val="000000">
+              <a:alpha val="0"/>
+            </a:srgbClr>
+          </a:solidFill>
+          <a:ln w="0">
+            <a:solidFill>
+              <a:srgbClr val="000000">
+                <a:alpha val="0"/>
+              </a:srgbClr>
+            </a:solidFill>
+            <a:prstDash val="solid"/>
+          </a:ln>
+        </p:spPr>
+        <p:txBody>
+          <a:bodyPr lIns="0" tIns="0" rIns="0" bIns="0" anchor="t"/>
+          <a:lstStyle/>
+          <a:p>
+            <a:pPr algn="l">
+              <a:defRPr sz="975" b="0">
+                <a:solidFill>
+                  <a:srgbClr val="6B7280"/>
+                </a:solidFill>
+                <a:latin typeface="Aptos"/>
+                <a:ea typeface="Aptos"/>
+                <a:cs typeface="Aptos"/>
+              </a:defRPr>
+            </a:pPr>
+            <a:r>
+              <a:rPr sz="731">
+                <a:solidFill>
+                  <a:srgbClr val="6B7280"/>
+                </a:solidFill>
+                <a:latin typeface="Aptos"/>
+                <a:ea typeface="Aptos"/>
+                <a:cs typeface="Aptos"/>
+              </a:rPr>
+              <a:t>Loyalty campaign</a:t>
+            </a:r>
+          </a:p>
+        </p:txBody>
+      </p:sp>
+      <p:sp>
+        <p:nvSpPr>
+          <p:cNvPr id="79" name="Rectangle 78">
+            <a:extLst>
+              <a:ext uri="{FF2B5EF4-FFF2-40B4-BE49-F238E27FC236}">
+                <a16:creationId xmlns:a16="http://schemas.microsoft.com/office/drawing/2014/main" id="{ACF15D8A-8591-46FC-BCF0-F92512549EBE}"/>
+              </a:ext>
+            </a:extLst>
+          </p:cNvPr>
+          <p:cNvSpPr>
+            <a:spLocks noGrp="1"/>
+          </p:cNvSpPr>
+          <p:nvPr/>
+        </p:nvSpPr>
+        <p:spPr>
+          <a:xfrm>
+            <a:off x="457200" y="5022057"/>
+            <a:ext cx="7786688" cy="7144"/>
+          </a:xfrm>
+          <a:prstGeom prst="rect">
+            <a:avLst/>
+          </a:prstGeom>
+          <a:solidFill>
+            <a:srgbClr val="D9DEE7"/>
+          </a:solidFill>
+          <a:ln w="0">
+            <a:solidFill>
+              <a:srgbClr val="000000">
+                <a:alpha val="0"/>
+              </a:srgbClr>
+            </a:solidFill>
+            <a:prstDash val="solid"/>
+          </a:ln>
+        </p:spPr>
+        <p:txBody>
+          <a:bodyPr/>
+          <a:lstStyle/>
+          <a:p>
+            <a:endParaRPr lang="en-SG" sz="1350"/>
+          </a:p>
+        </p:txBody>
+      </p:sp>
+      <p:sp>
+        <p:nvSpPr>
+          <p:cNvPr id="80" name="Oval 79">
+            <a:extLst>
+              <a:ext uri="{FF2B5EF4-FFF2-40B4-BE49-F238E27FC236}">
+                <a16:creationId xmlns:a16="http://schemas.microsoft.com/office/drawing/2014/main" id="{7916AC0D-81BB-4108-A098-90CC092EB650}"/>
+              </a:ext>
+            </a:extLst>
+          </p:cNvPr>
+          <p:cNvSpPr>
+            <a:spLocks noGrp="1"/>
+          </p:cNvSpPr>
+          <p:nvPr/>
+        </p:nvSpPr>
+        <p:spPr>
+          <a:xfrm>
+            <a:off x="457200" y="4814887"/>
+            <a:ext cx="71438" cy="71438"/>
+          </a:xfrm>
+          <a:prstGeom prst="ellipse">
+            <a:avLst/>
+          </a:prstGeom>
+          <a:solidFill>
+            <a:srgbClr val="34699A"/>
+          </a:solidFill>
+          <a:ln w="0">
+            <a:solidFill>
+              <a:srgbClr val="000000">
+                <a:alpha val="0"/>
+              </a:srgbClr>
+            </a:solidFill>
+            <a:prstDash val="solid"/>
+          </a:ln>
+        </p:spPr>
+        <p:txBody>
+          <a:bodyPr/>
+          <a:lstStyle/>
+          <a:p>
+            <a:endParaRPr lang="en-SG" sz="1350"/>
+          </a:p>
+        </p:txBody>
+      </p:sp>
+      <p:sp>
+        <p:nvSpPr>
+          <p:cNvPr id="81" name="Rectangle 80">
+            <a:extLst>
+              <a:ext uri="{FF2B5EF4-FFF2-40B4-BE49-F238E27FC236}">
+                <a16:creationId xmlns:a16="http://schemas.microsoft.com/office/drawing/2014/main" id="{F6218EA0-35B2-4843-ACA5-125B045CDDA9}"/>
+              </a:ext>
+            </a:extLst>
+          </p:cNvPr>
+          <p:cNvSpPr>
+            <a:spLocks noGrp="1"/>
+          </p:cNvSpPr>
+          <p:nvPr/>
+        </p:nvSpPr>
+        <p:spPr>
+          <a:xfrm>
+            <a:off x="585788" y="4764881"/>
+            <a:ext cx="2143125" cy="171450"/>
+          </a:xfrm>
+          <a:prstGeom prst="rect">
+            <a:avLst/>
+          </a:prstGeom>
+          <a:solidFill>
+            <a:srgbClr val="000000">
+              <a:alpha val="0"/>
+            </a:srgbClr>
+          </a:solidFill>
+          <a:ln w="0">
+            <a:solidFill>
+              <a:srgbClr val="000000">
+                <a:alpha val="0"/>
+              </a:srgbClr>
+            </a:solidFill>
+            <a:prstDash val="solid"/>
+          </a:ln>
+        </p:spPr>
+        <p:txBody>
+          <a:bodyPr lIns="0" tIns="0" rIns="0" bIns="0" anchor="t"/>
+          <a:lstStyle/>
+          <a:p>
+            <a:pPr algn="l">
+              <a:defRPr sz="1050" b="0">
+                <a:solidFill>
+                  <a:srgbClr val="1F2933"/>
+                </a:solidFill>
+                <a:latin typeface="Aptos"/>
+                <a:ea typeface="Aptos"/>
+                <a:cs typeface="Aptos"/>
+              </a:defRPr>
+            </a:pPr>
+            <a:r>
+              <a:rPr sz="788">
+                <a:solidFill>
+                  <a:srgbClr val="1F2933"/>
+                </a:solidFill>
+                <a:latin typeface="Aptos"/>
+                <a:ea typeface="Aptos"/>
+                <a:cs typeface="Aptos"/>
+              </a:rPr>
+              <a:t>At-Risk Repeat Buyers</a:t>
+            </a:r>
+          </a:p>
+        </p:txBody>
+      </p:sp>
+      <p:sp>
+        <p:nvSpPr>
+          <p:cNvPr id="82" name="Rectangle 81">
+            <a:extLst>
+              <a:ext uri="{FF2B5EF4-FFF2-40B4-BE49-F238E27FC236}">
+                <a16:creationId xmlns:a16="http://schemas.microsoft.com/office/drawing/2014/main" id="{12DA710F-222C-40D7-A5A1-C80C7EB3F449}"/>
+              </a:ext>
+            </a:extLst>
+          </p:cNvPr>
+          <p:cNvSpPr>
+            <a:spLocks noGrp="1"/>
+          </p:cNvSpPr>
+          <p:nvPr/>
+        </p:nvSpPr>
+        <p:spPr>
+          <a:xfrm>
+            <a:off x="2778919" y="4822031"/>
+            <a:ext cx="414338" cy="57150"/>
+          </a:xfrm>
+          <a:prstGeom prst="rect">
+            <a:avLst/>
+          </a:prstGeom>
+          <a:solidFill>
+            <a:srgbClr val="F4F6F8"/>
+          </a:solidFill>
+          <a:ln w="0">
+            <a:solidFill>
+              <a:srgbClr val="000000">
+                <a:alpha val="0"/>
+              </a:srgbClr>
+            </a:solidFill>
+            <a:prstDash val="solid"/>
+          </a:ln>
+        </p:spPr>
+        <p:txBody>
+          <a:bodyPr/>
+          <a:lstStyle/>
+          <a:p>
+            <a:endParaRPr lang="en-SG" sz="1350"/>
+          </a:p>
+        </p:txBody>
+      </p:sp>
+      <p:sp>
+        <p:nvSpPr>
+          <p:cNvPr id="83" name="Rectangle 82">
+            <a:extLst>
+              <a:ext uri="{FF2B5EF4-FFF2-40B4-BE49-F238E27FC236}">
+                <a16:creationId xmlns:a16="http://schemas.microsoft.com/office/drawing/2014/main" id="{366212A4-C54D-46A3-865E-6EFCFD8CD543}"/>
+              </a:ext>
+            </a:extLst>
+          </p:cNvPr>
+          <p:cNvSpPr>
+            <a:spLocks noGrp="1"/>
+          </p:cNvSpPr>
+          <p:nvPr/>
+        </p:nvSpPr>
+        <p:spPr>
+          <a:xfrm>
+            <a:off x="2778919" y="4822031"/>
+            <a:ext cx="22618" cy="57150"/>
+          </a:xfrm>
+          <a:prstGeom prst="rect">
+            <a:avLst/>
+          </a:prstGeom>
+          <a:solidFill>
+            <a:srgbClr val="34699A"/>
+          </a:solidFill>
+          <a:ln w="0">
+            <a:solidFill>
+              <a:srgbClr val="000000">
+                <a:alpha val="0"/>
+              </a:srgbClr>
+            </a:solidFill>
+            <a:prstDash val="solid"/>
+          </a:ln>
+        </p:spPr>
+        <p:txBody>
+          <a:bodyPr/>
+          <a:lstStyle/>
+          <a:p>
+            <a:endParaRPr lang="en-SG" sz="1350"/>
+          </a:p>
+        </p:txBody>
+      </p:sp>
+      <p:sp>
+        <p:nvSpPr>
+          <p:cNvPr id="84" name="Rectangle 83">
+            <a:extLst>
+              <a:ext uri="{FF2B5EF4-FFF2-40B4-BE49-F238E27FC236}">
+                <a16:creationId xmlns:a16="http://schemas.microsoft.com/office/drawing/2014/main" id="{3C8E564D-B90C-421E-8AC4-4411744643A2}"/>
+              </a:ext>
+            </a:extLst>
+          </p:cNvPr>
+          <p:cNvSpPr>
+            <a:spLocks noGrp="1"/>
+          </p:cNvSpPr>
+          <p:nvPr/>
+        </p:nvSpPr>
+        <p:spPr>
+          <a:xfrm>
+            <a:off x="3243263" y="4764881"/>
+            <a:ext cx="714375" cy="171450"/>
+          </a:xfrm>
+          <a:prstGeom prst="rect">
+            <a:avLst/>
+          </a:prstGeom>
+          <a:solidFill>
+            <a:srgbClr val="000000">
+              <a:alpha val="0"/>
+            </a:srgbClr>
+          </a:solidFill>
+          <a:ln w="0">
+            <a:solidFill>
+              <a:srgbClr val="000000">
+                <a:alpha val="0"/>
+              </a:srgbClr>
+            </a:solidFill>
+            <a:prstDash val="solid"/>
+          </a:ln>
+        </p:spPr>
+        <p:txBody>
+          <a:bodyPr lIns="0" tIns="0" rIns="0" bIns="0" anchor="t"/>
+          <a:lstStyle/>
+          <a:p>
+            <a:pPr algn="r">
+              <a:defRPr sz="1050" b="0">
+                <a:solidFill>
+                  <a:srgbClr val="1F2933"/>
+                </a:solidFill>
+                <a:latin typeface="Aptos"/>
+                <a:ea typeface="Aptos"/>
+                <a:cs typeface="Aptos"/>
+              </a:defRPr>
+            </a:pPr>
+            <a:r>
+              <a:rPr sz="788">
+                <a:solidFill>
+                  <a:srgbClr val="1F2933"/>
+                </a:solidFill>
+                <a:latin typeface="Aptos"/>
+                <a:ea typeface="Aptos"/>
+                <a:cs typeface="Aptos"/>
+              </a:rPr>
+              <a:t>1,314</a:t>
+            </a:r>
+          </a:p>
+        </p:txBody>
+      </p:sp>
+      <p:sp>
+        <p:nvSpPr>
+          <p:cNvPr id="85" name="Rectangle 84">
+            <a:extLst>
+              <a:ext uri="{FF2B5EF4-FFF2-40B4-BE49-F238E27FC236}">
+                <a16:creationId xmlns:a16="http://schemas.microsoft.com/office/drawing/2014/main" id="{1AB9B75A-1949-436F-92F7-4E70497B4B4E}"/>
+              </a:ext>
+            </a:extLst>
+          </p:cNvPr>
+          <p:cNvSpPr>
+            <a:spLocks noGrp="1"/>
+          </p:cNvSpPr>
+          <p:nvPr/>
+        </p:nvSpPr>
+        <p:spPr>
+          <a:xfrm>
+            <a:off x="4171951" y="4764881"/>
+            <a:ext cx="535781" cy="171450"/>
+          </a:xfrm>
+          <a:prstGeom prst="rect">
+            <a:avLst/>
+          </a:prstGeom>
+          <a:solidFill>
+            <a:srgbClr val="000000">
+              <a:alpha val="0"/>
+            </a:srgbClr>
+          </a:solidFill>
+          <a:ln w="0">
+            <a:solidFill>
+              <a:srgbClr val="000000">
+                <a:alpha val="0"/>
+              </a:srgbClr>
+            </a:solidFill>
+            <a:prstDash val="solid"/>
+          </a:ln>
+        </p:spPr>
+        <p:txBody>
+          <a:bodyPr lIns="0" tIns="0" rIns="0" bIns="0" anchor="t"/>
+          <a:lstStyle/>
+          <a:p>
+            <a:pPr algn="r">
+              <a:defRPr sz="1050" b="0">
+                <a:solidFill>
+                  <a:srgbClr val="1F2933"/>
+                </a:solidFill>
+                <a:latin typeface="Aptos"/>
+                <a:ea typeface="Aptos"/>
+                <a:cs typeface="Aptos"/>
+              </a:defRPr>
+            </a:pPr>
+            <a:r>
+              <a:rPr sz="788">
+                <a:solidFill>
+                  <a:srgbClr val="1F2933"/>
+                </a:solidFill>
+                <a:latin typeface="Aptos"/>
+                <a:ea typeface="Aptos"/>
+                <a:cs typeface="Aptos"/>
+              </a:rPr>
+              <a:t>1.38%</a:t>
+            </a:r>
+          </a:p>
+        </p:txBody>
+      </p:sp>
+      <p:sp>
+        <p:nvSpPr>
+          <p:cNvPr id="86" name="Rectangle 85">
+            <a:extLst>
+              <a:ext uri="{FF2B5EF4-FFF2-40B4-BE49-F238E27FC236}">
+                <a16:creationId xmlns:a16="http://schemas.microsoft.com/office/drawing/2014/main" id="{84B54BF5-75F9-4E44-94FB-91CD1873967C}"/>
+              </a:ext>
+            </a:extLst>
+          </p:cNvPr>
+          <p:cNvSpPr>
+            <a:spLocks noGrp="1"/>
+          </p:cNvSpPr>
+          <p:nvPr/>
+        </p:nvSpPr>
+        <p:spPr>
+          <a:xfrm>
+            <a:off x="4993482" y="4764881"/>
+            <a:ext cx="750094" cy="171450"/>
+          </a:xfrm>
+          <a:prstGeom prst="rect">
+            <a:avLst/>
+          </a:prstGeom>
+          <a:solidFill>
+            <a:srgbClr val="000000">
+              <a:alpha val="0"/>
+            </a:srgbClr>
+          </a:solidFill>
+          <a:ln w="0">
+            <a:solidFill>
+              <a:srgbClr val="000000">
+                <a:alpha val="0"/>
+              </a:srgbClr>
+            </a:solidFill>
+            <a:prstDash val="solid"/>
+          </a:ln>
+        </p:spPr>
+        <p:txBody>
+          <a:bodyPr lIns="0" tIns="0" rIns="0" bIns="0" anchor="t"/>
+          <a:lstStyle/>
+          <a:p>
+            <a:pPr algn="r">
+              <a:defRPr sz="1050" b="0">
+                <a:solidFill>
+                  <a:srgbClr val="1F2933"/>
+                </a:solidFill>
+                <a:latin typeface="Aptos"/>
+                <a:ea typeface="Aptos"/>
+                <a:cs typeface="Aptos"/>
+              </a:defRPr>
+            </a:pPr>
+            <a:r>
+              <a:rPr sz="788">
+                <a:solidFill>
+                  <a:srgbClr val="1F2933"/>
+                </a:solidFill>
+                <a:latin typeface="Aptos"/>
+                <a:ea typeface="Aptos"/>
+                <a:cs typeface="Aptos"/>
+              </a:rPr>
+              <a:t>R$402k</a:t>
+            </a:r>
+          </a:p>
+        </p:txBody>
+      </p:sp>
+      <p:sp>
+        <p:nvSpPr>
+          <p:cNvPr id="87" name="Rectangle 86">
+            <a:extLst>
+              <a:ext uri="{FF2B5EF4-FFF2-40B4-BE49-F238E27FC236}">
+                <a16:creationId xmlns:a16="http://schemas.microsoft.com/office/drawing/2014/main" id="{8D5A2CD9-A8BF-4F01-B9F1-139F9B7FCECA}"/>
+              </a:ext>
+            </a:extLst>
+          </p:cNvPr>
+          <p:cNvSpPr>
+            <a:spLocks noGrp="1"/>
+          </p:cNvSpPr>
+          <p:nvPr/>
+        </p:nvSpPr>
+        <p:spPr>
+          <a:xfrm>
+            <a:off x="5886450" y="4764881"/>
+            <a:ext cx="1785938" cy="171450"/>
+          </a:xfrm>
+          <a:prstGeom prst="rect">
+            <a:avLst/>
+          </a:prstGeom>
+          <a:solidFill>
+            <a:srgbClr val="000000">
+              <a:alpha val="0"/>
+            </a:srgbClr>
+          </a:solidFill>
+          <a:ln w="0">
+            <a:solidFill>
+              <a:srgbClr val="000000">
+                <a:alpha val="0"/>
+              </a:srgbClr>
+            </a:solidFill>
+            <a:prstDash val="solid"/>
+          </a:ln>
+        </p:spPr>
+        <p:txBody>
+          <a:bodyPr lIns="0" tIns="0" rIns="0" bIns="0" anchor="t"/>
+          <a:lstStyle/>
+          <a:p>
+            <a:pPr algn="l">
+              <a:defRPr sz="975" b="0">
+                <a:solidFill>
+                  <a:srgbClr val="6B7280"/>
+                </a:solidFill>
+                <a:latin typeface="Aptos"/>
+                <a:ea typeface="Aptos"/>
+                <a:cs typeface="Aptos"/>
+              </a:defRPr>
+            </a:pPr>
+            <a:r>
+              <a:rPr sz="731">
+                <a:solidFill>
+                  <a:srgbClr val="6B7280"/>
+                </a:solidFill>
+                <a:latin typeface="Aptos"/>
+                <a:ea typeface="Aptos"/>
+                <a:cs typeface="Aptos"/>
+              </a:rPr>
+              <a:t>Win-back repeat</a:t>
+            </a:r>
+          </a:p>
+        </p:txBody>
+      </p:sp>
+      <p:sp>
+        <p:nvSpPr>
+          <p:cNvPr id="88" name="Rectangle 87">
+            <a:extLst>
+              <a:ext uri="{FF2B5EF4-FFF2-40B4-BE49-F238E27FC236}">
+                <a16:creationId xmlns:a16="http://schemas.microsoft.com/office/drawing/2014/main" id="{4250C202-731A-4D81-9C01-DBB63B5C5D05}"/>
+              </a:ext>
+            </a:extLst>
+          </p:cNvPr>
+          <p:cNvSpPr>
+            <a:spLocks noGrp="1"/>
+          </p:cNvSpPr>
+          <p:nvPr/>
+        </p:nvSpPr>
+        <p:spPr>
+          <a:xfrm>
+            <a:off x="457200" y="5322094"/>
+            <a:ext cx="7786688" cy="7144"/>
+          </a:xfrm>
+          <a:prstGeom prst="rect">
+            <a:avLst/>
+          </a:prstGeom>
+          <a:solidFill>
+            <a:srgbClr val="D9DEE7"/>
+          </a:solidFill>
+          <a:ln w="0">
+            <a:solidFill>
+              <a:srgbClr val="000000">
+                <a:alpha val="0"/>
+              </a:srgbClr>
+            </a:solidFill>
+            <a:prstDash val="solid"/>
+          </a:ln>
+        </p:spPr>
+        <p:txBody>
+          <a:bodyPr/>
+          <a:lstStyle/>
+          <a:p>
+            <a:endParaRPr lang="en-SG" sz="1350"/>
+          </a:p>
+        </p:txBody>
+      </p:sp>
+      <p:sp>
+        <p:nvSpPr>
+          <p:cNvPr id="89" name="Oval 88">
+            <a:extLst>
+              <a:ext uri="{FF2B5EF4-FFF2-40B4-BE49-F238E27FC236}">
+                <a16:creationId xmlns:a16="http://schemas.microsoft.com/office/drawing/2014/main" id="{DAFE190D-62B2-4BAC-AEF0-B123E166FC3A}"/>
+              </a:ext>
+            </a:extLst>
+          </p:cNvPr>
+          <p:cNvSpPr>
+            <a:spLocks noGrp="1"/>
+          </p:cNvSpPr>
+          <p:nvPr/>
+        </p:nvSpPr>
+        <p:spPr>
+          <a:xfrm>
+            <a:off x="457200" y="5114925"/>
+            <a:ext cx="71438" cy="71438"/>
+          </a:xfrm>
+          <a:prstGeom prst="ellipse">
+            <a:avLst/>
+          </a:prstGeom>
+          <a:solidFill>
+            <a:srgbClr val="34699A"/>
+          </a:solidFill>
+          <a:ln w="0">
+            <a:solidFill>
+              <a:srgbClr val="000000">
+                <a:alpha val="0"/>
+              </a:srgbClr>
+            </a:solidFill>
+            <a:prstDash val="solid"/>
+          </a:ln>
+        </p:spPr>
+        <p:txBody>
+          <a:bodyPr/>
+          <a:lstStyle/>
+          <a:p>
+            <a:endParaRPr lang="en-SG" sz="1350"/>
+          </a:p>
+        </p:txBody>
+      </p:sp>
+      <p:sp>
+        <p:nvSpPr>
+          <p:cNvPr id="90" name="Rectangle 89">
+            <a:extLst>
+              <a:ext uri="{FF2B5EF4-FFF2-40B4-BE49-F238E27FC236}">
+                <a16:creationId xmlns:a16="http://schemas.microsoft.com/office/drawing/2014/main" id="{8CE5C440-120D-438D-BF73-7C7C8FF8A1F2}"/>
+              </a:ext>
+            </a:extLst>
+          </p:cNvPr>
+          <p:cNvSpPr>
+            <a:spLocks noGrp="1"/>
+          </p:cNvSpPr>
+          <p:nvPr/>
+        </p:nvSpPr>
+        <p:spPr>
+          <a:xfrm>
+            <a:off x="585788" y="5064919"/>
+            <a:ext cx="2143125" cy="171450"/>
+          </a:xfrm>
+          <a:prstGeom prst="rect">
+            <a:avLst/>
+          </a:prstGeom>
+          <a:solidFill>
+            <a:srgbClr val="000000">
+              <a:alpha val="0"/>
+            </a:srgbClr>
+          </a:solidFill>
+          <a:ln w="0">
+            <a:solidFill>
+              <a:srgbClr val="000000">
+                <a:alpha val="0"/>
+              </a:srgbClr>
+            </a:solidFill>
+            <a:prstDash val="solid"/>
+          </a:ln>
+        </p:spPr>
+        <p:txBody>
+          <a:bodyPr lIns="0" tIns="0" rIns="0" bIns="0" anchor="t"/>
+          <a:lstStyle/>
+          <a:p>
+            <a:pPr algn="l">
+              <a:defRPr sz="1050" b="0">
+                <a:solidFill>
+                  <a:srgbClr val="1F2933"/>
+                </a:solidFill>
+                <a:latin typeface="Aptos"/>
+                <a:ea typeface="Aptos"/>
+                <a:cs typeface="Aptos"/>
+              </a:defRPr>
+            </a:pPr>
+            <a:r>
+              <a:rPr sz="788">
+                <a:solidFill>
+                  <a:srgbClr val="1F2933"/>
+                </a:solidFill>
+                <a:latin typeface="Aptos"/>
+                <a:ea typeface="Aptos"/>
+                <a:cs typeface="Aptos"/>
+              </a:rPr>
+              <a:t>Champions</a:t>
+            </a:r>
+          </a:p>
+        </p:txBody>
+      </p:sp>
+      <p:sp>
+        <p:nvSpPr>
+          <p:cNvPr id="91" name="Rectangle 90">
+            <a:extLst>
+              <a:ext uri="{FF2B5EF4-FFF2-40B4-BE49-F238E27FC236}">
+                <a16:creationId xmlns:a16="http://schemas.microsoft.com/office/drawing/2014/main" id="{A5449975-FD5F-4F05-A3F1-1C851FFB2AB6}"/>
+              </a:ext>
+            </a:extLst>
+          </p:cNvPr>
+          <p:cNvSpPr>
+            <a:spLocks noGrp="1"/>
+          </p:cNvSpPr>
+          <p:nvPr/>
+        </p:nvSpPr>
+        <p:spPr>
+          <a:xfrm>
+            <a:off x="2778919" y="5122069"/>
+            <a:ext cx="414338" cy="57150"/>
+          </a:xfrm>
+          <a:prstGeom prst="rect">
+            <a:avLst/>
+          </a:prstGeom>
+          <a:solidFill>
+            <a:srgbClr val="F4F6F8"/>
+          </a:solidFill>
+          <a:ln w="0">
+            <a:solidFill>
+              <a:srgbClr val="000000">
+                <a:alpha val="0"/>
+              </a:srgbClr>
+            </a:solidFill>
+            <a:prstDash val="solid"/>
+          </a:ln>
+        </p:spPr>
+        <p:txBody>
+          <a:bodyPr/>
+          <a:lstStyle/>
+          <a:p>
+            <a:endParaRPr lang="en-SG" sz="1350"/>
+          </a:p>
+        </p:txBody>
+      </p:sp>
+      <p:sp>
+        <p:nvSpPr>
+          <p:cNvPr id="92" name="Rectangle 91">
+            <a:extLst>
+              <a:ext uri="{FF2B5EF4-FFF2-40B4-BE49-F238E27FC236}">
+                <a16:creationId xmlns:a16="http://schemas.microsoft.com/office/drawing/2014/main" id="{EF8B8746-C6C0-43C4-8897-A51DB2FE7269}"/>
+              </a:ext>
+            </a:extLst>
+          </p:cNvPr>
+          <p:cNvSpPr>
+            <a:spLocks noGrp="1"/>
+          </p:cNvSpPr>
+          <p:nvPr/>
+        </p:nvSpPr>
+        <p:spPr>
+          <a:xfrm>
+            <a:off x="2778919" y="5122069"/>
+            <a:ext cx="1394" cy="57150"/>
+          </a:xfrm>
+          <a:prstGeom prst="rect">
+            <a:avLst/>
+          </a:prstGeom>
+          <a:solidFill>
+            <a:srgbClr val="34699A"/>
+          </a:solidFill>
+          <a:ln w="0">
+            <a:solidFill>
+              <a:srgbClr val="000000">
+                <a:alpha val="0"/>
+              </a:srgbClr>
+            </a:solidFill>
+            <a:prstDash val="solid"/>
+          </a:ln>
+        </p:spPr>
+        <p:txBody>
+          <a:bodyPr/>
+          <a:lstStyle/>
+          <a:p>
+            <a:endParaRPr lang="en-SG" sz="1350"/>
+          </a:p>
+        </p:txBody>
+      </p:sp>
+      <p:sp>
+        <p:nvSpPr>
+          <p:cNvPr id="93" name="Rectangle 92">
+            <a:extLst>
+              <a:ext uri="{FF2B5EF4-FFF2-40B4-BE49-F238E27FC236}">
+                <a16:creationId xmlns:a16="http://schemas.microsoft.com/office/drawing/2014/main" id="{7C99830E-810A-41CD-AB04-B6BD2FD5A105}"/>
+              </a:ext>
+            </a:extLst>
+          </p:cNvPr>
+          <p:cNvSpPr>
+            <a:spLocks noGrp="1"/>
+          </p:cNvSpPr>
+          <p:nvPr/>
+        </p:nvSpPr>
+        <p:spPr>
+          <a:xfrm>
+            <a:off x="3243263" y="5064919"/>
+            <a:ext cx="714375" cy="171450"/>
+          </a:xfrm>
+          <a:prstGeom prst="rect">
+            <a:avLst/>
+          </a:prstGeom>
+          <a:solidFill>
+            <a:srgbClr val="000000">
+              <a:alpha val="0"/>
+            </a:srgbClr>
+          </a:solidFill>
+          <a:ln w="0">
+            <a:solidFill>
+              <a:srgbClr val="000000">
+                <a:alpha val="0"/>
+              </a:srgbClr>
+            </a:solidFill>
+            <a:prstDash val="solid"/>
+          </a:ln>
+        </p:spPr>
+        <p:txBody>
+          <a:bodyPr lIns="0" tIns="0" rIns="0" bIns="0" anchor="t"/>
+          <a:lstStyle/>
+          <a:p>
+            <a:pPr algn="r">
+              <a:defRPr sz="1050" b="0">
+                <a:solidFill>
+                  <a:srgbClr val="1F2933"/>
+                </a:solidFill>
+                <a:latin typeface="Aptos"/>
+                <a:ea typeface="Aptos"/>
+                <a:cs typeface="Aptos"/>
+              </a:defRPr>
+            </a:pPr>
+            <a:r>
+              <a:rPr sz="788">
+                <a:solidFill>
+                  <a:srgbClr val="1F2933"/>
+                </a:solidFill>
+                <a:latin typeface="Aptos"/>
+                <a:ea typeface="Aptos"/>
+                <a:cs typeface="Aptos"/>
+              </a:rPr>
+              <a:t>81</a:t>
+            </a:r>
+          </a:p>
+        </p:txBody>
+      </p:sp>
+      <p:sp>
+        <p:nvSpPr>
+          <p:cNvPr id="94" name="Rectangle 93">
+            <a:extLst>
+              <a:ext uri="{FF2B5EF4-FFF2-40B4-BE49-F238E27FC236}">
+                <a16:creationId xmlns:a16="http://schemas.microsoft.com/office/drawing/2014/main" id="{E9669C06-5C3A-432D-8E04-BAB575052D75}"/>
+              </a:ext>
+            </a:extLst>
+          </p:cNvPr>
+          <p:cNvSpPr>
+            <a:spLocks noGrp="1"/>
+          </p:cNvSpPr>
+          <p:nvPr/>
+        </p:nvSpPr>
+        <p:spPr>
+          <a:xfrm>
+            <a:off x="4171951" y="5064919"/>
+            <a:ext cx="535781" cy="171450"/>
+          </a:xfrm>
+          <a:prstGeom prst="rect">
+            <a:avLst/>
+          </a:prstGeom>
+          <a:solidFill>
+            <a:srgbClr val="000000">
+              <a:alpha val="0"/>
+            </a:srgbClr>
+          </a:solidFill>
+          <a:ln w="0">
+            <a:solidFill>
+              <a:srgbClr val="000000">
+                <a:alpha val="0"/>
+              </a:srgbClr>
+            </a:solidFill>
+            <a:prstDash val="solid"/>
+          </a:ln>
+        </p:spPr>
+        <p:txBody>
+          <a:bodyPr lIns="0" tIns="0" rIns="0" bIns="0" anchor="t"/>
+          <a:lstStyle/>
+          <a:p>
+            <a:pPr algn="r">
+              <a:defRPr sz="1050" b="0">
+                <a:solidFill>
+                  <a:srgbClr val="1F2933"/>
+                </a:solidFill>
+                <a:latin typeface="Aptos"/>
+                <a:ea typeface="Aptos"/>
+                <a:cs typeface="Aptos"/>
+              </a:defRPr>
+            </a:pPr>
+            <a:r>
+              <a:rPr sz="788">
+                <a:solidFill>
+                  <a:srgbClr val="1F2933"/>
+                </a:solidFill>
+                <a:latin typeface="Aptos"/>
+                <a:ea typeface="Aptos"/>
+                <a:cs typeface="Aptos"/>
+              </a:rPr>
+              <a:t>0.08%</a:t>
+            </a:r>
+          </a:p>
+        </p:txBody>
+      </p:sp>
+      <p:sp>
+        <p:nvSpPr>
+          <p:cNvPr id="95" name="Rectangle 94">
+            <a:extLst>
+              <a:ext uri="{FF2B5EF4-FFF2-40B4-BE49-F238E27FC236}">
+                <a16:creationId xmlns:a16="http://schemas.microsoft.com/office/drawing/2014/main" id="{768066F9-B752-4CFA-A94C-C1412BF63ECE}"/>
+              </a:ext>
+            </a:extLst>
+          </p:cNvPr>
+          <p:cNvSpPr>
+            <a:spLocks noGrp="1"/>
+          </p:cNvSpPr>
+          <p:nvPr/>
+        </p:nvSpPr>
+        <p:spPr>
+          <a:xfrm>
+            <a:off x="4993482" y="5064919"/>
+            <a:ext cx="750094" cy="171450"/>
+          </a:xfrm>
+          <a:prstGeom prst="rect">
+            <a:avLst/>
+          </a:prstGeom>
+          <a:solidFill>
+            <a:srgbClr val="000000">
+              <a:alpha val="0"/>
+            </a:srgbClr>
+          </a:solidFill>
+          <a:ln w="0">
+            <a:solidFill>
+              <a:srgbClr val="000000">
+                <a:alpha val="0"/>
+              </a:srgbClr>
+            </a:solidFill>
+            <a:prstDash val="solid"/>
+          </a:ln>
+        </p:spPr>
+        <p:txBody>
+          <a:bodyPr lIns="0" tIns="0" rIns="0" bIns="0" anchor="t"/>
+          <a:lstStyle/>
+          <a:p>
+            <a:pPr algn="r">
+              <a:defRPr sz="1050" b="0">
+                <a:solidFill>
+                  <a:srgbClr val="1F2933"/>
+                </a:solidFill>
+                <a:latin typeface="Aptos"/>
+                <a:ea typeface="Aptos"/>
+                <a:cs typeface="Aptos"/>
+              </a:defRPr>
+            </a:pPr>
+            <a:r>
+              <a:rPr sz="788">
+                <a:solidFill>
+                  <a:srgbClr val="1F2933"/>
+                </a:solidFill>
+                <a:latin typeface="Aptos"/>
+                <a:ea typeface="Aptos"/>
+                <a:cs typeface="Aptos"/>
+              </a:rPr>
+              <a:t>R$50k</a:t>
+            </a:r>
+          </a:p>
+        </p:txBody>
+      </p:sp>
+      <p:sp>
+        <p:nvSpPr>
+          <p:cNvPr id="96" name="Rectangle 95">
+            <a:extLst>
+              <a:ext uri="{FF2B5EF4-FFF2-40B4-BE49-F238E27FC236}">
+                <a16:creationId xmlns:a16="http://schemas.microsoft.com/office/drawing/2014/main" id="{6CC23852-C57E-4B6A-B0E3-D6F56E8CFAB2}"/>
+              </a:ext>
+            </a:extLst>
+          </p:cNvPr>
+          <p:cNvSpPr>
+            <a:spLocks noGrp="1"/>
+          </p:cNvSpPr>
+          <p:nvPr/>
+        </p:nvSpPr>
+        <p:spPr>
+          <a:xfrm>
+            <a:off x="5886450" y="5064919"/>
+            <a:ext cx="1785938" cy="171450"/>
+          </a:xfrm>
+          <a:prstGeom prst="rect">
+            <a:avLst/>
+          </a:prstGeom>
+          <a:solidFill>
+            <a:srgbClr val="000000">
+              <a:alpha val="0"/>
+            </a:srgbClr>
+          </a:solidFill>
+          <a:ln w="0">
+            <a:solidFill>
+              <a:srgbClr val="000000">
+                <a:alpha val="0"/>
+              </a:srgbClr>
+            </a:solidFill>
+            <a:prstDash val="solid"/>
+          </a:ln>
+        </p:spPr>
+        <p:txBody>
+          <a:bodyPr lIns="0" tIns="0" rIns="0" bIns="0" anchor="t"/>
+          <a:lstStyle/>
+          <a:p>
+            <a:pPr algn="l">
+              <a:defRPr sz="975" b="0">
+                <a:solidFill>
+                  <a:srgbClr val="6B7280"/>
+                </a:solidFill>
+                <a:latin typeface="Aptos"/>
+                <a:ea typeface="Aptos"/>
+                <a:cs typeface="Aptos"/>
+              </a:defRPr>
+            </a:pPr>
+            <a:r>
+              <a:rPr sz="731">
+                <a:solidFill>
+                  <a:srgbClr val="6B7280"/>
+                </a:solidFill>
+                <a:latin typeface="Aptos"/>
+                <a:ea typeface="Aptos"/>
+                <a:cs typeface="Aptos"/>
+              </a:rPr>
+              <a:t>VIP treatment</a:t>
+            </a:r>
+          </a:p>
+        </p:txBody>
+      </p:sp>
+      <p:sp>
+        <p:nvSpPr>
+          <p:cNvPr id="97" name="Rectangle 96">
+            <a:extLst>
+              <a:ext uri="{FF2B5EF4-FFF2-40B4-BE49-F238E27FC236}">
+                <a16:creationId xmlns:a16="http://schemas.microsoft.com/office/drawing/2014/main" id="{2E1D776F-2E1C-462D-9064-F67A9B1372D9}"/>
+              </a:ext>
+            </a:extLst>
+          </p:cNvPr>
+          <p:cNvSpPr>
+            <a:spLocks noGrp="1"/>
+          </p:cNvSpPr>
+          <p:nvPr/>
+        </p:nvSpPr>
+        <p:spPr>
+          <a:xfrm>
+            <a:off x="457200" y="5743575"/>
+            <a:ext cx="5857875" cy="128588"/>
+          </a:xfrm>
+          <a:prstGeom prst="rect">
+            <a:avLst/>
+          </a:prstGeom>
+          <a:solidFill>
+            <a:srgbClr val="000000">
+              <a:alpha val="0"/>
+            </a:srgbClr>
+          </a:solidFill>
+          <a:ln w="0">
+            <a:solidFill>
+              <a:srgbClr val="000000">
+                <a:alpha val="0"/>
+              </a:srgbClr>
+            </a:solidFill>
+            <a:prstDash val="solid"/>
+          </a:ln>
+        </p:spPr>
+        <p:txBody>
+          <a:bodyPr lIns="0" tIns="0" rIns="0" bIns="0" anchor="t"/>
+          <a:lstStyle/>
+          <a:p>
+            <a:pPr algn="l">
+              <a:defRPr sz="750" b="0">
+                <a:solidFill>
+                  <a:srgbClr val="8A94A3"/>
+                </a:solidFill>
+                <a:latin typeface="Aptos"/>
+                <a:ea typeface="Aptos"/>
+                <a:cs typeface="Aptos"/>
+              </a:defRPr>
+            </a:pPr>
+            <a:r>
+              <a:rPr sz="563">
+                <a:solidFill>
+                  <a:srgbClr val="8A94A3"/>
+                </a:solidFill>
+                <a:latin typeface="Aptos"/>
+                <a:ea typeface="Aptos"/>
+                <a:cs typeface="Aptos"/>
+              </a:rPr>
+              <a:t>Source: local Olist warehouse, fact_sales. Gross item sales include product price plus freight value.</a:t>
+            </a:r>
+          </a:p>
+        </p:txBody>
+      </p:sp>
+      <p:sp>
+        <p:nvSpPr>
+          <p:cNvPr id="98" name="Rectangle 97">
+            <a:extLst>
+              <a:ext uri="{FF2B5EF4-FFF2-40B4-BE49-F238E27FC236}">
+                <a16:creationId xmlns:a16="http://schemas.microsoft.com/office/drawing/2014/main" id="{CC2F7340-56ED-422E-A3E0-750CF9C5C301}"/>
+              </a:ext>
+            </a:extLst>
+          </p:cNvPr>
+          <p:cNvSpPr>
+            <a:spLocks noGrp="1"/>
+          </p:cNvSpPr>
+          <p:nvPr/>
+        </p:nvSpPr>
+        <p:spPr>
+          <a:xfrm>
+            <a:off x="8358187" y="5715000"/>
+            <a:ext cx="242888" cy="128588"/>
+          </a:xfrm>
+          <a:prstGeom prst="rect">
+            <a:avLst/>
+          </a:prstGeom>
+          <a:solidFill>
+            <a:srgbClr val="000000">
+              <a:alpha val="0"/>
+            </a:srgbClr>
+          </a:solidFill>
+          <a:ln w="0">
+            <a:solidFill>
+              <a:srgbClr val="000000">
+                <a:alpha val="0"/>
+              </a:srgbClr>
+            </a:solidFill>
+            <a:prstDash val="solid"/>
+          </a:ln>
+        </p:spPr>
+        <p:txBody>
+          <a:bodyPr lIns="0" tIns="0" rIns="0" bIns="0" anchor="t"/>
+          <a:lstStyle/>
+          <a:p>
+            <a:pPr algn="r">
+              <a:defRPr sz="750" b="0">
+                <a:solidFill>
+                  <a:srgbClr val="8A94A3"/>
+                </a:solidFill>
+                <a:latin typeface="Aptos"/>
+                <a:ea typeface="Aptos"/>
+                <a:cs typeface="Aptos"/>
+              </a:defRPr>
+            </a:pPr>
+            <a:r>
+              <a:rPr sz="563">
+                <a:solidFill>
+                  <a:srgbClr val="8A94A3"/>
+                </a:solidFill>
+                <a:latin typeface="Aptos"/>
+                <a:ea typeface="Aptos"/>
+                <a:cs typeface="Aptos"/>
+              </a:rPr>
+              <a:t>1</a:t>
+            </a:r>
+          </a:p>
+        </p:txBody>
+      </p:sp>
+    </p:spTree>
+    <p:extLst>
+      <p:ext uri="{BB962C8B-B14F-4D97-AF65-F5344CB8AC3E}">
+        <p14:creationId xmlns:p14="http://schemas.microsoft.com/office/powerpoint/2010/main" val="208234869"/>
+      </p:ext>
+    </p:extLst>
+  </p:cSld>
+  <p:clrMapOvr>
+    <a:masterClrMapping/>
+  </p:clrMapOvr>
+</p:sld>
+</file>
+
+<file path=ppt/slides/slide16.xml><?xml version="1.0" encoding="utf-8"?>
+<p:sld xmlns:a="http://schemas.openxmlformats.org/drawingml/2006/main" xmlns:r="http://schemas.openxmlformats.org/officeDocument/2006/relationships" xmlns:p="http://schemas.openxmlformats.org/presentationml/2006/main">
+  <p:cSld>
+    <p:spTree>
+      <p:nvGrpSpPr>
+        <p:cNvPr id="1" name=""/>
+        <p:cNvGrpSpPr/>
+        <p:nvPr/>
+      </p:nvGrpSpPr>
+      <p:grpSpPr>
+        <a:xfrm>
+          <a:off x="0" y="0"/>
+          <a:ext cx="0" cy="0"/>
+          <a:chOff x="0" y="0"/>
+          <a:chExt cx="0" cy="0"/>
+        </a:xfrm>
+      </p:grpSpPr>
+      <p:sp>
+        <p:nvSpPr>
+          <p:cNvPr id="46" name="Rectangle 45">
+            <a:extLst>
+              <a:ext uri="{FF2B5EF4-FFF2-40B4-BE49-F238E27FC236}">
+                <a16:creationId xmlns:a16="http://schemas.microsoft.com/office/drawing/2014/main" id="{1E1F03E3-8017-4900-B6FC-96758E671222}"/>
+              </a:ext>
+            </a:extLst>
+          </p:cNvPr>
+          <p:cNvSpPr>
+            <a:spLocks noGrp="1"/>
+          </p:cNvSpPr>
+          <p:nvPr/>
+        </p:nvSpPr>
+        <p:spPr>
+          <a:xfrm>
+            <a:off x="0" y="857250"/>
+            <a:ext cx="9144000" cy="5143500"/>
+          </a:xfrm>
+          <a:prstGeom prst="rect">
+            <a:avLst/>
+          </a:prstGeom>
+          <a:solidFill>
+            <a:srgbClr val="FFFFFF"/>
+          </a:solidFill>
+          <a:ln w="0">
+            <a:solidFill>
+              <a:srgbClr val="000000">
+                <a:alpha val="0"/>
+              </a:srgbClr>
+            </a:solidFill>
+            <a:prstDash val="solid"/>
+          </a:ln>
+        </p:spPr>
+        <p:txBody>
+          <a:bodyPr/>
+          <a:lstStyle/>
+          <a:p>
+            <a:endParaRPr lang="en-SG" sz="1350"/>
+          </a:p>
+        </p:txBody>
+      </p:sp>
+      <p:sp>
+        <p:nvSpPr>
+          <p:cNvPr id="2" name="kicker-marker">
+            <a:extLst>
+              <a:ext uri="{FF2B5EF4-FFF2-40B4-BE49-F238E27FC236}">
+                <a16:creationId xmlns:a16="http://schemas.microsoft.com/office/drawing/2014/main" id="{649AD2E8-94DC-475E-841A-DAA86E9D9991}"/>
+              </a:ext>
+            </a:extLst>
+          </p:cNvPr>
+          <p:cNvSpPr>
+            <a:spLocks noGrp="1"/>
+          </p:cNvSpPr>
+          <p:nvPr/>
+        </p:nvSpPr>
+        <p:spPr>
+          <a:xfrm>
+            <a:off x="457200" y="1200150"/>
+            <a:ext cx="92869" cy="92869"/>
+          </a:xfrm>
+          <a:prstGeom prst="ellipse">
+            <a:avLst/>
+          </a:prstGeom>
+          <a:solidFill>
+            <a:srgbClr val="2F8F5B"/>
+          </a:solidFill>
+          <a:ln w="0">
+            <a:solidFill>
+              <a:srgbClr val="000000">
+                <a:alpha val="0"/>
+              </a:srgbClr>
+            </a:solidFill>
+            <a:prstDash val="solid"/>
+          </a:ln>
+        </p:spPr>
+        <p:txBody>
+          <a:bodyPr/>
+          <a:lstStyle/>
+          <a:p>
+            <a:endParaRPr lang="en-SG" sz="1350"/>
+          </a:p>
+        </p:txBody>
+      </p:sp>
+      <p:sp>
+        <p:nvSpPr>
+          <p:cNvPr id="3" name="kicker-label">
+            <a:extLst>
+              <a:ext uri="{FF2B5EF4-FFF2-40B4-BE49-F238E27FC236}">
+                <a16:creationId xmlns:a16="http://schemas.microsoft.com/office/drawing/2014/main" id="{550A0277-D256-4737-BD5C-5969D6E50CBB}"/>
+              </a:ext>
+            </a:extLst>
+          </p:cNvPr>
+          <p:cNvSpPr>
+            <a:spLocks noGrp="1"/>
+          </p:cNvSpPr>
+          <p:nvPr/>
+        </p:nvSpPr>
+        <p:spPr>
+          <a:xfrm>
+            <a:off x="628650" y="1135856"/>
+            <a:ext cx="1928813" cy="214313"/>
+          </a:xfrm>
+          <a:prstGeom prst="rect">
+            <a:avLst/>
+          </a:prstGeom>
+          <a:solidFill>
+            <a:srgbClr val="000000">
+              <a:alpha val="0"/>
+            </a:srgbClr>
+          </a:solidFill>
+          <a:ln w="0">
+            <a:solidFill>
+              <a:srgbClr val="000000">
+                <a:alpha val="0"/>
+              </a:srgbClr>
+            </a:solidFill>
+            <a:prstDash val="solid"/>
+          </a:ln>
+        </p:spPr>
+        <p:txBody>
+          <a:bodyPr lIns="0" tIns="28575" rIns="0" bIns="0" anchor="t"/>
+          <a:lstStyle/>
+          <a:p>
+            <a:pPr algn="l">
+              <a:defRPr sz="975" b="1">
+                <a:solidFill>
+                  <a:srgbClr val="2F8F5B"/>
+                </a:solidFill>
+                <a:latin typeface="Aptos"/>
+                <a:ea typeface="Aptos"/>
+                <a:cs typeface="Aptos"/>
+              </a:defRPr>
+            </a:pPr>
+            <a:r>
+              <a:rPr sz="731" b="1">
+                <a:solidFill>
+                  <a:srgbClr val="2F8F5B"/>
+                </a:solidFill>
+                <a:latin typeface="Aptos"/>
+                <a:ea typeface="Aptos"/>
+                <a:cs typeface="Aptos"/>
+              </a:rPr>
+              <a:t>CAMPAIGN PRIORITIES</a:t>
+            </a:r>
+          </a:p>
+        </p:txBody>
+      </p:sp>
+      <p:sp>
+        <p:nvSpPr>
+          <p:cNvPr id="4" name="Rectangle 3">
+            <a:extLst>
+              <a:ext uri="{FF2B5EF4-FFF2-40B4-BE49-F238E27FC236}">
+                <a16:creationId xmlns:a16="http://schemas.microsoft.com/office/drawing/2014/main" id="{A59C1014-02F6-44F3-AA77-7AF6B78915B8}"/>
+              </a:ext>
+            </a:extLst>
+          </p:cNvPr>
+          <p:cNvSpPr>
+            <a:spLocks noGrp="1"/>
+          </p:cNvSpPr>
+          <p:nvPr/>
+        </p:nvSpPr>
+        <p:spPr>
+          <a:xfrm>
+            <a:off x="457200" y="1414463"/>
+            <a:ext cx="5715000" cy="657225"/>
+          </a:xfrm>
+          <a:prstGeom prst="rect">
+            <a:avLst/>
+          </a:prstGeom>
+          <a:solidFill>
+            <a:srgbClr val="000000">
+              <a:alpha val="0"/>
+            </a:srgbClr>
+          </a:solidFill>
+          <a:ln w="0">
+            <a:solidFill>
+              <a:srgbClr val="000000">
+                <a:alpha val="0"/>
+              </a:srgbClr>
+            </a:solidFill>
+            <a:prstDash val="solid"/>
+          </a:ln>
+        </p:spPr>
+        <p:txBody>
+          <a:bodyPr lIns="0" tIns="0" rIns="0" bIns="0" anchor="t"/>
+          <a:lstStyle/>
+          <a:p>
+            <a:pPr algn="l">
+              <a:defRPr sz="2550" b="1">
+                <a:solidFill>
+                  <a:srgbClr val="1F2933"/>
+                </a:solidFill>
+                <a:latin typeface="Aptos Display"/>
+                <a:ea typeface="Aptos Display"/>
+                <a:cs typeface="Aptos Display"/>
+              </a:defRPr>
+            </a:pPr>
+            <a:r>
+              <a:rPr sz="1913" b="1">
+                <a:solidFill>
+                  <a:srgbClr val="1F2933"/>
+                </a:solidFill>
+                <a:latin typeface="Aptos Display"/>
+                <a:ea typeface="Aptos Display"/>
+                <a:cs typeface="Aptos Display"/>
+              </a:rPr>
+              <a:t>Do not start with broad loyalty; first convert high-value one-time buyers.</a:t>
+            </a:r>
+          </a:p>
+        </p:txBody>
+      </p:sp>
+      <p:sp>
+        <p:nvSpPr>
+          <p:cNvPr id="5" name="Rectangle 4">
+            <a:extLst>
+              <a:ext uri="{FF2B5EF4-FFF2-40B4-BE49-F238E27FC236}">
+                <a16:creationId xmlns:a16="http://schemas.microsoft.com/office/drawing/2014/main" id="{847DC33A-0678-401D-986C-A54CD773DD16}"/>
+              </a:ext>
+            </a:extLst>
+          </p:cNvPr>
+          <p:cNvSpPr>
+            <a:spLocks noGrp="1"/>
+          </p:cNvSpPr>
+          <p:nvPr/>
+        </p:nvSpPr>
+        <p:spPr>
+          <a:xfrm>
+            <a:off x="457200" y="2085975"/>
+            <a:ext cx="5429250" cy="314325"/>
+          </a:xfrm>
+          <a:prstGeom prst="rect">
+            <a:avLst/>
+          </a:prstGeom>
+          <a:solidFill>
+            <a:srgbClr val="000000">
+              <a:alpha val="0"/>
+            </a:srgbClr>
+          </a:solidFill>
+          <a:ln w="0">
+            <a:solidFill>
+              <a:srgbClr val="000000">
+                <a:alpha val="0"/>
+              </a:srgbClr>
+            </a:solidFill>
+            <a:prstDash val="solid"/>
+          </a:ln>
+        </p:spPr>
+        <p:txBody>
+          <a:bodyPr lIns="0" tIns="0" rIns="0" bIns="0" anchor="t"/>
+          <a:lstStyle/>
+          <a:p>
+            <a:pPr algn="l">
+              <a:defRPr sz="1275" b="0">
+                <a:solidFill>
+                  <a:srgbClr val="6B7280"/>
+                </a:solidFill>
+                <a:latin typeface="Aptos"/>
+                <a:ea typeface="Aptos"/>
+                <a:cs typeface="Aptos"/>
+              </a:defRPr>
+            </a:pPr>
+            <a:r>
+              <a:rPr sz="956">
+                <a:solidFill>
+                  <a:srgbClr val="6B7280"/>
+                </a:solidFill>
+                <a:latin typeface="Aptos"/>
+                <a:ea typeface="Aptos"/>
+                <a:cs typeface="Aptos"/>
+              </a:rPr>
+              <a:t>The RFM result points to a staged retention strategy: second purchase first, win-back second, loyalty only for the small repeat base.</a:t>
+            </a:r>
+          </a:p>
+        </p:txBody>
+      </p:sp>
+      <p:sp>
+        <p:nvSpPr>
+          <p:cNvPr id="6" name="Oval 5">
+            <a:extLst>
+              <a:ext uri="{FF2B5EF4-FFF2-40B4-BE49-F238E27FC236}">
+                <a16:creationId xmlns:a16="http://schemas.microsoft.com/office/drawing/2014/main" id="{68DD8DAB-7AC6-4466-B40E-5965E0AD2BB1}"/>
+              </a:ext>
+            </a:extLst>
+          </p:cNvPr>
+          <p:cNvSpPr>
+            <a:spLocks noGrp="1"/>
+          </p:cNvSpPr>
+          <p:nvPr/>
+        </p:nvSpPr>
+        <p:spPr>
+          <a:xfrm>
+            <a:off x="6372225" y="1200150"/>
+            <a:ext cx="1657350" cy="1657350"/>
+          </a:xfrm>
+          <a:prstGeom prst="ellipse">
+            <a:avLst/>
+          </a:prstGeom>
+          <a:solidFill>
+            <a:srgbClr val="E0EFE7"/>
+          </a:solidFill>
+          <a:ln w="0">
+            <a:solidFill>
+              <a:srgbClr val="000000">
+                <a:alpha val="0"/>
+              </a:srgbClr>
+            </a:solidFill>
+            <a:prstDash val="solid"/>
+          </a:ln>
+        </p:spPr>
+        <p:txBody>
+          <a:bodyPr/>
+          <a:lstStyle/>
+          <a:p>
+            <a:endParaRPr lang="en-SG" sz="1350"/>
+          </a:p>
+        </p:txBody>
+      </p:sp>
+      <p:sp>
+        <p:nvSpPr>
+          <p:cNvPr id="7" name="Oval 6">
+            <a:extLst>
+              <a:ext uri="{FF2B5EF4-FFF2-40B4-BE49-F238E27FC236}">
+                <a16:creationId xmlns:a16="http://schemas.microsoft.com/office/drawing/2014/main" id="{FDADE27E-8E2C-4441-93F0-571D47829E02}"/>
+              </a:ext>
+            </a:extLst>
+          </p:cNvPr>
+          <p:cNvSpPr>
+            <a:spLocks noGrp="1"/>
+          </p:cNvSpPr>
+          <p:nvPr/>
+        </p:nvSpPr>
+        <p:spPr>
+          <a:xfrm>
+            <a:off x="6676549" y="1524953"/>
+            <a:ext cx="1049655" cy="1049655"/>
+          </a:xfrm>
+          <a:prstGeom prst="ellipse">
+            <a:avLst/>
+          </a:prstGeom>
+          <a:solidFill>
+            <a:srgbClr val="FFFFFF"/>
+          </a:solidFill>
+          <a:ln w="19050">
+            <a:solidFill>
+              <a:srgbClr val="2F8F5B"/>
+            </a:solidFill>
+            <a:prstDash val="solid"/>
+          </a:ln>
+        </p:spPr>
+        <p:txBody>
+          <a:bodyPr/>
+          <a:lstStyle/>
+          <a:p>
+            <a:endParaRPr lang="en-SG" sz="1350"/>
+          </a:p>
+        </p:txBody>
+      </p:sp>
+      <p:sp>
+        <p:nvSpPr>
+          <p:cNvPr id="8" name="Rectangle 7">
+            <a:extLst>
+              <a:ext uri="{FF2B5EF4-FFF2-40B4-BE49-F238E27FC236}">
+                <a16:creationId xmlns:a16="http://schemas.microsoft.com/office/drawing/2014/main" id="{59F4EF05-9387-499C-8428-C3EA128748AA}"/>
+              </a:ext>
+            </a:extLst>
+          </p:cNvPr>
+          <p:cNvSpPr>
+            <a:spLocks noGrp="1"/>
+          </p:cNvSpPr>
+          <p:nvPr/>
+        </p:nvSpPr>
+        <p:spPr>
+          <a:xfrm>
+            <a:off x="6607969" y="1850231"/>
+            <a:ext cx="1250156" cy="342900"/>
+          </a:xfrm>
+          <a:prstGeom prst="rect">
+            <a:avLst/>
+          </a:prstGeom>
+          <a:solidFill>
+            <a:srgbClr val="000000">
+              <a:alpha val="0"/>
+            </a:srgbClr>
+          </a:solidFill>
+          <a:ln w="0">
+            <a:solidFill>
+              <a:srgbClr val="000000">
+                <a:alpha val="0"/>
+              </a:srgbClr>
+            </a:solidFill>
+            <a:prstDash val="solid"/>
+          </a:ln>
+        </p:spPr>
+        <p:txBody>
+          <a:bodyPr lIns="0" tIns="0" rIns="0" bIns="0" anchor="t"/>
+          <a:lstStyle/>
+          <a:p>
+            <a:pPr algn="ctr">
+              <a:defRPr sz="2925" b="1">
+                <a:solidFill>
+                  <a:srgbClr val="2F8F5B"/>
+                </a:solidFill>
+                <a:latin typeface="Aptos"/>
+                <a:ea typeface="Aptos"/>
+                <a:cs typeface="Aptos"/>
+              </a:defRPr>
+            </a:pPr>
+            <a:r>
+              <a:rPr b="1" dirty="0">
+                <a:solidFill>
+                  <a:srgbClr val="2F8F5B"/>
+                </a:solidFill>
+                <a:latin typeface="Aptos"/>
+                <a:ea typeface="Aptos"/>
+                <a:cs typeface="Aptos"/>
+              </a:rPr>
+              <a:t>3.05%</a:t>
+            </a:r>
+          </a:p>
+        </p:txBody>
+      </p:sp>
+      <p:sp>
+        <p:nvSpPr>
+          <p:cNvPr id="9" name="Rectangle 8">
+            <a:extLst>
+              <a:ext uri="{FF2B5EF4-FFF2-40B4-BE49-F238E27FC236}">
+                <a16:creationId xmlns:a16="http://schemas.microsoft.com/office/drawing/2014/main" id="{6C86E2F3-2088-47A0-A337-128FB6536376}"/>
+              </a:ext>
+            </a:extLst>
+          </p:cNvPr>
+          <p:cNvSpPr>
+            <a:spLocks noGrp="1"/>
+          </p:cNvSpPr>
+          <p:nvPr/>
+        </p:nvSpPr>
+        <p:spPr>
+          <a:xfrm>
+            <a:off x="6643688" y="2093119"/>
+            <a:ext cx="1107281" cy="228600"/>
+          </a:xfrm>
+          <a:prstGeom prst="rect">
+            <a:avLst/>
+          </a:prstGeom>
+          <a:solidFill>
+            <a:srgbClr val="000000">
+              <a:alpha val="0"/>
+            </a:srgbClr>
+          </a:solidFill>
+          <a:ln w="0">
+            <a:solidFill>
+              <a:srgbClr val="000000">
+                <a:alpha val="0"/>
+              </a:srgbClr>
+            </a:solidFill>
+            <a:prstDash val="solid"/>
+          </a:ln>
+        </p:spPr>
+        <p:txBody>
+          <a:bodyPr lIns="0" tIns="0" rIns="0" bIns="0" anchor="t"/>
+          <a:lstStyle/>
+          <a:p>
+            <a:pPr algn="ctr">
+              <a:defRPr sz="975" b="0">
+                <a:solidFill>
+                  <a:srgbClr val="6B7280"/>
+                </a:solidFill>
+                <a:latin typeface="Aptos"/>
+                <a:ea typeface="Aptos"/>
+                <a:cs typeface="Aptos"/>
+              </a:defRPr>
+            </a:pPr>
+            <a:r>
+              <a:rPr sz="750" dirty="0">
+                <a:solidFill>
+                  <a:srgbClr val="6B7280"/>
+                </a:solidFill>
+                <a:latin typeface="Aptos"/>
+                <a:ea typeface="Aptos"/>
+                <a:cs typeface="Aptos"/>
+              </a:rPr>
+              <a:t>repeat-customer share</a:t>
+            </a:r>
+          </a:p>
+        </p:txBody>
+      </p:sp>
+      <p:sp>
+        <p:nvSpPr>
+          <p:cNvPr id="10" name="Rectangle 9">
+            <a:extLst>
+              <a:ext uri="{FF2B5EF4-FFF2-40B4-BE49-F238E27FC236}">
+                <a16:creationId xmlns:a16="http://schemas.microsoft.com/office/drawing/2014/main" id="{B3ED6AC7-2B64-4F76-9B4E-8EA4B3B334B1}"/>
+              </a:ext>
+            </a:extLst>
+          </p:cNvPr>
+          <p:cNvSpPr>
+            <a:spLocks noGrp="1"/>
+          </p:cNvSpPr>
+          <p:nvPr/>
+        </p:nvSpPr>
+        <p:spPr>
+          <a:xfrm>
+            <a:off x="457200" y="2857500"/>
+            <a:ext cx="1857375" cy="1700213"/>
+          </a:xfrm>
+          <a:prstGeom prst="rect">
+            <a:avLst/>
+          </a:prstGeom>
+          <a:solidFill>
+            <a:srgbClr val="E0EFE7"/>
+          </a:solidFill>
+          <a:ln w="0">
+            <a:solidFill>
+              <a:srgbClr val="000000">
+                <a:alpha val="0"/>
+              </a:srgbClr>
+            </a:solidFill>
+            <a:prstDash val="solid"/>
+          </a:ln>
+        </p:spPr>
+        <p:txBody>
+          <a:bodyPr/>
+          <a:lstStyle/>
+          <a:p>
+            <a:endParaRPr lang="en-SG" sz="1350"/>
+          </a:p>
+        </p:txBody>
+      </p:sp>
+      <p:sp>
+        <p:nvSpPr>
+          <p:cNvPr id="11" name="Rectangle 10">
+            <a:extLst>
+              <a:ext uri="{FF2B5EF4-FFF2-40B4-BE49-F238E27FC236}">
+                <a16:creationId xmlns:a16="http://schemas.microsoft.com/office/drawing/2014/main" id="{20F10528-0540-41C2-B65A-D2FFEA424FE1}"/>
+              </a:ext>
+            </a:extLst>
+          </p:cNvPr>
+          <p:cNvSpPr>
+            <a:spLocks noGrp="1"/>
+          </p:cNvSpPr>
+          <p:nvPr/>
+        </p:nvSpPr>
+        <p:spPr>
+          <a:xfrm>
+            <a:off x="457200" y="2857500"/>
+            <a:ext cx="64294" cy="1700213"/>
+          </a:xfrm>
+          <a:prstGeom prst="rect">
+            <a:avLst/>
+          </a:prstGeom>
+          <a:solidFill>
+            <a:srgbClr val="2F8F5B"/>
+          </a:solidFill>
+          <a:ln w="0">
+            <a:solidFill>
+              <a:srgbClr val="000000">
+                <a:alpha val="0"/>
+              </a:srgbClr>
+            </a:solidFill>
+            <a:prstDash val="solid"/>
+          </a:ln>
+        </p:spPr>
+        <p:txBody>
+          <a:bodyPr/>
+          <a:lstStyle/>
+          <a:p>
+            <a:endParaRPr lang="en-SG" sz="1350"/>
+          </a:p>
+        </p:txBody>
+      </p:sp>
+      <p:sp>
+        <p:nvSpPr>
+          <p:cNvPr id="12" name="Rectangle 11">
+            <a:extLst>
+              <a:ext uri="{FF2B5EF4-FFF2-40B4-BE49-F238E27FC236}">
+                <a16:creationId xmlns:a16="http://schemas.microsoft.com/office/drawing/2014/main" id="{A0D1C56D-4BAB-4166-8CBF-37BEF2150D88}"/>
+              </a:ext>
+            </a:extLst>
+          </p:cNvPr>
+          <p:cNvSpPr>
+            <a:spLocks noGrp="1"/>
+          </p:cNvSpPr>
+          <p:nvPr/>
+        </p:nvSpPr>
+        <p:spPr>
+          <a:xfrm>
+            <a:off x="614362" y="3000375"/>
+            <a:ext cx="357188" cy="200025"/>
+          </a:xfrm>
+          <a:prstGeom prst="rect">
+            <a:avLst/>
+          </a:prstGeom>
+          <a:solidFill>
+            <a:srgbClr val="000000">
+              <a:alpha val="0"/>
+            </a:srgbClr>
+          </a:solidFill>
+          <a:ln w="0">
+            <a:solidFill>
+              <a:srgbClr val="000000">
+                <a:alpha val="0"/>
+              </a:srgbClr>
+            </a:solidFill>
+            <a:prstDash val="solid"/>
+          </a:ln>
+        </p:spPr>
+        <p:txBody>
+          <a:bodyPr lIns="0" tIns="0" rIns="0" bIns="0" anchor="t"/>
+          <a:lstStyle/>
+          <a:p>
+            <a:pPr algn="l">
+              <a:defRPr sz="1350" b="1">
+                <a:solidFill>
+                  <a:srgbClr val="2F8F5B"/>
+                </a:solidFill>
+                <a:latin typeface="Aptos"/>
+                <a:ea typeface="Aptos"/>
+                <a:cs typeface="Aptos"/>
+              </a:defRPr>
+            </a:pPr>
+            <a:r>
+              <a:rPr sz="1013" b="1">
+                <a:solidFill>
+                  <a:srgbClr val="2F8F5B"/>
+                </a:solidFill>
+                <a:latin typeface="Aptos"/>
+                <a:ea typeface="Aptos"/>
+                <a:cs typeface="Aptos"/>
+              </a:rPr>
+              <a:t>01</a:t>
+            </a:r>
+          </a:p>
+        </p:txBody>
+      </p:sp>
+      <p:sp>
+        <p:nvSpPr>
+          <p:cNvPr id="13" name="Rectangle 12">
+            <a:extLst>
+              <a:ext uri="{FF2B5EF4-FFF2-40B4-BE49-F238E27FC236}">
+                <a16:creationId xmlns:a16="http://schemas.microsoft.com/office/drawing/2014/main" id="{59431F01-10A9-4E83-AC43-6E149D099E9B}"/>
+              </a:ext>
+            </a:extLst>
+          </p:cNvPr>
+          <p:cNvSpPr>
+            <a:spLocks noGrp="1"/>
+          </p:cNvSpPr>
+          <p:nvPr/>
+        </p:nvSpPr>
+        <p:spPr>
+          <a:xfrm>
+            <a:off x="614363" y="3271838"/>
+            <a:ext cx="1464469" cy="314325"/>
+          </a:xfrm>
+          <a:prstGeom prst="rect">
+            <a:avLst/>
+          </a:prstGeom>
+          <a:solidFill>
+            <a:srgbClr val="000000">
+              <a:alpha val="0"/>
+            </a:srgbClr>
+          </a:solidFill>
+          <a:ln w="0">
+            <a:solidFill>
+              <a:srgbClr val="000000">
+                <a:alpha val="0"/>
+              </a:srgbClr>
+            </a:solidFill>
+            <a:prstDash val="solid"/>
+          </a:ln>
+        </p:spPr>
+        <p:txBody>
+          <a:bodyPr lIns="0" tIns="0" rIns="0" bIns="0" anchor="t"/>
+          <a:lstStyle/>
+          <a:p>
+            <a:pPr algn="l">
+              <a:defRPr sz="1575" b="1">
+                <a:solidFill>
+                  <a:srgbClr val="1F2933"/>
+                </a:solidFill>
+                <a:latin typeface="Aptos Display"/>
+                <a:ea typeface="Aptos Display"/>
+                <a:cs typeface="Aptos Display"/>
+              </a:defRPr>
+            </a:pPr>
+            <a:r>
+              <a:rPr sz="1181" b="1">
+                <a:solidFill>
+                  <a:srgbClr val="1F2933"/>
+                </a:solidFill>
+                <a:latin typeface="Aptos Display"/>
+                <a:ea typeface="Aptos Display"/>
+                <a:cs typeface="Aptos Display"/>
+              </a:rPr>
+              <a:t>High-value new customers</a:t>
+            </a:r>
+          </a:p>
+        </p:txBody>
+      </p:sp>
+      <p:sp>
+        <p:nvSpPr>
+          <p:cNvPr id="14" name="Rectangle 13">
+            <a:extLst>
+              <a:ext uri="{FF2B5EF4-FFF2-40B4-BE49-F238E27FC236}">
+                <a16:creationId xmlns:a16="http://schemas.microsoft.com/office/drawing/2014/main" id="{04BF7342-21AF-4124-98A2-F08313D9F938}"/>
+              </a:ext>
+            </a:extLst>
+          </p:cNvPr>
+          <p:cNvSpPr>
+            <a:spLocks noGrp="1"/>
+          </p:cNvSpPr>
+          <p:nvPr/>
+        </p:nvSpPr>
+        <p:spPr>
+          <a:xfrm>
+            <a:off x="614363" y="3671887"/>
+            <a:ext cx="1464469" cy="8573"/>
+          </a:xfrm>
+          <a:prstGeom prst="rect">
+            <a:avLst/>
+          </a:prstGeom>
+          <a:solidFill>
+            <a:srgbClr val="2F8F5B"/>
+          </a:solidFill>
+          <a:ln w="0">
+            <a:solidFill>
+              <a:srgbClr val="000000">
+                <a:alpha val="0"/>
+              </a:srgbClr>
+            </a:solidFill>
+            <a:prstDash val="solid"/>
+          </a:ln>
+        </p:spPr>
+        <p:txBody>
+          <a:bodyPr/>
+          <a:lstStyle/>
+          <a:p>
+            <a:endParaRPr lang="en-SG" sz="1350"/>
+          </a:p>
+        </p:txBody>
+      </p:sp>
+      <p:sp>
+        <p:nvSpPr>
+          <p:cNvPr id="15" name="Rectangle 14">
+            <a:extLst>
+              <a:ext uri="{FF2B5EF4-FFF2-40B4-BE49-F238E27FC236}">
+                <a16:creationId xmlns:a16="http://schemas.microsoft.com/office/drawing/2014/main" id="{3A4417E6-574A-4F36-B8C4-7617CC75989C}"/>
+              </a:ext>
+            </a:extLst>
+          </p:cNvPr>
+          <p:cNvSpPr>
+            <a:spLocks noGrp="1"/>
+          </p:cNvSpPr>
+          <p:nvPr/>
+        </p:nvSpPr>
+        <p:spPr>
+          <a:xfrm>
+            <a:off x="614363" y="3771900"/>
+            <a:ext cx="1485900" cy="157163"/>
+          </a:xfrm>
+          <a:prstGeom prst="rect">
+            <a:avLst/>
+          </a:prstGeom>
+          <a:solidFill>
+            <a:srgbClr val="000000">
+              <a:alpha val="0"/>
+            </a:srgbClr>
+          </a:solidFill>
+          <a:ln w="0">
+            <a:solidFill>
+              <a:srgbClr val="000000">
+                <a:alpha val="0"/>
+              </a:srgbClr>
+            </a:solidFill>
+            <a:prstDash val="solid"/>
+          </a:ln>
+        </p:spPr>
+        <p:txBody>
+          <a:bodyPr lIns="0" tIns="0" rIns="0" bIns="0" anchor="t"/>
+          <a:lstStyle/>
+          <a:p>
+            <a:pPr algn="l">
+              <a:defRPr sz="1050" b="1">
+                <a:solidFill>
+                  <a:srgbClr val="2F8F5B"/>
+                </a:solidFill>
+                <a:latin typeface="Aptos"/>
+                <a:ea typeface="Aptos"/>
+                <a:cs typeface="Aptos"/>
+              </a:defRPr>
+            </a:pPr>
+            <a:r>
+              <a:rPr sz="788" b="1">
+                <a:solidFill>
+                  <a:srgbClr val="2F8F5B"/>
+                </a:solidFill>
+                <a:latin typeface="Aptos"/>
+                <a:ea typeface="Aptos"/>
+                <a:cs typeface="Aptos"/>
+              </a:rPr>
+              <a:t>11,081 customers | R$4.34M</a:t>
+            </a:r>
+          </a:p>
+        </p:txBody>
+      </p:sp>
+      <p:sp>
+        <p:nvSpPr>
+          <p:cNvPr id="16" name="Rectangle 15">
+            <a:extLst>
+              <a:ext uri="{FF2B5EF4-FFF2-40B4-BE49-F238E27FC236}">
+                <a16:creationId xmlns:a16="http://schemas.microsoft.com/office/drawing/2014/main" id="{E321D9F2-AD07-4FF9-B0DE-C187E06FF14F}"/>
+              </a:ext>
+            </a:extLst>
+          </p:cNvPr>
+          <p:cNvSpPr>
+            <a:spLocks noGrp="1"/>
+          </p:cNvSpPr>
+          <p:nvPr/>
+        </p:nvSpPr>
+        <p:spPr>
+          <a:xfrm>
+            <a:off x="614363" y="3993356"/>
+            <a:ext cx="1485900" cy="171450"/>
+          </a:xfrm>
+          <a:prstGeom prst="rect">
+            <a:avLst/>
+          </a:prstGeom>
+          <a:solidFill>
+            <a:srgbClr val="000000">
+              <a:alpha val="0"/>
+            </a:srgbClr>
+          </a:solidFill>
+          <a:ln w="0">
+            <a:solidFill>
+              <a:srgbClr val="000000">
+                <a:alpha val="0"/>
+              </a:srgbClr>
+            </a:solidFill>
+            <a:prstDash val="solid"/>
+          </a:ln>
+        </p:spPr>
+        <p:txBody>
+          <a:bodyPr lIns="0" tIns="0" rIns="0" bIns="0" anchor="t"/>
+          <a:lstStyle/>
+          <a:p>
+            <a:pPr algn="l">
+              <a:defRPr sz="1125" b="1">
+                <a:solidFill>
+                  <a:srgbClr val="1F2933"/>
+                </a:solidFill>
+                <a:latin typeface="Aptos"/>
+                <a:ea typeface="Aptos"/>
+                <a:cs typeface="Aptos"/>
+              </a:defRPr>
+            </a:pPr>
+            <a:r>
+              <a:rPr sz="844" b="1">
+                <a:solidFill>
+                  <a:srgbClr val="1F2933"/>
+                </a:solidFill>
+                <a:latin typeface="Aptos"/>
+                <a:ea typeface="Aptos"/>
+                <a:cs typeface="Aptos"/>
+              </a:rPr>
+              <a:t>Priority second-purchase offer</a:t>
+            </a:r>
+          </a:p>
+        </p:txBody>
+      </p:sp>
+      <p:sp>
+        <p:nvSpPr>
+          <p:cNvPr id="17" name="Rectangle 16">
+            <a:extLst>
+              <a:ext uri="{FF2B5EF4-FFF2-40B4-BE49-F238E27FC236}">
+                <a16:creationId xmlns:a16="http://schemas.microsoft.com/office/drawing/2014/main" id="{71916AE9-47E4-4E23-8F4E-7DB1377E3F1A}"/>
+              </a:ext>
+            </a:extLst>
+          </p:cNvPr>
+          <p:cNvSpPr>
+            <a:spLocks noGrp="1"/>
+          </p:cNvSpPr>
+          <p:nvPr/>
+        </p:nvSpPr>
+        <p:spPr>
+          <a:xfrm>
+            <a:off x="614363" y="4236244"/>
+            <a:ext cx="1464469" cy="342900"/>
+          </a:xfrm>
+          <a:prstGeom prst="rect">
+            <a:avLst/>
+          </a:prstGeom>
+          <a:solidFill>
+            <a:srgbClr val="000000">
+              <a:alpha val="0"/>
+            </a:srgbClr>
+          </a:solidFill>
+          <a:ln w="0">
+            <a:solidFill>
+              <a:srgbClr val="000000">
+                <a:alpha val="0"/>
+              </a:srgbClr>
+            </a:solidFill>
+            <a:prstDash val="solid"/>
+          </a:ln>
+        </p:spPr>
+        <p:txBody>
+          <a:bodyPr lIns="0" tIns="0" rIns="0" bIns="0" anchor="t"/>
+          <a:lstStyle/>
+          <a:p>
+            <a:pPr algn="l">
+              <a:defRPr sz="975" b="0">
+                <a:solidFill>
+                  <a:srgbClr val="6B7280"/>
+                </a:solidFill>
+                <a:latin typeface="Aptos"/>
+                <a:ea typeface="Aptos"/>
+                <a:cs typeface="Aptos"/>
+              </a:defRPr>
+            </a:pPr>
+            <a:r>
+              <a:rPr sz="731">
+                <a:solidFill>
+                  <a:srgbClr val="6B7280"/>
+                </a:solidFill>
+                <a:latin typeface="Aptos"/>
+                <a:ea typeface="Aptos"/>
+                <a:cs typeface="Aptos"/>
+              </a:rPr>
+              <a:t>Recent one-time buyers already proved willingness to spend.</a:t>
+            </a:r>
+          </a:p>
+        </p:txBody>
+      </p:sp>
+      <p:sp>
+        <p:nvSpPr>
+          <p:cNvPr id="18" name="Rectangle 17">
+            <a:extLst>
+              <a:ext uri="{FF2B5EF4-FFF2-40B4-BE49-F238E27FC236}">
+                <a16:creationId xmlns:a16="http://schemas.microsoft.com/office/drawing/2014/main" id="{0C727E56-AD74-416E-AEC5-9061B5BABE5A}"/>
+              </a:ext>
+            </a:extLst>
+          </p:cNvPr>
+          <p:cNvSpPr>
+            <a:spLocks noGrp="1"/>
+          </p:cNvSpPr>
+          <p:nvPr/>
+        </p:nvSpPr>
+        <p:spPr>
+          <a:xfrm>
+            <a:off x="2471738" y="2857500"/>
+            <a:ext cx="1857375" cy="1700213"/>
+          </a:xfrm>
+          <a:prstGeom prst="rect">
+            <a:avLst/>
+          </a:prstGeom>
+          <a:solidFill>
+            <a:srgbClr val="F8E8D4"/>
+          </a:solidFill>
+          <a:ln w="0">
+            <a:solidFill>
+              <a:srgbClr val="000000">
+                <a:alpha val="0"/>
+              </a:srgbClr>
+            </a:solidFill>
+            <a:prstDash val="solid"/>
+          </a:ln>
+        </p:spPr>
+        <p:txBody>
+          <a:bodyPr/>
+          <a:lstStyle/>
+          <a:p>
+            <a:endParaRPr lang="en-SG" sz="1350"/>
+          </a:p>
+        </p:txBody>
+      </p:sp>
+      <p:sp>
+        <p:nvSpPr>
+          <p:cNvPr id="19" name="Rectangle 18">
+            <a:extLst>
+              <a:ext uri="{FF2B5EF4-FFF2-40B4-BE49-F238E27FC236}">
+                <a16:creationId xmlns:a16="http://schemas.microsoft.com/office/drawing/2014/main" id="{4C900D85-E5A7-4095-92A2-03C91E6759D2}"/>
+              </a:ext>
+            </a:extLst>
+          </p:cNvPr>
+          <p:cNvSpPr>
+            <a:spLocks noGrp="1"/>
+          </p:cNvSpPr>
+          <p:nvPr/>
+        </p:nvSpPr>
+        <p:spPr>
+          <a:xfrm>
+            <a:off x="2471738" y="2857500"/>
+            <a:ext cx="64294" cy="1700213"/>
+          </a:xfrm>
+          <a:prstGeom prst="rect">
+            <a:avLst/>
+          </a:prstGeom>
+          <a:solidFill>
+            <a:srgbClr val="C77721"/>
+          </a:solidFill>
+          <a:ln w="0">
+            <a:solidFill>
+              <a:srgbClr val="000000">
+                <a:alpha val="0"/>
+              </a:srgbClr>
+            </a:solidFill>
+            <a:prstDash val="solid"/>
+          </a:ln>
+        </p:spPr>
+        <p:txBody>
+          <a:bodyPr/>
+          <a:lstStyle/>
+          <a:p>
+            <a:endParaRPr lang="en-SG" sz="1350"/>
+          </a:p>
+        </p:txBody>
+      </p:sp>
+      <p:sp>
+        <p:nvSpPr>
+          <p:cNvPr id="20" name="Rectangle 19">
+            <a:extLst>
+              <a:ext uri="{FF2B5EF4-FFF2-40B4-BE49-F238E27FC236}">
+                <a16:creationId xmlns:a16="http://schemas.microsoft.com/office/drawing/2014/main" id="{EF735847-8614-4337-A6D1-1977FA0C6CE5}"/>
+              </a:ext>
+            </a:extLst>
+          </p:cNvPr>
+          <p:cNvSpPr>
+            <a:spLocks noGrp="1"/>
+          </p:cNvSpPr>
+          <p:nvPr/>
+        </p:nvSpPr>
+        <p:spPr>
+          <a:xfrm>
+            <a:off x="2628900" y="3000375"/>
+            <a:ext cx="357188" cy="200025"/>
+          </a:xfrm>
+          <a:prstGeom prst="rect">
+            <a:avLst/>
+          </a:prstGeom>
+          <a:solidFill>
+            <a:srgbClr val="000000">
+              <a:alpha val="0"/>
+            </a:srgbClr>
+          </a:solidFill>
+          <a:ln w="0">
+            <a:solidFill>
+              <a:srgbClr val="000000">
+                <a:alpha val="0"/>
+              </a:srgbClr>
+            </a:solidFill>
+            <a:prstDash val="solid"/>
+          </a:ln>
+        </p:spPr>
+        <p:txBody>
+          <a:bodyPr lIns="0" tIns="0" rIns="0" bIns="0" anchor="t"/>
+          <a:lstStyle/>
+          <a:p>
+            <a:pPr algn="l">
+              <a:defRPr sz="1350" b="1">
+                <a:solidFill>
+                  <a:srgbClr val="C77721"/>
+                </a:solidFill>
+                <a:latin typeface="Aptos"/>
+                <a:ea typeface="Aptos"/>
+                <a:cs typeface="Aptos"/>
+              </a:defRPr>
+            </a:pPr>
+            <a:r>
+              <a:rPr sz="1013" b="1">
+                <a:solidFill>
+                  <a:srgbClr val="C77721"/>
+                </a:solidFill>
+                <a:latin typeface="Aptos"/>
+                <a:ea typeface="Aptos"/>
+                <a:cs typeface="Aptos"/>
+              </a:rPr>
+              <a:t>02</a:t>
+            </a:r>
+          </a:p>
+        </p:txBody>
+      </p:sp>
+      <p:sp>
+        <p:nvSpPr>
+          <p:cNvPr id="21" name="Rectangle 20">
+            <a:extLst>
+              <a:ext uri="{FF2B5EF4-FFF2-40B4-BE49-F238E27FC236}">
+                <a16:creationId xmlns:a16="http://schemas.microsoft.com/office/drawing/2014/main" id="{2B843278-4D7A-4E9C-B8A4-616AD5CF04B8}"/>
+              </a:ext>
+            </a:extLst>
+          </p:cNvPr>
+          <p:cNvSpPr>
+            <a:spLocks noGrp="1"/>
+          </p:cNvSpPr>
+          <p:nvPr/>
+        </p:nvSpPr>
+        <p:spPr>
+          <a:xfrm>
+            <a:off x="2628900" y="3271838"/>
+            <a:ext cx="1464469" cy="314325"/>
+          </a:xfrm>
+          <a:prstGeom prst="rect">
+            <a:avLst/>
+          </a:prstGeom>
+          <a:solidFill>
+            <a:srgbClr val="000000">
+              <a:alpha val="0"/>
+            </a:srgbClr>
+          </a:solidFill>
+          <a:ln w="0">
+            <a:solidFill>
+              <a:srgbClr val="000000">
+                <a:alpha val="0"/>
+              </a:srgbClr>
+            </a:solidFill>
+            <a:prstDash val="solid"/>
+          </a:ln>
+        </p:spPr>
+        <p:txBody>
+          <a:bodyPr lIns="0" tIns="0" rIns="0" bIns="0" anchor="t"/>
+          <a:lstStyle/>
+          <a:p>
+            <a:pPr algn="l">
+              <a:defRPr sz="1575" b="1">
+                <a:solidFill>
+                  <a:srgbClr val="1F2933"/>
+                </a:solidFill>
+                <a:latin typeface="Aptos Display"/>
+                <a:ea typeface="Aptos Display"/>
+                <a:cs typeface="Aptos Display"/>
+              </a:defRPr>
+            </a:pPr>
+            <a:r>
+              <a:rPr sz="1181" b="1">
+                <a:solidFill>
+                  <a:srgbClr val="1F2933"/>
+                </a:solidFill>
+                <a:latin typeface="Aptos Display"/>
+                <a:ea typeface="Aptos Display"/>
+                <a:cs typeface="Aptos Display"/>
+              </a:rPr>
+              <a:t>At-risk high spenders</a:t>
+            </a:r>
+          </a:p>
+        </p:txBody>
+      </p:sp>
+      <p:sp>
+        <p:nvSpPr>
+          <p:cNvPr id="22" name="Rectangle 21">
+            <a:extLst>
+              <a:ext uri="{FF2B5EF4-FFF2-40B4-BE49-F238E27FC236}">
+                <a16:creationId xmlns:a16="http://schemas.microsoft.com/office/drawing/2014/main" id="{38FE3E9C-EDA4-4C30-9980-8BE1D6600BE8}"/>
+              </a:ext>
+            </a:extLst>
+          </p:cNvPr>
+          <p:cNvSpPr>
+            <a:spLocks noGrp="1"/>
+          </p:cNvSpPr>
+          <p:nvPr/>
+        </p:nvSpPr>
+        <p:spPr>
+          <a:xfrm>
+            <a:off x="2628900" y="3671887"/>
+            <a:ext cx="1464469" cy="8573"/>
+          </a:xfrm>
+          <a:prstGeom prst="rect">
+            <a:avLst/>
+          </a:prstGeom>
+          <a:solidFill>
+            <a:srgbClr val="C77721"/>
+          </a:solidFill>
+          <a:ln w="0">
+            <a:solidFill>
+              <a:srgbClr val="000000">
+                <a:alpha val="0"/>
+              </a:srgbClr>
+            </a:solidFill>
+            <a:prstDash val="solid"/>
+          </a:ln>
+        </p:spPr>
+        <p:txBody>
+          <a:bodyPr/>
+          <a:lstStyle/>
+          <a:p>
+            <a:endParaRPr lang="en-SG" sz="1350"/>
+          </a:p>
+        </p:txBody>
+      </p:sp>
+      <p:sp>
+        <p:nvSpPr>
+          <p:cNvPr id="23" name="Rectangle 22">
+            <a:extLst>
+              <a:ext uri="{FF2B5EF4-FFF2-40B4-BE49-F238E27FC236}">
+                <a16:creationId xmlns:a16="http://schemas.microsoft.com/office/drawing/2014/main" id="{BDE3A641-FE01-4047-BFED-4FD056483E13}"/>
+              </a:ext>
+            </a:extLst>
+          </p:cNvPr>
+          <p:cNvSpPr>
+            <a:spLocks noGrp="1"/>
+          </p:cNvSpPr>
+          <p:nvPr/>
+        </p:nvSpPr>
+        <p:spPr>
+          <a:xfrm>
+            <a:off x="2628900" y="3771900"/>
+            <a:ext cx="1485900" cy="157163"/>
+          </a:xfrm>
+          <a:prstGeom prst="rect">
+            <a:avLst/>
+          </a:prstGeom>
+          <a:solidFill>
+            <a:srgbClr val="000000">
+              <a:alpha val="0"/>
+            </a:srgbClr>
+          </a:solidFill>
+          <a:ln w="0">
+            <a:solidFill>
+              <a:srgbClr val="000000">
+                <a:alpha val="0"/>
+              </a:srgbClr>
+            </a:solidFill>
+            <a:prstDash val="solid"/>
+          </a:ln>
+        </p:spPr>
+        <p:txBody>
+          <a:bodyPr lIns="0" tIns="0" rIns="0" bIns="0" anchor="t"/>
+          <a:lstStyle/>
+          <a:p>
+            <a:pPr algn="l">
+              <a:defRPr sz="1050" b="1">
+                <a:solidFill>
+                  <a:srgbClr val="C77721"/>
+                </a:solidFill>
+                <a:latin typeface="Aptos"/>
+                <a:ea typeface="Aptos"/>
+                <a:cs typeface="Aptos"/>
+              </a:defRPr>
+            </a:pPr>
+            <a:r>
+              <a:rPr sz="788" b="1">
+                <a:solidFill>
+                  <a:srgbClr val="C77721"/>
+                </a:solidFill>
+                <a:latin typeface="Aptos"/>
+                <a:ea typeface="Aptos"/>
+                <a:cs typeface="Aptos"/>
+              </a:rPr>
+              <a:t>11,274 customers | R$1.59M</a:t>
+            </a:r>
+          </a:p>
+        </p:txBody>
+      </p:sp>
+      <p:sp>
+        <p:nvSpPr>
+          <p:cNvPr id="24" name="Rectangle 23">
+            <a:extLst>
+              <a:ext uri="{FF2B5EF4-FFF2-40B4-BE49-F238E27FC236}">
+                <a16:creationId xmlns:a16="http://schemas.microsoft.com/office/drawing/2014/main" id="{C25C469A-DD1C-48D3-A545-4E279E5A8C17}"/>
+              </a:ext>
+            </a:extLst>
+          </p:cNvPr>
+          <p:cNvSpPr>
+            <a:spLocks noGrp="1"/>
+          </p:cNvSpPr>
+          <p:nvPr/>
+        </p:nvSpPr>
+        <p:spPr>
+          <a:xfrm>
+            <a:off x="2628900" y="3993356"/>
+            <a:ext cx="1485900" cy="171450"/>
+          </a:xfrm>
+          <a:prstGeom prst="rect">
+            <a:avLst/>
+          </a:prstGeom>
+          <a:solidFill>
+            <a:srgbClr val="000000">
+              <a:alpha val="0"/>
+            </a:srgbClr>
+          </a:solidFill>
+          <a:ln w="0">
+            <a:solidFill>
+              <a:srgbClr val="000000">
+                <a:alpha val="0"/>
+              </a:srgbClr>
+            </a:solidFill>
+            <a:prstDash val="solid"/>
+          </a:ln>
+        </p:spPr>
+        <p:txBody>
+          <a:bodyPr lIns="0" tIns="0" rIns="0" bIns="0" anchor="t"/>
+          <a:lstStyle/>
+          <a:p>
+            <a:pPr algn="l">
+              <a:defRPr sz="1125" b="1">
+                <a:solidFill>
+                  <a:srgbClr val="1F2933"/>
+                </a:solidFill>
+                <a:latin typeface="Aptos"/>
+                <a:ea typeface="Aptos"/>
+                <a:cs typeface="Aptos"/>
+              </a:defRPr>
+            </a:pPr>
+            <a:r>
+              <a:rPr sz="844" b="1">
+                <a:solidFill>
+                  <a:srgbClr val="1F2933"/>
+                </a:solidFill>
+                <a:latin typeface="Aptos"/>
+                <a:ea typeface="Aptos"/>
+                <a:cs typeface="Aptos"/>
+              </a:rPr>
+              <a:t>Timed win-back campaign</a:t>
+            </a:r>
+          </a:p>
+        </p:txBody>
+      </p:sp>
+      <p:sp>
+        <p:nvSpPr>
+          <p:cNvPr id="25" name="Rectangle 24">
+            <a:extLst>
+              <a:ext uri="{FF2B5EF4-FFF2-40B4-BE49-F238E27FC236}">
+                <a16:creationId xmlns:a16="http://schemas.microsoft.com/office/drawing/2014/main" id="{8E6648FE-0EF5-43A3-98E1-89CF828A2436}"/>
+              </a:ext>
+            </a:extLst>
+          </p:cNvPr>
+          <p:cNvSpPr>
+            <a:spLocks noGrp="1"/>
+          </p:cNvSpPr>
+          <p:nvPr/>
+        </p:nvSpPr>
+        <p:spPr>
+          <a:xfrm>
+            <a:off x="2628900" y="4236244"/>
+            <a:ext cx="1464469" cy="342900"/>
+          </a:xfrm>
+          <a:prstGeom prst="rect">
+            <a:avLst/>
+          </a:prstGeom>
+          <a:solidFill>
+            <a:srgbClr val="000000">
+              <a:alpha val="0"/>
+            </a:srgbClr>
+          </a:solidFill>
+          <a:ln w="0">
+            <a:solidFill>
+              <a:srgbClr val="000000">
+                <a:alpha val="0"/>
+              </a:srgbClr>
+            </a:solidFill>
+            <a:prstDash val="solid"/>
+          </a:ln>
+        </p:spPr>
+        <p:txBody>
+          <a:bodyPr lIns="0" tIns="0" rIns="0" bIns="0" anchor="t"/>
+          <a:lstStyle/>
+          <a:p>
+            <a:pPr algn="l">
+              <a:defRPr sz="975" b="0">
+                <a:solidFill>
+                  <a:srgbClr val="6B7280"/>
+                </a:solidFill>
+                <a:latin typeface="Aptos"/>
+                <a:ea typeface="Aptos"/>
+                <a:cs typeface="Aptos"/>
+              </a:defRPr>
+            </a:pPr>
+            <a:r>
+              <a:rPr sz="731">
+                <a:solidFill>
+                  <a:srgbClr val="6B7280"/>
+                </a:solidFill>
+                <a:latin typeface="Aptos"/>
+                <a:ea typeface="Aptos"/>
+                <a:cs typeface="Aptos"/>
+              </a:rPr>
+              <a:t>High value is present, but recency has weakened.</a:t>
+            </a:r>
+          </a:p>
+        </p:txBody>
+      </p:sp>
+      <p:sp>
+        <p:nvSpPr>
+          <p:cNvPr id="26" name="Rectangle 25">
+            <a:extLst>
+              <a:ext uri="{FF2B5EF4-FFF2-40B4-BE49-F238E27FC236}">
+                <a16:creationId xmlns:a16="http://schemas.microsoft.com/office/drawing/2014/main" id="{7C2FD390-8860-4D9A-8603-91860D9F96C8}"/>
+              </a:ext>
+            </a:extLst>
+          </p:cNvPr>
+          <p:cNvSpPr>
+            <a:spLocks noGrp="1"/>
+          </p:cNvSpPr>
+          <p:nvPr/>
+        </p:nvSpPr>
+        <p:spPr>
+          <a:xfrm>
+            <a:off x="4486275" y="2857500"/>
+            <a:ext cx="1857375" cy="1700213"/>
+          </a:xfrm>
+          <a:prstGeom prst="rect">
+            <a:avLst/>
+          </a:prstGeom>
+          <a:solidFill>
+            <a:srgbClr val="E2EAF3"/>
+          </a:solidFill>
+          <a:ln w="0">
+            <a:solidFill>
+              <a:srgbClr val="000000">
+                <a:alpha val="0"/>
+              </a:srgbClr>
+            </a:solidFill>
+            <a:prstDash val="solid"/>
+          </a:ln>
+        </p:spPr>
+        <p:txBody>
+          <a:bodyPr/>
+          <a:lstStyle/>
+          <a:p>
+            <a:endParaRPr lang="en-SG" sz="1350"/>
+          </a:p>
+        </p:txBody>
+      </p:sp>
+      <p:sp>
+        <p:nvSpPr>
+          <p:cNvPr id="27" name="Rectangle 26">
+            <a:extLst>
+              <a:ext uri="{FF2B5EF4-FFF2-40B4-BE49-F238E27FC236}">
+                <a16:creationId xmlns:a16="http://schemas.microsoft.com/office/drawing/2014/main" id="{08F0D518-10EA-491C-8496-5D03A66814CD}"/>
+              </a:ext>
+            </a:extLst>
+          </p:cNvPr>
+          <p:cNvSpPr>
+            <a:spLocks noGrp="1"/>
+          </p:cNvSpPr>
+          <p:nvPr/>
+        </p:nvSpPr>
+        <p:spPr>
+          <a:xfrm>
+            <a:off x="4486275" y="2857500"/>
+            <a:ext cx="64294" cy="1700213"/>
+          </a:xfrm>
+          <a:prstGeom prst="rect">
+            <a:avLst/>
+          </a:prstGeom>
+          <a:solidFill>
+            <a:srgbClr val="34699A"/>
+          </a:solidFill>
+          <a:ln w="0">
+            <a:solidFill>
+              <a:srgbClr val="000000">
+                <a:alpha val="0"/>
+              </a:srgbClr>
+            </a:solidFill>
+            <a:prstDash val="solid"/>
+          </a:ln>
+        </p:spPr>
+        <p:txBody>
+          <a:bodyPr/>
+          <a:lstStyle/>
+          <a:p>
+            <a:endParaRPr lang="en-SG" sz="1350"/>
+          </a:p>
+        </p:txBody>
+      </p:sp>
+      <p:sp>
+        <p:nvSpPr>
+          <p:cNvPr id="28" name="Rectangle 27">
+            <a:extLst>
+              <a:ext uri="{FF2B5EF4-FFF2-40B4-BE49-F238E27FC236}">
+                <a16:creationId xmlns:a16="http://schemas.microsoft.com/office/drawing/2014/main" id="{77D3B730-F0CD-4742-B0D8-219C02EDDEC5}"/>
+              </a:ext>
+            </a:extLst>
+          </p:cNvPr>
+          <p:cNvSpPr>
+            <a:spLocks noGrp="1"/>
+          </p:cNvSpPr>
+          <p:nvPr/>
+        </p:nvSpPr>
+        <p:spPr>
+          <a:xfrm>
+            <a:off x="4643437" y="3000375"/>
+            <a:ext cx="357188" cy="200025"/>
+          </a:xfrm>
+          <a:prstGeom prst="rect">
+            <a:avLst/>
+          </a:prstGeom>
+          <a:solidFill>
+            <a:srgbClr val="000000">
+              <a:alpha val="0"/>
+            </a:srgbClr>
+          </a:solidFill>
+          <a:ln w="0">
+            <a:solidFill>
+              <a:srgbClr val="000000">
+                <a:alpha val="0"/>
+              </a:srgbClr>
+            </a:solidFill>
+            <a:prstDash val="solid"/>
+          </a:ln>
+        </p:spPr>
+        <p:txBody>
+          <a:bodyPr lIns="0" tIns="0" rIns="0" bIns="0" anchor="t"/>
+          <a:lstStyle/>
+          <a:p>
+            <a:pPr algn="l">
+              <a:defRPr sz="1350" b="1">
+                <a:solidFill>
+                  <a:srgbClr val="34699A"/>
+                </a:solidFill>
+                <a:latin typeface="Aptos"/>
+                <a:ea typeface="Aptos"/>
+                <a:cs typeface="Aptos"/>
+              </a:defRPr>
+            </a:pPr>
+            <a:r>
+              <a:rPr sz="1013" b="1">
+                <a:solidFill>
+                  <a:srgbClr val="34699A"/>
+                </a:solidFill>
+                <a:latin typeface="Aptos"/>
+                <a:ea typeface="Aptos"/>
+                <a:cs typeface="Aptos"/>
+              </a:rPr>
+              <a:t>03</a:t>
+            </a:r>
+          </a:p>
+        </p:txBody>
+      </p:sp>
+      <p:sp>
+        <p:nvSpPr>
+          <p:cNvPr id="29" name="Rectangle 28">
+            <a:extLst>
+              <a:ext uri="{FF2B5EF4-FFF2-40B4-BE49-F238E27FC236}">
+                <a16:creationId xmlns:a16="http://schemas.microsoft.com/office/drawing/2014/main" id="{8E897F28-8963-4582-9DEB-9F3EEB09B93E}"/>
+              </a:ext>
+            </a:extLst>
+          </p:cNvPr>
+          <p:cNvSpPr>
+            <a:spLocks noGrp="1"/>
+          </p:cNvSpPr>
+          <p:nvPr/>
+        </p:nvSpPr>
+        <p:spPr>
+          <a:xfrm>
+            <a:off x="4643438" y="3271838"/>
+            <a:ext cx="1464469" cy="314325"/>
+          </a:xfrm>
+          <a:prstGeom prst="rect">
+            <a:avLst/>
+          </a:prstGeom>
+          <a:solidFill>
+            <a:srgbClr val="000000">
+              <a:alpha val="0"/>
+            </a:srgbClr>
+          </a:solidFill>
+          <a:ln w="0">
+            <a:solidFill>
+              <a:srgbClr val="000000">
+                <a:alpha val="0"/>
+              </a:srgbClr>
+            </a:solidFill>
+            <a:prstDash val="solid"/>
+          </a:ln>
+        </p:spPr>
+        <p:txBody>
+          <a:bodyPr lIns="0" tIns="0" rIns="0" bIns="0" anchor="t"/>
+          <a:lstStyle/>
+          <a:p>
+            <a:pPr algn="l">
+              <a:defRPr sz="1575" b="1">
+                <a:solidFill>
+                  <a:srgbClr val="1F2933"/>
+                </a:solidFill>
+                <a:latin typeface="Aptos Display"/>
+                <a:ea typeface="Aptos Display"/>
+                <a:cs typeface="Aptos Display"/>
+              </a:defRPr>
+            </a:pPr>
+            <a:r>
+              <a:rPr sz="1181" b="1">
+                <a:solidFill>
+                  <a:srgbClr val="1F2933"/>
+                </a:solidFill>
+                <a:latin typeface="Aptos Display"/>
+                <a:ea typeface="Aptos Display"/>
+                <a:cs typeface="Aptos Display"/>
+              </a:rPr>
+              <a:t>Recent repeat buyers</a:t>
+            </a:r>
+          </a:p>
+        </p:txBody>
+      </p:sp>
+      <p:sp>
+        <p:nvSpPr>
+          <p:cNvPr id="30" name="Rectangle 29">
+            <a:extLst>
+              <a:ext uri="{FF2B5EF4-FFF2-40B4-BE49-F238E27FC236}">
+                <a16:creationId xmlns:a16="http://schemas.microsoft.com/office/drawing/2014/main" id="{6E7F6D7C-796C-4AAD-B01F-F3B97108BEBE}"/>
+              </a:ext>
+            </a:extLst>
+          </p:cNvPr>
+          <p:cNvSpPr>
+            <a:spLocks noGrp="1"/>
+          </p:cNvSpPr>
+          <p:nvPr/>
+        </p:nvSpPr>
+        <p:spPr>
+          <a:xfrm>
+            <a:off x="4643438" y="3671887"/>
+            <a:ext cx="1464469" cy="8573"/>
+          </a:xfrm>
+          <a:prstGeom prst="rect">
+            <a:avLst/>
+          </a:prstGeom>
+          <a:solidFill>
+            <a:srgbClr val="34699A"/>
+          </a:solidFill>
+          <a:ln w="0">
+            <a:solidFill>
+              <a:srgbClr val="000000">
+                <a:alpha val="0"/>
+              </a:srgbClr>
+            </a:solidFill>
+            <a:prstDash val="solid"/>
+          </a:ln>
+        </p:spPr>
+        <p:txBody>
+          <a:bodyPr/>
+          <a:lstStyle/>
+          <a:p>
+            <a:endParaRPr lang="en-SG" sz="1350"/>
+          </a:p>
+        </p:txBody>
+      </p:sp>
+      <p:sp>
+        <p:nvSpPr>
+          <p:cNvPr id="31" name="Rectangle 30">
+            <a:extLst>
+              <a:ext uri="{FF2B5EF4-FFF2-40B4-BE49-F238E27FC236}">
+                <a16:creationId xmlns:a16="http://schemas.microsoft.com/office/drawing/2014/main" id="{C5BAAF2A-0D4A-4252-90E6-D2CB280FE37B}"/>
+              </a:ext>
+            </a:extLst>
+          </p:cNvPr>
+          <p:cNvSpPr>
+            <a:spLocks noGrp="1"/>
+          </p:cNvSpPr>
+          <p:nvPr/>
+        </p:nvSpPr>
+        <p:spPr>
+          <a:xfrm>
+            <a:off x="4643438" y="3771900"/>
+            <a:ext cx="1485900" cy="157163"/>
+          </a:xfrm>
+          <a:prstGeom prst="rect">
+            <a:avLst/>
+          </a:prstGeom>
+          <a:solidFill>
+            <a:srgbClr val="000000">
+              <a:alpha val="0"/>
+            </a:srgbClr>
+          </a:solidFill>
+          <a:ln w="0">
+            <a:solidFill>
+              <a:srgbClr val="000000">
+                <a:alpha val="0"/>
+              </a:srgbClr>
+            </a:solidFill>
+            <a:prstDash val="solid"/>
+          </a:ln>
+        </p:spPr>
+        <p:txBody>
+          <a:bodyPr lIns="0" tIns="0" rIns="0" bIns="0" anchor="t"/>
+          <a:lstStyle/>
+          <a:p>
+            <a:pPr algn="l">
+              <a:defRPr sz="1050" b="1">
+                <a:solidFill>
+                  <a:srgbClr val="34699A"/>
+                </a:solidFill>
+                <a:latin typeface="Aptos"/>
+                <a:ea typeface="Aptos"/>
+                <a:cs typeface="Aptos"/>
+              </a:defRPr>
+            </a:pPr>
+            <a:r>
+              <a:rPr sz="788" b="1">
+                <a:solidFill>
+                  <a:srgbClr val="34699A"/>
+                </a:solidFill>
+                <a:latin typeface="Aptos"/>
+                <a:ea typeface="Aptos"/>
+                <a:cs typeface="Aptos"/>
+              </a:rPr>
+              <a:t>1,518 customers | R$453k</a:t>
+            </a:r>
+          </a:p>
+        </p:txBody>
+      </p:sp>
+      <p:sp>
+        <p:nvSpPr>
+          <p:cNvPr id="32" name="Rectangle 31">
+            <a:extLst>
+              <a:ext uri="{FF2B5EF4-FFF2-40B4-BE49-F238E27FC236}">
+                <a16:creationId xmlns:a16="http://schemas.microsoft.com/office/drawing/2014/main" id="{C1171E6F-0764-4624-9CFE-4EC3CC4BD762}"/>
+              </a:ext>
+            </a:extLst>
+          </p:cNvPr>
+          <p:cNvSpPr>
+            <a:spLocks noGrp="1"/>
+          </p:cNvSpPr>
+          <p:nvPr/>
+        </p:nvSpPr>
+        <p:spPr>
+          <a:xfrm>
+            <a:off x="4643438" y="3993356"/>
+            <a:ext cx="1485900" cy="171450"/>
+          </a:xfrm>
+          <a:prstGeom prst="rect">
+            <a:avLst/>
+          </a:prstGeom>
+          <a:solidFill>
+            <a:srgbClr val="000000">
+              <a:alpha val="0"/>
+            </a:srgbClr>
+          </a:solidFill>
+          <a:ln w="0">
+            <a:solidFill>
+              <a:srgbClr val="000000">
+                <a:alpha val="0"/>
+              </a:srgbClr>
+            </a:solidFill>
+            <a:prstDash val="solid"/>
+          </a:ln>
+        </p:spPr>
+        <p:txBody>
+          <a:bodyPr lIns="0" tIns="0" rIns="0" bIns="0" anchor="t"/>
+          <a:lstStyle/>
+          <a:p>
+            <a:pPr algn="l">
+              <a:defRPr sz="1125" b="1">
+                <a:solidFill>
+                  <a:srgbClr val="1F2933"/>
+                </a:solidFill>
+                <a:latin typeface="Aptos"/>
+                <a:ea typeface="Aptos"/>
+                <a:cs typeface="Aptos"/>
+              </a:defRPr>
+            </a:pPr>
+            <a:r>
+              <a:rPr sz="844" b="1">
+                <a:solidFill>
+                  <a:srgbClr val="1F2933"/>
+                </a:solidFill>
+                <a:latin typeface="Aptos"/>
+                <a:ea typeface="Aptos"/>
+                <a:cs typeface="Aptos"/>
+              </a:rPr>
+              <a:t>Loyalty rewards</a:t>
+            </a:r>
+          </a:p>
+        </p:txBody>
+      </p:sp>
+      <p:sp>
+        <p:nvSpPr>
+          <p:cNvPr id="33" name="Rectangle 32">
+            <a:extLst>
+              <a:ext uri="{FF2B5EF4-FFF2-40B4-BE49-F238E27FC236}">
+                <a16:creationId xmlns:a16="http://schemas.microsoft.com/office/drawing/2014/main" id="{24138D23-9012-4D46-B8AA-63FAFBA153C2}"/>
+              </a:ext>
+            </a:extLst>
+          </p:cNvPr>
+          <p:cNvSpPr>
+            <a:spLocks noGrp="1"/>
+          </p:cNvSpPr>
+          <p:nvPr/>
+        </p:nvSpPr>
+        <p:spPr>
+          <a:xfrm>
+            <a:off x="4643438" y="4236244"/>
+            <a:ext cx="1464469" cy="342900"/>
+          </a:xfrm>
+          <a:prstGeom prst="rect">
+            <a:avLst/>
+          </a:prstGeom>
+          <a:solidFill>
+            <a:srgbClr val="000000">
+              <a:alpha val="0"/>
+            </a:srgbClr>
+          </a:solidFill>
+          <a:ln w="0">
+            <a:solidFill>
+              <a:srgbClr val="000000">
+                <a:alpha val="0"/>
+              </a:srgbClr>
+            </a:solidFill>
+            <a:prstDash val="solid"/>
+          </a:ln>
+        </p:spPr>
+        <p:txBody>
+          <a:bodyPr lIns="0" tIns="0" rIns="0" bIns="0" anchor="t"/>
+          <a:lstStyle/>
+          <a:p>
+            <a:pPr algn="l">
+              <a:defRPr sz="975" b="0">
+                <a:solidFill>
+                  <a:srgbClr val="6B7280"/>
+                </a:solidFill>
+                <a:latin typeface="Aptos"/>
+                <a:ea typeface="Aptos"/>
+                <a:cs typeface="Aptos"/>
+              </a:defRPr>
+            </a:pPr>
+            <a:r>
+              <a:rPr sz="731">
+                <a:solidFill>
+                  <a:srgbClr val="6B7280"/>
+                </a:solidFill>
+                <a:latin typeface="Aptos"/>
+                <a:ea typeface="Aptos"/>
+                <a:cs typeface="Aptos"/>
+              </a:rPr>
+              <a:t>This small base has already crossed the repeat threshold.</a:t>
+            </a:r>
+          </a:p>
+        </p:txBody>
+      </p:sp>
+      <p:sp>
+        <p:nvSpPr>
+          <p:cNvPr id="34" name="Rectangle 33">
+            <a:extLst>
+              <a:ext uri="{FF2B5EF4-FFF2-40B4-BE49-F238E27FC236}">
+                <a16:creationId xmlns:a16="http://schemas.microsoft.com/office/drawing/2014/main" id="{0B48CCDE-8B53-48E6-92F5-CC01B7B0CCF0}"/>
+              </a:ext>
+            </a:extLst>
+          </p:cNvPr>
+          <p:cNvSpPr>
+            <a:spLocks noGrp="1"/>
+          </p:cNvSpPr>
+          <p:nvPr/>
+        </p:nvSpPr>
+        <p:spPr>
+          <a:xfrm>
+            <a:off x="6500813" y="2857500"/>
+            <a:ext cx="1857375" cy="1700213"/>
+          </a:xfrm>
+          <a:prstGeom prst="rect">
+            <a:avLst/>
+          </a:prstGeom>
+          <a:solidFill>
+            <a:srgbClr val="DDEDEA"/>
+          </a:solidFill>
+          <a:ln w="0">
+            <a:solidFill>
+              <a:srgbClr val="000000">
+                <a:alpha val="0"/>
+              </a:srgbClr>
+            </a:solidFill>
+            <a:prstDash val="solid"/>
+          </a:ln>
+        </p:spPr>
+        <p:txBody>
+          <a:bodyPr/>
+          <a:lstStyle/>
+          <a:p>
+            <a:endParaRPr lang="en-SG" sz="1350"/>
+          </a:p>
+        </p:txBody>
+      </p:sp>
+      <p:sp>
+        <p:nvSpPr>
+          <p:cNvPr id="35" name="Rectangle 34">
+            <a:extLst>
+              <a:ext uri="{FF2B5EF4-FFF2-40B4-BE49-F238E27FC236}">
+                <a16:creationId xmlns:a16="http://schemas.microsoft.com/office/drawing/2014/main" id="{17B1996C-A3C0-4314-A8A0-4883B7A9E7E2}"/>
+              </a:ext>
+            </a:extLst>
+          </p:cNvPr>
+          <p:cNvSpPr>
+            <a:spLocks noGrp="1"/>
+          </p:cNvSpPr>
+          <p:nvPr/>
+        </p:nvSpPr>
+        <p:spPr>
+          <a:xfrm>
+            <a:off x="6500813" y="2857500"/>
+            <a:ext cx="64294" cy="1700213"/>
+          </a:xfrm>
+          <a:prstGeom prst="rect">
+            <a:avLst/>
+          </a:prstGeom>
+          <a:solidFill>
+            <a:srgbClr val="178F8A"/>
+          </a:solidFill>
+          <a:ln w="0">
+            <a:solidFill>
+              <a:srgbClr val="000000">
+                <a:alpha val="0"/>
+              </a:srgbClr>
+            </a:solidFill>
+            <a:prstDash val="solid"/>
+          </a:ln>
+        </p:spPr>
+        <p:txBody>
+          <a:bodyPr/>
+          <a:lstStyle/>
+          <a:p>
+            <a:endParaRPr lang="en-SG" sz="1350"/>
+          </a:p>
+        </p:txBody>
+      </p:sp>
+      <p:sp>
+        <p:nvSpPr>
+          <p:cNvPr id="36" name="Rectangle 35">
+            <a:extLst>
+              <a:ext uri="{FF2B5EF4-FFF2-40B4-BE49-F238E27FC236}">
+                <a16:creationId xmlns:a16="http://schemas.microsoft.com/office/drawing/2014/main" id="{317D26ED-8618-4CB7-AF25-24400D9F554B}"/>
+              </a:ext>
+            </a:extLst>
+          </p:cNvPr>
+          <p:cNvSpPr>
+            <a:spLocks noGrp="1"/>
+          </p:cNvSpPr>
+          <p:nvPr/>
+        </p:nvSpPr>
+        <p:spPr>
+          <a:xfrm>
+            <a:off x="6657975" y="3000375"/>
+            <a:ext cx="357188" cy="200025"/>
+          </a:xfrm>
+          <a:prstGeom prst="rect">
+            <a:avLst/>
+          </a:prstGeom>
+          <a:solidFill>
+            <a:srgbClr val="000000">
+              <a:alpha val="0"/>
+            </a:srgbClr>
+          </a:solidFill>
+          <a:ln w="0">
+            <a:solidFill>
+              <a:srgbClr val="000000">
+                <a:alpha val="0"/>
+              </a:srgbClr>
+            </a:solidFill>
+            <a:prstDash val="solid"/>
+          </a:ln>
+        </p:spPr>
+        <p:txBody>
+          <a:bodyPr lIns="0" tIns="0" rIns="0" bIns="0" anchor="t"/>
+          <a:lstStyle/>
+          <a:p>
+            <a:pPr algn="l">
+              <a:defRPr sz="1350" b="1">
+                <a:solidFill>
+                  <a:srgbClr val="178F8A"/>
+                </a:solidFill>
+                <a:latin typeface="Aptos"/>
+                <a:ea typeface="Aptos"/>
+                <a:cs typeface="Aptos"/>
+              </a:defRPr>
+            </a:pPr>
+            <a:r>
+              <a:rPr sz="1013" b="1">
+                <a:solidFill>
+                  <a:srgbClr val="178F8A"/>
+                </a:solidFill>
+                <a:latin typeface="Aptos"/>
+                <a:ea typeface="Aptos"/>
+                <a:cs typeface="Aptos"/>
+              </a:rPr>
+              <a:t>04</a:t>
+            </a:r>
+          </a:p>
+        </p:txBody>
+      </p:sp>
+      <p:sp>
+        <p:nvSpPr>
+          <p:cNvPr id="37" name="Rectangle 36">
+            <a:extLst>
+              <a:ext uri="{FF2B5EF4-FFF2-40B4-BE49-F238E27FC236}">
+                <a16:creationId xmlns:a16="http://schemas.microsoft.com/office/drawing/2014/main" id="{7537C93A-2A32-419B-A34E-E4DF764A403B}"/>
+              </a:ext>
+            </a:extLst>
+          </p:cNvPr>
+          <p:cNvSpPr>
+            <a:spLocks noGrp="1"/>
+          </p:cNvSpPr>
+          <p:nvPr/>
+        </p:nvSpPr>
+        <p:spPr>
+          <a:xfrm>
+            <a:off x="6657975" y="3271838"/>
+            <a:ext cx="1464469" cy="314325"/>
+          </a:xfrm>
+          <a:prstGeom prst="rect">
+            <a:avLst/>
+          </a:prstGeom>
+          <a:solidFill>
+            <a:srgbClr val="000000">
+              <a:alpha val="0"/>
+            </a:srgbClr>
+          </a:solidFill>
+          <a:ln w="0">
+            <a:solidFill>
+              <a:srgbClr val="000000">
+                <a:alpha val="0"/>
+              </a:srgbClr>
+            </a:solidFill>
+            <a:prstDash val="solid"/>
+          </a:ln>
+        </p:spPr>
+        <p:txBody>
+          <a:bodyPr lIns="0" tIns="0" rIns="0" bIns="0" anchor="t"/>
+          <a:lstStyle/>
+          <a:p>
+            <a:pPr algn="l">
+              <a:defRPr sz="1575" b="1">
+                <a:solidFill>
+                  <a:srgbClr val="1F2933"/>
+                </a:solidFill>
+                <a:latin typeface="Aptos Display"/>
+                <a:ea typeface="Aptos Display"/>
+                <a:cs typeface="Aptos Display"/>
+              </a:defRPr>
+            </a:pPr>
+            <a:r>
+              <a:rPr sz="1181" b="1">
+                <a:solidFill>
+                  <a:srgbClr val="1F2933"/>
+                </a:solidFill>
+                <a:latin typeface="Aptos Display"/>
+                <a:ea typeface="Aptos Display"/>
+                <a:cs typeface="Aptos Display"/>
+              </a:rPr>
+              <a:t>Champions</a:t>
+            </a:r>
+          </a:p>
+        </p:txBody>
+      </p:sp>
+      <p:sp>
+        <p:nvSpPr>
+          <p:cNvPr id="38" name="Rectangle 37">
+            <a:extLst>
+              <a:ext uri="{FF2B5EF4-FFF2-40B4-BE49-F238E27FC236}">
+                <a16:creationId xmlns:a16="http://schemas.microsoft.com/office/drawing/2014/main" id="{E2AFF3AA-180C-4701-A30A-5F9C37926927}"/>
+              </a:ext>
+            </a:extLst>
+          </p:cNvPr>
+          <p:cNvSpPr>
+            <a:spLocks noGrp="1"/>
+          </p:cNvSpPr>
+          <p:nvPr/>
+        </p:nvSpPr>
+        <p:spPr>
+          <a:xfrm>
+            <a:off x="6657975" y="3671887"/>
+            <a:ext cx="1464469" cy="8573"/>
+          </a:xfrm>
+          <a:prstGeom prst="rect">
+            <a:avLst/>
+          </a:prstGeom>
+          <a:solidFill>
+            <a:srgbClr val="178F8A"/>
+          </a:solidFill>
+          <a:ln w="0">
+            <a:solidFill>
+              <a:srgbClr val="000000">
+                <a:alpha val="0"/>
+              </a:srgbClr>
+            </a:solidFill>
+            <a:prstDash val="solid"/>
+          </a:ln>
+        </p:spPr>
+        <p:txBody>
+          <a:bodyPr/>
+          <a:lstStyle/>
+          <a:p>
+            <a:endParaRPr lang="en-SG" sz="1350"/>
+          </a:p>
+        </p:txBody>
+      </p:sp>
+      <p:sp>
+        <p:nvSpPr>
+          <p:cNvPr id="39" name="Rectangle 38">
+            <a:extLst>
+              <a:ext uri="{FF2B5EF4-FFF2-40B4-BE49-F238E27FC236}">
+                <a16:creationId xmlns:a16="http://schemas.microsoft.com/office/drawing/2014/main" id="{6F24BA5B-D6D1-4DCE-8D8D-FFCE5DAE5DCA}"/>
+              </a:ext>
+            </a:extLst>
+          </p:cNvPr>
+          <p:cNvSpPr>
+            <a:spLocks noGrp="1"/>
+          </p:cNvSpPr>
+          <p:nvPr/>
+        </p:nvSpPr>
+        <p:spPr>
+          <a:xfrm>
+            <a:off x="6657975" y="3771900"/>
+            <a:ext cx="1485900" cy="157163"/>
+          </a:xfrm>
+          <a:prstGeom prst="rect">
+            <a:avLst/>
+          </a:prstGeom>
+          <a:solidFill>
+            <a:srgbClr val="000000">
+              <a:alpha val="0"/>
+            </a:srgbClr>
+          </a:solidFill>
+          <a:ln w="0">
+            <a:solidFill>
+              <a:srgbClr val="000000">
+                <a:alpha val="0"/>
+              </a:srgbClr>
+            </a:solidFill>
+            <a:prstDash val="solid"/>
+          </a:ln>
+        </p:spPr>
+        <p:txBody>
+          <a:bodyPr lIns="0" tIns="0" rIns="0" bIns="0" anchor="t"/>
+          <a:lstStyle/>
+          <a:p>
+            <a:pPr algn="l">
+              <a:defRPr sz="1050" b="1">
+                <a:solidFill>
+                  <a:srgbClr val="178F8A"/>
+                </a:solidFill>
+                <a:latin typeface="Aptos"/>
+                <a:ea typeface="Aptos"/>
+                <a:cs typeface="Aptos"/>
+              </a:defRPr>
+            </a:pPr>
+            <a:r>
+              <a:rPr sz="788" b="1">
+                <a:solidFill>
+                  <a:srgbClr val="178F8A"/>
+                </a:solidFill>
+                <a:latin typeface="Aptos"/>
+                <a:ea typeface="Aptos"/>
+                <a:cs typeface="Aptos"/>
+              </a:rPr>
+              <a:t>81 customers | R$50k</a:t>
+            </a:r>
+          </a:p>
+        </p:txBody>
+      </p:sp>
+      <p:sp>
+        <p:nvSpPr>
+          <p:cNvPr id="40" name="Rectangle 39">
+            <a:extLst>
+              <a:ext uri="{FF2B5EF4-FFF2-40B4-BE49-F238E27FC236}">
+                <a16:creationId xmlns:a16="http://schemas.microsoft.com/office/drawing/2014/main" id="{7EF76FEA-F9A1-4DA3-AFF7-D21936C4F8EB}"/>
+              </a:ext>
+            </a:extLst>
+          </p:cNvPr>
+          <p:cNvSpPr>
+            <a:spLocks noGrp="1"/>
+          </p:cNvSpPr>
+          <p:nvPr/>
+        </p:nvSpPr>
+        <p:spPr>
+          <a:xfrm>
+            <a:off x="6657975" y="3993356"/>
+            <a:ext cx="1485900" cy="171450"/>
+          </a:xfrm>
+          <a:prstGeom prst="rect">
+            <a:avLst/>
+          </a:prstGeom>
+          <a:solidFill>
+            <a:srgbClr val="000000">
+              <a:alpha val="0"/>
+            </a:srgbClr>
+          </a:solidFill>
+          <a:ln w="0">
+            <a:solidFill>
+              <a:srgbClr val="000000">
+                <a:alpha val="0"/>
+              </a:srgbClr>
+            </a:solidFill>
+            <a:prstDash val="solid"/>
+          </a:ln>
+        </p:spPr>
+        <p:txBody>
+          <a:bodyPr lIns="0" tIns="0" rIns="0" bIns="0" anchor="t"/>
+          <a:lstStyle/>
+          <a:p>
+            <a:pPr algn="l">
+              <a:defRPr sz="1125" b="1">
+                <a:solidFill>
+                  <a:srgbClr val="1F2933"/>
+                </a:solidFill>
+                <a:latin typeface="Aptos"/>
+                <a:ea typeface="Aptos"/>
+                <a:cs typeface="Aptos"/>
+              </a:defRPr>
+            </a:pPr>
+            <a:r>
+              <a:rPr sz="844" b="1">
+                <a:solidFill>
+                  <a:srgbClr val="1F2933"/>
+                </a:solidFill>
+                <a:latin typeface="Aptos"/>
+                <a:ea typeface="Aptos"/>
+                <a:cs typeface="Aptos"/>
+              </a:rPr>
+              <a:t>VIP treatment</a:t>
+            </a:r>
+          </a:p>
+        </p:txBody>
+      </p:sp>
+      <p:sp>
+        <p:nvSpPr>
+          <p:cNvPr id="41" name="Rectangle 40">
+            <a:extLst>
+              <a:ext uri="{FF2B5EF4-FFF2-40B4-BE49-F238E27FC236}">
+                <a16:creationId xmlns:a16="http://schemas.microsoft.com/office/drawing/2014/main" id="{A3144D48-2244-4EB8-85A0-090F9C1D15E9}"/>
+              </a:ext>
+            </a:extLst>
+          </p:cNvPr>
+          <p:cNvSpPr>
+            <a:spLocks noGrp="1"/>
+          </p:cNvSpPr>
+          <p:nvPr/>
+        </p:nvSpPr>
+        <p:spPr>
+          <a:xfrm>
+            <a:off x="6657975" y="4236244"/>
+            <a:ext cx="1464469" cy="342900"/>
+          </a:xfrm>
+          <a:prstGeom prst="rect">
+            <a:avLst/>
+          </a:prstGeom>
+          <a:solidFill>
+            <a:srgbClr val="000000">
+              <a:alpha val="0"/>
+            </a:srgbClr>
+          </a:solidFill>
+          <a:ln w="0">
+            <a:solidFill>
+              <a:srgbClr val="000000">
+                <a:alpha val="0"/>
+              </a:srgbClr>
+            </a:solidFill>
+            <a:prstDash val="solid"/>
+          </a:ln>
+        </p:spPr>
+        <p:txBody>
+          <a:bodyPr lIns="0" tIns="0" rIns="0" bIns="0" anchor="t"/>
+          <a:lstStyle/>
+          <a:p>
+            <a:pPr algn="l">
+              <a:defRPr sz="975" b="0">
+                <a:solidFill>
+                  <a:srgbClr val="6B7280"/>
+                </a:solidFill>
+                <a:latin typeface="Aptos"/>
+                <a:ea typeface="Aptos"/>
+                <a:cs typeface="Aptos"/>
+              </a:defRPr>
+            </a:pPr>
+            <a:r>
+              <a:rPr sz="731">
+                <a:solidFill>
+                  <a:srgbClr val="6B7280"/>
+                </a:solidFill>
+                <a:latin typeface="Aptos"/>
+                <a:ea typeface="Aptos"/>
+                <a:cs typeface="Aptos"/>
+              </a:rPr>
+              <a:t>Tiny group with recent, frequent, high-value behavior.</a:t>
+            </a:r>
+          </a:p>
+        </p:txBody>
+      </p:sp>
+      <p:sp>
+        <p:nvSpPr>
+          <p:cNvPr id="42" name="Rectangle 41">
+            <a:extLst>
+              <a:ext uri="{FF2B5EF4-FFF2-40B4-BE49-F238E27FC236}">
+                <a16:creationId xmlns:a16="http://schemas.microsoft.com/office/drawing/2014/main" id="{417EA54B-F3FE-40F3-9F57-231774B529AA}"/>
+              </a:ext>
+            </a:extLst>
+          </p:cNvPr>
+          <p:cNvSpPr>
+            <a:spLocks noGrp="1"/>
+          </p:cNvSpPr>
+          <p:nvPr/>
+        </p:nvSpPr>
+        <p:spPr>
+          <a:xfrm>
+            <a:off x="457200" y="4914900"/>
+            <a:ext cx="7772400" cy="442913"/>
+          </a:xfrm>
+          <a:prstGeom prst="rect">
+            <a:avLst/>
+          </a:prstGeom>
+          <a:solidFill>
+            <a:srgbClr val="F4F6F8"/>
+          </a:solidFill>
+          <a:ln w="0">
+            <a:solidFill>
+              <a:srgbClr val="000000">
+                <a:alpha val="0"/>
+              </a:srgbClr>
+            </a:solidFill>
+            <a:prstDash val="solid"/>
+          </a:ln>
+        </p:spPr>
+        <p:txBody>
+          <a:bodyPr/>
+          <a:lstStyle/>
+          <a:p>
+            <a:endParaRPr lang="en-SG" sz="1350"/>
+          </a:p>
+        </p:txBody>
+      </p:sp>
+      <p:sp>
+        <p:nvSpPr>
+          <p:cNvPr id="43" name="Rectangle 42">
+            <a:extLst>
+              <a:ext uri="{FF2B5EF4-FFF2-40B4-BE49-F238E27FC236}">
+                <a16:creationId xmlns:a16="http://schemas.microsoft.com/office/drawing/2014/main" id="{A74CD303-6CE8-4028-A153-11D6C0261A84}"/>
+              </a:ext>
+            </a:extLst>
+          </p:cNvPr>
+          <p:cNvSpPr>
+            <a:spLocks noGrp="1"/>
+          </p:cNvSpPr>
+          <p:nvPr/>
+        </p:nvSpPr>
+        <p:spPr>
+          <a:xfrm>
+            <a:off x="628651" y="5029200"/>
+            <a:ext cx="7393781" cy="214313"/>
+          </a:xfrm>
+          <a:prstGeom prst="rect">
+            <a:avLst/>
+          </a:prstGeom>
+          <a:solidFill>
+            <a:srgbClr val="000000">
+              <a:alpha val="0"/>
+            </a:srgbClr>
+          </a:solidFill>
+          <a:ln w="0">
+            <a:solidFill>
+              <a:srgbClr val="000000">
+                <a:alpha val="0"/>
+              </a:srgbClr>
+            </a:solidFill>
+            <a:prstDash val="solid"/>
+          </a:ln>
+        </p:spPr>
+        <p:txBody>
+          <a:bodyPr lIns="0" tIns="0" rIns="0" bIns="0" anchor="t"/>
+          <a:lstStyle/>
+          <a:p>
+            <a:pPr algn="l">
+              <a:defRPr sz="1350" b="1">
+                <a:solidFill>
+                  <a:srgbClr val="1F2933"/>
+                </a:solidFill>
+                <a:latin typeface="Aptos"/>
+                <a:ea typeface="Aptos"/>
+                <a:cs typeface="Aptos"/>
+              </a:defRPr>
+            </a:pPr>
+            <a:r>
+              <a:rPr sz="1013" b="1">
+                <a:solidFill>
+                  <a:srgbClr val="1F2933"/>
+                </a:solidFill>
+                <a:latin typeface="Aptos"/>
+                <a:ea typeface="Aptos"/>
+                <a:cs typeface="Aptos"/>
+              </a:rPr>
+              <a:t>Slide message: RFM scoring shows Olist's biggest customer opportunity is converting high-value one-time buyers into repeat customers.</a:t>
+            </a:r>
+          </a:p>
+        </p:txBody>
+      </p:sp>
+      <p:sp>
+        <p:nvSpPr>
+          <p:cNvPr id="44" name="Rectangle 43">
+            <a:extLst>
+              <a:ext uri="{FF2B5EF4-FFF2-40B4-BE49-F238E27FC236}">
+                <a16:creationId xmlns:a16="http://schemas.microsoft.com/office/drawing/2014/main" id="{0F0971E0-16CE-45B4-A141-DFC6DC4348A2}"/>
+              </a:ext>
+            </a:extLst>
+          </p:cNvPr>
+          <p:cNvSpPr>
+            <a:spLocks noGrp="1"/>
+          </p:cNvSpPr>
+          <p:nvPr/>
+        </p:nvSpPr>
+        <p:spPr>
+          <a:xfrm>
+            <a:off x="457200" y="5743575"/>
+            <a:ext cx="5857875" cy="128588"/>
+          </a:xfrm>
+          <a:prstGeom prst="rect">
+            <a:avLst/>
+          </a:prstGeom>
+          <a:solidFill>
+            <a:srgbClr val="000000">
+              <a:alpha val="0"/>
+            </a:srgbClr>
+          </a:solidFill>
+          <a:ln w="0">
+            <a:solidFill>
+              <a:srgbClr val="000000">
+                <a:alpha val="0"/>
+              </a:srgbClr>
+            </a:solidFill>
+            <a:prstDash val="solid"/>
+          </a:ln>
+        </p:spPr>
+        <p:txBody>
+          <a:bodyPr lIns="0" tIns="0" rIns="0" bIns="0" anchor="t"/>
+          <a:lstStyle/>
+          <a:p>
+            <a:pPr algn="l">
+              <a:defRPr sz="750" b="0">
+                <a:solidFill>
+                  <a:srgbClr val="8A94A3"/>
+                </a:solidFill>
+                <a:latin typeface="Aptos"/>
+                <a:ea typeface="Aptos"/>
+                <a:cs typeface="Aptos"/>
+              </a:defRPr>
+            </a:pPr>
+            <a:r>
+              <a:rPr sz="563">
+                <a:solidFill>
+                  <a:srgbClr val="8A94A3"/>
+                </a:solidFill>
+                <a:latin typeface="Aptos"/>
+                <a:ea typeface="Aptos"/>
+                <a:cs typeface="Aptos"/>
+              </a:rPr>
+              <a:t>Source: local Olist warehouse, fact_sales. Gross item sales include product price plus freight value.</a:t>
+            </a:r>
+          </a:p>
+        </p:txBody>
+      </p:sp>
+      <p:sp>
+        <p:nvSpPr>
+          <p:cNvPr id="45" name="Rectangle 44">
+            <a:extLst>
+              <a:ext uri="{FF2B5EF4-FFF2-40B4-BE49-F238E27FC236}">
+                <a16:creationId xmlns:a16="http://schemas.microsoft.com/office/drawing/2014/main" id="{E96DBECB-C403-4714-AD9C-E6EE3B40C9EC}"/>
+              </a:ext>
+            </a:extLst>
+          </p:cNvPr>
+          <p:cNvSpPr>
+            <a:spLocks noGrp="1"/>
+          </p:cNvSpPr>
+          <p:nvPr/>
+        </p:nvSpPr>
+        <p:spPr>
+          <a:xfrm>
+            <a:off x="8358187" y="5715000"/>
+            <a:ext cx="242888" cy="128588"/>
+          </a:xfrm>
+          <a:prstGeom prst="rect">
+            <a:avLst/>
+          </a:prstGeom>
+          <a:solidFill>
+            <a:srgbClr val="000000">
+              <a:alpha val="0"/>
+            </a:srgbClr>
+          </a:solidFill>
+          <a:ln w="0">
+            <a:solidFill>
+              <a:srgbClr val="000000">
+                <a:alpha val="0"/>
+              </a:srgbClr>
+            </a:solidFill>
+            <a:prstDash val="solid"/>
+          </a:ln>
+        </p:spPr>
+        <p:txBody>
+          <a:bodyPr lIns="0" tIns="0" rIns="0" bIns="0" anchor="t"/>
+          <a:lstStyle/>
+          <a:p>
+            <a:pPr algn="r">
+              <a:defRPr sz="750" b="0">
+                <a:solidFill>
+                  <a:srgbClr val="8A94A3"/>
+                </a:solidFill>
+                <a:latin typeface="Aptos"/>
+                <a:ea typeface="Aptos"/>
+                <a:cs typeface="Aptos"/>
+              </a:defRPr>
+            </a:pPr>
+            <a:r>
+              <a:rPr sz="563">
+                <a:solidFill>
+                  <a:srgbClr val="8A94A3"/>
+                </a:solidFill>
+                <a:latin typeface="Aptos"/>
+                <a:ea typeface="Aptos"/>
+                <a:cs typeface="Aptos"/>
+              </a:rPr>
+              <a:t>2</a:t>
+            </a:r>
+          </a:p>
+        </p:txBody>
+      </p:sp>
+    </p:spTree>
+    <p:extLst>
+      <p:ext uri="{BB962C8B-B14F-4D97-AF65-F5344CB8AC3E}">
+        <p14:creationId xmlns:p14="http://schemas.microsoft.com/office/powerpoint/2010/main" val="1791980570"/>
+      </p:ext>
+    </p:extLst>
+  </p:cSld>
+  <p:clrMapOvr>
+    <a:masterClrMapping/>
+  </p:clrMapOvr>
+</p:sld>
+</file>
+
+<file path=ppt/slides/slide17.xml><?xml version="1.0" encoding="utf-8"?>
 <p:sld xmlns:a="http://schemas.openxmlformats.org/drawingml/2006/main" xmlns:r="http://schemas.openxmlformats.org/officeDocument/2006/relationships" xmlns:p="http://schemas.openxmlformats.org/presentationml/2006/main">
   <p:cSld>
     <p:spTree>

--- a/slices/Olist_Ecommerce_Project_Presentation.pptx
+++ b/slices/Olist_Ecommerce_Project_Presentation.pptx
@@ -3958,6 +3958,127 @@
             </a:r>
             <a:endParaRPr/>
           </a:p>
+          <a:p>
+            <a:pPr indent="0" lvl="0" marL="457200" rtl="0" algn="l">
+              <a:lnSpc>
+                <a:spcPct val="115000"/>
+              </a:lnSpc>
+              <a:spcBef>
+                <a:spcPts val="0"/>
+              </a:spcBef>
+              <a:spcAft>
+                <a:spcPts val="0"/>
+              </a:spcAft>
+              <a:buClr>
+                <a:schemeClr val="dk1"/>
+              </a:buClr>
+              <a:buSzPts val="1100"/>
+              <a:buFont typeface="Arial"/>
+              <a:buNone/>
+            </a:pPr>
+            <a:r>
+              <a:rPr lang="en-US">
+                <a:latin typeface="Century Gothic"/>
+                <a:ea typeface="Century Gothic"/>
+                <a:cs typeface="Century Gothic"/>
+                <a:sym typeface="Century Gothic"/>
+              </a:rPr>
+              <a:t>Wrapping up — we transformed nine raw CSV files into a clean analytics model, uncovering strong platform momentum: 8.8% month-over-month GMV growth, top categories pulling in R$4M, and São Paulo contributing R$5.9M across 3,095 active sellers.</a:t>
+            </a:r>
+            <a:endParaRPr>
+              <a:latin typeface="Century Gothic"/>
+              <a:ea typeface="Century Gothic"/>
+              <a:cs typeface="Century Gothic"/>
+              <a:sym typeface="Century Gothic"/>
+            </a:endParaRPr>
+          </a:p>
+          <a:p>
+            <a:pPr indent="0" lvl="0" marL="457200" rtl="0" algn="l">
+              <a:lnSpc>
+                <a:spcPct val="115000"/>
+              </a:lnSpc>
+              <a:spcBef>
+                <a:spcPts val="0"/>
+              </a:spcBef>
+              <a:spcAft>
+                <a:spcPts val="0"/>
+              </a:spcAft>
+              <a:buClr>
+                <a:schemeClr val="dk1"/>
+              </a:buClr>
+              <a:buSzPts val="1100"/>
+              <a:buFont typeface="Arial"/>
+              <a:buNone/>
+            </a:pPr>
+            <a:r>
+              <a:rPr lang="en-US">
+                <a:latin typeface="Century Gothic"/>
+                <a:ea typeface="Century Gothic"/>
+                <a:cs typeface="Century Gothic"/>
+                <a:sym typeface="Century Gothic"/>
+              </a:rPr>
+              <a:t>Moving forward, our three priorities are clear: defend top categories, drive seller repeat business and continuously monitor performance.</a:t>
+            </a:r>
+            <a:endParaRPr>
+              <a:latin typeface="Century Gothic"/>
+              <a:ea typeface="Century Gothic"/>
+              <a:cs typeface="Century Gothic"/>
+              <a:sym typeface="Century Gothic"/>
+            </a:endParaRPr>
+          </a:p>
+          <a:p>
+            <a:pPr indent="0" lvl="0" marL="457200" rtl="0" algn="l">
+              <a:lnSpc>
+                <a:spcPct val="115000"/>
+              </a:lnSpc>
+              <a:spcBef>
+                <a:spcPts val="0"/>
+              </a:spcBef>
+              <a:spcAft>
+                <a:spcPts val="0"/>
+              </a:spcAft>
+              <a:buClr>
+                <a:schemeClr val="dk1"/>
+              </a:buClr>
+              <a:buSzPts val="1100"/>
+              <a:buFont typeface="Arial"/>
+              <a:buNone/>
+            </a:pPr>
+            <a:r>
+              <a:rPr lang="en-US">
+                <a:latin typeface="Century Gothic"/>
+                <a:ea typeface="Century Gothic"/>
+                <a:cs typeface="Century Gothic"/>
+                <a:sym typeface="Century Gothic"/>
+              </a:rPr>
+              <a:t>A solid data pipeline drives real growth — transparently and auditably.</a:t>
+            </a:r>
+            <a:endParaRPr>
+              <a:latin typeface="Century Gothic"/>
+              <a:ea typeface="Century Gothic"/>
+              <a:cs typeface="Century Gothic"/>
+              <a:sym typeface="Century Gothic"/>
+            </a:endParaRPr>
+          </a:p>
+          <a:p>
+            <a:pPr indent="0" lvl="0" marL="0" rtl="0" algn="l">
+              <a:lnSpc>
+                <a:spcPct val="100000"/>
+              </a:lnSpc>
+              <a:spcBef>
+                <a:spcPts val="0"/>
+              </a:spcBef>
+              <a:spcAft>
+                <a:spcPts val="0"/>
+              </a:spcAft>
+              <a:buSzPts val="1400"/>
+              <a:buNone/>
+            </a:pPr>
+            <a:r>
+              <a:t/>
+            </a:r>
+            <a:endParaRPr/>
+          </a:p>
         </p:txBody>
       </p:sp>
       <p:sp>
@@ -4133,7 +4254,7 @@
                 <a:cs typeface="Arial"/>
                 <a:sym typeface="Arial"/>
               </a:rPr>
-              <a:t>"Good morning everyone. As we wrap up our presentation, I’d like to share the </a:t>
+              <a:t>"Good morning everyone. As we wrap up our presentation, I’d liked to share the </a:t>
             </a:r>
             <a:r>
               <a:rPr b="1" lang="en-US" sz="1100">
@@ -4369,6 +4490,158 @@
                 <a:sym typeface="Arial"/>
               </a:rPr>
               <a:t>Overall, this project taught us that a well-designed analytics pipeline is not just a technical exercise — it’s a strategic capability that drives real business growth and seller success."</a:t>
+            </a:r>
+            <a:endParaRPr sz="1100">
+              <a:latin typeface="Arial"/>
+              <a:ea typeface="Arial"/>
+              <a:cs typeface="Arial"/>
+              <a:sym typeface="Arial"/>
+            </a:endParaRPr>
+          </a:p>
+          <a:p>
+            <a:pPr indent="0" lvl="0" marL="0" rtl="0" algn="l">
+              <a:lnSpc>
+                <a:spcPct val="115000"/>
+              </a:lnSpc>
+              <a:spcBef>
+                <a:spcPts val="1200"/>
+              </a:spcBef>
+              <a:spcAft>
+                <a:spcPts val="0"/>
+              </a:spcAft>
+              <a:buClr>
+                <a:schemeClr val="dk1"/>
+              </a:buClr>
+              <a:buSzPts val="1100"/>
+              <a:buFont typeface="Arial"/>
+              <a:buNone/>
+            </a:pPr>
+            <a:r>
+              <a:t/>
+            </a:r>
+            <a:endParaRPr sz="1100">
+              <a:latin typeface="Arial"/>
+              <a:ea typeface="Arial"/>
+              <a:cs typeface="Arial"/>
+              <a:sym typeface="Arial"/>
+            </a:endParaRPr>
+          </a:p>
+          <a:p>
+            <a:pPr indent="0" lvl="0" marL="0" rtl="0" algn="l">
+              <a:lnSpc>
+                <a:spcPct val="115000"/>
+              </a:lnSpc>
+              <a:spcBef>
+                <a:spcPts val="1200"/>
+              </a:spcBef>
+              <a:spcAft>
+                <a:spcPts val="0"/>
+              </a:spcAft>
+              <a:buClr>
+                <a:schemeClr val="dk1"/>
+              </a:buClr>
+              <a:buSzPts val="1100"/>
+              <a:buFont typeface="Arial"/>
+              <a:buNone/>
+            </a:pPr>
+            <a:r>
+              <a:t/>
+            </a:r>
+            <a:endParaRPr sz="1100">
+              <a:latin typeface="Arial"/>
+              <a:ea typeface="Arial"/>
+              <a:cs typeface="Arial"/>
+              <a:sym typeface="Arial"/>
+            </a:endParaRPr>
+          </a:p>
+          <a:p>
+            <a:pPr indent="0" lvl="0" marL="457200" rtl="0" algn="l">
+              <a:lnSpc>
+                <a:spcPct val="115000"/>
+              </a:lnSpc>
+              <a:spcBef>
+                <a:spcPts val="1200"/>
+              </a:spcBef>
+              <a:spcAft>
+                <a:spcPts val="0"/>
+              </a:spcAft>
+              <a:buClr>
+                <a:schemeClr val="dk1"/>
+              </a:buClr>
+              <a:buSzPts val="1100"/>
+              <a:buFont typeface="Arial"/>
+              <a:buNone/>
+            </a:pPr>
+            <a:r>
+              <a:rPr lang="en-US" sz="1100">
+                <a:latin typeface="Century Gothic"/>
+                <a:ea typeface="Century Gothic"/>
+                <a:cs typeface="Century Gothic"/>
+                <a:sym typeface="Century Gothic"/>
+              </a:rPr>
+              <a:t>To close, here are three key learnings we're taking away from the Olist project.</a:t>
+            </a:r>
+            <a:endParaRPr sz="1100">
+              <a:latin typeface="Century Gothic"/>
+              <a:ea typeface="Century Gothic"/>
+              <a:cs typeface="Century Gothic"/>
+              <a:sym typeface="Century Gothic"/>
+            </a:endParaRPr>
+          </a:p>
+          <a:p>
+            <a:pPr indent="0" lvl="0" marL="457200" rtl="0" algn="l">
+              <a:lnSpc>
+                <a:spcPct val="115000"/>
+              </a:lnSpc>
+              <a:spcBef>
+                <a:spcPts val="0"/>
+              </a:spcBef>
+              <a:spcAft>
+                <a:spcPts val="0"/>
+              </a:spcAft>
+              <a:buClr>
+                <a:schemeClr val="dk1"/>
+              </a:buClr>
+              <a:buSzPts val="1100"/>
+              <a:buFont typeface="Arial"/>
+              <a:buNone/>
+            </a:pPr>
+            <a:r>
+              <a:rPr lang="en-US" sz="1100">
+                <a:latin typeface="Century Gothic"/>
+                <a:ea typeface="Century Gothic"/>
+                <a:cs typeface="Century Gothic"/>
+                <a:sym typeface="Century Gothic"/>
+              </a:rPr>
+              <a:t>And most importantly, a well-designed analytics pipeline unlocks the true power of big data — making it not just technical, but a strategic business capability. Thank you.</a:t>
+            </a:r>
+            <a:endParaRPr sz="1100">
+              <a:latin typeface="Century Gothic"/>
+              <a:ea typeface="Century Gothic"/>
+              <a:cs typeface="Century Gothic"/>
+              <a:sym typeface="Century Gothic"/>
+            </a:endParaRPr>
+          </a:p>
+          <a:p>
+            <a:pPr indent="0" lvl="0" marL="0" rtl="0" algn="l">
+              <a:lnSpc>
+                <a:spcPct val="115000"/>
+              </a:lnSpc>
+              <a:spcBef>
+                <a:spcPts val="1200"/>
+              </a:spcBef>
+              <a:spcAft>
+                <a:spcPts val="0"/>
+              </a:spcAft>
+              <a:buClr>
+                <a:schemeClr val="dk1"/>
+              </a:buClr>
+              <a:buSzPts val="1100"/>
+              <a:buFont typeface="Arial"/>
+              <a:buNone/>
+            </a:pPr>
+            <a:r>
+              <a:t/>
             </a:r>
             <a:endParaRPr sz="1100">
               <a:latin typeface="Arial"/>
@@ -4542,6 +4815,65 @@
               <a:rPr lang="en-US"/>
               <a:t>Pilo: </a:t>
             </a:r>
+            <a:r>
+              <a:rPr lang="en-US"/>
+              <a:t>This slide sets the business-model lens for the rest of the presentation.</a:t>
+            </a:r>
+            <a:br>
+              <a:rPr lang="en-US"/>
+            </a:br>
+            <a:br>
+              <a:rPr lang="en-US"/>
+            </a:br>
+            <a:r>
+              <a:rPr lang="en-US"/>
+              <a:t> The important distinction is that Olist should not be treated as a traditional retailer selling its own inventory directly to consumers. Olist is better understood as a commerce enablement platform for sellers.</a:t>
+            </a:r>
+            <a:br>
+              <a:rPr lang="en-US"/>
+            </a:br>
+            <a:br>
+              <a:rPr lang="en-US"/>
+            </a:br>
+            <a:r>
+              <a:rPr lang="en-US"/>
+              <a:t> Sellers are Olist's primary clients. Olist helps them manage catalog, stock, pricing, fulfillment, marketplace access, logistics, payments, and operating tools.</a:t>
+            </a:r>
+            <a:br>
+              <a:rPr lang="en-US"/>
+            </a:br>
+            <a:br>
+              <a:rPr lang="en-US"/>
+            </a:br>
+            <a:r>
+              <a:rPr lang="en-US"/>
+              <a:t> Marketplaces provide large customer traffic, while end customers generate the orders, payments, reviews, and demand signals we see in the dataset.</a:t>
+            </a:r>
+            <a:br>
+              <a:rPr lang="en-US"/>
+            </a:br>
+            <a:br>
+              <a:rPr lang="en-US"/>
+            </a:br>
+            <a:r>
+              <a:rPr lang="en-US"/>
+              <a:t> So when we analyze orders, products, geography, reviews, and repeat buyers later in the deck, we should read those metrics as signals of platform activity and seller success, not simply as consumer retail metrics.</a:t>
+            </a:r>
+            <a:endParaRPr/>
+          </a:p>
+          <a:p>
+            <a:pPr indent="0" lvl="0" marL="0" rtl="0" algn="l">
+              <a:spcBef>
+                <a:spcPts val="0"/>
+              </a:spcBef>
+              <a:spcAft>
+                <a:spcPts val="0"/>
+              </a:spcAft>
+              <a:buNone/>
+            </a:pPr>
+            <a:r>
+              <a:t/>
+            </a:r>
             <a:endParaRPr/>
           </a:p>
         </p:txBody>
@@ -4685,6 +5017,55 @@
             <a:r>
               <a:rPr lang="en-US"/>
               <a:t>Pilo: </a:t>
+            </a:r>
+            <a:r>
+              <a:rPr lang="en-US"/>
+              <a:t>This slide explains how the data connects to the business questions.</a:t>
+            </a:r>
+            <a:br>
+              <a:rPr lang="en-US"/>
+            </a:br>
+            <a:br>
+              <a:rPr lang="en-US"/>
+            </a:br>
+            <a:r>
+              <a:rPr lang="en-US"/>
+              <a:t> The nine CSV files are operational records of marketplace activity. They are very useful, but they are not a full financial view of Olist. In particular, transaction value should be treated as a GMV proxy, not true Olist revenue.</a:t>
+            </a:r>
+            <a:br>
+              <a:rPr lang="en-US"/>
+            </a:br>
+            <a:br>
+              <a:rPr lang="en-US"/>
+            </a:br>
+            <a:r>
+              <a:rPr lang="en-US"/>
+              <a:t> The questions move from measurement to decision-making: first, how much commerce is moving through the platform; second, which categories are strongest; third, which sellers and customers drive value; and fourth, what Olist should do next.</a:t>
+            </a:r>
+            <a:br>
+              <a:rPr lang="en-US"/>
+            </a:br>
+            <a:br>
+              <a:rPr lang="en-US"/>
+            </a:br>
+            <a:r>
+              <a:rPr lang="en-US"/>
+              <a:t> The key message is that buyer and product analysis still matters, but the strategic use of that analysis is seller-centric. The goal is to help sellers grow GMV, improve delivery and review performance, and convert buyer demand into repeat platform activity.</a:t>
+            </a:r>
+            <a:endParaRPr/>
+          </a:p>
+          <a:p>
+            <a:pPr indent="0" lvl="0" marL="0" rtl="0" algn="l">
+              <a:spcBef>
+                <a:spcPts val="0"/>
+              </a:spcBef>
+              <a:spcAft>
+                <a:spcPts val="0"/>
+              </a:spcAft>
+              <a:buNone/>
+            </a:pPr>
+            <a:r>
+              <a:t/>
             </a:r>
             <a:endParaRPr/>
           </a:p>
@@ -33282,7 +33663,7 @@
         </p:nvSpPr>
         <p:spPr>
           <a:xfrm>
-            <a:off x="0" y="0"/>
+            <a:off x="0" y="-2890250"/>
             <a:ext cx="9144000" cy="6858000"/>
           </a:xfrm>
           <a:prstGeom prst="rect">
